--- a/docs/MNIST-PRO-overview.pptx
+++ b/docs/MNIST-PRO-overview.pptx
@@ -16,6 +16,14 @@
     <p:sldId id="264" r:id="rId15"/>
     <p:sldId id="265" r:id="rId16"/>
     <p:sldId id="266" r:id="rId17"/>
+    <p:sldId id="267" r:id="rId18"/>
+    <p:sldId id="268" r:id="rId19"/>
+    <p:sldId id="269" r:id="rId20"/>
+    <p:sldId id="270" r:id="rId21"/>
+    <p:sldId id="271" r:id="rId22"/>
+    <p:sldId id="272" r:id="rId23"/>
+    <p:sldId id="273" r:id="rId24"/>
+    <p:sldId id="274" r:id="rId25"/>
   </p:sldIdLst>
   <p:sldSz cx="12191695" cy="6858000" type="screen4x3"/>
   <p:notesSz cx="6858000" cy="9144000"/>
@@ -3194,7 +3202,7 @@
         </p:nvSpPr>
         <p:spPr>
           <a:xfrm>
-            <a:off x="914400" y="1828800"/>
+            <a:off x="914400" y="1691640"/>
             <a:ext cx="10515600" cy="914400"/>
           </a:xfrm>
           <a:prstGeom prst="rect">
@@ -3212,12 +3220,9 @@
               <a:lnSpc>
                 <a:spcPct val="115000"/>
               </a:lnSpc>
-              <a:spcAft>
-                <a:spcPts val="0"/>
-              </a:spcAft>
-            </a:pPr>
-            <a:r>
-              <a:rPr sz="4400" b="1">
+            </a:pPr>
+            <a:r>
+              <a:rPr sz="4200" b="1" i="0">
                 <a:solidFill>
                   <a:srgbClr val="FFFFFF"/>
                 </a:solidFill>
@@ -3236,36 +3241,33 @@
         </p:nvSpPr>
         <p:spPr>
           <a:xfrm>
-            <a:off x="914400" y="3063240"/>
-            <a:ext cx="10515600" cy="548640"/>
-          </a:xfrm>
-          <a:prstGeom prst="rect">
-            <a:avLst/>
-          </a:prstGeom>
-          <a:noFill/>
-        </p:spPr>
-        <p:txBody>
-          <a:bodyPr wrap="square">
-            <a:spAutoFit/>
-          </a:bodyPr>
-          <a:lstStyle/>
-          <a:p>
-            <a:pPr algn="l">
-              <a:lnSpc>
-                <a:spcPct val="115000"/>
-              </a:lnSpc>
-              <a:spcAft>
-                <a:spcPts val="0"/>
-              </a:spcAft>
-            </a:pPr>
-            <a:r>
-              <a:rPr sz="1900" b="0">
+            <a:off x="914400" y="3035808"/>
+            <a:ext cx="10515600" cy="914400"/>
+          </a:xfrm>
+          <a:prstGeom prst="rect">
+            <a:avLst/>
+          </a:prstGeom>
+          <a:noFill/>
+        </p:spPr>
+        <p:txBody>
+          <a:bodyPr wrap="square">
+            <a:spAutoFit/>
+          </a:bodyPr>
+          <a:lstStyle/>
+          <a:p>
+            <a:pPr algn="l">
+              <a:lnSpc>
+                <a:spcPct val="135000"/>
+              </a:lnSpc>
+            </a:pPr>
+            <a:r>
+              <a:rPr sz="1800" b="0" i="0">
                 <a:solidFill>
                   <a:srgbClr val="B6C3D4"/>
                 </a:solidFill>
                 <a:latin typeface="Segoe UI"/>
               </a:rPr>
-              <a:t>Two games where a person and an AI face the same problem at the same time</a:t>
+              <a:t>What happens when a person and an AI are given the same problem, at the same moment, with the same information</a:t>
             </a:r>
           </a:p>
         </p:txBody>
@@ -3278,7 +3280,7 @@
         </p:nvSpPr>
         <p:spPr>
           <a:xfrm>
-            <a:off x="914400" y="5120640"/>
+            <a:off x="914400" y="5257800"/>
             <a:ext cx="10515600" cy="822960"/>
           </a:xfrm>
           <a:prstGeom prst="rect">
@@ -3296,12 +3298,9 @@
               <a:lnSpc>
                 <a:spcPct val="150000"/>
               </a:lnSpc>
-              <a:spcAft>
-                <a:spcPts val="0"/>
-              </a:spcAft>
-            </a:pPr>
-            <a:r>
-              <a:rPr sz="1300" b="0">
+            </a:pPr>
+            <a:r>
+              <a:rPr sz="1300" b="0" i="0">
                 <a:solidFill>
                   <a:srgbClr val="8D9DB2"/>
                 </a:solidFill>
@@ -3315,18 +3314,15 @@
               <a:lnSpc>
                 <a:spcPct val="150000"/>
               </a:lnSpc>
-              <a:spcAft>
-                <a:spcPts val="0"/>
-              </a:spcAft>
-            </a:pPr>
-            <a:r>
-              <a:rPr sz="1300" b="0">
+            </a:pPr>
+            <a:r>
+              <a:rPr sz="1300" b="0" i="0">
                 <a:solidFill>
                   <a:srgbClr val="8D9DB2"/>
                 </a:solidFill>
                 <a:latin typeface="Segoe UI"/>
               </a:rPr>
-              <a:t>Runs entirely in the browser  ·  No server  ·  No API key required to play</a:t>
+              <a:t>Runs in the browser  ·  No server  ·  No key needed to play solo</a:t>
             </a:r>
           </a:p>
         </p:txBody>
@@ -3463,18 +3459,15 @@
               <a:lnSpc>
                 <a:spcPct val="115000"/>
               </a:lnSpc>
-              <a:spcAft>
-                <a:spcPts val="0"/>
-              </a:spcAft>
-            </a:pPr>
-            <a:r>
-              <a:rPr sz="1100" b="1">
+            </a:pPr>
+            <a:r>
+              <a:rPr sz="1100" b="1" i="0">
                 <a:solidFill>
                   <a:srgbClr val="5A667A"/>
                 </a:solidFill>
                 <a:latin typeface="Segoe UI"/>
               </a:rPr>
-              <a:t>CREDITS</a:t>
+              <a:t>EFFORT DOES NOT RESCUE IT</a:t>
             </a:r>
           </a:p>
         </p:txBody>
@@ -3488,7 +3481,7 @@
         <p:spPr>
           <a:xfrm>
             <a:off x="841248" y="841248"/>
-            <a:ext cx="10607040" cy="731520"/>
+            <a:ext cx="10607040" cy="566928"/>
           </a:xfrm>
           <a:prstGeom prst="rect">
             <a:avLst/>
@@ -3505,64 +3498,43 @@
               <a:lnSpc>
                 <a:spcPct val="115000"/>
               </a:lnSpc>
-              <a:spcAft>
-                <a:spcPts val="0"/>
-              </a:spcAft>
-            </a:pPr>
-            <a:r>
-              <a:rPr sz="3000" b="1">
+            </a:pPr>
+            <a:r>
+              <a:rPr sz="2800" b="1" i="0">
                 <a:solidFill>
                   <a:srgbClr val="141B2D"/>
                 </a:solidFill>
                 <a:latin typeface="Segoe UI"/>
               </a:rPr>
-              <a:t>Standing on other people's work</a:t>
-            </a:r>
-          </a:p>
-        </p:txBody>
-      </p:sp>
-      <p:sp>
-        <p:nvSpPr>
-          <p:cNvPr id="6" name="TextBox 5"/>
-          <p:cNvSpPr txBox="1"/>
-          <p:nvPr/>
-        </p:nvSpPr>
-        <p:spPr>
-          <a:xfrm>
-            <a:off x="868680" y="1874519"/>
-            <a:ext cx="10607040" cy="255270"/>
-          </a:xfrm>
-          <a:prstGeom prst="rect">
-            <a:avLst/>
-          </a:prstGeom>
-          <a:noFill/>
-        </p:spPr>
-        <p:txBody>
-          <a:bodyPr wrap="square">
-            <a:spAutoFit/>
-          </a:bodyPr>
-          <a:lstStyle/>
-          <a:p>
-            <a:pPr algn="l">
-              <a:lnSpc>
-                <a:spcPct val="115000"/>
-              </a:lnSpc>
-              <a:spcAft>
-                <a:spcPts val="0"/>
-              </a:spcAft>
-            </a:pPr>
-            <a:r>
-              <a:rPr sz="1500" b="1">
-                <a:solidFill>
-                  <a:srgbClr val="141B2D"/>
-                </a:solidFill>
-                <a:latin typeface="Segoe UI"/>
-              </a:rPr>
-              <a:t>MNIST-PRO  -  MIT</a:t>
-            </a:r>
-          </a:p>
-        </p:txBody>
-      </p:sp>
+              <a:t>Looking longer is not the same as looking well</a:t>
+            </a:r>
+          </a:p>
+        </p:txBody>
+      </p:sp>
+      <p:pic>
+        <p:nvPicPr>
+          <p:cNvPr id="6" name="Picture 5" descr="chart_effort.png"/>
+          <p:cNvPicPr>
+            <a:picLocks noChangeAspect="1"/>
+          </p:cNvPicPr>
+          <p:nvPr/>
+        </p:nvPicPr>
+        <p:blipFill>
+          <a:blip r:embed="rId2"/>
+          <a:stretch>
+            <a:fillRect/>
+          </a:stretch>
+        </p:blipFill>
+        <p:spPr>
+          <a:xfrm>
+            <a:off x="1371600" y="1691640"/>
+            <a:ext cx="7863840" cy="4023360"/>
+          </a:xfrm>
+          <a:prstGeom prst="rect">
+            <a:avLst/>
+          </a:prstGeom>
+        </p:spPr>
+      </p:pic>
       <p:sp>
         <p:nvSpPr>
           <p:cNvPr id="7" name="TextBox 6"/>
@@ -3571,288 +3543,33 @@
         </p:nvSpPr>
         <p:spPr>
           <a:xfrm>
-            <a:off x="868680" y="2175510"/>
-            <a:ext cx="10607040" cy="431800"/>
-          </a:xfrm>
-          <a:prstGeom prst="rect">
-            <a:avLst/>
-          </a:prstGeom>
-          <a:noFill/>
-        </p:spPr>
-        <p:txBody>
-          <a:bodyPr wrap="square">
-            <a:spAutoFit/>
-          </a:bodyPr>
-          <a:lstStyle/>
-          <a:p>
-            <a:pPr algn="l">
-              <a:lnSpc>
-                <a:spcPct val="125000"/>
-              </a:lnSpc>
-              <a:spcAft>
-                <a:spcPts val="0"/>
-              </a:spcAft>
-            </a:pPr>
-            <a:r>
-              <a:rPr sz="1250" b="0">
+            <a:off x="868680" y="5989320"/>
+            <a:ext cx="10607040" cy="640080"/>
+          </a:xfrm>
+          <a:prstGeom prst="rect">
+            <a:avLst/>
+          </a:prstGeom>
+          <a:noFill/>
+        </p:spPr>
+        <p:txBody>
+          <a:bodyPr wrap="square">
+            <a:spAutoFit/>
+          </a:bodyPr>
+          <a:lstStyle/>
+          <a:p>
+            <a:pPr algn="l">
+              <a:lnSpc>
+                <a:spcPct val="130000"/>
+              </a:lnSpc>
+            </a:pPr>
+            <a:r>
+              <a:rPr sz="1200" b="0" i="0">
                 <a:solidFill>
                   <a:srgbClr val="5A667A"/>
                 </a:solidFill>
                 <a:latin typeface="Segoe UI"/>
               </a:rPr>
-              <a:t>Toh, Majumder, Liu, Chen and Poria. DeCLaRe Lab, Nanyang Technological University, and A*STAR. arXiv:2608.31022  ·  github.com/declare-lab/MNIST-PRO</a:t>
-            </a:r>
-          </a:p>
-        </p:txBody>
-      </p:sp>
-      <p:sp>
-        <p:nvSpPr>
-          <p:cNvPr id="8" name="TextBox 7"/>
-          <p:cNvSpPr txBox="1"/>
-          <p:nvPr/>
-        </p:nvSpPr>
-        <p:spPr>
-          <a:xfrm>
-            <a:off x="868680" y="2771902"/>
-            <a:ext cx="10607040" cy="255270"/>
-          </a:xfrm>
-          <a:prstGeom prst="rect">
-            <a:avLst/>
-          </a:prstGeom>
-          <a:noFill/>
-        </p:spPr>
-        <p:txBody>
-          <a:bodyPr wrap="square">
-            <a:spAutoFit/>
-          </a:bodyPr>
-          <a:lstStyle/>
-          <a:p>
-            <a:pPr algn="l">
-              <a:lnSpc>
-                <a:spcPct val="115000"/>
-              </a:lnSpc>
-              <a:spcAft>
-                <a:spcPts val="0"/>
-              </a:spcAft>
-            </a:pPr>
-            <a:r>
-              <a:rPr sz="1500" b="1">
-                <a:solidFill>
-                  <a:srgbClr val="141B2D"/>
-                </a:solidFill>
-                <a:latin typeface="Segoe UI"/>
-              </a:rPr>
-              <a:t>MNIST  -  CC BY-SA 3.0</a:t>
-            </a:r>
-          </a:p>
-        </p:txBody>
-      </p:sp>
-      <p:sp>
-        <p:nvSpPr>
-          <p:cNvPr id="9" name="TextBox 8"/>
-          <p:cNvSpPr txBox="1"/>
-          <p:nvPr/>
-        </p:nvSpPr>
-        <p:spPr>
-          <a:xfrm>
-            <a:off x="868680" y="3072892"/>
-            <a:ext cx="10607040" cy="215900"/>
-          </a:xfrm>
-          <a:prstGeom prst="rect">
-            <a:avLst/>
-          </a:prstGeom>
-          <a:noFill/>
-        </p:spPr>
-        <p:txBody>
-          <a:bodyPr wrap="square">
-            <a:spAutoFit/>
-          </a:bodyPr>
-          <a:lstStyle/>
-          <a:p>
-            <a:pPr algn="l">
-              <a:lnSpc>
-                <a:spcPct val="125000"/>
-              </a:lnSpc>
-              <a:spcAft>
-                <a:spcPts val="0"/>
-              </a:spcAft>
-            </a:pPr>
-            <a:r>
-              <a:rPr sz="1250" b="0">
-                <a:solidFill>
-                  <a:srgbClr val="5A667A"/>
-                </a:solidFill>
-                <a:latin typeface="Segoe UI"/>
-              </a:rPr>
-              <a:t>LeCun, Cortes and Burges, derived from NIST Special Database 19.</a:t>
-            </a:r>
-          </a:p>
-        </p:txBody>
-      </p:sp>
-      <p:sp>
-        <p:nvSpPr>
-          <p:cNvPr id="10" name="TextBox 9"/>
-          <p:cNvSpPr txBox="1"/>
-          <p:nvPr/>
-        </p:nvSpPr>
-        <p:spPr>
-          <a:xfrm>
-            <a:off x="868680" y="3453384"/>
-            <a:ext cx="10607040" cy="255270"/>
-          </a:xfrm>
-          <a:prstGeom prst="rect">
-            <a:avLst/>
-          </a:prstGeom>
-          <a:noFill/>
-        </p:spPr>
-        <p:txBody>
-          <a:bodyPr wrap="square">
-            <a:spAutoFit/>
-          </a:bodyPr>
-          <a:lstStyle/>
-          <a:p>
-            <a:pPr algn="l">
-              <a:lnSpc>
-                <a:spcPct val="115000"/>
-              </a:lnSpc>
-              <a:spcAft>
-                <a:spcPts val="0"/>
-              </a:spcAft>
-            </a:pPr>
-            <a:r>
-              <a:rPr sz="1500" b="1">
-                <a:solidFill>
-                  <a:srgbClr val="141B2D"/>
-                </a:solidFill>
-                <a:latin typeface="Segoe UI"/>
-              </a:rPr>
-              <a:t>ARC-AGI-1  -  Apache 2.0</a:t>
-            </a:r>
-          </a:p>
-        </p:txBody>
-      </p:sp>
-      <p:sp>
-        <p:nvSpPr>
-          <p:cNvPr id="11" name="TextBox 10"/>
-          <p:cNvSpPr txBox="1"/>
-          <p:nvPr/>
-        </p:nvSpPr>
-        <p:spPr>
-          <a:xfrm>
-            <a:off x="868680" y="3754374"/>
-            <a:ext cx="10607040" cy="215900"/>
-          </a:xfrm>
-          <a:prstGeom prst="rect">
-            <a:avLst/>
-          </a:prstGeom>
-          <a:noFill/>
-        </p:spPr>
-        <p:txBody>
-          <a:bodyPr wrap="square">
-            <a:spAutoFit/>
-          </a:bodyPr>
-          <a:lstStyle/>
-          <a:p>
-            <a:pPr algn="l">
-              <a:lnSpc>
-                <a:spcPct val="125000"/>
-              </a:lnSpc>
-              <a:spcAft>
-                <a:spcPts val="0"/>
-              </a:spcAft>
-            </a:pPr>
-            <a:r>
-              <a:rPr sz="1250" b="0">
-                <a:solidFill>
-                  <a:srgbClr val="5A667A"/>
-                </a:solidFill>
-                <a:latin typeface="Segoe UI"/>
-              </a:rPr>
-              <a:t>Francois Chollet. The public training set, used unmodified.</a:t>
-            </a:r>
-          </a:p>
-        </p:txBody>
-      </p:sp>
-      <p:sp>
-        <p:nvSpPr>
-          <p:cNvPr id="12" name="TextBox 11"/>
-          <p:cNvSpPr txBox="1"/>
-          <p:nvPr/>
-        </p:nvSpPr>
-        <p:spPr>
-          <a:xfrm>
-            <a:off x="868680" y="4134866"/>
-            <a:ext cx="10607040" cy="255270"/>
-          </a:xfrm>
-          <a:prstGeom prst="rect">
-            <a:avLst/>
-          </a:prstGeom>
-          <a:noFill/>
-        </p:spPr>
-        <p:txBody>
-          <a:bodyPr wrap="square">
-            <a:spAutoFit/>
-          </a:bodyPr>
-          <a:lstStyle/>
-          <a:p>
-            <a:pPr algn="l">
-              <a:lnSpc>
-                <a:spcPct val="115000"/>
-              </a:lnSpc>
-              <a:spcAft>
-                <a:spcPts val="0"/>
-              </a:spcAft>
-            </a:pPr>
-            <a:r>
-              <a:rPr sz="1500" b="1">
-                <a:solidFill>
-                  <a:srgbClr val="141B2D"/>
-                </a:solidFill>
-                <a:latin typeface="Segoe UI"/>
-              </a:rPr>
-              <a:t>Licences are retained in the repository.</a:t>
-            </a:r>
-          </a:p>
-        </p:txBody>
-      </p:sp>
-      <p:sp>
-        <p:nvSpPr>
-          <p:cNvPr id="13" name="TextBox 12"/>
-          <p:cNvSpPr txBox="1"/>
-          <p:nvPr/>
-        </p:nvSpPr>
-        <p:spPr>
-          <a:xfrm>
-            <a:off x="868680" y="4435856"/>
-            <a:ext cx="10607040" cy="215900"/>
-          </a:xfrm>
-          <a:prstGeom prst="rect">
-            <a:avLst/>
-          </a:prstGeom>
-          <a:noFill/>
-        </p:spPr>
-        <p:txBody>
-          <a:bodyPr wrap="square">
-            <a:spAutoFit/>
-          </a:bodyPr>
-          <a:lstStyle/>
-          <a:p>
-            <a:pPr algn="l">
-              <a:lnSpc>
-                <a:spcPct val="125000"/>
-              </a:lnSpc>
-              <a:spcAft>
-                <a:spcPts val="0"/>
-              </a:spcAft>
-            </a:pPr>
-            <a:r>
-              <a:rPr sz="1250" b="0">
-                <a:solidFill>
-                  <a:srgbClr val="5A667A"/>
-                </a:solidFill>
-                <a:latin typeface="Segoe UI"/>
-              </a:rPr>
-              <a:t>third_party/mnist-pro/LICENSE, and attribution files beside the generated data.</a:t>
+              <a:t>Claude Sonnet 5 spends 29.6 of its 36 steps and reaches 11.5%. GLM-4.6V spends 4 and reaches 6.5%. Gemini 3.7 Flash spends 18.3 and reaches 61%. Strategy, not budget, separates them.</a:t>
             </a:r>
           </a:p>
         </p:txBody>
@@ -3890,7 +3607,7 @@
             <a:avLst/>
           </a:prstGeom>
           <a:solidFill>
-            <a:srgbClr val="0E1A2B"/>
+            <a:srgbClr val="FAFBFD"/>
           </a:solidFill>
           <a:ln>
             <a:noFill/>
@@ -3927,8 +3644,8 @@
         </p:nvSpPr>
         <p:spPr>
           <a:xfrm>
-            <a:off x="0" y="2743200"/>
-            <a:ext cx="12191695" cy="41148"/>
+            <a:off x="640080" y="566928"/>
+            <a:ext cx="82296" cy="420624"/>
           </a:xfrm>
           <a:prstGeom prst="rect">
             <a:avLst/>
@@ -3971,7 +3688,3595 @@
         </p:nvSpPr>
         <p:spPr>
           <a:xfrm>
-            <a:off x="914400" y="1691640"/>
+            <a:off x="868680" y="502920"/>
+            <a:ext cx="10058400" cy="310896"/>
+          </a:xfrm>
+          <a:prstGeom prst="rect">
+            <a:avLst/>
+          </a:prstGeom>
+          <a:noFill/>
+        </p:spPr>
+        <p:txBody>
+          <a:bodyPr wrap="square">
+            <a:spAutoFit/>
+          </a:bodyPr>
+          <a:lstStyle/>
+          <a:p>
+            <a:pPr algn="l">
+              <a:lnSpc>
+                <a:spcPct val="115000"/>
+              </a:lnSpc>
+            </a:pPr>
+            <a:r>
+              <a:rPr sz="1100" b="1" i="0">
+                <a:solidFill>
+                  <a:srgbClr val="5A667A"/>
+                </a:solidFill>
+                <a:latin typeface="Segoe UI"/>
+              </a:rPr>
+              <a:t>CAPABILITY, UP CLOSE</a:t>
+            </a:r>
+          </a:p>
+        </p:txBody>
+      </p:sp>
+      <p:sp>
+        <p:nvSpPr>
+          <p:cNvPr id="5" name="TextBox 4"/>
+          <p:cNvSpPr txBox="1"/>
+          <p:nvPr/>
+        </p:nvSpPr>
+        <p:spPr>
+          <a:xfrm>
+            <a:off x="841248" y="841248"/>
+            <a:ext cx="10607040" cy="566928"/>
+          </a:xfrm>
+          <a:prstGeom prst="rect">
+            <a:avLst/>
+          </a:prstGeom>
+          <a:noFill/>
+        </p:spPr>
+        <p:txBody>
+          <a:bodyPr wrap="square">
+            <a:spAutoFit/>
+          </a:bodyPr>
+          <a:lstStyle/>
+          <a:p>
+            <a:pPr algn="l">
+              <a:lnSpc>
+                <a:spcPct val="115000"/>
+              </a:lnSpc>
+            </a:pPr>
+            <a:r>
+              <a:rPr sz="2800" b="1" i="0">
+                <a:solidFill>
+                  <a:srgbClr val="141B2D"/>
+                </a:solidFill>
+                <a:latin typeface="Segoe UI"/>
+              </a:rPr>
+              <a:t>When it works, it genuinely reasons</a:t>
+            </a:r>
+          </a:p>
+        </p:txBody>
+      </p:sp>
+      <p:sp>
+        <p:nvSpPr>
+          <p:cNvPr id="6" name="Rectangle 5"/>
+          <p:cNvSpPr/>
+          <p:nvPr/>
+        </p:nvSpPr>
+        <p:spPr>
+          <a:xfrm>
+            <a:off x="868680" y="1783080"/>
+            <a:ext cx="41148" cy="937768"/>
+          </a:xfrm>
+          <a:prstGeom prst="rect">
+            <a:avLst/>
+          </a:prstGeom>
+          <a:solidFill>
+            <a:srgbClr val="00A8BF"/>
+          </a:solidFill>
+          <a:ln>
+            <a:noFill/>
+          </a:ln>
+          <a:effectLst/>
+        </p:spPr>
+        <p:style>
+          <a:lnRef idx="1">
+            <a:schemeClr val="accent1"/>
+          </a:lnRef>
+          <a:fillRef idx="3">
+            <a:schemeClr val="accent1"/>
+          </a:fillRef>
+          <a:effectRef idx="2">
+            <a:schemeClr val="accent1"/>
+          </a:effectRef>
+          <a:fontRef idx="minor">
+            <a:schemeClr val="lt1"/>
+          </a:fontRef>
+        </p:style>
+        <p:txBody>
+          <a:bodyPr rtlCol="0" anchor="ctr"/>
+          <a:lstStyle/>
+          <a:p>
+            <a:pPr algn="ctr"/>
+          </a:p>
+        </p:txBody>
+      </p:sp>
+      <p:sp>
+        <p:nvSpPr>
+          <p:cNvPr id="7" name="TextBox 6"/>
+          <p:cNvSpPr txBox="1"/>
+          <p:nvPr/>
+        </p:nvSpPr>
+        <p:spPr>
+          <a:xfrm>
+            <a:off x="1051560" y="1837944"/>
+            <a:ext cx="10378440" cy="626871"/>
+          </a:xfrm>
+          <a:prstGeom prst="rect">
+            <a:avLst/>
+          </a:prstGeom>
+          <a:noFill/>
+        </p:spPr>
+        <p:txBody>
+          <a:bodyPr wrap="square">
+            <a:spAutoFit/>
+          </a:bodyPr>
+          <a:lstStyle/>
+          <a:p>
+            <a:pPr algn="l">
+              <a:lnSpc>
+                <a:spcPct val="130000"/>
+              </a:lnSpc>
+            </a:pPr>
+            <a:r>
+              <a:rPr sz="1300" b="0" i="1">
+                <a:solidFill>
+                  <a:srgbClr val="141B2D"/>
+                </a:solidFill>
+                <a:latin typeface="Segoe UI"/>
+              </a:rPr>
+              <a:t>"The center is completely white inside. We have traced a single continuous oval loop with a hollow white interior: top arch, right vertical stroke, bottom curve, left vertical stroke. It's a 0."</a:t>
+            </a:r>
+          </a:p>
+        </p:txBody>
+      </p:sp>
+      <p:sp>
+        <p:nvSpPr>
+          <p:cNvPr id="8" name="TextBox 7"/>
+          <p:cNvSpPr txBox="1"/>
+          <p:nvPr/>
+        </p:nvSpPr>
+        <p:spPr>
+          <a:xfrm>
+            <a:off x="1051560" y="2464816"/>
+            <a:ext cx="10378440" cy="237744"/>
+          </a:xfrm>
+          <a:prstGeom prst="rect">
+            <a:avLst/>
+          </a:prstGeom>
+          <a:noFill/>
+        </p:spPr>
+        <p:txBody>
+          <a:bodyPr wrap="square">
+            <a:spAutoFit/>
+          </a:bodyPr>
+          <a:lstStyle/>
+          <a:p>
+            <a:pPr algn="l">
+              <a:lnSpc>
+                <a:spcPct val="115000"/>
+              </a:lnSpc>
+            </a:pPr>
+            <a:r>
+              <a:rPr sz="1050" b="0" i="0">
+                <a:solidFill>
+                  <a:srgbClr val="5A667A"/>
+                </a:solidFill>
+                <a:latin typeface="Segoe UI"/>
+              </a:rPr>
+              <a:t>Gemini 3.8 Flash, answering correctly after tracing the stroke</a:t>
+            </a:r>
+          </a:p>
+        </p:txBody>
+      </p:sp>
+      <p:sp>
+        <p:nvSpPr>
+          <p:cNvPr id="9" name="Rectangle 8"/>
+          <p:cNvSpPr/>
+          <p:nvPr/>
+        </p:nvSpPr>
+        <p:spPr>
+          <a:xfrm>
+            <a:off x="868680" y="2940303"/>
+            <a:ext cx="41148" cy="706628"/>
+          </a:xfrm>
+          <a:prstGeom prst="rect">
+            <a:avLst/>
+          </a:prstGeom>
+          <a:solidFill>
+            <a:srgbClr val="00A8BF"/>
+          </a:solidFill>
+          <a:ln>
+            <a:noFill/>
+          </a:ln>
+          <a:effectLst/>
+        </p:spPr>
+        <p:style>
+          <a:lnRef idx="1">
+            <a:schemeClr val="accent1"/>
+          </a:lnRef>
+          <a:fillRef idx="3">
+            <a:schemeClr val="accent1"/>
+          </a:fillRef>
+          <a:effectRef idx="2">
+            <a:schemeClr val="accent1"/>
+          </a:effectRef>
+          <a:fontRef idx="minor">
+            <a:schemeClr val="lt1"/>
+          </a:fontRef>
+        </p:style>
+        <p:txBody>
+          <a:bodyPr rtlCol="0" anchor="ctr"/>
+          <a:lstStyle/>
+          <a:p>
+            <a:pPr algn="ctr"/>
+          </a:p>
+        </p:txBody>
+      </p:sp>
+      <p:sp>
+        <p:nvSpPr>
+          <p:cNvPr id="10" name="TextBox 9"/>
+          <p:cNvSpPr txBox="1"/>
+          <p:nvPr/>
+        </p:nvSpPr>
+        <p:spPr>
+          <a:xfrm>
+            <a:off x="1051560" y="2995167"/>
+            <a:ext cx="10378440" cy="395732"/>
+          </a:xfrm>
+          <a:prstGeom prst="rect">
+            <a:avLst/>
+          </a:prstGeom>
+          <a:noFill/>
+        </p:spPr>
+        <p:txBody>
+          <a:bodyPr wrap="square">
+            <a:spAutoFit/>
+          </a:bodyPr>
+          <a:lstStyle/>
+          <a:p>
+            <a:pPr algn="l">
+              <a:lnSpc>
+                <a:spcPct val="130000"/>
+              </a:lnSpc>
+            </a:pPr>
+            <a:r>
+              <a:rPr sz="1300" b="0" i="1">
+                <a:solidFill>
+                  <a:srgbClr val="141B2D"/>
+                </a:solidFill>
+                <a:latin typeface="Segoe UI"/>
+              </a:rPr>
+              <a:t>"Wait, let's see where this connects. Let's move up."</a:t>
+            </a:r>
+          </a:p>
+        </p:txBody>
+      </p:sp>
+      <p:sp>
+        <p:nvSpPr>
+          <p:cNvPr id="11" name="TextBox 10"/>
+          <p:cNvSpPr txBox="1"/>
+          <p:nvPr/>
+        </p:nvSpPr>
+        <p:spPr>
+          <a:xfrm>
+            <a:off x="1051560" y="3390899"/>
+            <a:ext cx="10378440" cy="237744"/>
+          </a:xfrm>
+          <a:prstGeom prst="rect">
+            <a:avLst/>
+          </a:prstGeom>
+          <a:noFill/>
+        </p:spPr>
+        <p:txBody>
+          <a:bodyPr wrap="square">
+            <a:spAutoFit/>
+          </a:bodyPr>
+          <a:lstStyle/>
+          <a:p>
+            <a:pPr algn="l">
+              <a:lnSpc>
+                <a:spcPct val="115000"/>
+              </a:lnSpc>
+            </a:pPr>
+            <a:r>
+              <a:rPr sz="1050" b="0" i="0">
+                <a:solidFill>
+                  <a:srgbClr val="5A667A"/>
+                </a:solidFill>
+                <a:latin typeface="Segoe UI"/>
+              </a:rPr>
+              <a:t>Choosing where to look next, mid-round</a:t>
+            </a:r>
+          </a:p>
+        </p:txBody>
+      </p:sp>
+      <p:sp>
+        <p:nvSpPr>
+          <p:cNvPr id="12" name="TextBox 11"/>
+          <p:cNvSpPr txBox="1"/>
+          <p:nvPr/>
+        </p:nvSpPr>
+        <p:spPr>
+          <a:xfrm>
+            <a:off x="868680" y="4003547"/>
+            <a:ext cx="10607040" cy="1280160"/>
+          </a:xfrm>
+          <a:prstGeom prst="rect">
+            <a:avLst/>
+          </a:prstGeom>
+          <a:noFill/>
+        </p:spPr>
+        <p:txBody>
+          <a:bodyPr wrap="square">
+            <a:spAutoFit/>
+          </a:bodyPr>
+          <a:lstStyle/>
+          <a:p>
+            <a:pPr algn="l">
+              <a:lnSpc>
+                <a:spcPct val="130000"/>
+              </a:lnSpc>
+            </a:pPr>
+            <a:r>
+              <a:rPr sz="1400" b="0" i="0">
+                <a:solidFill>
+                  <a:srgbClr val="141B2D"/>
+                </a:solidFill>
+                <a:latin typeface="Segoe UI"/>
+              </a:rPr>
+              <a:t>That first quote is a correct answer reached by integrating four separate glimpses into one shape. It is a real capability, and it is worth seeing before the failure modes on the next slide.</a:t>
+            </a:r>
+          </a:p>
+        </p:txBody>
+      </p:sp>
+    </p:spTree>
+  </p:cSld>
+  <p:clrMapOvr>
+    <a:masterClrMapping/>
+  </p:clrMapOvr>
+</p:sld>
+</file>
+
+<file path=ppt/slides/slide12.xml><?xml version="1.0" encoding="utf-8"?>
+<p:sld xmlns:a="http://schemas.openxmlformats.org/drawingml/2006/main" xmlns:p="http://schemas.openxmlformats.org/presentationml/2006/main" xmlns:r="http://schemas.openxmlformats.org/officeDocument/2006/relationships">
+  <p:cSld>
+    <p:spTree>
+      <p:nvGrpSpPr>
+        <p:cNvPr id="1" name=""/>
+        <p:cNvGrpSpPr/>
+        <p:nvPr/>
+      </p:nvGrpSpPr>
+      <p:grpSpPr/>
+      <p:sp>
+        <p:nvSpPr>
+          <p:cNvPr id="2" name="Rectangle 1"/>
+          <p:cNvSpPr/>
+          <p:nvPr/>
+        </p:nvSpPr>
+        <p:spPr>
+          <a:xfrm>
+            <a:off x="0" y="0"/>
+            <a:ext cx="12191695" cy="6858000"/>
+          </a:xfrm>
+          <a:prstGeom prst="rect">
+            <a:avLst/>
+          </a:prstGeom>
+          <a:solidFill>
+            <a:srgbClr val="FAFBFD"/>
+          </a:solidFill>
+          <a:ln>
+            <a:noFill/>
+          </a:ln>
+          <a:effectLst/>
+        </p:spPr>
+        <p:style>
+          <a:lnRef idx="1">
+            <a:schemeClr val="accent1"/>
+          </a:lnRef>
+          <a:fillRef idx="3">
+            <a:schemeClr val="accent1"/>
+          </a:fillRef>
+          <a:effectRef idx="2">
+            <a:schemeClr val="accent1"/>
+          </a:effectRef>
+          <a:fontRef idx="minor">
+            <a:schemeClr val="lt1"/>
+          </a:fontRef>
+        </p:style>
+        <p:txBody>
+          <a:bodyPr rtlCol="0" anchor="ctr"/>
+          <a:lstStyle/>
+          <a:p>
+            <a:pPr algn="ctr"/>
+          </a:p>
+        </p:txBody>
+      </p:sp>
+      <p:sp>
+        <p:nvSpPr>
+          <p:cNvPr id="3" name="Rectangle 2"/>
+          <p:cNvSpPr/>
+          <p:nvPr/>
+        </p:nvSpPr>
+        <p:spPr>
+          <a:xfrm>
+            <a:off x="640080" y="566928"/>
+            <a:ext cx="82296" cy="420624"/>
+          </a:xfrm>
+          <a:prstGeom prst="rect">
+            <a:avLst/>
+          </a:prstGeom>
+          <a:solidFill>
+            <a:srgbClr val="00A8BF"/>
+          </a:solidFill>
+          <a:ln>
+            <a:noFill/>
+          </a:ln>
+          <a:effectLst/>
+        </p:spPr>
+        <p:style>
+          <a:lnRef idx="1">
+            <a:schemeClr val="accent1"/>
+          </a:lnRef>
+          <a:fillRef idx="3">
+            <a:schemeClr val="accent1"/>
+          </a:fillRef>
+          <a:effectRef idx="2">
+            <a:schemeClr val="accent1"/>
+          </a:effectRef>
+          <a:fontRef idx="minor">
+            <a:schemeClr val="lt1"/>
+          </a:fontRef>
+        </p:style>
+        <p:txBody>
+          <a:bodyPr rtlCol="0" anchor="ctr"/>
+          <a:lstStyle/>
+          <a:p>
+            <a:pPr algn="ctr"/>
+          </a:p>
+        </p:txBody>
+      </p:sp>
+      <p:sp>
+        <p:nvSpPr>
+          <p:cNvPr id="4" name="TextBox 3"/>
+          <p:cNvSpPr txBox="1"/>
+          <p:nvPr/>
+        </p:nvSpPr>
+        <p:spPr>
+          <a:xfrm>
+            <a:off x="868680" y="502920"/>
+            <a:ext cx="10058400" cy="310896"/>
+          </a:xfrm>
+          <a:prstGeom prst="rect">
+            <a:avLst/>
+          </a:prstGeom>
+          <a:noFill/>
+        </p:spPr>
+        <p:txBody>
+          <a:bodyPr wrap="square">
+            <a:spAutoFit/>
+          </a:bodyPr>
+          <a:lstStyle/>
+          <a:p>
+            <a:pPr algn="l">
+              <a:lnSpc>
+                <a:spcPct val="115000"/>
+              </a:lnSpc>
+            </a:pPr>
+            <a:r>
+              <a:rPr sz="1100" b="1" i="0">
+                <a:solidFill>
+                  <a:srgbClr val="5A667A"/>
+                </a:solidFill>
+                <a:latin typeface="Segoe UI"/>
+              </a:rPr>
+              <a:t>CAPABILITY, UP CLOSE</a:t>
+            </a:r>
+          </a:p>
+        </p:txBody>
+      </p:sp>
+      <p:sp>
+        <p:nvSpPr>
+          <p:cNvPr id="5" name="TextBox 4"/>
+          <p:cNvSpPr txBox="1"/>
+          <p:nvPr/>
+        </p:nvSpPr>
+        <p:spPr>
+          <a:xfrm>
+            <a:off x="841248" y="841248"/>
+            <a:ext cx="10607040" cy="566928"/>
+          </a:xfrm>
+          <a:prstGeom prst="rect">
+            <a:avLst/>
+          </a:prstGeom>
+          <a:noFill/>
+        </p:spPr>
+        <p:txBody>
+          <a:bodyPr wrap="square">
+            <a:spAutoFit/>
+          </a:bodyPr>
+          <a:lstStyle/>
+          <a:p>
+            <a:pPr algn="l">
+              <a:lnSpc>
+                <a:spcPct val="115000"/>
+              </a:lnSpc>
+            </a:pPr>
+            <a:r>
+              <a:rPr sz="2800" b="1" i="0">
+                <a:solidFill>
+                  <a:srgbClr val="141B2D"/>
+                </a:solidFill>
+                <a:latin typeface="Segoe UI"/>
+              </a:rPr>
+              <a:t>How it fails is specific, and repeatable</a:t>
+            </a:r>
+          </a:p>
+        </p:txBody>
+      </p:sp>
+      <p:sp>
+        <p:nvSpPr>
+          <p:cNvPr id="6" name="TextBox 5"/>
+          <p:cNvSpPr txBox="1"/>
+          <p:nvPr/>
+        </p:nvSpPr>
+        <p:spPr>
+          <a:xfrm>
+            <a:off x="868680" y="1783080"/>
+            <a:ext cx="10607040" cy="246761"/>
+          </a:xfrm>
+          <a:prstGeom prst="rect">
+            <a:avLst/>
+          </a:prstGeom>
+          <a:noFill/>
+        </p:spPr>
+        <p:txBody>
+          <a:bodyPr wrap="square">
+            <a:spAutoFit/>
+          </a:bodyPr>
+          <a:lstStyle/>
+          <a:p>
+            <a:pPr algn="l">
+              <a:lnSpc>
+                <a:spcPct val="115000"/>
+              </a:lnSpc>
+            </a:pPr>
+            <a:r>
+              <a:rPr sz="1450" b="1" i="0">
+                <a:solidFill>
+                  <a:srgbClr val="141B2D"/>
+                </a:solidFill>
+                <a:latin typeface="Segoe UI"/>
+              </a:rPr>
+              <a:t>It wanders.</a:t>
+            </a:r>
+          </a:p>
+        </p:txBody>
+      </p:sp>
+      <p:sp>
+        <p:nvSpPr>
+          <p:cNvPr id="7" name="TextBox 6"/>
+          <p:cNvSpPr txBox="1"/>
+          <p:nvPr/>
+        </p:nvSpPr>
+        <p:spPr>
+          <a:xfrm>
+            <a:off x="868680" y="2066416"/>
+            <a:ext cx="10607040" cy="414528"/>
+          </a:xfrm>
+          <a:prstGeom prst="rect">
+            <a:avLst/>
+          </a:prstGeom>
+          <a:noFill/>
+        </p:spPr>
+        <p:txBody>
+          <a:bodyPr wrap="square">
+            <a:spAutoFit/>
+          </a:bodyPr>
+          <a:lstStyle/>
+          <a:p>
+            <a:pPr algn="l">
+              <a:lnSpc>
+                <a:spcPct val="125000"/>
+              </a:lnSpc>
+            </a:pPr>
+            <a:r>
+              <a:rPr sz="1200" b="0" i="0">
+                <a:solidFill>
+                  <a:srgbClr val="5A667A"/>
+                </a:solidFill>
+                <a:latin typeface="Segoe UI"/>
+              </a:rPr>
+              <a:t>Eleven steps of moving without converging is ordinary. The published mean is 4 to 30 steps depending on the model, and most never reach an answer worth trusting.</a:t>
+            </a:r>
+          </a:p>
+        </p:txBody>
+      </p:sp>
+      <p:sp>
+        <p:nvSpPr>
+          <p:cNvPr id="8" name="TextBox 7"/>
+          <p:cNvSpPr txBox="1"/>
+          <p:nvPr/>
+        </p:nvSpPr>
+        <p:spPr>
+          <a:xfrm>
+            <a:off x="868680" y="2663825"/>
+            <a:ext cx="10607040" cy="246761"/>
+          </a:xfrm>
+          <a:prstGeom prst="rect">
+            <a:avLst/>
+          </a:prstGeom>
+          <a:noFill/>
+        </p:spPr>
+        <p:txBody>
+          <a:bodyPr wrap="square">
+            <a:spAutoFit/>
+          </a:bodyPr>
+          <a:lstStyle/>
+          <a:p>
+            <a:pPr algn="l">
+              <a:lnSpc>
+                <a:spcPct val="115000"/>
+              </a:lnSpc>
+            </a:pPr>
+            <a:r>
+              <a:rPr sz="1450" b="1" i="0">
+                <a:solidFill>
+                  <a:srgbClr val="141B2D"/>
+                </a:solidFill>
+                <a:latin typeface="Segoe UI"/>
+              </a:rPr>
+              <a:t>It loses the thread and starts narrating.</a:t>
+            </a:r>
+          </a:p>
+        </p:txBody>
+      </p:sp>
+      <p:sp>
+        <p:nvSpPr>
+          <p:cNvPr id="9" name="TextBox 8"/>
+          <p:cNvSpPr txBox="1"/>
+          <p:nvPr/>
+        </p:nvSpPr>
+        <p:spPr>
+          <a:xfrm>
+            <a:off x="868680" y="2947162"/>
+            <a:ext cx="10607040" cy="414528"/>
+          </a:xfrm>
+          <a:prstGeom prst="rect">
+            <a:avLst/>
+          </a:prstGeom>
+          <a:noFill/>
+        </p:spPr>
+        <p:txBody>
+          <a:bodyPr wrap="square">
+            <a:spAutoFit/>
+          </a:bodyPr>
+          <a:lstStyle/>
+          <a:p>
+            <a:pPr algn="l">
+              <a:lnSpc>
+                <a:spcPct val="125000"/>
+              </a:lnSpc>
+            </a:pPr>
+            <a:r>
+              <a:rPr sz="1200" b="0" i="0">
+                <a:solidFill>
+                  <a:srgbClr val="5A667A"/>
+                </a:solidFill>
+                <a:latin typeface="Segoe UI"/>
+              </a:rPr>
+              <a:t>"Wait, this stroke goes all the way around! Let's see: - Top-left: there was a loop or something? Wait! Let's recall the top-left image..." - the reasoning stops being about the digit and becomes about its own uncertainty.</a:t>
+            </a:r>
+          </a:p>
+        </p:txBody>
+      </p:sp>
+      <p:sp>
+        <p:nvSpPr>
+          <p:cNvPr id="10" name="TextBox 9"/>
+          <p:cNvSpPr txBox="1"/>
+          <p:nvPr/>
+        </p:nvSpPr>
+        <p:spPr>
+          <a:xfrm>
+            <a:off x="868680" y="3544570"/>
+            <a:ext cx="10607040" cy="246761"/>
+          </a:xfrm>
+          <a:prstGeom prst="rect">
+            <a:avLst/>
+          </a:prstGeom>
+          <a:noFill/>
+        </p:spPr>
+        <p:txBody>
+          <a:bodyPr wrap="square">
+            <a:spAutoFit/>
+          </a:bodyPr>
+          <a:lstStyle/>
+          <a:p>
+            <a:pPr algn="l">
+              <a:lnSpc>
+                <a:spcPct val="115000"/>
+              </a:lnSpc>
+            </a:pPr>
+            <a:r>
+              <a:rPr sz="1450" b="1" i="0">
+                <a:solidFill>
+                  <a:srgbClr val="141B2D"/>
+                </a:solidFill>
+                <a:latin typeface="Segoe UI"/>
+              </a:rPr>
+              <a:t>Working memory is the bottleneck, not eyesight.</a:t>
+            </a:r>
+          </a:p>
+        </p:txBody>
+      </p:sp>
+      <p:sp>
+        <p:nvSpPr>
+          <p:cNvPr id="11" name="TextBox 10"/>
+          <p:cNvSpPr txBox="1"/>
+          <p:nvPr/>
+        </p:nvSpPr>
+        <p:spPr>
+          <a:xfrm>
+            <a:off x="868680" y="3827907"/>
+            <a:ext cx="10607040" cy="414528"/>
+          </a:xfrm>
+          <a:prstGeom prst="rect">
+            <a:avLst/>
+          </a:prstGeom>
+          <a:noFill/>
+        </p:spPr>
+        <p:txBody>
+          <a:bodyPr wrap="square">
+            <a:spAutoFit/>
+          </a:bodyPr>
+          <a:lstStyle/>
+          <a:p>
+            <a:pPr algn="l">
+              <a:lnSpc>
+                <a:spcPct val="125000"/>
+              </a:lnSpc>
+            </a:pPr>
+            <a:r>
+              <a:rPr sz="1200" b="0" i="0">
+                <a:solidFill>
+                  <a:srgbClr val="5A667A"/>
+                </a:solidFill>
+                <a:latin typeface="Segoe UI"/>
+              </a:rPr>
+              <a:t>Each glimpse is perfectly legible. What degrades is holding four of them together and knowing which part of the canvas has not been examined.</a:t>
+            </a:r>
+          </a:p>
+        </p:txBody>
+      </p:sp>
+      <p:sp>
+        <p:nvSpPr>
+          <p:cNvPr id="12" name="TextBox 11"/>
+          <p:cNvSpPr txBox="1"/>
+          <p:nvPr/>
+        </p:nvSpPr>
+        <p:spPr>
+          <a:xfrm>
+            <a:off x="868680" y="5440680"/>
+            <a:ext cx="10607040" cy="822960"/>
+          </a:xfrm>
+          <a:prstGeom prst="rect">
+            <a:avLst/>
+          </a:prstGeom>
+          <a:noFill/>
+        </p:spPr>
+        <p:txBody>
+          <a:bodyPr wrap="square">
+            <a:spAutoFit/>
+          </a:bodyPr>
+          <a:lstStyle/>
+          <a:p>
+            <a:pPr algn="l">
+              <a:lnSpc>
+                <a:spcPct val="130000"/>
+              </a:lnSpc>
+            </a:pPr>
+            <a:r>
+              <a:rPr sz="1400" b="1" i="0">
+                <a:solidFill>
+                  <a:srgbClr val="B56A00"/>
+                </a:solidFill>
+                <a:latin typeface="Segoe UI"/>
+              </a:rPr>
+              <a:t>None of this is a trick question. A person solves the same rounds in 5 to 10 glimpses without noticing they are doing anything clever.</a:t>
+            </a:r>
+          </a:p>
+        </p:txBody>
+      </p:sp>
+    </p:spTree>
+  </p:cSld>
+  <p:clrMapOvr>
+    <a:masterClrMapping/>
+  </p:clrMapOvr>
+</p:sld>
+</file>
+
+<file path=ppt/slides/slide13.xml><?xml version="1.0" encoding="utf-8"?>
+<p:sld xmlns:a="http://schemas.openxmlformats.org/drawingml/2006/main" xmlns:p="http://schemas.openxmlformats.org/presentationml/2006/main" xmlns:r="http://schemas.openxmlformats.org/officeDocument/2006/relationships">
+  <p:cSld>
+    <p:spTree>
+      <p:nvGrpSpPr>
+        <p:cNvPr id="1" name=""/>
+        <p:cNvGrpSpPr/>
+        <p:nvPr/>
+      </p:nvGrpSpPr>
+      <p:grpSpPr/>
+      <p:sp>
+        <p:nvSpPr>
+          <p:cNvPr id="2" name="Rectangle 1"/>
+          <p:cNvSpPr/>
+          <p:nvPr/>
+        </p:nvSpPr>
+        <p:spPr>
+          <a:xfrm>
+            <a:off x="0" y="0"/>
+            <a:ext cx="12191695" cy="6858000"/>
+          </a:xfrm>
+          <a:prstGeom prst="rect">
+            <a:avLst/>
+          </a:prstGeom>
+          <a:solidFill>
+            <a:srgbClr val="0E1A2B"/>
+          </a:solidFill>
+          <a:ln>
+            <a:noFill/>
+          </a:ln>
+          <a:effectLst/>
+        </p:spPr>
+        <p:style>
+          <a:lnRef idx="1">
+            <a:schemeClr val="accent1"/>
+          </a:lnRef>
+          <a:fillRef idx="3">
+            <a:schemeClr val="accent1"/>
+          </a:fillRef>
+          <a:effectRef idx="2">
+            <a:schemeClr val="accent1"/>
+          </a:effectRef>
+          <a:fontRef idx="minor">
+            <a:schemeClr val="lt1"/>
+          </a:fontRef>
+        </p:style>
+        <p:txBody>
+          <a:bodyPr rtlCol="0" anchor="ctr"/>
+          <a:lstStyle/>
+          <a:p>
+            <a:pPr algn="ctr"/>
+          </a:p>
+        </p:txBody>
+      </p:sp>
+      <p:sp>
+        <p:nvSpPr>
+          <p:cNvPr id="3" name="Rectangle 2"/>
+          <p:cNvSpPr/>
+          <p:nvPr/>
+        </p:nvSpPr>
+        <p:spPr>
+          <a:xfrm>
+            <a:off x="0" y="2788920"/>
+            <a:ext cx="12191695" cy="36576"/>
+          </a:xfrm>
+          <a:prstGeom prst="rect">
+            <a:avLst/>
+          </a:prstGeom>
+          <a:solidFill>
+            <a:srgbClr val="00A8BF"/>
+          </a:solidFill>
+          <a:ln>
+            <a:noFill/>
+          </a:ln>
+          <a:effectLst/>
+        </p:spPr>
+        <p:style>
+          <a:lnRef idx="1">
+            <a:schemeClr val="accent1"/>
+          </a:lnRef>
+          <a:fillRef idx="3">
+            <a:schemeClr val="accent1"/>
+          </a:fillRef>
+          <a:effectRef idx="2">
+            <a:schemeClr val="accent1"/>
+          </a:effectRef>
+          <a:fontRef idx="minor">
+            <a:schemeClr val="lt1"/>
+          </a:fontRef>
+        </p:style>
+        <p:txBody>
+          <a:bodyPr rtlCol="0" anchor="ctr"/>
+          <a:lstStyle/>
+          <a:p>
+            <a:pPr algn="ctr"/>
+          </a:p>
+        </p:txBody>
+      </p:sp>
+      <p:sp>
+        <p:nvSpPr>
+          <p:cNvPr id="4" name="TextBox 3"/>
+          <p:cNvSpPr txBox="1"/>
+          <p:nvPr/>
+        </p:nvSpPr>
+        <p:spPr>
+          <a:xfrm>
+            <a:off x="914400" y="1874519"/>
+            <a:ext cx="10515600" cy="384048"/>
+          </a:xfrm>
+          <a:prstGeom prst="rect">
+            <a:avLst/>
+          </a:prstGeom>
+          <a:noFill/>
+        </p:spPr>
+        <p:txBody>
+          <a:bodyPr wrap="square">
+            <a:spAutoFit/>
+          </a:bodyPr>
+          <a:lstStyle/>
+          <a:p>
+            <a:pPr algn="l">
+              <a:lnSpc>
+                <a:spcPct val="115000"/>
+              </a:lnSpc>
+            </a:pPr>
+            <a:r>
+              <a:rPr sz="1300" b="1" i="0">
+                <a:solidFill>
+                  <a:srgbClr val="00A8BF"/>
+                </a:solidFill>
+                <a:latin typeface="Segoe UI"/>
+              </a:rPr>
+              <a:t>PART THREE</a:t>
+            </a:r>
+          </a:p>
+        </p:txBody>
+      </p:sp>
+      <p:sp>
+        <p:nvSpPr>
+          <p:cNvPr id="5" name="TextBox 4"/>
+          <p:cNvSpPr txBox="1"/>
+          <p:nvPr/>
+        </p:nvSpPr>
+        <p:spPr>
+          <a:xfrm>
+            <a:off x="914400" y="2240280"/>
+            <a:ext cx="10515600" cy="640080"/>
+          </a:xfrm>
+          <a:prstGeom prst="rect">
+            <a:avLst/>
+          </a:prstGeom>
+          <a:noFill/>
+        </p:spPr>
+        <p:txBody>
+          <a:bodyPr wrap="square">
+            <a:spAutoFit/>
+          </a:bodyPr>
+          <a:lstStyle/>
+          <a:p>
+            <a:pPr algn="l">
+              <a:lnSpc>
+                <a:spcPct val="115000"/>
+              </a:lnSpc>
+            </a:pPr>
+            <a:r>
+              <a:rPr sz="3400" b="1" i="0">
+                <a:solidFill>
+                  <a:srgbClr val="FFFFFF"/>
+                </a:solidFill>
+                <a:latin typeface="Segoe UI"/>
+              </a:rPr>
+              <a:t>How it is built</a:t>
+            </a:r>
+          </a:p>
+        </p:txBody>
+      </p:sp>
+      <p:sp>
+        <p:nvSpPr>
+          <p:cNvPr id="6" name="TextBox 5"/>
+          <p:cNvSpPr txBox="1"/>
+          <p:nvPr/>
+        </p:nvSpPr>
+        <p:spPr>
+          <a:xfrm>
+            <a:off x="914400" y="3063240"/>
+            <a:ext cx="9601200" cy="731520"/>
+          </a:xfrm>
+          <a:prstGeom prst="rect">
+            <a:avLst/>
+          </a:prstGeom>
+          <a:noFill/>
+        </p:spPr>
+        <p:txBody>
+          <a:bodyPr wrap="square">
+            <a:spAutoFit/>
+          </a:bodyPr>
+          <a:lstStyle/>
+          <a:p>
+            <a:pPr algn="l">
+              <a:lnSpc>
+                <a:spcPct val="135000"/>
+              </a:lnSpc>
+            </a:pPr>
+            <a:r>
+              <a:rPr sz="1500" b="0" i="0">
+                <a:solidFill>
+                  <a:srgbClr val="B6C3D4"/>
+                </a:solidFill>
+                <a:latin typeface="Segoe UI"/>
+              </a:rPr>
+              <a:t>A static site with no server that still keeps secrets, generates its data from the benchmark's own code, and is checked against the published runs.</a:t>
+            </a:r>
+          </a:p>
+        </p:txBody>
+      </p:sp>
+    </p:spTree>
+  </p:cSld>
+  <p:clrMapOvr>
+    <a:masterClrMapping/>
+  </p:clrMapOvr>
+</p:sld>
+</file>
+
+<file path=ppt/slides/slide14.xml><?xml version="1.0" encoding="utf-8"?>
+<p:sld xmlns:a="http://schemas.openxmlformats.org/drawingml/2006/main" xmlns:p="http://schemas.openxmlformats.org/presentationml/2006/main" xmlns:r="http://schemas.openxmlformats.org/officeDocument/2006/relationships">
+  <p:cSld>
+    <p:spTree>
+      <p:nvGrpSpPr>
+        <p:cNvPr id="1" name=""/>
+        <p:cNvGrpSpPr/>
+        <p:nvPr/>
+      </p:nvGrpSpPr>
+      <p:grpSpPr/>
+      <p:sp>
+        <p:nvSpPr>
+          <p:cNvPr id="2" name="Rectangle 1"/>
+          <p:cNvSpPr/>
+          <p:nvPr/>
+        </p:nvSpPr>
+        <p:spPr>
+          <a:xfrm>
+            <a:off x="0" y="0"/>
+            <a:ext cx="12191695" cy="6858000"/>
+          </a:xfrm>
+          <a:prstGeom prst="rect">
+            <a:avLst/>
+          </a:prstGeom>
+          <a:solidFill>
+            <a:srgbClr val="FAFBFD"/>
+          </a:solidFill>
+          <a:ln>
+            <a:noFill/>
+          </a:ln>
+          <a:effectLst/>
+        </p:spPr>
+        <p:style>
+          <a:lnRef idx="1">
+            <a:schemeClr val="accent1"/>
+          </a:lnRef>
+          <a:fillRef idx="3">
+            <a:schemeClr val="accent1"/>
+          </a:fillRef>
+          <a:effectRef idx="2">
+            <a:schemeClr val="accent1"/>
+          </a:effectRef>
+          <a:fontRef idx="minor">
+            <a:schemeClr val="lt1"/>
+          </a:fontRef>
+        </p:style>
+        <p:txBody>
+          <a:bodyPr rtlCol="0" anchor="ctr"/>
+          <a:lstStyle/>
+          <a:p>
+            <a:pPr algn="ctr"/>
+          </a:p>
+        </p:txBody>
+      </p:sp>
+      <p:sp>
+        <p:nvSpPr>
+          <p:cNvPr id="3" name="Rectangle 2"/>
+          <p:cNvSpPr/>
+          <p:nvPr/>
+        </p:nvSpPr>
+        <p:spPr>
+          <a:xfrm>
+            <a:off x="640080" y="566928"/>
+            <a:ext cx="82296" cy="420624"/>
+          </a:xfrm>
+          <a:prstGeom prst="rect">
+            <a:avLst/>
+          </a:prstGeom>
+          <a:solidFill>
+            <a:srgbClr val="00A8BF"/>
+          </a:solidFill>
+          <a:ln>
+            <a:noFill/>
+          </a:ln>
+          <a:effectLst/>
+        </p:spPr>
+        <p:style>
+          <a:lnRef idx="1">
+            <a:schemeClr val="accent1"/>
+          </a:lnRef>
+          <a:fillRef idx="3">
+            <a:schemeClr val="accent1"/>
+          </a:fillRef>
+          <a:effectRef idx="2">
+            <a:schemeClr val="accent1"/>
+          </a:effectRef>
+          <a:fontRef idx="minor">
+            <a:schemeClr val="lt1"/>
+          </a:fontRef>
+        </p:style>
+        <p:txBody>
+          <a:bodyPr rtlCol="0" anchor="ctr"/>
+          <a:lstStyle/>
+          <a:p>
+            <a:pPr algn="ctr"/>
+          </a:p>
+        </p:txBody>
+      </p:sp>
+      <p:sp>
+        <p:nvSpPr>
+          <p:cNvPr id="4" name="TextBox 3"/>
+          <p:cNvSpPr txBox="1"/>
+          <p:nvPr/>
+        </p:nvSpPr>
+        <p:spPr>
+          <a:xfrm>
+            <a:off x="868680" y="502920"/>
+            <a:ext cx="10058400" cy="310896"/>
+          </a:xfrm>
+          <a:prstGeom prst="rect">
+            <a:avLst/>
+          </a:prstGeom>
+          <a:noFill/>
+        </p:spPr>
+        <p:txBody>
+          <a:bodyPr wrap="square">
+            <a:spAutoFit/>
+          </a:bodyPr>
+          <a:lstStyle/>
+          <a:p>
+            <a:pPr algn="l">
+              <a:lnSpc>
+                <a:spcPct val="115000"/>
+              </a:lnSpc>
+            </a:pPr>
+            <a:r>
+              <a:rPr sz="1100" b="1" i="0">
+                <a:solidFill>
+                  <a:srgbClr val="5A667A"/>
+                </a:solidFill>
+                <a:latin typeface="Segoe UI"/>
+              </a:rPr>
+              <a:t>ARCHITECTURE</a:t>
+            </a:r>
+          </a:p>
+        </p:txBody>
+      </p:sp>
+      <p:sp>
+        <p:nvSpPr>
+          <p:cNvPr id="5" name="TextBox 4"/>
+          <p:cNvSpPr txBox="1"/>
+          <p:nvPr/>
+        </p:nvSpPr>
+        <p:spPr>
+          <a:xfrm>
+            <a:off x="841248" y="841248"/>
+            <a:ext cx="10607040" cy="566928"/>
+          </a:xfrm>
+          <a:prstGeom prst="rect">
+            <a:avLst/>
+          </a:prstGeom>
+          <a:noFill/>
+        </p:spPr>
+        <p:txBody>
+          <a:bodyPr wrap="square">
+            <a:spAutoFit/>
+          </a:bodyPr>
+          <a:lstStyle/>
+          <a:p>
+            <a:pPr algn="l">
+              <a:lnSpc>
+                <a:spcPct val="115000"/>
+              </a:lnSpc>
+            </a:pPr>
+            <a:r>
+              <a:rPr sz="2800" b="1" i="0">
+                <a:solidFill>
+                  <a:srgbClr val="141B2D"/>
+                </a:solidFill>
+                <a:latin typeface="Segoe UI"/>
+              </a:rPr>
+              <a:t>A static site that still keeps secrets</a:t>
+            </a:r>
+          </a:p>
+        </p:txBody>
+      </p:sp>
+      <p:sp>
+        <p:nvSpPr>
+          <p:cNvPr id="6" name="TextBox 5"/>
+          <p:cNvSpPr txBox="1"/>
+          <p:nvPr/>
+        </p:nvSpPr>
+        <p:spPr>
+          <a:xfrm>
+            <a:off x="868680" y="1783080"/>
+            <a:ext cx="10607040" cy="246761"/>
+          </a:xfrm>
+          <a:prstGeom prst="rect">
+            <a:avLst/>
+          </a:prstGeom>
+          <a:noFill/>
+        </p:spPr>
+        <p:txBody>
+          <a:bodyPr wrap="square">
+            <a:spAutoFit/>
+          </a:bodyPr>
+          <a:lstStyle/>
+          <a:p>
+            <a:pPr algn="l">
+              <a:lnSpc>
+                <a:spcPct val="115000"/>
+              </a:lnSpc>
+            </a:pPr>
+            <a:r>
+              <a:rPr sz="1450" b="1" i="0">
+                <a:solidFill>
+                  <a:srgbClr val="141B2D"/>
+                </a:solidFill>
+                <a:latin typeface="Segoe UI"/>
+              </a:rPr>
+              <a:t>GitHub Pages serves files and cannot run code.</a:t>
+            </a:r>
+          </a:p>
+        </p:txBody>
+      </p:sp>
+      <p:sp>
+        <p:nvSpPr>
+          <p:cNvPr id="7" name="TextBox 6"/>
+          <p:cNvSpPr txBox="1"/>
+          <p:nvPr/>
+        </p:nvSpPr>
+        <p:spPr>
+          <a:xfrm>
+            <a:off x="868680" y="2066416"/>
+            <a:ext cx="10607040" cy="207264"/>
+          </a:xfrm>
+          <a:prstGeom prst="rect">
+            <a:avLst/>
+          </a:prstGeom>
+          <a:noFill/>
+        </p:spPr>
+        <p:txBody>
+          <a:bodyPr wrap="square">
+            <a:spAutoFit/>
+          </a:bodyPr>
+          <a:lstStyle/>
+          <a:p>
+            <a:pPr algn="l">
+              <a:lnSpc>
+                <a:spcPct val="125000"/>
+              </a:lnSpc>
+            </a:pPr>
+            <a:r>
+              <a:rPr sz="1200" b="0" i="0">
+                <a:solidFill>
+                  <a:srgbClr val="5A667A"/>
+                </a:solidFill>
+                <a:latin typeface="Segoe UI"/>
+              </a:rPr>
+              <a:t>So the whole race runs in the browser. There is no server to operate, nothing to attack, and no hosting cost.</a:t>
+            </a:r>
+          </a:p>
+        </p:txBody>
+      </p:sp>
+      <p:sp>
+        <p:nvSpPr>
+          <p:cNvPr id="8" name="TextBox 7"/>
+          <p:cNvSpPr txBox="1"/>
+          <p:nvPr/>
+        </p:nvSpPr>
+        <p:spPr>
+          <a:xfrm>
+            <a:off x="868680" y="2392552"/>
+            <a:ext cx="10607040" cy="246761"/>
+          </a:xfrm>
+          <a:prstGeom prst="rect">
+            <a:avLst/>
+          </a:prstGeom>
+          <a:noFill/>
+        </p:spPr>
+        <p:txBody>
+          <a:bodyPr wrap="square">
+            <a:spAutoFit/>
+          </a:bodyPr>
+          <a:lstStyle/>
+          <a:p>
+            <a:pPr algn="l">
+              <a:lnSpc>
+                <a:spcPct val="115000"/>
+              </a:lnSpc>
+            </a:pPr>
+            <a:r>
+              <a:rPr sz="1450" b="1" i="0">
+                <a:solidFill>
+                  <a:srgbClr val="141B2D"/>
+                </a:solidFill>
+                <a:latin typeface="Segoe UI"/>
+              </a:rPr>
+              <a:t>No API key is ever in the site.</a:t>
+            </a:r>
+          </a:p>
+        </p:txBody>
+      </p:sp>
+      <p:sp>
+        <p:nvSpPr>
+          <p:cNvPr id="9" name="TextBox 8"/>
+          <p:cNvSpPr txBox="1"/>
+          <p:nvPr/>
+        </p:nvSpPr>
+        <p:spPr>
+          <a:xfrm>
+            <a:off x="868680" y="2675889"/>
+            <a:ext cx="10607040" cy="414528"/>
+          </a:xfrm>
+          <a:prstGeom prst="rect">
+            <a:avLst/>
+          </a:prstGeom>
+          <a:noFill/>
+        </p:spPr>
+        <p:txBody>
+          <a:bodyPr wrap="square">
+            <a:spAutoFit/>
+          </a:bodyPr>
+          <a:lstStyle/>
+          <a:p>
+            <a:pPr algn="l">
+              <a:lnSpc>
+                <a:spcPct val="125000"/>
+              </a:lnSpc>
+            </a:pPr>
+            <a:r>
+              <a:rPr sz="1200" b="0" i="0">
+                <a:solidFill>
+                  <a:srgbClr val="5A667A"/>
+                </a:solidFill>
+                <a:latin typeface="Segoe UI"/>
+              </a:rPr>
+              <a:t>Solo play needs none at all. To race the AI a visitor supplies their own, held in their browser and sent only to openrouter.ai. The project's own key has never been in the repository, and that is enforced by a check on every commit.</a:t>
+            </a:r>
+          </a:p>
+        </p:txBody>
+      </p:sp>
+      <p:sp>
+        <p:nvSpPr>
+          <p:cNvPr id="10" name="TextBox 9"/>
+          <p:cNvSpPr txBox="1"/>
+          <p:nvPr/>
+        </p:nvSpPr>
+        <p:spPr>
+          <a:xfrm>
+            <a:off x="868680" y="3209289"/>
+            <a:ext cx="10607040" cy="246761"/>
+          </a:xfrm>
+          <a:prstGeom prst="rect">
+            <a:avLst/>
+          </a:prstGeom>
+          <a:noFill/>
+        </p:spPr>
+        <p:txBody>
+          <a:bodyPr wrap="square">
+            <a:spAutoFit/>
+          </a:bodyPr>
+          <a:lstStyle/>
+          <a:p>
+            <a:pPr algn="l">
+              <a:lnSpc>
+                <a:spcPct val="115000"/>
+              </a:lnSpc>
+            </a:pPr>
+            <a:r>
+              <a:rPr sz="1450" b="1" i="0">
+                <a:solidFill>
+                  <a:srgbClr val="141B2D"/>
+                </a:solidFill>
+                <a:latin typeface="Segoe UI"/>
+              </a:rPr>
+              <a:t>ARC answers ship as SHA-256 digests, never as answers.</a:t>
+            </a:r>
+          </a:p>
+        </p:txBody>
+      </p:sp>
+      <p:sp>
+        <p:nvSpPr>
+          <p:cNvPr id="11" name="TextBox 10"/>
+          <p:cNvSpPr txBox="1"/>
+          <p:nvPr/>
+        </p:nvSpPr>
+        <p:spPr>
+          <a:xfrm>
+            <a:off x="868680" y="3492627"/>
+            <a:ext cx="10607040" cy="207264"/>
+          </a:xfrm>
+          <a:prstGeom prst="rect">
+            <a:avLst/>
+          </a:prstGeom>
+          <a:noFill/>
+        </p:spPr>
+        <p:txBody>
+          <a:bodyPr wrap="square">
+            <a:spAutoFit/>
+          </a:bodyPr>
+          <a:lstStyle/>
+          <a:p>
+            <a:pPr algn="l">
+              <a:lnSpc>
+                <a:spcPct val="125000"/>
+              </a:lnSpc>
+            </a:pPr>
+            <a:r>
+              <a:rPr sz="1200" b="0" i="0">
+                <a:solidFill>
+                  <a:srgbClr val="5A667A"/>
+                </a:solidFill>
+                <a:latin typeface="Segoe UI"/>
+              </a:rPr>
+              <a:t>A submission is graded by hashing it in the browser. MNIST canvases ship as packed bitmaps that Pages gzips to a few hundred bytes each.</a:t>
+            </a:r>
+          </a:p>
+        </p:txBody>
+      </p:sp>
+      <p:sp>
+        <p:nvSpPr>
+          <p:cNvPr id="12" name="TextBox 11"/>
+          <p:cNvSpPr txBox="1"/>
+          <p:nvPr/>
+        </p:nvSpPr>
+        <p:spPr>
+          <a:xfrm>
+            <a:off x="868680" y="3818762"/>
+            <a:ext cx="10607040" cy="246761"/>
+          </a:xfrm>
+          <a:prstGeom prst="rect">
+            <a:avLst/>
+          </a:prstGeom>
+          <a:noFill/>
+        </p:spPr>
+        <p:txBody>
+          <a:bodyPr wrap="square">
+            <a:spAutoFit/>
+          </a:bodyPr>
+          <a:lstStyle/>
+          <a:p>
+            <a:pPr algn="l">
+              <a:lnSpc>
+                <a:spcPct val="115000"/>
+              </a:lnSpc>
+            </a:pPr>
+            <a:r>
+              <a:rPr sz="1450" b="1" i="0">
+                <a:solidFill>
+                  <a:srgbClr val="141B2D"/>
+                </a:solidFill>
+                <a:latin typeface="Segoe UI"/>
+              </a:rPr>
+              <a:t>An optional FastAPI backend exists for a hosted AI lane.</a:t>
+            </a:r>
+          </a:p>
+        </p:txBody>
+      </p:sp>
+      <p:sp>
+        <p:nvSpPr>
+          <p:cNvPr id="13" name="TextBox 12"/>
+          <p:cNvSpPr txBox="1"/>
+          <p:nvPr/>
+        </p:nvSpPr>
+        <p:spPr>
+          <a:xfrm>
+            <a:off x="868680" y="4102099"/>
+            <a:ext cx="10607040" cy="207264"/>
+          </a:xfrm>
+          <a:prstGeom prst="rect">
+            <a:avLst/>
+          </a:prstGeom>
+          <a:noFill/>
+        </p:spPr>
+        <p:txBody>
+          <a:bodyPr wrap="square">
+            <a:spAutoFit/>
+          </a:bodyPr>
+          <a:lstStyle/>
+          <a:p>
+            <a:pPr algn="l">
+              <a:lnSpc>
+                <a:spcPct val="125000"/>
+              </a:lnSpc>
+            </a:pPr>
+            <a:r>
+              <a:rPr sz="1200" b="0" i="0">
+                <a:solidFill>
+                  <a:srgbClr val="5A667A"/>
+                </a:solidFill>
+                <a:latin typeface="Segoe UI"/>
+              </a:rPr>
+              <a:t>There the key stays server-side and is never returned to a client. It is not required for either game.</a:t>
+            </a:r>
+          </a:p>
+        </p:txBody>
+      </p:sp>
+    </p:spTree>
+  </p:cSld>
+  <p:clrMapOvr>
+    <a:masterClrMapping/>
+  </p:clrMapOvr>
+</p:sld>
+</file>
+
+<file path=ppt/slides/slide15.xml><?xml version="1.0" encoding="utf-8"?>
+<p:sld xmlns:a="http://schemas.openxmlformats.org/drawingml/2006/main" xmlns:p="http://schemas.openxmlformats.org/presentationml/2006/main" xmlns:r="http://schemas.openxmlformats.org/officeDocument/2006/relationships">
+  <p:cSld>
+    <p:spTree>
+      <p:nvGrpSpPr>
+        <p:cNvPr id="1" name=""/>
+        <p:cNvGrpSpPr/>
+        <p:nvPr/>
+      </p:nvGrpSpPr>
+      <p:grpSpPr/>
+      <p:sp>
+        <p:nvSpPr>
+          <p:cNvPr id="2" name="Rectangle 1"/>
+          <p:cNvSpPr/>
+          <p:nvPr/>
+        </p:nvSpPr>
+        <p:spPr>
+          <a:xfrm>
+            <a:off x="0" y="0"/>
+            <a:ext cx="12191695" cy="6858000"/>
+          </a:xfrm>
+          <a:prstGeom prst="rect">
+            <a:avLst/>
+          </a:prstGeom>
+          <a:solidFill>
+            <a:srgbClr val="FAFBFD"/>
+          </a:solidFill>
+          <a:ln>
+            <a:noFill/>
+          </a:ln>
+          <a:effectLst/>
+        </p:spPr>
+        <p:style>
+          <a:lnRef idx="1">
+            <a:schemeClr val="accent1"/>
+          </a:lnRef>
+          <a:fillRef idx="3">
+            <a:schemeClr val="accent1"/>
+          </a:fillRef>
+          <a:effectRef idx="2">
+            <a:schemeClr val="accent1"/>
+          </a:effectRef>
+          <a:fontRef idx="minor">
+            <a:schemeClr val="lt1"/>
+          </a:fontRef>
+        </p:style>
+        <p:txBody>
+          <a:bodyPr rtlCol="0" anchor="ctr"/>
+          <a:lstStyle/>
+          <a:p>
+            <a:pPr algn="ctr"/>
+          </a:p>
+        </p:txBody>
+      </p:sp>
+      <p:sp>
+        <p:nvSpPr>
+          <p:cNvPr id="3" name="Rectangle 2"/>
+          <p:cNvSpPr/>
+          <p:nvPr/>
+        </p:nvSpPr>
+        <p:spPr>
+          <a:xfrm>
+            <a:off x="640080" y="566928"/>
+            <a:ext cx="82296" cy="420624"/>
+          </a:xfrm>
+          <a:prstGeom prst="rect">
+            <a:avLst/>
+          </a:prstGeom>
+          <a:solidFill>
+            <a:srgbClr val="00A8BF"/>
+          </a:solidFill>
+          <a:ln>
+            <a:noFill/>
+          </a:ln>
+          <a:effectLst/>
+        </p:spPr>
+        <p:style>
+          <a:lnRef idx="1">
+            <a:schemeClr val="accent1"/>
+          </a:lnRef>
+          <a:fillRef idx="3">
+            <a:schemeClr val="accent1"/>
+          </a:fillRef>
+          <a:effectRef idx="2">
+            <a:schemeClr val="accent1"/>
+          </a:effectRef>
+          <a:fontRef idx="minor">
+            <a:schemeClr val="lt1"/>
+          </a:fontRef>
+        </p:style>
+        <p:txBody>
+          <a:bodyPr rtlCol="0" anchor="ctr"/>
+          <a:lstStyle/>
+          <a:p>
+            <a:pPr algn="ctr"/>
+          </a:p>
+        </p:txBody>
+      </p:sp>
+      <p:sp>
+        <p:nvSpPr>
+          <p:cNvPr id="4" name="TextBox 3"/>
+          <p:cNvSpPr txBox="1"/>
+          <p:nvPr/>
+        </p:nvSpPr>
+        <p:spPr>
+          <a:xfrm>
+            <a:off x="868680" y="502920"/>
+            <a:ext cx="10058400" cy="310896"/>
+          </a:xfrm>
+          <a:prstGeom prst="rect">
+            <a:avLst/>
+          </a:prstGeom>
+          <a:noFill/>
+        </p:spPr>
+        <p:txBody>
+          <a:bodyPr wrap="square">
+            <a:spAutoFit/>
+          </a:bodyPr>
+          <a:lstStyle/>
+          <a:p>
+            <a:pPr algn="l">
+              <a:lnSpc>
+                <a:spcPct val="115000"/>
+              </a:lnSpc>
+            </a:pPr>
+            <a:r>
+              <a:rPr sz="1100" b="1" i="0">
+                <a:solidFill>
+                  <a:srgbClr val="5A667A"/>
+                </a:solidFill>
+                <a:latin typeface="Segoe UI"/>
+              </a:rPr>
+              <a:t>DATA</a:t>
+            </a:r>
+          </a:p>
+        </p:txBody>
+      </p:sp>
+      <p:sp>
+        <p:nvSpPr>
+          <p:cNvPr id="5" name="TextBox 4"/>
+          <p:cNvSpPr txBox="1"/>
+          <p:nvPr/>
+        </p:nvSpPr>
+        <p:spPr>
+          <a:xfrm>
+            <a:off x="841248" y="841248"/>
+            <a:ext cx="10607040" cy="566928"/>
+          </a:xfrm>
+          <a:prstGeom prst="rect">
+            <a:avLst/>
+          </a:prstGeom>
+          <a:noFill/>
+        </p:spPr>
+        <p:txBody>
+          <a:bodyPr wrap="square">
+            <a:spAutoFit/>
+          </a:bodyPr>
+          <a:lstStyle/>
+          <a:p>
+            <a:pPr algn="l">
+              <a:lnSpc>
+                <a:spcPct val="115000"/>
+              </a:lnSpc>
+            </a:pPr>
+            <a:r>
+              <a:rPr sz="2800" b="1" i="0">
+                <a:solidFill>
+                  <a:srgbClr val="141B2D"/>
+                </a:solidFill>
+                <a:latin typeface="Segoe UI"/>
+              </a:rPr>
+              <a:t>Generated by the benchmark, not imitated</a:t>
+            </a:r>
+          </a:p>
+        </p:txBody>
+      </p:sp>
+      <p:sp>
+        <p:nvSpPr>
+          <p:cNvPr id="6" name="TextBox 5"/>
+          <p:cNvSpPr txBox="1"/>
+          <p:nvPr/>
+        </p:nvSpPr>
+        <p:spPr>
+          <a:xfrm>
+            <a:off x="868680" y="1783080"/>
+            <a:ext cx="10607040" cy="246761"/>
+          </a:xfrm>
+          <a:prstGeom prst="rect">
+            <a:avLst/>
+          </a:prstGeom>
+          <a:noFill/>
+        </p:spPr>
+        <p:txBody>
+          <a:bodyPr wrap="square">
+            <a:spAutoFit/>
+          </a:bodyPr>
+          <a:lstStyle/>
+          <a:p>
+            <a:pPr algn="l">
+              <a:lnSpc>
+                <a:spcPct val="115000"/>
+              </a:lnSpc>
+            </a:pPr>
+            <a:r>
+              <a:rPr sz="1450" b="1" i="0">
+                <a:solidFill>
+                  <a:srgbClr val="141B2D"/>
+                </a:solidFill>
+                <a:latin typeface="Segoe UI"/>
+              </a:rPr>
+              <a:t>Canvases come from the upstream generators themselves.</a:t>
+            </a:r>
+          </a:p>
+        </p:txBody>
+      </p:sp>
+      <p:sp>
+        <p:nvSpPr>
+          <p:cNvPr id="7" name="TextBox 6"/>
+          <p:cNvSpPr txBox="1"/>
+          <p:nvPr/>
+        </p:nvSpPr>
+        <p:spPr>
+          <a:xfrm>
+            <a:off x="868680" y="2066416"/>
+            <a:ext cx="10607040" cy="207264"/>
+          </a:xfrm>
+          <a:prstGeom prst="rect">
+            <a:avLst/>
+          </a:prstGeom>
+          <a:noFill/>
+        </p:spPr>
+        <p:txBody>
+          <a:bodyPr wrap="square">
+            <a:spAutoFit/>
+          </a:bodyPr>
+          <a:lstStyle/>
+          <a:p>
+            <a:pPr algn="l">
+              <a:lnSpc>
+                <a:spcPct val="125000"/>
+              </a:lnSpc>
+            </a:pPr>
+            <a:r>
+              <a:rPr sz="1200" b="0" i="0">
+                <a:solidFill>
+                  <a:srgbClr val="5A667A"/>
+                </a:solidFill>
+                <a:latin typeface="Segoe UI"/>
+              </a:rPr>
+              <a:t>build_canvas and deterministic_start produce every canvas; episodes are sampled with the benchmark's own sample_balanced at seed 42.</a:t>
+            </a:r>
+          </a:p>
+        </p:txBody>
+      </p:sp>
+      <p:sp>
+        <p:nvSpPr>
+          <p:cNvPr id="8" name="TextBox 7"/>
+          <p:cNvSpPr txBox="1"/>
+          <p:nvPr/>
+        </p:nvSpPr>
+        <p:spPr>
+          <a:xfrm>
+            <a:off x="868680" y="2392552"/>
+            <a:ext cx="10607040" cy="246761"/>
+          </a:xfrm>
+          <a:prstGeom prst="rect">
+            <a:avLst/>
+          </a:prstGeom>
+          <a:noFill/>
+        </p:spPr>
+        <p:txBody>
+          <a:bodyPr wrap="square">
+            <a:spAutoFit/>
+          </a:bodyPr>
+          <a:lstStyle/>
+          <a:p>
+            <a:pPr algn="l">
+              <a:lnSpc>
+                <a:spcPct val="115000"/>
+              </a:lnSpc>
+            </a:pPr>
+            <a:r>
+              <a:rPr sz="1450" b="1" i="0">
+                <a:solidFill>
+                  <a:srgbClr val="141B2D"/>
+                </a:solidFill>
+                <a:latin typeface="Segoe UI"/>
+              </a:rPr>
+              <a:t>So episode 0 here is episode 0 of the published runs.</a:t>
+            </a:r>
+          </a:p>
+        </p:txBody>
+      </p:sp>
+      <p:sp>
+        <p:nvSpPr>
+          <p:cNvPr id="9" name="TextBox 8"/>
+          <p:cNvSpPr txBox="1"/>
+          <p:nvPr/>
+        </p:nvSpPr>
+        <p:spPr>
+          <a:xfrm>
+            <a:off x="868680" y="2675889"/>
+            <a:ext cx="10607040" cy="414528"/>
+          </a:xfrm>
+          <a:prstGeom prst="rect">
+            <a:avLst/>
+          </a:prstGeom>
+          <a:noFill/>
+        </p:spPr>
+        <p:txBody>
+          <a:bodyPr wrap="square">
+            <a:spAutoFit/>
+          </a:bodyPr>
+          <a:lstStyle/>
+          <a:p>
+            <a:pPr algn="l">
+              <a:lnSpc>
+                <a:spcPct val="125000"/>
+              </a:lnSpc>
+            </a:pPr>
+            <a:r>
+              <a:rPr sz="1200" b="0" i="0">
+                <a:solidFill>
+                  <a:srgbClr val="5A667A"/>
+                </a:solidFill>
+                <a:latin typeface="Segoe UI"/>
+              </a:rPr>
+              <a:t>Verified against their golden manifest: it starts at [130,130], and two 'up' moves give [130,98] then [130,66] - exactly the trajectory their recorded run produced.</a:t>
+            </a:r>
+          </a:p>
+        </p:txBody>
+      </p:sp>
+      <p:sp>
+        <p:nvSpPr>
+          <p:cNvPr id="10" name="TextBox 9"/>
+          <p:cNvSpPr txBox="1"/>
+          <p:nvPr/>
+        </p:nvSpPr>
+        <p:spPr>
+          <a:xfrm>
+            <a:off x="868680" y="3209289"/>
+            <a:ext cx="10607040" cy="246761"/>
+          </a:xfrm>
+          <a:prstGeom prst="rect">
+            <a:avLst/>
+          </a:prstGeom>
+          <a:noFill/>
+        </p:spPr>
+        <p:txBody>
+          <a:bodyPr wrap="square">
+            <a:spAutoFit/>
+          </a:bodyPr>
+          <a:lstStyle/>
+          <a:p>
+            <a:pPr algn="l">
+              <a:lnSpc>
+                <a:spcPct val="115000"/>
+              </a:lnSpc>
+            </a:pPr>
+            <a:r>
+              <a:rPr sz="1450" b="1" i="0">
+                <a:solidFill>
+                  <a:srgbClr val="141B2D"/>
+                </a:solidFill>
+                <a:latin typeface="Segoe UI"/>
+              </a:rPr>
+              <a:t>Only what must run live was ported to JavaScript.</a:t>
+            </a:r>
+          </a:p>
+        </p:txBody>
+      </p:sp>
+      <p:sp>
+        <p:nvSpPr>
+          <p:cNvPr id="11" name="TextBox 10"/>
+          <p:cNvSpPr txBox="1"/>
+          <p:nvPr/>
+        </p:nvSpPr>
+        <p:spPr>
+          <a:xfrm>
+            <a:off x="868680" y="3492627"/>
+            <a:ext cx="10607040" cy="414528"/>
+          </a:xfrm>
+          <a:prstGeom prst="rect">
+            <a:avLst/>
+          </a:prstGeom>
+          <a:noFill/>
+        </p:spPr>
+        <p:txBody>
+          <a:bodyPr wrap="square">
+            <a:spAutoFit/>
+          </a:bodyPr>
+          <a:lstStyle/>
+          <a:p>
+            <a:pPr algn="l">
+              <a:lnSpc>
+                <a:spcPct val="125000"/>
+              </a:lnSpc>
+            </a:pPr>
+            <a:r>
+              <a:rPr sz="1200" b="0" i="0">
+                <a:solidFill>
+                  <a:srgbClr val="5A667A"/>
+                </a:solidFill>
+                <a:latin typeface="Segoe UI"/>
+              </a:rPr>
+              <a:t>Movement clamping, the one-shot answer, the step limit, and the masking that render_observation performs. The rendered canvas is checked against the shipped bitmap pixel for pixel.</a:t>
+            </a:r>
+          </a:p>
+        </p:txBody>
+      </p:sp>
+      <p:sp>
+        <p:nvSpPr>
+          <p:cNvPr id="12" name="TextBox 11"/>
+          <p:cNvSpPr txBox="1"/>
+          <p:nvPr/>
+        </p:nvSpPr>
+        <p:spPr>
+          <a:xfrm>
+            <a:off x="868680" y="4026026"/>
+            <a:ext cx="10607040" cy="246761"/>
+          </a:xfrm>
+          <a:prstGeom prst="rect">
+            <a:avLst/>
+          </a:prstGeom>
+          <a:noFill/>
+        </p:spPr>
+        <p:txBody>
+          <a:bodyPr wrap="square">
+            <a:spAutoFit/>
+          </a:bodyPr>
+          <a:lstStyle/>
+          <a:p>
+            <a:pPr algn="l">
+              <a:lnSpc>
+                <a:spcPct val="115000"/>
+              </a:lnSpc>
+            </a:pPr>
+            <a:r>
+              <a:rPr sz="1450" b="1" i="0">
+                <a:solidFill>
+                  <a:srgbClr val="141B2D"/>
+                </a:solidFill>
+                <a:latin typeface="Segoe UI"/>
+              </a:rPr>
+              <a:t>200 MNIST-PRO episodes, balanced across all ten digits; 386 ARC tasks.</a:t>
+            </a:r>
+          </a:p>
+        </p:txBody>
+      </p:sp>
+    </p:spTree>
+  </p:cSld>
+  <p:clrMapOvr>
+    <a:masterClrMapping/>
+  </p:clrMapOvr>
+</p:sld>
+</file>
+
+<file path=ppt/slides/slide16.xml><?xml version="1.0" encoding="utf-8"?>
+<p:sld xmlns:a="http://schemas.openxmlformats.org/drawingml/2006/main" xmlns:p="http://schemas.openxmlformats.org/presentationml/2006/main" xmlns:r="http://schemas.openxmlformats.org/officeDocument/2006/relationships">
+  <p:cSld>
+    <p:spTree>
+      <p:nvGrpSpPr>
+        <p:cNvPr id="1" name=""/>
+        <p:cNvGrpSpPr/>
+        <p:nvPr/>
+      </p:nvGrpSpPr>
+      <p:grpSpPr/>
+      <p:sp>
+        <p:nvSpPr>
+          <p:cNvPr id="2" name="Rectangle 1"/>
+          <p:cNvSpPr/>
+          <p:nvPr/>
+        </p:nvSpPr>
+        <p:spPr>
+          <a:xfrm>
+            <a:off x="0" y="0"/>
+            <a:ext cx="12191695" cy="6858000"/>
+          </a:xfrm>
+          <a:prstGeom prst="rect">
+            <a:avLst/>
+          </a:prstGeom>
+          <a:solidFill>
+            <a:srgbClr val="FAFBFD"/>
+          </a:solidFill>
+          <a:ln>
+            <a:noFill/>
+          </a:ln>
+          <a:effectLst/>
+        </p:spPr>
+        <p:style>
+          <a:lnRef idx="1">
+            <a:schemeClr val="accent1"/>
+          </a:lnRef>
+          <a:fillRef idx="3">
+            <a:schemeClr val="accent1"/>
+          </a:fillRef>
+          <a:effectRef idx="2">
+            <a:schemeClr val="accent1"/>
+          </a:effectRef>
+          <a:fontRef idx="minor">
+            <a:schemeClr val="lt1"/>
+          </a:fontRef>
+        </p:style>
+        <p:txBody>
+          <a:bodyPr rtlCol="0" anchor="ctr"/>
+          <a:lstStyle/>
+          <a:p>
+            <a:pPr algn="ctr"/>
+          </a:p>
+        </p:txBody>
+      </p:sp>
+      <p:sp>
+        <p:nvSpPr>
+          <p:cNvPr id="3" name="Rectangle 2"/>
+          <p:cNvSpPr/>
+          <p:nvPr/>
+        </p:nvSpPr>
+        <p:spPr>
+          <a:xfrm>
+            <a:off x="640080" y="566928"/>
+            <a:ext cx="82296" cy="420624"/>
+          </a:xfrm>
+          <a:prstGeom prst="rect">
+            <a:avLst/>
+          </a:prstGeom>
+          <a:solidFill>
+            <a:srgbClr val="00A8BF"/>
+          </a:solidFill>
+          <a:ln>
+            <a:noFill/>
+          </a:ln>
+          <a:effectLst/>
+        </p:spPr>
+        <p:style>
+          <a:lnRef idx="1">
+            <a:schemeClr val="accent1"/>
+          </a:lnRef>
+          <a:fillRef idx="3">
+            <a:schemeClr val="accent1"/>
+          </a:fillRef>
+          <a:effectRef idx="2">
+            <a:schemeClr val="accent1"/>
+          </a:effectRef>
+          <a:fontRef idx="minor">
+            <a:schemeClr val="lt1"/>
+          </a:fontRef>
+        </p:style>
+        <p:txBody>
+          <a:bodyPr rtlCol="0" anchor="ctr"/>
+          <a:lstStyle/>
+          <a:p>
+            <a:pPr algn="ctr"/>
+          </a:p>
+        </p:txBody>
+      </p:sp>
+      <p:sp>
+        <p:nvSpPr>
+          <p:cNvPr id="4" name="TextBox 3"/>
+          <p:cNvSpPr txBox="1"/>
+          <p:nvPr/>
+        </p:nvSpPr>
+        <p:spPr>
+          <a:xfrm>
+            <a:off x="868680" y="502920"/>
+            <a:ext cx="10058400" cy="310896"/>
+          </a:xfrm>
+          <a:prstGeom prst="rect">
+            <a:avLst/>
+          </a:prstGeom>
+          <a:noFill/>
+        </p:spPr>
+        <p:txBody>
+          <a:bodyPr wrap="square">
+            <a:spAutoFit/>
+          </a:bodyPr>
+          <a:lstStyle/>
+          <a:p>
+            <a:pPr algn="l">
+              <a:lnSpc>
+                <a:spcPct val="115000"/>
+              </a:lnSpc>
+            </a:pPr>
+            <a:r>
+              <a:rPr sz="1100" b="1" i="0">
+                <a:solidFill>
+                  <a:srgbClr val="5A667A"/>
+                </a:solidFill>
+                <a:latin typeface="Segoe UI"/>
+              </a:rPr>
+              <a:t>DESIGN</a:t>
+            </a:r>
+          </a:p>
+        </p:txBody>
+      </p:sp>
+      <p:sp>
+        <p:nvSpPr>
+          <p:cNvPr id="5" name="TextBox 4"/>
+          <p:cNvSpPr txBox="1"/>
+          <p:nvPr/>
+        </p:nvSpPr>
+        <p:spPr>
+          <a:xfrm>
+            <a:off x="841248" y="841248"/>
+            <a:ext cx="10607040" cy="566928"/>
+          </a:xfrm>
+          <a:prstGeom prst="rect">
+            <a:avLst/>
+          </a:prstGeom>
+          <a:noFill/>
+        </p:spPr>
+        <p:txBody>
+          <a:bodyPr wrap="square">
+            <a:spAutoFit/>
+          </a:bodyPr>
+          <a:lstStyle/>
+          <a:p>
+            <a:pPr algn="l">
+              <a:lnSpc>
+                <a:spcPct val="115000"/>
+              </a:lnSpc>
+            </a:pPr>
+            <a:r>
+              <a:rPr sz="2800" b="1" i="0">
+                <a:solidFill>
+                  <a:srgbClr val="141B2D"/>
+                </a:solidFill>
+                <a:latin typeface="Segoe UI"/>
+              </a:rPr>
+              <a:t>Decisions, and why they went that way</a:t>
+            </a:r>
+          </a:p>
+        </p:txBody>
+      </p:sp>
+      <p:sp>
+        <p:nvSpPr>
+          <p:cNvPr id="6" name="TextBox 5"/>
+          <p:cNvSpPr txBox="1"/>
+          <p:nvPr/>
+        </p:nvSpPr>
+        <p:spPr>
+          <a:xfrm>
+            <a:off x="868680" y="1783080"/>
+            <a:ext cx="10607040" cy="246761"/>
+          </a:xfrm>
+          <a:prstGeom prst="rect">
+            <a:avLst/>
+          </a:prstGeom>
+          <a:noFill/>
+        </p:spPr>
+        <p:txBody>
+          <a:bodyPr wrap="square">
+            <a:spAutoFit/>
+          </a:bodyPr>
+          <a:lstStyle/>
+          <a:p>
+            <a:pPr algn="l">
+              <a:lnSpc>
+                <a:spcPct val="115000"/>
+              </a:lnSpc>
+            </a:pPr>
+            <a:r>
+              <a:rPr sz="1450" b="1" i="0">
+                <a:solidFill>
+                  <a:srgbClr val="141B2D"/>
+                </a:solidFill>
+                <a:latin typeface="Segoe UI"/>
+              </a:rPr>
+              <a:t>ARC first, MNIST-PRO second.</a:t>
+            </a:r>
+          </a:p>
+        </p:txBody>
+      </p:sp>
+      <p:sp>
+        <p:nvSpPr>
+          <p:cNvPr id="7" name="TextBox 6"/>
+          <p:cNvSpPr txBox="1"/>
+          <p:nvPr/>
+        </p:nvSpPr>
+        <p:spPr>
+          <a:xfrm>
+            <a:off x="868680" y="2066416"/>
+            <a:ext cx="10607040" cy="414528"/>
+          </a:xfrm>
+          <a:prstGeom prst="rect">
+            <a:avLst/>
+          </a:prstGeom>
+          <a:noFill/>
+        </p:spPr>
+        <p:txBody>
+          <a:bodyPr wrap="square">
+            <a:spAutoFit/>
+          </a:bodyPr>
+          <a:lstStyle/>
+          <a:p>
+            <a:pPr algn="l">
+              <a:lnSpc>
+                <a:spcPct val="125000"/>
+              </a:lnSpc>
+            </a:pPr>
+            <a:r>
+              <a:rPr sz="1200" b="0" i="0">
+                <a:solidFill>
+                  <a:srgbClr val="5A667A"/>
+                </a:solidFill>
+                <a:latin typeface="Segoe UI"/>
+              </a:rPr>
+              <a:t>ARC asks you to infer a rule in five minutes. That turned out to be the wrong kind of hard for a party game, so a task needing no prior knowledge became the front page.</a:t>
+            </a:r>
+          </a:p>
+        </p:txBody>
+      </p:sp>
+      <p:sp>
+        <p:nvSpPr>
+          <p:cNvPr id="8" name="TextBox 7"/>
+          <p:cNvSpPr txBox="1"/>
+          <p:nvPr/>
+        </p:nvSpPr>
+        <p:spPr>
+          <a:xfrm>
+            <a:off x="868680" y="2590673"/>
+            <a:ext cx="10607040" cy="246761"/>
+          </a:xfrm>
+          <a:prstGeom prst="rect">
+            <a:avLst/>
+          </a:prstGeom>
+          <a:noFill/>
+        </p:spPr>
+        <p:txBody>
+          <a:bodyPr wrap="square">
+            <a:spAutoFit/>
+          </a:bodyPr>
+          <a:lstStyle/>
+          <a:p>
+            <a:pPr algn="l">
+              <a:lnSpc>
+                <a:spcPct val="115000"/>
+              </a:lnSpc>
+            </a:pPr>
+            <a:r>
+              <a:rPr sz="1450" b="1" i="0">
+                <a:solidFill>
+                  <a:srgbClr val="141B2D"/>
+                </a:solidFill>
+                <a:latin typeface="Segoe UI"/>
+              </a:rPr>
+              <a:t>Difficulty measured rather than asserted.</a:t>
+            </a:r>
+          </a:p>
+        </p:txBody>
+      </p:sp>
+      <p:sp>
+        <p:nvSpPr>
+          <p:cNvPr id="9" name="TextBox 8"/>
+          <p:cNvSpPr txBox="1"/>
+          <p:nvPr/>
+        </p:nvSpPr>
+        <p:spPr>
+          <a:xfrm>
+            <a:off x="868680" y="2874010"/>
+            <a:ext cx="10607040" cy="414528"/>
+          </a:xfrm>
+          <a:prstGeom prst="rect">
+            <a:avLst/>
+          </a:prstGeom>
+          <a:noFill/>
+        </p:spPr>
+        <p:txBody>
+          <a:bodyPr wrap="square">
+            <a:spAutoFit/>
+          </a:bodyPr>
+          <a:lstStyle/>
+          <a:p>
+            <a:pPr algn="l">
+              <a:lnSpc>
+                <a:spcPct val="125000"/>
+              </a:lnSpc>
+            </a:pPr>
+            <a:r>
+              <a:rPr sz="1200" b="0" i="0">
+                <a:solidFill>
+                  <a:srgbClr val="5A667A"/>
+                </a:solidFill>
+                <a:latin typeface="Segoe UI"/>
+              </a:rPr>
+              <a:t>For ARC, a classifier found the 19 tasks a single rule explains. For MNIST-PRO, a simulation of 400 digits set the window size: 8x8 tiles end a round in 2 glimpses, 2x2 in 15. 4x4 was the playable middle.</a:t>
+            </a:r>
+          </a:p>
+        </p:txBody>
+      </p:sp>
+      <p:sp>
+        <p:nvSpPr>
+          <p:cNvPr id="10" name="TextBox 9"/>
+          <p:cNvSpPr txBox="1"/>
+          <p:nvPr/>
+        </p:nvSpPr>
+        <p:spPr>
+          <a:xfrm>
+            <a:off x="868680" y="3398266"/>
+            <a:ext cx="10607040" cy="246761"/>
+          </a:xfrm>
+          <a:prstGeom prst="rect">
+            <a:avLst/>
+          </a:prstGeom>
+          <a:noFill/>
+        </p:spPr>
+        <p:txBody>
+          <a:bodyPr wrap="square">
+            <a:spAutoFit/>
+          </a:bodyPr>
+          <a:lstStyle/>
+          <a:p>
+            <a:pPr algn="l">
+              <a:lnSpc>
+                <a:spcPct val="115000"/>
+              </a:lnSpc>
+            </a:pPr>
+            <a:r>
+              <a:rPr sz="1450" b="1" i="0">
+                <a:solidFill>
+                  <a:srgbClr val="141B2D"/>
+                </a:solidFill>
+                <a:latin typeface="Segoe UI"/>
+              </a:rPr>
+              <a:t>Steps, not seconds.</a:t>
+            </a:r>
+          </a:p>
+        </p:txBody>
+      </p:sp>
+      <p:sp>
+        <p:nvSpPr>
+          <p:cNvPr id="11" name="TextBox 10"/>
+          <p:cNvSpPr txBox="1"/>
+          <p:nvPr/>
+        </p:nvSpPr>
+        <p:spPr>
+          <a:xfrm>
+            <a:off x="868680" y="3681603"/>
+            <a:ext cx="10607040" cy="207264"/>
+          </a:xfrm>
+          <a:prstGeom prst="rect">
+            <a:avLst/>
+          </a:prstGeom>
+          <a:noFill/>
+        </p:spPr>
+        <p:txBody>
+          <a:bodyPr wrap="square">
+            <a:spAutoFit/>
+          </a:bodyPr>
+          <a:lstStyle/>
+          <a:p>
+            <a:pPr algn="l">
+              <a:lnSpc>
+                <a:spcPct val="125000"/>
+              </a:lnSpc>
+            </a:pPr>
+            <a:r>
+              <a:rPr sz="1200" b="0" i="0">
+                <a:solidFill>
+                  <a:srgbClr val="5A667A"/>
+                </a:solidFill>
+                <a:latin typeface="Segoe UI"/>
+              </a:rPr>
+              <a:t>Suggested by the first player to look at it, and correct: timing a networked opponent measures latency.</a:t>
+            </a:r>
+          </a:p>
+        </p:txBody>
+      </p:sp>
+      <p:sp>
+        <p:nvSpPr>
+          <p:cNvPr id="12" name="TextBox 11"/>
+          <p:cNvSpPr txBox="1"/>
+          <p:nvPr/>
+        </p:nvSpPr>
+        <p:spPr>
+          <a:xfrm>
+            <a:off x="868680" y="3998595"/>
+            <a:ext cx="10607040" cy="246761"/>
+          </a:xfrm>
+          <a:prstGeom prst="rect">
+            <a:avLst/>
+          </a:prstGeom>
+          <a:noFill/>
+        </p:spPr>
+        <p:txBody>
+          <a:bodyPr wrap="square">
+            <a:spAutoFit/>
+          </a:bodyPr>
+          <a:lstStyle/>
+          <a:p>
+            <a:pPr algn="l">
+              <a:lnSpc>
+                <a:spcPct val="115000"/>
+              </a:lnSpc>
+            </a:pPr>
+            <a:r>
+              <a:rPr sz="1450" b="1" i="0">
+                <a:solidFill>
+                  <a:srgbClr val="141B2D"/>
+                </a:solidFill>
+                <a:latin typeface="Segoe UI"/>
+              </a:rPr>
+              <a:t>The rules panel collapsed by default.</a:t>
+            </a:r>
+          </a:p>
+        </p:txBody>
+      </p:sp>
+      <p:sp>
+        <p:nvSpPr>
+          <p:cNvPr id="13" name="TextBox 12"/>
+          <p:cNvSpPr txBox="1"/>
+          <p:nvPr/>
+        </p:nvSpPr>
+        <p:spPr>
+          <a:xfrm>
+            <a:off x="868680" y="4281932"/>
+            <a:ext cx="10607040" cy="207264"/>
+          </a:xfrm>
+          <a:prstGeom prst="rect">
+            <a:avLst/>
+          </a:prstGeom>
+          <a:noFill/>
+        </p:spPr>
+        <p:txBody>
+          <a:bodyPr wrap="square">
+            <a:spAutoFit/>
+          </a:bodyPr>
+          <a:lstStyle/>
+          <a:p>
+            <a:pPr algn="l">
+              <a:lnSpc>
+                <a:spcPct val="125000"/>
+              </a:lnSpc>
+            </a:pPr>
+            <a:r>
+              <a:rPr sz="1200" b="0" i="0">
+                <a:solidFill>
+                  <a:srgbClr val="5A667A"/>
+                </a:solidFill>
+                <a:latin typeface="Segoe UI"/>
+              </a:rPr>
+              <a:t>It occupied the top of both games before anyone had pressed anything.</a:t>
+            </a:r>
+          </a:p>
+        </p:txBody>
+      </p:sp>
+    </p:spTree>
+  </p:cSld>
+  <p:clrMapOvr>
+    <a:masterClrMapping/>
+  </p:clrMapOvr>
+</p:sld>
+</file>
+
+<file path=ppt/slides/slide17.xml><?xml version="1.0" encoding="utf-8"?>
+<p:sld xmlns:a="http://schemas.openxmlformats.org/drawingml/2006/main" xmlns:p="http://schemas.openxmlformats.org/presentationml/2006/main" xmlns:r="http://schemas.openxmlformats.org/officeDocument/2006/relationships">
+  <p:cSld>
+    <p:spTree>
+      <p:nvGrpSpPr>
+        <p:cNvPr id="1" name=""/>
+        <p:cNvGrpSpPr/>
+        <p:nvPr/>
+      </p:nvGrpSpPr>
+      <p:grpSpPr/>
+      <p:sp>
+        <p:nvSpPr>
+          <p:cNvPr id="2" name="Rectangle 1"/>
+          <p:cNvSpPr/>
+          <p:nvPr/>
+        </p:nvSpPr>
+        <p:spPr>
+          <a:xfrm>
+            <a:off x="0" y="0"/>
+            <a:ext cx="12191695" cy="6858000"/>
+          </a:xfrm>
+          <a:prstGeom prst="rect">
+            <a:avLst/>
+          </a:prstGeom>
+          <a:solidFill>
+            <a:srgbClr val="FAFBFD"/>
+          </a:solidFill>
+          <a:ln>
+            <a:noFill/>
+          </a:ln>
+          <a:effectLst/>
+        </p:spPr>
+        <p:style>
+          <a:lnRef idx="1">
+            <a:schemeClr val="accent1"/>
+          </a:lnRef>
+          <a:fillRef idx="3">
+            <a:schemeClr val="accent1"/>
+          </a:fillRef>
+          <a:effectRef idx="2">
+            <a:schemeClr val="accent1"/>
+          </a:effectRef>
+          <a:fontRef idx="minor">
+            <a:schemeClr val="lt1"/>
+          </a:fontRef>
+        </p:style>
+        <p:txBody>
+          <a:bodyPr rtlCol="0" anchor="ctr"/>
+          <a:lstStyle/>
+          <a:p>
+            <a:pPr algn="ctr"/>
+          </a:p>
+        </p:txBody>
+      </p:sp>
+      <p:sp>
+        <p:nvSpPr>
+          <p:cNvPr id="3" name="Rectangle 2"/>
+          <p:cNvSpPr/>
+          <p:nvPr/>
+        </p:nvSpPr>
+        <p:spPr>
+          <a:xfrm>
+            <a:off x="640080" y="566928"/>
+            <a:ext cx="82296" cy="420624"/>
+          </a:xfrm>
+          <a:prstGeom prst="rect">
+            <a:avLst/>
+          </a:prstGeom>
+          <a:solidFill>
+            <a:srgbClr val="00A8BF"/>
+          </a:solidFill>
+          <a:ln>
+            <a:noFill/>
+          </a:ln>
+          <a:effectLst/>
+        </p:spPr>
+        <p:style>
+          <a:lnRef idx="1">
+            <a:schemeClr val="accent1"/>
+          </a:lnRef>
+          <a:fillRef idx="3">
+            <a:schemeClr val="accent1"/>
+          </a:fillRef>
+          <a:effectRef idx="2">
+            <a:schemeClr val="accent1"/>
+          </a:effectRef>
+          <a:fontRef idx="minor">
+            <a:schemeClr val="lt1"/>
+          </a:fontRef>
+        </p:style>
+        <p:txBody>
+          <a:bodyPr rtlCol="0" anchor="ctr"/>
+          <a:lstStyle/>
+          <a:p>
+            <a:pPr algn="ctr"/>
+          </a:p>
+        </p:txBody>
+      </p:sp>
+      <p:sp>
+        <p:nvSpPr>
+          <p:cNvPr id="4" name="TextBox 3"/>
+          <p:cNvSpPr txBox="1"/>
+          <p:nvPr/>
+        </p:nvSpPr>
+        <p:spPr>
+          <a:xfrm>
+            <a:off x="868680" y="502920"/>
+            <a:ext cx="10058400" cy="310896"/>
+          </a:xfrm>
+          <a:prstGeom prst="rect">
+            <a:avLst/>
+          </a:prstGeom>
+          <a:noFill/>
+        </p:spPr>
+        <p:txBody>
+          <a:bodyPr wrap="square">
+            <a:spAutoFit/>
+          </a:bodyPr>
+          <a:lstStyle/>
+          <a:p>
+            <a:pPr algn="l">
+              <a:lnSpc>
+                <a:spcPct val="115000"/>
+              </a:lnSpc>
+            </a:pPr>
+            <a:r>
+              <a:rPr sz="1100" b="1" i="0">
+                <a:solidFill>
+                  <a:srgbClr val="5A667A"/>
+                </a:solidFill>
+                <a:latin typeface="Segoe UI"/>
+              </a:rPr>
+              <a:t>WHAT BUILDING IT TAUGHT US</a:t>
+            </a:r>
+          </a:p>
+        </p:txBody>
+      </p:sp>
+      <p:sp>
+        <p:nvSpPr>
+          <p:cNvPr id="5" name="TextBox 4"/>
+          <p:cNvSpPr txBox="1"/>
+          <p:nvPr/>
+        </p:nvSpPr>
+        <p:spPr>
+          <a:xfrm>
+            <a:off x="841248" y="841248"/>
+            <a:ext cx="10607040" cy="566928"/>
+          </a:xfrm>
+          <a:prstGeom prst="rect">
+            <a:avLst/>
+          </a:prstGeom>
+          <a:noFill/>
+        </p:spPr>
+        <p:txBody>
+          <a:bodyPr wrap="square">
+            <a:spAutoFit/>
+          </a:bodyPr>
+          <a:lstStyle/>
+          <a:p>
+            <a:pPr algn="l">
+              <a:lnSpc>
+                <a:spcPct val="115000"/>
+              </a:lnSpc>
+            </a:pPr>
+            <a:r>
+              <a:rPr sz="2800" b="1" i="0">
+                <a:solidFill>
+                  <a:srgbClr val="141B2D"/>
+                </a:solidFill>
+                <a:latin typeface="Segoe UI"/>
+              </a:rPr>
+              <a:t>The tests agreed with me more often than they should have</a:t>
+            </a:r>
+          </a:p>
+        </p:txBody>
+      </p:sp>
+      <p:sp>
+        <p:nvSpPr>
+          <p:cNvPr id="6" name="TextBox 5"/>
+          <p:cNvSpPr txBox="1"/>
+          <p:nvPr/>
+        </p:nvSpPr>
+        <p:spPr>
+          <a:xfrm>
+            <a:off x="868680" y="1783080"/>
+            <a:ext cx="10607040" cy="246761"/>
+          </a:xfrm>
+          <a:prstGeom prst="rect">
+            <a:avLst/>
+          </a:prstGeom>
+          <a:noFill/>
+        </p:spPr>
+        <p:txBody>
+          <a:bodyPr wrap="square">
+            <a:spAutoFit/>
+          </a:bodyPr>
+          <a:lstStyle/>
+          <a:p>
+            <a:pPr algn="l">
+              <a:lnSpc>
+                <a:spcPct val="115000"/>
+              </a:lnSpc>
+            </a:pPr>
+            <a:r>
+              <a:rPr sz="1450" b="1" i="0">
+                <a:solidFill>
+                  <a:srgbClr val="141B2D"/>
+                </a:solidFill>
+                <a:latin typeface="Segoe UI"/>
+              </a:rPr>
+              <a:t>Five real bugs were caught by looking at screenshots, not by assertions.</a:t>
+            </a:r>
+          </a:p>
+        </p:txBody>
+      </p:sp>
+      <p:sp>
+        <p:nvSpPr>
+          <p:cNvPr id="7" name="TextBox 6"/>
+          <p:cNvSpPr txBox="1"/>
+          <p:nvPr/>
+        </p:nvSpPr>
+        <p:spPr>
+          <a:xfrm>
+            <a:off x="868680" y="2066416"/>
+            <a:ext cx="10607040" cy="414528"/>
+          </a:xfrm>
+          <a:prstGeom prst="rect">
+            <a:avLst/>
+          </a:prstGeom>
+          <a:noFill/>
+        </p:spPr>
+        <p:txBody>
+          <a:bodyPr wrap="square">
+            <a:spAutoFit/>
+          </a:bodyPr>
+          <a:lstStyle/>
+          <a:p>
+            <a:pPr algn="l">
+              <a:lnSpc>
+                <a:spcPct val="125000"/>
+              </a:lnSpc>
+            </a:pPr>
+            <a:r>
+              <a:rPr sz="1200" b="0" i="0">
+                <a:solidFill>
+                  <a:srgbClr val="5A667A"/>
+                </a:solidFill>
+                <a:latin typeface="Segoe UI"/>
+              </a:rPr>
+              <a:t>A correct answer reported as 'Wrong - it answered null'. Panels frozen on a stale state. Overlays sitting on top of live canvases. Sensible actions rejected on formatting. A reply cut off by a token budget and scored as malformed.</a:t>
+            </a:r>
+          </a:p>
+        </p:txBody>
+      </p:sp>
+      <p:sp>
+        <p:nvSpPr>
+          <p:cNvPr id="8" name="TextBox 7"/>
+          <p:cNvSpPr txBox="1"/>
+          <p:nvPr/>
+        </p:nvSpPr>
+        <p:spPr>
+          <a:xfrm>
+            <a:off x="868680" y="2581529"/>
+            <a:ext cx="10607040" cy="246761"/>
+          </a:xfrm>
+          <a:prstGeom prst="rect">
+            <a:avLst/>
+          </a:prstGeom>
+          <a:noFill/>
+        </p:spPr>
+        <p:txBody>
+          <a:bodyPr wrap="square">
+            <a:spAutoFit/>
+          </a:bodyPr>
+          <a:lstStyle/>
+          <a:p>
+            <a:pPr algn="l">
+              <a:lnSpc>
+                <a:spcPct val="115000"/>
+              </a:lnSpc>
+            </a:pPr>
+            <a:r>
+              <a:rPr sz="1450" b="1" i="0">
+                <a:solidFill>
+                  <a:srgbClr val="141B2D"/>
+                </a:solidFill>
+                <a:latin typeface="Segoe UI"/>
+              </a:rPr>
+              <a:t>The common thread: asserting intent instead of outcome.</a:t>
+            </a:r>
+          </a:p>
+        </p:txBody>
+      </p:sp>
+      <p:sp>
+        <p:nvSpPr>
+          <p:cNvPr id="9" name="TextBox 8"/>
+          <p:cNvSpPr txBox="1"/>
+          <p:nvPr/>
+        </p:nvSpPr>
+        <p:spPr>
+          <a:xfrm>
+            <a:off x="868680" y="2864866"/>
+            <a:ext cx="10607040" cy="414528"/>
+          </a:xfrm>
+          <a:prstGeom prst="rect">
+            <a:avLst/>
+          </a:prstGeom>
+          <a:noFill/>
+        </p:spPr>
+        <p:txBody>
+          <a:bodyPr wrap="square">
+            <a:spAutoFit/>
+          </a:bodyPr>
+          <a:lstStyle/>
+          <a:p>
+            <a:pPr algn="l">
+              <a:lnSpc>
+                <a:spcPct val="125000"/>
+              </a:lnSpc>
+            </a:pPr>
+            <a:r>
+              <a:rPr sz="1200" b="0" i="0">
+                <a:solidFill>
+                  <a:srgbClr val="5A667A"/>
+                </a:solidFill>
+                <a:latin typeface="Segoe UI"/>
+              </a:rPr>
+              <a:t>Tests checked that hidden was set - it was - while the element stayed on screen, because an explicit CSS display beats the hidden attribute. Every such test passed throughout.</a:t>
+            </a:r>
+          </a:p>
+        </p:txBody>
+      </p:sp>
+      <p:sp>
+        <p:nvSpPr>
+          <p:cNvPr id="10" name="TextBox 9"/>
+          <p:cNvSpPr txBox="1"/>
+          <p:nvPr/>
+        </p:nvSpPr>
+        <p:spPr>
+          <a:xfrm>
+            <a:off x="868680" y="3379978"/>
+            <a:ext cx="10607040" cy="246761"/>
+          </a:xfrm>
+          <a:prstGeom prst="rect">
+            <a:avLst/>
+          </a:prstGeom>
+          <a:noFill/>
+        </p:spPr>
+        <p:txBody>
+          <a:bodyPr wrap="square">
+            <a:spAutoFit/>
+          </a:bodyPr>
+          <a:lstStyle/>
+          <a:p>
+            <a:pPr algn="l">
+              <a:lnSpc>
+                <a:spcPct val="115000"/>
+              </a:lnSpc>
+            </a:pPr>
+            <a:r>
+              <a:rPr sz="1450" b="1" i="0">
+                <a:solidFill>
+                  <a:srgbClr val="141B2D"/>
+                </a:solidFill>
+                <a:latin typeface="Segoe UI"/>
+              </a:rPr>
+              <a:t>Fixes applied per-place rather than once come back.</a:t>
+            </a:r>
+          </a:p>
+        </p:txBody>
+      </p:sp>
+      <p:sp>
+        <p:nvSpPr>
+          <p:cNvPr id="11" name="TextBox 10"/>
+          <p:cNvSpPr txBox="1"/>
+          <p:nvPr/>
+        </p:nvSpPr>
+        <p:spPr>
+          <a:xfrm>
+            <a:off x="868680" y="3663314"/>
+            <a:ext cx="10607040" cy="414528"/>
+          </a:xfrm>
+          <a:prstGeom prst="rect">
+            <a:avLst/>
+          </a:prstGeom>
+          <a:noFill/>
+        </p:spPr>
+        <p:txBody>
+          <a:bodyPr wrap="square">
+            <a:spAutoFit/>
+          </a:bodyPr>
+          <a:lstStyle/>
+          <a:p>
+            <a:pPr algn="l">
+              <a:lnSpc>
+                <a:spcPct val="125000"/>
+              </a:lnSpc>
+            </a:pPr>
+            <a:r>
+              <a:rPr sz="1200" b="0" i="0">
+                <a:solidFill>
+                  <a:srgbClr val="5A667A"/>
+                </a:solidFill>
+                <a:latin typeface="Segoe UI"/>
+              </a:rPr>
+              <a:t>The hidden-attribute bug was patched in four components before being fixed globally. The token-budget check existed in two other code paths and was missing from the third.</a:t>
+            </a:r>
+          </a:p>
+        </p:txBody>
+      </p:sp>
+      <p:sp>
+        <p:nvSpPr>
+          <p:cNvPr id="12" name="TextBox 11"/>
+          <p:cNvSpPr txBox="1"/>
+          <p:nvPr/>
+        </p:nvSpPr>
+        <p:spPr>
+          <a:xfrm>
+            <a:off x="868680" y="4178427"/>
+            <a:ext cx="10607040" cy="246761"/>
+          </a:xfrm>
+          <a:prstGeom prst="rect">
+            <a:avLst/>
+          </a:prstGeom>
+          <a:noFill/>
+        </p:spPr>
+        <p:txBody>
+          <a:bodyPr wrap="square">
+            <a:spAutoFit/>
+          </a:bodyPr>
+          <a:lstStyle/>
+          <a:p>
+            <a:pPr algn="l">
+              <a:lnSpc>
+                <a:spcPct val="115000"/>
+              </a:lnSpc>
+            </a:pPr>
+            <a:r>
+              <a:rPr sz="1450" b="1" i="0">
+                <a:solidFill>
+                  <a:srgbClr val="141B2D"/>
+                </a:solidFill>
+                <a:latin typeface="Segoe UI"/>
+              </a:rPr>
+              <a:t>Diagnostics are a feature.</a:t>
+            </a:r>
+          </a:p>
+        </p:txBody>
+      </p:sp>
+      <p:sp>
+        <p:nvSpPr>
+          <p:cNvPr id="13" name="TextBox 12"/>
+          <p:cNvSpPr txBox="1"/>
+          <p:nvPr/>
+        </p:nvSpPr>
+        <p:spPr>
+          <a:xfrm>
+            <a:off x="868680" y="4461764"/>
+            <a:ext cx="10607040" cy="207264"/>
+          </a:xfrm>
+          <a:prstGeom prst="rect">
+            <a:avLst/>
+          </a:prstGeom>
+          <a:noFill/>
+        </p:spPr>
+        <p:txBody>
+          <a:bodyPr wrap="square">
+            <a:spAutoFit/>
+          </a:bodyPr>
+          <a:lstStyle/>
+          <a:p>
+            <a:pPr algn="l">
+              <a:lnSpc>
+                <a:spcPct val="125000"/>
+              </a:lnSpc>
+            </a:pPr>
+            <a:r>
+              <a:rPr sz="1200" b="0" i="0">
+                <a:solidFill>
+                  <a:srgbClr val="5A667A"/>
+                </a:solidFill>
+                <a:latin typeface="Segoe UI"/>
+              </a:rPr>
+              <a:t>The failure message now shows the model's actual reply. The bug that took three rounds to identify would have been obvious in one.</a:t>
+            </a:r>
+          </a:p>
+        </p:txBody>
+      </p:sp>
+    </p:spTree>
+  </p:cSld>
+  <p:clrMapOvr>
+    <a:masterClrMapping/>
+  </p:clrMapOvr>
+</p:sld>
+</file>
+
+<file path=ppt/slides/slide18.xml><?xml version="1.0" encoding="utf-8"?>
+<p:sld xmlns:a="http://schemas.openxmlformats.org/drawingml/2006/main" xmlns:p="http://schemas.openxmlformats.org/presentationml/2006/main" xmlns:r="http://schemas.openxmlformats.org/officeDocument/2006/relationships">
+  <p:cSld>
+    <p:spTree>
+      <p:nvGrpSpPr>
+        <p:cNvPr id="1" name=""/>
+        <p:cNvGrpSpPr/>
+        <p:nvPr/>
+      </p:nvGrpSpPr>
+      <p:grpSpPr/>
+      <p:sp>
+        <p:nvSpPr>
+          <p:cNvPr id="2" name="Rectangle 1"/>
+          <p:cNvSpPr/>
+          <p:nvPr/>
+        </p:nvSpPr>
+        <p:spPr>
+          <a:xfrm>
+            <a:off x="0" y="0"/>
+            <a:ext cx="12191695" cy="6858000"/>
+          </a:xfrm>
+          <a:prstGeom prst="rect">
+            <a:avLst/>
+          </a:prstGeom>
+          <a:solidFill>
+            <a:srgbClr val="FAFBFD"/>
+          </a:solidFill>
+          <a:ln>
+            <a:noFill/>
+          </a:ln>
+          <a:effectLst/>
+        </p:spPr>
+        <p:style>
+          <a:lnRef idx="1">
+            <a:schemeClr val="accent1"/>
+          </a:lnRef>
+          <a:fillRef idx="3">
+            <a:schemeClr val="accent1"/>
+          </a:fillRef>
+          <a:effectRef idx="2">
+            <a:schemeClr val="accent1"/>
+          </a:effectRef>
+          <a:fontRef idx="minor">
+            <a:schemeClr val="lt1"/>
+          </a:fontRef>
+        </p:style>
+        <p:txBody>
+          <a:bodyPr rtlCol="0" anchor="ctr"/>
+          <a:lstStyle/>
+          <a:p>
+            <a:pPr algn="ctr"/>
+          </a:p>
+        </p:txBody>
+      </p:sp>
+      <p:sp>
+        <p:nvSpPr>
+          <p:cNvPr id="3" name="Rectangle 2"/>
+          <p:cNvSpPr/>
+          <p:nvPr/>
+        </p:nvSpPr>
+        <p:spPr>
+          <a:xfrm>
+            <a:off x="640080" y="566928"/>
+            <a:ext cx="82296" cy="420624"/>
+          </a:xfrm>
+          <a:prstGeom prst="rect">
+            <a:avLst/>
+          </a:prstGeom>
+          <a:solidFill>
+            <a:srgbClr val="00A8BF"/>
+          </a:solidFill>
+          <a:ln>
+            <a:noFill/>
+          </a:ln>
+          <a:effectLst/>
+        </p:spPr>
+        <p:style>
+          <a:lnRef idx="1">
+            <a:schemeClr val="accent1"/>
+          </a:lnRef>
+          <a:fillRef idx="3">
+            <a:schemeClr val="accent1"/>
+          </a:fillRef>
+          <a:effectRef idx="2">
+            <a:schemeClr val="accent1"/>
+          </a:effectRef>
+          <a:fontRef idx="minor">
+            <a:schemeClr val="lt1"/>
+          </a:fontRef>
+        </p:style>
+        <p:txBody>
+          <a:bodyPr rtlCol="0" anchor="ctr"/>
+          <a:lstStyle/>
+          <a:p>
+            <a:pPr algn="ctr"/>
+          </a:p>
+        </p:txBody>
+      </p:sp>
+      <p:sp>
+        <p:nvSpPr>
+          <p:cNvPr id="4" name="TextBox 3"/>
+          <p:cNvSpPr txBox="1"/>
+          <p:nvPr/>
+        </p:nvSpPr>
+        <p:spPr>
+          <a:xfrm>
+            <a:off x="868680" y="502920"/>
+            <a:ext cx="10058400" cy="310896"/>
+          </a:xfrm>
+          <a:prstGeom prst="rect">
+            <a:avLst/>
+          </a:prstGeom>
+          <a:noFill/>
+        </p:spPr>
+        <p:txBody>
+          <a:bodyPr wrap="square">
+            <a:spAutoFit/>
+          </a:bodyPr>
+          <a:lstStyle/>
+          <a:p>
+            <a:pPr algn="l">
+              <a:lnSpc>
+                <a:spcPct val="115000"/>
+              </a:lnSpc>
+            </a:pPr>
+            <a:r>
+              <a:rPr sz="1100" b="1" i="0">
+                <a:solidFill>
+                  <a:srgbClr val="5A667A"/>
+                </a:solidFill>
+                <a:latin typeface="Segoe UI"/>
+              </a:rPr>
+              <a:t>CREDITS</a:t>
+            </a:r>
+          </a:p>
+        </p:txBody>
+      </p:sp>
+      <p:sp>
+        <p:nvSpPr>
+          <p:cNvPr id="5" name="TextBox 4"/>
+          <p:cNvSpPr txBox="1"/>
+          <p:nvPr/>
+        </p:nvSpPr>
+        <p:spPr>
+          <a:xfrm>
+            <a:off x="841248" y="841248"/>
+            <a:ext cx="10607040" cy="566928"/>
+          </a:xfrm>
+          <a:prstGeom prst="rect">
+            <a:avLst/>
+          </a:prstGeom>
+          <a:noFill/>
+        </p:spPr>
+        <p:txBody>
+          <a:bodyPr wrap="square">
+            <a:spAutoFit/>
+          </a:bodyPr>
+          <a:lstStyle/>
+          <a:p>
+            <a:pPr algn="l">
+              <a:lnSpc>
+                <a:spcPct val="115000"/>
+              </a:lnSpc>
+            </a:pPr>
+            <a:r>
+              <a:rPr sz="2800" b="1" i="0">
+                <a:solidFill>
+                  <a:srgbClr val="141B2D"/>
+                </a:solidFill>
+                <a:latin typeface="Segoe UI"/>
+              </a:rPr>
+              <a:t>Standing on other people's work</a:t>
+            </a:r>
+          </a:p>
+        </p:txBody>
+      </p:sp>
+      <p:sp>
+        <p:nvSpPr>
+          <p:cNvPr id="6" name="TextBox 5"/>
+          <p:cNvSpPr txBox="1"/>
+          <p:nvPr/>
+        </p:nvSpPr>
+        <p:spPr>
+          <a:xfrm>
+            <a:off x="868680" y="1783080"/>
+            <a:ext cx="10607040" cy="246761"/>
+          </a:xfrm>
+          <a:prstGeom prst="rect">
+            <a:avLst/>
+          </a:prstGeom>
+          <a:noFill/>
+        </p:spPr>
+        <p:txBody>
+          <a:bodyPr wrap="square">
+            <a:spAutoFit/>
+          </a:bodyPr>
+          <a:lstStyle/>
+          <a:p>
+            <a:pPr algn="l">
+              <a:lnSpc>
+                <a:spcPct val="115000"/>
+              </a:lnSpc>
+            </a:pPr>
+            <a:r>
+              <a:rPr sz="1450" b="1" i="0">
+                <a:solidFill>
+                  <a:srgbClr val="141B2D"/>
+                </a:solidFill>
+                <a:latin typeface="Segoe UI"/>
+              </a:rPr>
+              <a:t>MNIST-PRO  -  MIT</a:t>
+            </a:r>
+          </a:p>
+        </p:txBody>
+      </p:sp>
+      <p:sp>
+        <p:nvSpPr>
+          <p:cNvPr id="7" name="TextBox 6"/>
+          <p:cNvSpPr txBox="1"/>
+          <p:nvPr/>
+        </p:nvSpPr>
+        <p:spPr>
+          <a:xfrm>
+            <a:off x="868680" y="2066416"/>
+            <a:ext cx="10607040" cy="414528"/>
+          </a:xfrm>
+          <a:prstGeom prst="rect">
+            <a:avLst/>
+          </a:prstGeom>
+          <a:noFill/>
+        </p:spPr>
+        <p:txBody>
+          <a:bodyPr wrap="square">
+            <a:spAutoFit/>
+          </a:bodyPr>
+          <a:lstStyle/>
+          <a:p>
+            <a:pPr algn="l">
+              <a:lnSpc>
+                <a:spcPct val="125000"/>
+              </a:lnSpc>
+            </a:pPr>
+            <a:r>
+              <a:rPr sz="1200" b="0" i="0">
+                <a:solidFill>
+                  <a:srgbClr val="5A667A"/>
+                </a:solidFill>
+                <a:latin typeface="Segoe UI"/>
+              </a:rPr>
+              <a:t>Toh, Majumder, Liu, Chen and Poria. DeCLaRe Lab, Nanyang Technological University, and A*STAR. arXiv:2608.31022  ·  github.com/declare-lab/MNIST-PRO</a:t>
+            </a:r>
+          </a:p>
+        </p:txBody>
+      </p:sp>
+      <p:sp>
+        <p:nvSpPr>
+          <p:cNvPr id="8" name="TextBox 7"/>
+          <p:cNvSpPr txBox="1"/>
+          <p:nvPr/>
+        </p:nvSpPr>
+        <p:spPr>
+          <a:xfrm>
+            <a:off x="868680" y="2663825"/>
+            <a:ext cx="10607040" cy="246761"/>
+          </a:xfrm>
+          <a:prstGeom prst="rect">
+            <a:avLst/>
+          </a:prstGeom>
+          <a:noFill/>
+        </p:spPr>
+        <p:txBody>
+          <a:bodyPr wrap="square">
+            <a:spAutoFit/>
+          </a:bodyPr>
+          <a:lstStyle/>
+          <a:p>
+            <a:pPr algn="l">
+              <a:lnSpc>
+                <a:spcPct val="115000"/>
+              </a:lnSpc>
+            </a:pPr>
+            <a:r>
+              <a:rPr sz="1450" b="1" i="0">
+                <a:solidFill>
+                  <a:srgbClr val="141B2D"/>
+                </a:solidFill>
+                <a:latin typeface="Segoe UI"/>
+              </a:rPr>
+              <a:t>MNIST  -  CC BY-SA 3.0</a:t>
+            </a:r>
+          </a:p>
+        </p:txBody>
+      </p:sp>
+      <p:sp>
+        <p:nvSpPr>
+          <p:cNvPr id="9" name="TextBox 8"/>
+          <p:cNvSpPr txBox="1"/>
+          <p:nvPr/>
+        </p:nvSpPr>
+        <p:spPr>
+          <a:xfrm>
+            <a:off x="868680" y="2947162"/>
+            <a:ext cx="10607040" cy="207264"/>
+          </a:xfrm>
+          <a:prstGeom prst="rect">
+            <a:avLst/>
+          </a:prstGeom>
+          <a:noFill/>
+        </p:spPr>
+        <p:txBody>
+          <a:bodyPr wrap="square">
+            <a:spAutoFit/>
+          </a:bodyPr>
+          <a:lstStyle/>
+          <a:p>
+            <a:pPr algn="l">
+              <a:lnSpc>
+                <a:spcPct val="125000"/>
+              </a:lnSpc>
+            </a:pPr>
+            <a:r>
+              <a:rPr sz="1200" b="0" i="0">
+                <a:solidFill>
+                  <a:srgbClr val="5A667A"/>
+                </a:solidFill>
+                <a:latin typeface="Segoe UI"/>
+              </a:rPr>
+              <a:t>LeCun, Cortes and Burges, derived from NIST Special Database 19.</a:t>
+            </a:r>
+          </a:p>
+        </p:txBody>
+      </p:sp>
+      <p:sp>
+        <p:nvSpPr>
+          <p:cNvPr id="10" name="TextBox 9"/>
+          <p:cNvSpPr txBox="1"/>
+          <p:nvPr/>
+        </p:nvSpPr>
+        <p:spPr>
+          <a:xfrm>
+            <a:off x="868680" y="3337306"/>
+            <a:ext cx="10607040" cy="246761"/>
+          </a:xfrm>
+          <a:prstGeom prst="rect">
+            <a:avLst/>
+          </a:prstGeom>
+          <a:noFill/>
+        </p:spPr>
+        <p:txBody>
+          <a:bodyPr wrap="square">
+            <a:spAutoFit/>
+          </a:bodyPr>
+          <a:lstStyle/>
+          <a:p>
+            <a:pPr algn="l">
+              <a:lnSpc>
+                <a:spcPct val="115000"/>
+              </a:lnSpc>
+            </a:pPr>
+            <a:r>
+              <a:rPr sz="1450" b="1" i="0">
+                <a:solidFill>
+                  <a:srgbClr val="141B2D"/>
+                </a:solidFill>
+                <a:latin typeface="Segoe UI"/>
+              </a:rPr>
+              <a:t>ARC-AGI-1  -  Apache 2.0</a:t>
+            </a:r>
+          </a:p>
+        </p:txBody>
+      </p:sp>
+      <p:sp>
+        <p:nvSpPr>
+          <p:cNvPr id="11" name="TextBox 10"/>
+          <p:cNvSpPr txBox="1"/>
+          <p:nvPr/>
+        </p:nvSpPr>
+        <p:spPr>
+          <a:xfrm>
+            <a:off x="868680" y="3620643"/>
+            <a:ext cx="10607040" cy="207264"/>
+          </a:xfrm>
+          <a:prstGeom prst="rect">
+            <a:avLst/>
+          </a:prstGeom>
+          <a:noFill/>
+        </p:spPr>
+        <p:txBody>
+          <a:bodyPr wrap="square">
+            <a:spAutoFit/>
+          </a:bodyPr>
+          <a:lstStyle/>
+          <a:p>
+            <a:pPr algn="l">
+              <a:lnSpc>
+                <a:spcPct val="125000"/>
+              </a:lnSpc>
+            </a:pPr>
+            <a:r>
+              <a:rPr sz="1200" b="0" i="0">
+                <a:solidFill>
+                  <a:srgbClr val="5A667A"/>
+                </a:solidFill>
+                <a:latin typeface="Segoe UI"/>
+              </a:rPr>
+              <a:t>Francois Chollet. The public training set, used unmodified.</a:t>
+            </a:r>
+          </a:p>
+        </p:txBody>
+      </p:sp>
+      <p:sp>
+        <p:nvSpPr>
+          <p:cNvPr id="12" name="TextBox 11"/>
+          <p:cNvSpPr txBox="1"/>
+          <p:nvPr/>
+        </p:nvSpPr>
+        <p:spPr>
+          <a:xfrm>
+            <a:off x="868680" y="4010787"/>
+            <a:ext cx="10607040" cy="246761"/>
+          </a:xfrm>
+          <a:prstGeom prst="rect">
+            <a:avLst/>
+          </a:prstGeom>
+          <a:noFill/>
+        </p:spPr>
+        <p:txBody>
+          <a:bodyPr wrap="square">
+            <a:spAutoFit/>
+          </a:bodyPr>
+          <a:lstStyle/>
+          <a:p>
+            <a:pPr algn="l">
+              <a:lnSpc>
+                <a:spcPct val="115000"/>
+              </a:lnSpc>
+            </a:pPr>
+            <a:r>
+              <a:rPr sz="1450" b="1" i="0">
+                <a:solidFill>
+                  <a:srgbClr val="141B2D"/>
+                </a:solidFill>
+                <a:latin typeface="Segoe UI"/>
+              </a:rPr>
+              <a:t>Licences are retained in the repository.</a:t>
+            </a:r>
+          </a:p>
+        </p:txBody>
+      </p:sp>
+      <p:sp>
+        <p:nvSpPr>
+          <p:cNvPr id="13" name="TextBox 12"/>
+          <p:cNvSpPr txBox="1"/>
+          <p:nvPr/>
+        </p:nvSpPr>
+        <p:spPr>
+          <a:xfrm>
+            <a:off x="868680" y="4294124"/>
+            <a:ext cx="10607040" cy="207264"/>
+          </a:xfrm>
+          <a:prstGeom prst="rect">
+            <a:avLst/>
+          </a:prstGeom>
+          <a:noFill/>
+        </p:spPr>
+        <p:txBody>
+          <a:bodyPr wrap="square">
+            <a:spAutoFit/>
+          </a:bodyPr>
+          <a:lstStyle/>
+          <a:p>
+            <a:pPr algn="l">
+              <a:lnSpc>
+                <a:spcPct val="125000"/>
+              </a:lnSpc>
+            </a:pPr>
+            <a:r>
+              <a:rPr sz="1200" b="0" i="0">
+                <a:solidFill>
+                  <a:srgbClr val="5A667A"/>
+                </a:solidFill>
+                <a:latin typeface="Segoe UI"/>
+              </a:rPr>
+              <a:t>third_party/mnist-pro/LICENSE, with attribution files beside the generated data.</a:t>
+            </a:r>
+          </a:p>
+        </p:txBody>
+      </p:sp>
+    </p:spTree>
+  </p:cSld>
+  <p:clrMapOvr>
+    <a:masterClrMapping/>
+  </p:clrMapOvr>
+</p:sld>
+</file>
+
+<file path=ppt/slides/slide19.xml><?xml version="1.0" encoding="utf-8"?>
+<p:sld xmlns:a="http://schemas.openxmlformats.org/drawingml/2006/main" xmlns:p="http://schemas.openxmlformats.org/presentationml/2006/main" xmlns:r="http://schemas.openxmlformats.org/officeDocument/2006/relationships">
+  <p:cSld>
+    <p:spTree>
+      <p:nvGrpSpPr>
+        <p:cNvPr id="1" name=""/>
+        <p:cNvGrpSpPr/>
+        <p:nvPr/>
+      </p:nvGrpSpPr>
+      <p:grpSpPr/>
+      <p:sp>
+        <p:nvSpPr>
+          <p:cNvPr id="2" name="Rectangle 1"/>
+          <p:cNvSpPr/>
+          <p:nvPr/>
+        </p:nvSpPr>
+        <p:spPr>
+          <a:xfrm>
+            <a:off x="0" y="0"/>
+            <a:ext cx="12191695" cy="6858000"/>
+          </a:xfrm>
+          <a:prstGeom prst="rect">
+            <a:avLst/>
+          </a:prstGeom>
+          <a:solidFill>
+            <a:srgbClr val="0E1A2B"/>
+          </a:solidFill>
+          <a:ln>
+            <a:noFill/>
+          </a:ln>
+          <a:effectLst/>
+        </p:spPr>
+        <p:style>
+          <a:lnRef idx="1">
+            <a:schemeClr val="accent1"/>
+          </a:lnRef>
+          <a:fillRef idx="3">
+            <a:schemeClr val="accent1"/>
+          </a:fillRef>
+          <a:effectRef idx="2">
+            <a:schemeClr val="accent1"/>
+          </a:effectRef>
+          <a:fontRef idx="minor">
+            <a:schemeClr val="lt1"/>
+          </a:fontRef>
+        </p:style>
+        <p:txBody>
+          <a:bodyPr rtlCol="0" anchor="ctr"/>
+          <a:lstStyle/>
+          <a:p>
+            <a:pPr algn="ctr"/>
+          </a:p>
+        </p:txBody>
+      </p:sp>
+      <p:sp>
+        <p:nvSpPr>
+          <p:cNvPr id="3" name="Rectangle 2"/>
+          <p:cNvSpPr/>
+          <p:nvPr/>
+        </p:nvSpPr>
+        <p:spPr>
+          <a:xfrm>
+            <a:off x="0" y="2697480"/>
+            <a:ext cx="12191695" cy="41148"/>
+          </a:xfrm>
+          <a:prstGeom prst="rect">
+            <a:avLst/>
+          </a:prstGeom>
+          <a:solidFill>
+            <a:srgbClr val="00A8BF"/>
+          </a:solidFill>
+          <a:ln>
+            <a:noFill/>
+          </a:ln>
+          <a:effectLst/>
+        </p:spPr>
+        <p:style>
+          <a:lnRef idx="1">
+            <a:schemeClr val="accent1"/>
+          </a:lnRef>
+          <a:fillRef idx="3">
+            <a:schemeClr val="accent1"/>
+          </a:fillRef>
+          <a:effectRef idx="2">
+            <a:schemeClr val="accent1"/>
+          </a:effectRef>
+          <a:fontRef idx="minor">
+            <a:schemeClr val="lt1"/>
+          </a:fontRef>
+        </p:style>
+        <p:txBody>
+          <a:bodyPr rtlCol="0" anchor="ctr"/>
+          <a:lstStyle/>
+          <a:p>
+            <a:pPr algn="ctr"/>
+          </a:p>
+        </p:txBody>
+      </p:sp>
+      <p:sp>
+        <p:nvSpPr>
+          <p:cNvPr id="4" name="TextBox 3"/>
+          <p:cNvSpPr txBox="1"/>
+          <p:nvPr/>
+        </p:nvSpPr>
+        <p:spPr>
+          <a:xfrm>
+            <a:off x="914400" y="1645920"/>
             <a:ext cx="10515600" cy="822960"/>
           </a:xfrm>
           <a:prstGeom prst="rect">
@@ -3989,18 +7294,15 @@
               <a:lnSpc>
                 <a:spcPct val="115000"/>
               </a:lnSpc>
-              <a:spcAft>
-                <a:spcPts val="0"/>
-              </a:spcAft>
-            </a:pPr>
-            <a:r>
-              <a:rPr sz="4000" b="1">
+            </a:pPr>
+            <a:r>
+              <a:rPr sz="3800" b="1" i="0">
                 <a:solidFill>
                   <a:srgbClr val="FFFFFF"/>
                 </a:solidFill>
                 <a:latin typeface="Segoe UI"/>
               </a:rPr>
-              <a:t>Try it</a:t>
+              <a:t>Play it</a:t>
             </a:r>
           </a:p>
         </p:txBody>
@@ -4013,7 +7315,7 @@
         </p:nvSpPr>
         <p:spPr>
           <a:xfrm>
-            <a:off x="914400" y="3017520"/>
+            <a:off x="914400" y="2971800"/>
             <a:ext cx="10515600" cy="2194560"/>
           </a:xfrm>
           <a:prstGeom prst="rect">
@@ -4031,12 +7333,9 @@
               <a:lnSpc>
                 <a:spcPct val="190000"/>
               </a:lnSpc>
-              <a:spcAft>
-                <a:spcPts val="0"/>
-              </a:spcAft>
-            </a:pPr>
-            <a:r>
-              <a:rPr sz="1600" b="0">
+            </a:pPr>
+            <a:r>
+              <a:rPr sz="1550" b="0" i="0">
                 <a:solidFill>
                   <a:srgbClr val="D4DEEA"/>
                 </a:solidFill>
@@ -4050,12 +7349,9 @@
               <a:lnSpc>
                 <a:spcPct val="190000"/>
               </a:lnSpc>
-              <a:spcAft>
-                <a:spcPts val="0"/>
-              </a:spcAft>
-            </a:pPr>
-            <a:r>
-              <a:rPr sz="1600" b="0">
+            </a:pPr>
+            <a:r>
+              <a:rPr sz="1550" b="0" i="0">
                 <a:solidFill>
                   <a:srgbClr val="D4DEEA"/>
                 </a:solidFill>
@@ -4069,12 +7365,9 @@
               <a:lnSpc>
                 <a:spcPct val="190000"/>
               </a:lnSpc>
-              <a:spcAft>
-                <a:spcPts val="0"/>
-              </a:spcAft>
-            </a:pPr>
-            <a:r>
-              <a:rPr sz="1600" b="0">
+            </a:pPr>
+            <a:r>
+              <a:rPr sz="1550" b="0" i="0">
                 <a:solidFill>
                   <a:srgbClr val="D4DEEA"/>
                 </a:solidFill>
@@ -4088,12 +7381,9 @@
               <a:lnSpc>
                 <a:spcPct val="190000"/>
               </a:lnSpc>
-              <a:spcAft>
-                <a:spcPts val="0"/>
-              </a:spcAft>
-            </a:pPr>
-            <a:r>
-              <a:rPr sz="1600" b="0">
+            </a:pPr>
+            <a:r>
+              <a:rPr sz="1550" b="0" i="0">
                 <a:solidFill>
                   <a:srgbClr val="D4DEEA"/>
                 </a:solidFill>
@@ -4112,8 +7402,8 @@
         </p:nvSpPr>
         <p:spPr>
           <a:xfrm>
-            <a:off x="914400" y="5760720"/>
-            <a:ext cx="10515600" cy="457200"/>
+            <a:off x="914400" y="5715000"/>
+            <a:ext cx="10515600" cy="548640"/>
           </a:xfrm>
           <a:prstGeom prst="rect">
             <a:avLst/>
@@ -4130,18 +7420,15 @@
               <a:lnSpc>
                 <a:spcPct val="115000"/>
               </a:lnSpc>
-              <a:spcAft>
-                <a:spcPts val="0"/>
-              </a:spcAft>
-            </a:pPr>
-            <a:r>
-              <a:rPr sz="1300" b="0">
+            </a:pPr>
+            <a:r>
+              <a:rPr sz="1300" b="0" i="0">
                 <a:solidFill>
                   <a:srgbClr val="8D9DB2"/>
                 </a:solidFill>
                 <a:latin typeface="Segoe UI"/>
               </a:rPr>
-              <a:t>No install, no sign-up, no key needed to play solo.</a:t>
+              <a:t>No install, no sign-up, no key needed to play solo. Bring an OpenRouter key if you want to race the model.</a:t>
             </a:r>
           </a:p>
         </p:txBody>
@@ -4278,18 +7565,15 @@
               <a:lnSpc>
                 <a:spcPct val="115000"/>
               </a:lnSpc>
-              <a:spcAft>
-                <a:spcPts val="0"/>
-              </a:spcAft>
-            </a:pPr>
-            <a:r>
-              <a:rPr sz="1100" b="1">
+            </a:pPr>
+            <a:r>
+              <a:rPr sz="1100" b="1" i="0">
                 <a:solidFill>
                   <a:srgbClr val="5A667A"/>
                 </a:solidFill>
                 <a:latin typeface="Segoe UI"/>
               </a:rPr>
-              <a:t>THE IDEA</a:t>
+              <a:t>IN ONE LINE</a:t>
             </a:r>
           </a:p>
         </p:txBody>
@@ -4303,7 +7587,7 @@
         <p:spPr>
           <a:xfrm>
             <a:off x="841248" y="841248"/>
-            <a:ext cx="10607040" cy="731520"/>
+            <a:ext cx="10607040" cy="566928"/>
           </a:xfrm>
           <a:prstGeom prst="rect">
             <a:avLst/>
@@ -4320,18 +7604,15 @@
               <a:lnSpc>
                 <a:spcPct val="115000"/>
               </a:lnSpc>
-              <a:spcAft>
-                <a:spcPts val="0"/>
-              </a:spcAft>
-            </a:pPr>
-            <a:r>
-              <a:rPr sz="3000" b="1">
+            </a:pPr>
+            <a:r>
+              <a:rPr sz="2800" b="1" i="0">
                 <a:solidFill>
                   <a:srgbClr val="141B2D"/>
                 </a:solidFill>
                 <a:latin typeface="Segoe UI"/>
               </a:rPr>
-              <a:t>Same problem, same moment, two players</a:t>
+              <a:t>Recognition is solved. Looking is not.</a:t>
             </a:r>
           </a:p>
         </p:txBody>
@@ -4344,8 +7625,8 @@
         </p:nvSpPr>
         <p:spPr>
           <a:xfrm>
-            <a:off x="868680" y="1874519"/>
-            <a:ext cx="10607040" cy="255270"/>
+            <a:off x="868680" y="1828800"/>
+            <a:ext cx="10607040" cy="246761"/>
           </a:xfrm>
           <a:prstGeom prst="rect">
             <a:avLst/>
@@ -4362,18 +7643,15 @@
               <a:lnSpc>
                 <a:spcPct val="115000"/>
               </a:lnSpc>
-              <a:spcAft>
-                <a:spcPts val="0"/>
-              </a:spcAft>
-            </a:pPr>
-            <a:r>
-              <a:rPr sz="1500" b="1">
+            </a:pPr>
+            <a:r>
+              <a:rPr sz="1450" b="1" i="0">
                 <a:solidFill>
                   <a:srgbClr val="141B2D"/>
                 </a:solidFill>
                 <a:latin typeface="Segoe UI"/>
               </a:rPr>
-              <a:t>A person and a model are given an identical task and race.</a:t>
+              <a:t>Show a model a whole handwritten digit and it is right 92-98% of the time.</a:t>
             </a:r>
           </a:p>
         </p:txBody>
@@ -4386,8 +7664,8 @@
         </p:nvSpPr>
         <p:spPr>
           <a:xfrm>
-            <a:off x="868680" y="2175510"/>
-            <a:ext cx="10607040" cy="215900"/>
+            <a:off x="868680" y="2112137"/>
+            <a:ext cx="10607040" cy="207264"/>
           </a:xfrm>
           <a:prstGeom prst="rect">
             <a:avLst/>
@@ -4404,18 +7682,15 @@
               <a:lnSpc>
                 <a:spcPct val="125000"/>
               </a:lnSpc>
-              <a:spcAft>
-                <a:spcPts val="0"/>
-              </a:spcAft>
-            </a:pPr>
-            <a:r>
-              <a:rPr sz="1250" b="0">
+            </a:pPr>
+            <a:r>
+              <a:rPr sz="1200" b="0" i="0">
                 <a:solidFill>
                   <a:srgbClr val="5A667A"/>
                 </a:solidFill>
                 <a:latin typeface="Segoe UI"/>
               </a:rPr>
-              <a:t>Not a benchmark chart in a paper - something you can actually sit down and play.</a:t>
+              <a:t>That problem has been finished for years.</a:t>
             </a:r>
           </a:p>
         </p:txBody>
@@ -4428,8 +7703,8 @@
         </p:nvSpPr>
         <p:spPr>
           <a:xfrm>
-            <a:off x="868680" y="2574290"/>
-            <a:ext cx="10607040" cy="255270"/>
+            <a:off x="868680" y="2557144"/>
+            <a:ext cx="10607040" cy="246761"/>
           </a:xfrm>
           <a:prstGeom prst="rect">
             <a:avLst/>
@@ -4446,18 +7721,15 @@
               <a:lnSpc>
                 <a:spcPct val="115000"/>
               </a:lnSpc>
-              <a:spcAft>
-                <a:spcPts val="0"/>
-              </a:spcAft>
-            </a:pPr>
-            <a:r>
-              <a:rPr sz="1500" b="1">
+            </a:pPr>
+            <a:r>
+              <a:rPr sz="1450" b="1" i="0">
                 <a:solidFill>
                   <a:srgbClr val="141B2D"/>
                 </a:solidFill>
                 <a:latin typeface="Segoe UI"/>
               </a:rPr>
-              <a:t>Two games, because the first one was too hard.</a:t>
+              <a:t>Show it the same digit through a small moving window and accuracy collapses to 6.5-61%.</a:t>
             </a:r>
           </a:p>
         </p:txBody>
@@ -4470,8 +7742,8 @@
         </p:nvSpPr>
         <p:spPr>
           <a:xfrm>
-            <a:off x="868680" y="2875280"/>
-            <a:ext cx="10607040" cy="431800"/>
+            <a:off x="868680" y="2840482"/>
+            <a:ext cx="10607040" cy="207264"/>
           </a:xfrm>
           <a:prstGeom prst="rect">
             <a:avLst/>
@@ -4488,18 +7760,15 @@
               <a:lnSpc>
                 <a:spcPct val="125000"/>
               </a:lnSpc>
-              <a:spcAft>
-                <a:spcPts val="0"/>
-              </a:spcAft>
-            </a:pPr>
-            <a:r>
-              <a:rPr sz="1250" b="0">
+            </a:pPr>
+            <a:r>
+              <a:rPr sz="1200" b="0" i="0">
                 <a:solidFill>
                   <a:srgbClr val="5A667A"/>
                 </a:solidFill>
                 <a:latin typeface="Segoe UI"/>
               </a:rPr>
-              <a:t>ARC Race asks you to infer a hidden rule. That turned out to be the wrong kind of hard for a five-minute game, so MNIST-PRO was added and became the front page.</a:t>
+              <a:t>Nothing about the digit changed. What changed is that the model now has to decide where to look next, and remember what it already saw.</a:t>
             </a:r>
           </a:p>
         </p:txBody>
@@ -4512,8 +7781,8 @@
         </p:nvSpPr>
         <p:spPr>
           <a:xfrm>
-            <a:off x="868680" y="3489960"/>
-            <a:ext cx="10607040" cy="255270"/>
+            <a:off x="868680" y="3285489"/>
+            <a:ext cx="10607040" cy="246761"/>
           </a:xfrm>
           <a:prstGeom prst="rect">
             <a:avLst/>
@@ -4530,18 +7799,15 @@
               <a:lnSpc>
                 <a:spcPct val="115000"/>
               </a:lnSpc>
-              <a:spcAft>
-                <a:spcPts val="0"/>
-              </a:spcAft>
-            </a:pPr>
-            <a:r>
-              <a:rPr sz="1500" b="1">
+            </a:pPr>
+            <a:r>
+              <a:rPr sz="1450" b="1" i="0">
                 <a:solidFill>
                   <a:srgbClr val="141B2D"/>
                 </a:solidFill>
                 <a:latin typeface="Segoe UI"/>
               </a:rPr>
-              <a:t>MNIST-PRO needs no prior knowledge.</a:t>
+              <a:t>That gap is the subject of this project, and you can play against it.</a:t>
             </a:r>
           </a:p>
         </p:txBody>
@@ -4554,8 +7820,8 @@
         </p:nvSpPr>
         <p:spPr>
           <a:xfrm>
-            <a:off x="868680" y="3790950"/>
-            <a:ext cx="10607040" cy="431800"/>
+            <a:off x="868680" y="3568826"/>
+            <a:ext cx="10607040" cy="207264"/>
           </a:xfrm>
           <a:prstGeom prst="rect">
             <a:avLst/>
@@ -4572,18 +7838,15 @@
               <a:lnSpc>
                 <a:spcPct val="125000"/>
               </a:lnSpc>
-              <a:spcAft>
-                <a:spcPts val="0"/>
-              </a:spcAft>
-            </a:pPr>
-            <a:r>
-              <a:rPr sz="1250" b="0">
+            </a:pPr>
+            <a:r>
+              <a:rPr sz="1200" b="0" i="0">
                 <a:solidFill>
                   <a:srgbClr val="5A667A"/>
                 </a:solidFill>
                 <a:latin typeface="Segoe UI"/>
               </a:rPr>
-              <a:t>There is no rule to work out. Everyone already knows what a handwritten digit looks like - the difficulty is entirely in deciding where to look next.</a:t>
+              <a:t>Two games, both in the browser. You will usually win, and watching how a model loses is more informative than any score.</a:t>
             </a:r>
           </a:p>
         </p:txBody>
@@ -4596,78 +7859,33 @@
         </p:nvSpPr>
         <p:spPr>
           <a:xfrm>
-            <a:off x="868680" y="4405630"/>
-            <a:ext cx="10607040" cy="255270"/>
-          </a:xfrm>
-          <a:prstGeom prst="rect">
-            <a:avLst/>
-          </a:prstGeom>
-          <a:noFill/>
-        </p:spPr>
-        <p:txBody>
-          <a:bodyPr wrap="square">
-            <a:spAutoFit/>
-          </a:bodyPr>
-          <a:lstStyle/>
-          <a:p>
-            <a:pPr algn="l">
-              <a:lnSpc>
-                <a:spcPct val="115000"/>
-              </a:lnSpc>
-              <a:spcAft>
-                <a:spcPts val="0"/>
-              </a:spcAft>
-            </a:pPr>
-            <a:r>
-              <a:rPr sz="1500" b="1">
-                <a:solidFill>
-                  <a:srgbClr val="141B2D"/>
-                </a:solidFill>
-                <a:latin typeface="Segoe UI"/>
-              </a:rPr>
-              <a:t>You are expected to win.</a:t>
-            </a:r>
-          </a:p>
-        </p:txBody>
-      </p:sp>
-      <p:sp>
-        <p:nvSpPr>
-          <p:cNvPr id="13" name="TextBox 12"/>
-          <p:cNvSpPr txBox="1"/>
-          <p:nvPr/>
-        </p:nvSpPr>
-        <p:spPr>
-          <a:xfrm>
-            <a:off x="868680" y="4706620"/>
-            <a:ext cx="10607040" cy="215900"/>
-          </a:xfrm>
-          <a:prstGeom prst="rect">
-            <a:avLst/>
-          </a:prstGeom>
-          <a:noFill/>
-        </p:spPr>
-        <p:txBody>
-          <a:bodyPr wrap="square">
-            <a:spAutoFit/>
-          </a:bodyPr>
-          <a:lstStyle/>
-          <a:p>
-            <a:pPr algn="l">
-              <a:lnSpc>
-                <a:spcPct val="125000"/>
-              </a:lnSpc>
-              <a:spcAft>
-                <a:spcPts val="0"/>
-              </a:spcAft>
-            </a:pPr>
-            <a:r>
-              <a:rPr sz="1250" b="0">
-                <a:solidFill>
-                  <a:srgbClr val="5A667A"/>
-                </a:solidFill>
-                <a:latin typeface="Segoe UI"/>
-              </a:rPr>
-              <a:t>That is the interesting part, not a defect. Active perception is a real weakness in current models.</a:t>
+            <a:off x="868680" y="5120640"/>
+            <a:ext cx="10607040" cy="822960"/>
+          </a:xfrm>
+          <a:prstGeom prst="rect">
+            <a:avLst/>
+          </a:prstGeom>
+          <a:noFill/>
+        </p:spPr>
+        <p:txBody>
+          <a:bodyPr wrap="square">
+            <a:spAutoFit/>
+          </a:bodyPr>
+          <a:lstStyle/>
+          <a:p>
+            <a:pPr algn="l">
+              <a:lnSpc>
+                <a:spcPct val="130000"/>
+              </a:lnSpc>
+            </a:pPr>
+            <a:r>
+              <a:rPr sz="1500" b="1" i="0">
+                <a:solidFill>
+                  <a:srgbClr val="B56A00"/>
+                </a:solidFill>
+                <a:latin typeface="Segoe UI"/>
+              </a:rPr>
+              <a:t>Passive perception is not active perception. A model that reads an image perfectly can still be poor at deciding what to look at.</a:t>
             </a:r>
           </a:p>
         </p:txBody>
@@ -4705,7 +7923,7 @@
             <a:avLst/>
           </a:prstGeom>
           <a:solidFill>
-            <a:srgbClr val="FAFBFD"/>
+            <a:srgbClr val="0E1A2B"/>
           </a:solidFill>
           <a:ln>
             <a:noFill/>
@@ -4742,8 +7960,8 @@
         </p:nvSpPr>
         <p:spPr>
           <a:xfrm>
-            <a:off x="640080" y="566928"/>
-            <a:ext cx="82296" cy="420624"/>
+            <a:off x="0" y="2788920"/>
+            <a:ext cx="12191695" cy="36576"/>
           </a:xfrm>
           <a:prstGeom prst="rect">
             <a:avLst/>
@@ -4786,8 +8004,8 @@
         </p:nvSpPr>
         <p:spPr>
           <a:xfrm>
-            <a:off x="868680" y="502920"/>
-            <a:ext cx="10058400" cy="310896"/>
+            <a:off x="914400" y="1874519"/>
+            <a:ext cx="10515600" cy="384048"/>
           </a:xfrm>
           <a:prstGeom prst="rect">
             <a:avLst/>
@@ -4804,18 +8022,15 @@
               <a:lnSpc>
                 <a:spcPct val="115000"/>
               </a:lnSpc>
-              <a:spcAft>
-                <a:spcPts val="0"/>
-              </a:spcAft>
-            </a:pPr>
-            <a:r>
-              <a:rPr sz="1100" b="1">
-                <a:solidFill>
-                  <a:srgbClr val="5A667A"/>
-                </a:solidFill>
-                <a:latin typeface="Segoe UI"/>
-              </a:rPr>
-              <a:t>MNIST-PRO</a:t>
+            </a:pPr>
+            <a:r>
+              <a:rPr sz="1300" b="1" i="0">
+                <a:solidFill>
+                  <a:srgbClr val="00A8BF"/>
+                </a:solidFill>
+                <a:latin typeface="Segoe UI"/>
+              </a:rPr>
+              <a:t>PART ONE</a:t>
             </a:r>
           </a:p>
         </p:txBody>
@@ -4828,8 +8043,8 @@
         </p:nvSpPr>
         <p:spPr>
           <a:xfrm>
-            <a:off x="841248" y="841248"/>
-            <a:ext cx="10607040" cy="731520"/>
+            <a:off x="914400" y="2240280"/>
+            <a:ext cx="10515600" cy="640080"/>
           </a:xfrm>
           <a:prstGeom prst="rect">
             <a:avLst/>
@@ -4846,18 +8061,15 @@
               <a:lnSpc>
                 <a:spcPct val="115000"/>
               </a:lnSpc>
-              <a:spcAft>
-                <a:spcPts val="0"/>
-              </a:spcAft>
-            </a:pPr>
-            <a:r>
-              <a:rPr sz="3000" b="1">
-                <a:solidFill>
-                  <a:srgbClr val="141B2D"/>
-                </a:solidFill>
-                <a:latin typeface="Segoe UI"/>
-              </a:rPr>
-              <a:t>A digit behind a moving window</a:t>
+            </a:pPr>
+            <a:r>
+              <a:rPr sz="3400" b="1" i="0">
+                <a:solidFill>
+                  <a:srgbClr val="FFFFFF"/>
+                </a:solidFill>
+                <a:latin typeface="Segoe UI"/>
+              </a:rPr>
+              <a:t>The games</a:t>
             </a:r>
           </a:p>
         </p:txBody>
@@ -4870,330 +8082,33 @@
         </p:nvSpPr>
         <p:spPr>
           <a:xfrm>
-            <a:off x="868680" y="1874519"/>
-            <a:ext cx="10607040" cy="255270"/>
-          </a:xfrm>
-          <a:prstGeom prst="rect">
-            <a:avLst/>
-          </a:prstGeom>
-          <a:noFill/>
-        </p:spPr>
-        <p:txBody>
-          <a:bodyPr wrap="square">
-            <a:spAutoFit/>
-          </a:bodyPr>
-          <a:lstStyle/>
-          <a:p>
-            <a:pPr algn="l">
-              <a:lnSpc>
-                <a:spcPct val="115000"/>
-              </a:lnSpc>
-              <a:spcAft>
-                <a:spcPts val="0"/>
-              </a:spcAft>
-            </a:pPr>
-            <a:r>
-              <a:rPr sz="1500" b="1">
-                <a:solidFill>
-                  <a:srgbClr val="141B2D"/>
-                </a:solidFill>
-                <a:latin typeface="Segoe UI"/>
-              </a:rPr>
-              <a:t>The canvas is 224x224. The window is 64x64 - about 8% of it.</a:t>
-            </a:r>
-          </a:p>
-        </p:txBody>
-      </p:sp>
-      <p:sp>
-        <p:nvSpPr>
-          <p:cNvPr id="7" name="TextBox 6"/>
-          <p:cNvSpPr txBox="1"/>
-          <p:nvPr/>
-        </p:nvSpPr>
-        <p:spPr>
-          <a:xfrm>
-            <a:off x="868680" y="2175510"/>
-            <a:ext cx="10607040" cy="215900"/>
-          </a:xfrm>
-          <a:prstGeom prst="rect">
-            <a:avLst/>
-          </a:prstGeom>
-          <a:noFill/>
-        </p:spPr>
-        <p:txBody>
-          <a:bodyPr wrap="square">
-            <a:spAutoFit/>
-          </a:bodyPr>
-          <a:lstStyle/>
-          <a:p>
-            <a:pPr algn="l">
-              <a:lnSpc>
-                <a:spcPct val="125000"/>
-              </a:lnSpc>
-              <a:spcAft>
-                <a:spcPts val="0"/>
-              </a:spcAft>
-            </a:pPr>
-            <a:r>
-              <a:rPr sz="1250" b="0">
-                <a:solidFill>
-                  <a:srgbClr val="5A667A"/>
-                </a:solidFill>
-                <a:latin typeface="Segoe UI"/>
-              </a:rPr>
-              <a:t>A handwritten digit fills the canvas. Everything outside the window is masked grey.</a:t>
-            </a:r>
-          </a:p>
-        </p:txBody>
-      </p:sp>
-      <p:sp>
-        <p:nvSpPr>
-          <p:cNvPr id="8" name="TextBox 7"/>
-          <p:cNvSpPr txBox="1"/>
-          <p:nvPr/>
-        </p:nvSpPr>
-        <p:spPr>
-          <a:xfrm>
-            <a:off x="868680" y="2574290"/>
-            <a:ext cx="10607040" cy="255270"/>
-          </a:xfrm>
-          <a:prstGeom prst="rect">
-            <a:avLst/>
-          </a:prstGeom>
-          <a:noFill/>
-        </p:spPr>
-        <p:txBody>
-          <a:bodyPr wrap="square">
-            <a:spAutoFit/>
-          </a:bodyPr>
-          <a:lstStyle/>
-          <a:p>
-            <a:pPr algn="l">
-              <a:lnSpc>
-                <a:spcPct val="115000"/>
-              </a:lnSpc>
-              <a:spcAft>
-                <a:spcPts val="0"/>
-              </a:spcAft>
-            </a:pPr>
-            <a:r>
-              <a:rPr sz="1500" b="1">
-                <a:solidFill>
-                  <a:srgbClr val="141B2D"/>
-                </a:solidFill>
-                <a:latin typeface="Segoe UI"/>
-              </a:rPr>
-              <a:t>The window moves up, down, left or right, 32px at a time.</a:t>
-            </a:r>
-          </a:p>
-        </p:txBody>
-      </p:sp>
-      <p:sp>
-        <p:nvSpPr>
-          <p:cNvPr id="9" name="TextBox 8"/>
-          <p:cNvSpPr txBox="1"/>
-          <p:nvPr/>
-        </p:nvSpPr>
-        <p:spPr>
-          <a:xfrm>
-            <a:off x="868680" y="2875280"/>
-            <a:ext cx="10607040" cy="215900"/>
-          </a:xfrm>
-          <a:prstGeom prst="rect">
-            <a:avLst/>
-          </a:prstGeom>
-          <a:noFill/>
-        </p:spPr>
-        <p:txBody>
-          <a:bodyPr wrap="square">
-            <a:spAutoFit/>
-          </a:bodyPr>
-          <a:lstStyle/>
-          <a:p>
-            <a:pPr algn="l">
-              <a:lnSpc>
-                <a:spcPct val="125000"/>
-              </a:lnSpc>
-              <a:spcAft>
-                <a:spcPts val="0"/>
-              </a:spcAft>
-            </a:pPr>
-            <a:r>
-              <a:rPr sz="1250" b="0">
-                <a:solidFill>
-                  <a:srgbClr val="5A667A"/>
-                </a:solidFill>
-                <a:latin typeface="Segoe UI"/>
-              </a:rPr>
-              <a:t>Half the window's width, so consecutive views overlap. Each move is one sensing step.</a:t>
-            </a:r>
-          </a:p>
-        </p:txBody>
-      </p:sp>
-      <p:sp>
-        <p:nvSpPr>
-          <p:cNvPr id="10" name="TextBox 9"/>
-          <p:cNvSpPr txBox="1"/>
-          <p:nvPr/>
-        </p:nvSpPr>
-        <p:spPr>
-          <a:xfrm>
-            <a:off x="868680" y="3274060"/>
-            <a:ext cx="10607040" cy="255270"/>
-          </a:xfrm>
-          <a:prstGeom prst="rect">
-            <a:avLst/>
-          </a:prstGeom>
-          <a:noFill/>
-        </p:spPr>
-        <p:txBody>
-          <a:bodyPr wrap="square">
-            <a:spAutoFit/>
-          </a:bodyPr>
-          <a:lstStyle/>
-          <a:p>
-            <a:pPr algn="l">
-              <a:lnSpc>
-                <a:spcPct val="115000"/>
-              </a:lnSpc>
-              <a:spcAft>
-                <a:spcPts val="0"/>
-              </a:spcAft>
-            </a:pPr>
-            <a:r>
-              <a:rPr sz="1500" b="1">
-                <a:solidFill>
-                  <a:srgbClr val="141B2D"/>
-                </a:solidFill>
-                <a:latin typeface="Segoe UI"/>
-              </a:rPr>
-              <a:t>Only the current window is visible. The rest is memory.</a:t>
-            </a:r>
-          </a:p>
-        </p:txBody>
-      </p:sp>
-      <p:sp>
-        <p:nvSpPr>
-          <p:cNvPr id="11" name="TextBox 10"/>
-          <p:cNvSpPr txBox="1"/>
-          <p:nvPr/>
-        </p:nvSpPr>
-        <p:spPr>
-          <a:xfrm>
-            <a:off x="868680" y="3575050"/>
-            <a:ext cx="10607040" cy="431800"/>
-          </a:xfrm>
-          <a:prstGeom prst="rect">
-            <a:avLst/>
-          </a:prstGeom>
-          <a:noFill/>
-        </p:spPr>
-        <p:txBody>
-          <a:bodyPr wrap="square">
-            <a:spAutoFit/>
-          </a:bodyPr>
-          <a:lstStyle/>
-          <a:p>
-            <a:pPr algn="l">
-              <a:lnSpc>
-                <a:spcPct val="125000"/>
-              </a:lnSpc>
-              <a:spcAft>
-                <a:spcPts val="0"/>
-              </a:spcAft>
-            </a:pPr>
-            <a:r>
-              <a:rPr sz="1250" b="0">
-                <a:solidFill>
-                  <a:srgbClr val="5A667A"/>
-                </a:solidFill>
-                <a:latin typeface="Segoe UI"/>
-              </a:rPr>
-              <a:t>This is the point of the benchmark, not a limitation. A 'keep a trail' option relaxes it to the published unbounded-lookback condition.</a:t>
-            </a:r>
-          </a:p>
-        </p:txBody>
-      </p:sp>
-      <p:sp>
-        <p:nvSpPr>
-          <p:cNvPr id="12" name="TextBox 11"/>
-          <p:cNvSpPr txBox="1"/>
-          <p:nvPr/>
-        </p:nvSpPr>
-        <p:spPr>
-          <a:xfrm>
-            <a:off x="868680" y="4189730"/>
-            <a:ext cx="10607040" cy="255270"/>
-          </a:xfrm>
-          <a:prstGeom prst="rect">
-            <a:avLst/>
-          </a:prstGeom>
-          <a:noFill/>
-        </p:spPr>
-        <p:txBody>
-          <a:bodyPr wrap="square">
-            <a:spAutoFit/>
-          </a:bodyPr>
-          <a:lstStyle/>
-          <a:p>
-            <a:pPr algn="l">
-              <a:lnSpc>
-                <a:spcPct val="115000"/>
-              </a:lnSpc>
-              <a:spcAft>
-                <a:spcPts val="0"/>
-              </a:spcAft>
-            </a:pPr>
-            <a:r>
-              <a:rPr sz="1500" b="1">
-                <a:solidFill>
-                  <a:srgbClr val="141B2D"/>
-                </a:solidFill>
-                <a:latin typeface="Segoe UI"/>
-              </a:rPr>
-              <a:t>One answer, 36 steps.</a:t>
-            </a:r>
-          </a:p>
-        </p:txBody>
-      </p:sp>
-      <p:sp>
-        <p:nvSpPr>
-          <p:cNvPr id="13" name="TextBox 12"/>
-          <p:cNvSpPr txBox="1"/>
-          <p:nvPr/>
-        </p:nvSpPr>
-        <p:spPr>
-          <a:xfrm>
-            <a:off x="868680" y="4490720"/>
-            <a:ext cx="10607040" cy="215900"/>
-          </a:xfrm>
-          <a:prstGeom prst="rect">
-            <a:avLst/>
-          </a:prstGeom>
-          <a:noFill/>
-        </p:spPr>
-        <p:txBody>
-          <a:bodyPr wrap="square">
-            <a:spAutoFit/>
-          </a:bodyPr>
-          <a:lstStyle/>
-          <a:p>
-            <a:pPr algn="l">
-              <a:lnSpc>
-                <a:spcPct val="125000"/>
-              </a:lnSpc>
-              <a:spcAft>
-                <a:spcPts val="0"/>
-              </a:spcAft>
-            </a:pPr>
-            <a:r>
-              <a:rPr sz="1250" b="0">
-                <a:solidFill>
-                  <a:srgbClr val="5A667A"/>
-                </a:solidFill>
-                <a:latin typeface="Segoe UI"/>
-              </a:rPr>
-              <a:t>36 is exactly the number of distinct window positions - enough to visit every one once. A wrong answer ends the round.</a:t>
+            <a:off x="914400" y="3063240"/>
+            <a:ext cx="9601200" cy="731520"/>
+          </a:xfrm>
+          <a:prstGeom prst="rect">
+            <a:avLst/>
+          </a:prstGeom>
+          <a:noFill/>
+        </p:spPr>
+        <p:txBody>
+          <a:bodyPr wrap="square">
+            <a:spAutoFit/>
+          </a:bodyPr>
+          <a:lstStyle/>
+          <a:p>
+            <a:pPr algn="l">
+              <a:lnSpc>
+                <a:spcPct val="135000"/>
+              </a:lnSpc>
+            </a:pPr>
+            <a:r>
+              <a:rPr sz="1500" b="0" i="0">
+                <a:solidFill>
+                  <a:srgbClr val="B6C3D4"/>
+                </a:solidFill>
+                <a:latin typeface="Segoe UI"/>
+              </a:rPr>
+              <a:t>Two tasks: one needs no prior knowledge at all, the other needs a rule you must infer. Both are played by a person and a model at the same time.</a:t>
             </a:r>
           </a:p>
         </p:txBody>
@@ -5330,18 +8245,15 @@
               <a:lnSpc>
                 <a:spcPct val="115000"/>
               </a:lnSpc>
-              <a:spcAft>
-                <a:spcPts val="0"/>
-              </a:spcAft>
-            </a:pPr>
-            <a:r>
-              <a:rPr sz="1100" b="1">
+            </a:pPr>
+            <a:r>
+              <a:rPr sz="1100" b="1" i="0">
                 <a:solidFill>
                   <a:srgbClr val="5A667A"/>
                 </a:solidFill>
                 <a:latin typeface="Segoe UI"/>
               </a:rPr>
-              <a:t>SCORING</a:t>
+              <a:t>MNIST-PRO</a:t>
             </a:r>
           </a:p>
         </p:txBody>
@@ -5355,7 +8267,7 @@
         <p:spPr>
           <a:xfrm>
             <a:off x="841248" y="841248"/>
-            <a:ext cx="10607040" cy="731520"/>
+            <a:ext cx="10607040" cy="566928"/>
           </a:xfrm>
           <a:prstGeom prst="rect">
             <a:avLst/>
@@ -5372,18 +8284,15 @@
               <a:lnSpc>
                 <a:spcPct val="115000"/>
               </a:lnSpc>
-              <a:spcAft>
-                <a:spcPts val="0"/>
-              </a:spcAft>
-            </a:pPr>
-            <a:r>
-              <a:rPr sz="3000" b="1">
+            </a:pPr>
+            <a:r>
+              <a:rPr sz="2800" b="1" i="0">
                 <a:solidFill>
                   <a:srgbClr val="141B2D"/>
                 </a:solidFill>
                 <a:latin typeface="Segoe UI"/>
               </a:rPr>
-              <a:t>Fewest sensing steps wins - not fastest</a:t>
+              <a:t>A digit behind a moving window</a:t>
             </a:r>
           </a:p>
         </p:txBody>
@@ -5396,8 +8305,8 @@
         </p:nvSpPr>
         <p:spPr>
           <a:xfrm>
-            <a:off x="868680" y="1874519"/>
-            <a:ext cx="10607040" cy="255270"/>
+            <a:off x="868680" y="1783080"/>
+            <a:ext cx="10607040" cy="246761"/>
           </a:xfrm>
           <a:prstGeom prst="rect">
             <a:avLst/>
@@ -5414,18 +8323,15 @@
               <a:lnSpc>
                 <a:spcPct val="115000"/>
               </a:lnSpc>
-              <a:spcAft>
-                <a:spcPts val="0"/>
-              </a:spcAft>
-            </a:pPr>
-            <a:r>
-              <a:rPr sz="1500" b="1">
+            </a:pPr>
+            <a:r>
+              <a:rPr sz="1450" b="1" i="0">
                 <a:solidFill>
                   <a:srgbClr val="141B2D"/>
                 </a:solidFill>
                 <a:latin typeface="Segoe UI"/>
               </a:rPr>
-              <a:t>Correctness gates first.</a:t>
+              <a:t>The canvas is 224x224. The window is 64x64 - about 8% of it.</a:t>
             </a:r>
           </a:p>
         </p:txBody>
@@ -5438,8 +8344,8 @@
         </p:nvSpPr>
         <p:spPr>
           <a:xfrm>
-            <a:off x="868680" y="2175510"/>
-            <a:ext cx="10607040" cy="215900"/>
+            <a:off x="868680" y="2066416"/>
+            <a:ext cx="10607040" cy="414528"/>
           </a:xfrm>
           <a:prstGeom prst="rect">
             <a:avLst/>
@@ -5456,18 +8362,15 @@
               <a:lnSpc>
                 <a:spcPct val="125000"/>
               </a:lnSpc>
-              <a:spcAft>
-                <a:spcPts val="0"/>
-              </a:spcAft>
-            </a:pPr>
-            <a:r>
-              <a:rPr sz="1250" b="0">
+            </a:pPr>
+            <a:r>
+              <a:rPr sz="1200" b="0" i="0">
                 <a:solidFill>
                   <a:srgbClr val="5A667A"/>
                 </a:solidFill>
                 <a:latin typeface="Segoe UI"/>
               </a:rPr>
-              <a:t>A lucky one-step guess never beats a careful correct answer.</a:t>
+              <a:t>A handwritten digit fills the canvas; everything outside the window is masked grey. You always start centred on part of the stroke, never on blank space.</a:t>
             </a:r>
           </a:p>
         </p:txBody>
@@ -5480,8 +8383,8 @@
         </p:nvSpPr>
         <p:spPr>
           <a:xfrm>
-            <a:off x="868680" y="2592578"/>
-            <a:ext cx="10607040" cy="255270"/>
+            <a:off x="868680" y="2636393"/>
+            <a:ext cx="10607040" cy="246761"/>
           </a:xfrm>
           <a:prstGeom prst="rect">
             <a:avLst/>
@@ -5498,18 +8401,15 @@
               <a:lnSpc>
                 <a:spcPct val="115000"/>
               </a:lnSpc>
-              <a:spcAft>
-                <a:spcPts val="0"/>
-              </a:spcAft>
-            </a:pPr>
-            <a:r>
-              <a:rPr sz="1500" b="1">
+            </a:pPr>
+            <a:r>
+              <a:rPr sz="1450" b="1" i="0">
                 <a:solidFill>
                   <a:srgbClr val="141B2D"/>
                 </a:solidFill>
                 <a:latin typeface="Segoe UI"/>
               </a:rPr>
-              <a:t>Between two correct answers, fewer sensing steps wins. Equal counts tie.</a:t>
+              <a:t>The window moves up, down, left or right, 32px at a time.</a:t>
             </a:r>
           </a:p>
         </p:txBody>
@@ -5522,8 +8422,47 @@
         </p:nvSpPr>
         <p:spPr>
           <a:xfrm>
-            <a:off x="868680" y="3094736"/>
-            <a:ext cx="10607040" cy="255270"/>
+            <a:off x="868680" y="2919730"/>
+            <a:ext cx="10607040" cy="207264"/>
+          </a:xfrm>
+          <a:prstGeom prst="rect">
+            <a:avLst/>
+          </a:prstGeom>
+          <a:noFill/>
+        </p:spPr>
+        <p:txBody>
+          <a:bodyPr wrap="square">
+            <a:spAutoFit/>
+          </a:bodyPr>
+          <a:lstStyle/>
+          <a:p>
+            <a:pPr algn="l">
+              <a:lnSpc>
+                <a:spcPct val="125000"/>
+              </a:lnSpc>
+            </a:pPr>
+            <a:r>
+              <a:rPr sz="1200" b="0" i="0">
+                <a:solidFill>
+                  <a:srgbClr val="5A667A"/>
+                </a:solidFill>
+                <a:latin typeface="Segoe UI"/>
+              </a:rPr>
+              <a:t>Half its own width, so consecutive views overlap. Each move is one sensing step.</a:t>
+            </a:r>
+          </a:p>
+        </p:txBody>
+      </p:sp>
+      <p:sp>
+        <p:nvSpPr>
+          <p:cNvPr id="10" name="TextBox 9"/>
+          <p:cNvSpPr txBox="1"/>
+          <p:nvPr/>
+        </p:nvSpPr>
+        <p:spPr>
+          <a:xfrm>
+            <a:off x="868680" y="3282442"/>
+            <a:ext cx="10607040" cy="246761"/>
           </a:xfrm>
           <a:prstGeom prst="rect">
             <a:avLst/>
@@ -5540,32 +8479,29 @@
               <a:lnSpc>
                 <a:spcPct val="115000"/>
               </a:lnSpc>
-              <a:spcAft>
-                <a:spcPts val="0"/>
-              </a:spcAft>
-            </a:pPr>
-            <a:r>
-              <a:rPr sz="1500" b="1">
+            </a:pPr>
+            <a:r>
+              <a:rPr sz="1450" b="1" i="0">
                 <a:solidFill>
                   <a:srgbClr val="141B2D"/>
                 </a:solidFill>
                 <a:latin typeface="Segoe UI"/>
               </a:rPr>
-              <a:t>Time is deliberately not scored.</a:t>
-            </a:r>
-          </a:p>
-        </p:txBody>
-      </p:sp>
-      <p:sp>
-        <p:nvSpPr>
-          <p:cNvPr id="10" name="TextBox 9"/>
-          <p:cNvSpPr txBox="1"/>
-          <p:nvPr/>
-        </p:nvSpPr>
-        <p:spPr>
-          <a:xfrm>
-            <a:off x="868680" y="3395726"/>
-            <a:ext cx="10607040" cy="215900"/>
+              <a:t>Only the current window is visible. The rest is memory.</a:t>
+            </a:r>
+          </a:p>
+        </p:txBody>
+      </p:sp>
+      <p:sp>
+        <p:nvSpPr>
+          <p:cNvPr id="11" name="TextBox 10"/>
+          <p:cNvSpPr txBox="1"/>
+          <p:nvPr/>
+        </p:nvSpPr>
+        <p:spPr>
+          <a:xfrm>
+            <a:off x="868680" y="3565779"/>
+            <a:ext cx="10607040" cy="414528"/>
           </a:xfrm>
           <a:prstGeom prst="rect">
             <a:avLst/>
@@ -5582,32 +8518,29 @@
               <a:lnSpc>
                 <a:spcPct val="125000"/>
               </a:lnSpc>
-              <a:spcAft>
-                <a:spcPts val="0"/>
-              </a:spcAft>
-            </a:pPr>
-            <a:r>
-              <a:rPr sz="1250" b="0">
+            </a:pPr>
+            <a:r>
+              <a:rPr sz="1200" b="0" i="0">
                 <a:solidFill>
                   <a:srgbClr val="5A667A"/>
                 </a:solidFill>
                 <a:latin typeface="Segoe UI"/>
               </a:rPr>
-              <a:t>The model answers over a network. Timing the race would measure API latency and my connection speed, not anyone's judgement.</a:t>
-            </a:r>
-          </a:p>
-        </p:txBody>
-      </p:sp>
-      <p:sp>
-        <p:nvSpPr>
-          <p:cNvPr id="11" name="TextBox 10"/>
-          <p:cNvSpPr txBox="1"/>
-          <p:nvPr/>
-        </p:nvSpPr>
-        <p:spPr>
-          <a:xfrm>
-            <a:off x="868680" y="3812794"/>
-            <a:ext cx="10607040" cy="255270"/>
+              <a:t>This is the point of the benchmark, not a limitation of the interface. A 'keep a trail' option relaxes it to the published unbounded-lookback condition.</a:t>
+            </a:r>
+          </a:p>
+        </p:txBody>
+      </p:sp>
+      <p:sp>
+        <p:nvSpPr>
+          <p:cNvPr id="12" name="TextBox 11"/>
+          <p:cNvSpPr txBox="1"/>
+          <p:nvPr/>
+        </p:nvSpPr>
+        <p:spPr>
+          <a:xfrm>
+            <a:off x="868680" y="4135754"/>
+            <a:ext cx="10607040" cy="246761"/>
           </a:xfrm>
           <a:prstGeom prst="rect">
             <a:avLst/>
@@ -5624,32 +8557,29 @@
               <a:lnSpc>
                 <a:spcPct val="115000"/>
               </a:lnSpc>
-              <a:spcAft>
-                <a:spcPts val="0"/>
-              </a:spcAft>
-            </a:pPr>
-            <a:r>
-              <a:rPr sz="1500" b="1">
+            </a:pPr>
+            <a:r>
+              <a:rPr sz="1450" b="1" i="0">
                 <a:solidFill>
                   <a:srgbClr val="141B2D"/>
                 </a:solidFill>
                 <a:latin typeface="Segoe UI"/>
               </a:rPr>
-              <a:t>This mirrors the benchmark's own reward.</a:t>
-            </a:r>
-          </a:p>
-        </p:txBody>
-      </p:sp>
-      <p:sp>
-        <p:nvSpPr>
-          <p:cNvPr id="12" name="TextBox 11"/>
-          <p:cNvSpPr txBox="1"/>
-          <p:nvPr/>
-        </p:nvSpPr>
-        <p:spPr>
-          <a:xfrm>
-            <a:off x="868680" y="4113784"/>
-            <a:ext cx="10607040" cy="215900"/>
+              <a:t>One answer, 36 steps.</a:t>
+            </a:r>
+          </a:p>
+        </p:txBody>
+      </p:sp>
+      <p:sp>
+        <p:nvSpPr>
+          <p:cNvPr id="13" name="TextBox 12"/>
+          <p:cNvSpPr txBox="1"/>
+          <p:nvPr/>
+        </p:nvSpPr>
+        <p:spPr>
+          <a:xfrm>
+            <a:off x="868680" y="4419092"/>
+            <a:ext cx="10607040" cy="207264"/>
           </a:xfrm>
           <a:prstGeom prst="rect">
             <a:avLst/>
@@ -5666,18 +8596,15 @@
               <a:lnSpc>
                 <a:spcPct val="125000"/>
               </a:lnSpc>
-              <a:spcAft>
-                <a:spcPts val="0"/>
-              </a:spcAft>
-            </a:pPr>
-            <a:r>
-              <a:rPr sz="1250" b="0">
+            </a:pPr>
+            <a:r>
+              <a:rPr sz="1200" b="0" i="0">
                 <a:solidFill>
                   <a:srgbClr val="5A667A"/>
                 </a:solidFill>
                 <a:latin typeface="Segoe UI"/>
               </a:rPr>
-              <a:t>-0.1 per move against +10 for a correct answer and -10 for a wrong one is already 'fewest steps wins'.</a:t>
+              <a:t>36 is exactly the number of distinct window positions - enough to visit every one once. A wrong answer ends the round.</a:t>
             </a:r>
           </a:p>
         </p:txBody>
@@ -5814,18 +8741,15 @@
               <a:lnSpc>
                 <a:spcPct val="115000"/>
               </a:lnSpc>
-              <a:spcAft>
-                <a:spcPts val="0"/>
-              </a:spcAft>
-            </a:pPr>
-            <a:r>
-              <a:rPr sz="1100" b="1">
+            </a:pPr>
+            <a:r>
+              <a:rPr sz="1100" b="1" i="0">
                 <a:solidFill>
                   <a:srgbClr val="5A667A"/>
                 </a:solidFill>
                 <a:latin typeface="Segoe UI"/>
               </a:rPr>
-              <a:t>WHY YOU ARE THE FAVOURITE</a:t>
+              <a:t>ON SCREEN</a:t>
             </a:r>
           </a:p>
         </p:txBody>
@@ -5839,7 +8763,7 @@
         <p:spPr>
           <a:xfrm>
             <a:off x="841248" y="841248"/>
-            <a:ext cx="10607040" cy="731520"/>
+            <a:ext cx="10607040" cy="566928"/>
           </a:xfrm>
           <a:prstGeom prst="rect">
             <a:avLst/>
@@ -5856,25 +8780,22 @@
               <a:lnSpc>
                 <a:spcPct val="115000"/>
               </a:lnSpc>
-              <a:spcAft>
-                <a:spcPts val="0"/>
-              </a:spcAft>
-            </a:pPr>
-            <a:r>
-              <a:rPr sz="3000" b="1">
+            </a:pPr>
+            <a:r>
+              <a:rPr sz="2800" b="1" i="0">
                 <a:solidFill>
                   <a:srgbClr val="141B2D"/>
                 </a:solidFill>
                 <a:latin typeface="Segoe UI"/>
               </a:rPr>
-              <a:t>Whole digits are easy. Exploring for one is not.</a:t>
+              <a:t>Both lanes, mid-round</a:t>
             </a:r>
           </a:p>
         </p:txBody>
       </p:sp>
       <p:pic>
         <p:nvPicPr>
-          <p:cNvPr id="6" name="Picture 5" descr="results_chart.png"/>
+          <p:cNvPr id="6" name="Picture 5" descr="veils-fixed.png"/>
           <p:cNvPicPr>
             <a:picLocks noChangeAspect="1"/>
           </p:cNvPicPr>
@@ -5888,8 +8809,8 @@
         </p:blipFill>
         <p:spPr>
           <a:xfrm>
-            <a:off x="868680" y="1783080"/>
-            <a:ext cx="8229600" cy="4112562"/>
+            <a:off x="868680" y="1691640"/>
+            <a:ext cx="10424160" cy="4507348"/>
           </a:xfrm>
           <a:prstGeom prst="rect">
             <a:avLst/>
@@ -5904,145 +8825,33 @@
         </p:nvSpPr>
         <p:spPr>
           <a:xfrm>
-            <a:off x="9326880" y="2011680"/>
-            <a:ext cx="2377440" cy="2743200"/>
-          </a:xfrm>
-          <a:prstGeom prst="rect">
-            <a:avLst/>
-          </a:prstGeom>
-          <a:noFill/>
-        </p:spPr>
-        <p:txBody>
-          <a:bodyPr wrap="square">
-            <a:spAutoFit/>
-          </a:bodyPr>
-          <a:lstStyle/>
-          <a:p>
-            <a:pPr algn="l">
-              <a:lnSpc>
-                <a:spcPct val="135000"/>
-              </a:lnSpc>
-              <a:spcAft>
-                <a:spcPts val="0"/>
-              </a:spcAft>
-            </a:pPr>
-            <a:r>
-              <a:rPr sz="1500" b="1">
-                <a:solidFill>
-                  <a:srgbClr val="141B2D"/>
-                </a:solidFill>
-                <a:latin typeface="Segoe UI"/>
-              </a:rPr>
-              <a:t>92-98%</a:t>
-            </a:r>
-          </a:p>
-          <a:p>
-            <a:pPr algn="l">
-              <a:lnSpc>
-                <a:spcPct val="135000"/>
-              </a:lnSpc>
-              <a:spcAft>
-                <a:spcPts val="0"/>
-              </a:spcAft>
-            </a:pPr>
-            <a:r>
-              <a:rPr sz="1500" b="1">
-                <a:solidFill>
-                  <a:srgbClr val="141B2D"/>
-                </a:solidFill>
-                <a:latin typeface="Segoe UI"/>
-              </a:rPr>
-              <a:t>on the whole digit</a:t>
-            </a:r>
-          </a:p>
-          <a:p>
-            <a:pPr algn="l">
-              <a:lnSpc>
-                <a:spcPct val="135000"/>
-              </a:lnSpc>
-              <a:spcAft>
-                <a:spcPts val="0"/>
-              </a:spcAft>
-            </a:pPr>
-          </a:p>
-          <a:p>
-            <a:pPr algn="l">
-              <a:lnSpc>
-                <a:spcPct val="135000"/>
-              </a:lnSpc>
-              <a:spcAft>
-                <a:spcPts val="0"/>
-              </a:spcAft>
-            </a:pPr>
-            <a:r>
-              <a:rPr sz="1500" b="1">
-                <a:solidFill>
-                  <a:srgbClr val="141B2D"/>
-                </a:solidFill>
-                <a:latin typeface="Segoe UI"/>
-              </a:rPr>
-              <a:t>6.5-61%</a:t>
-            </a:r>
-          </a:p>
-          <a:p>
-            <a:pPr algn="l">
-              <a:lnSpc>
-                <a:spcPct val="135000"/>
-              </a:lnSpc>
-              <a:spcAft>
-                <a:spcPts val="0"/>
-              </a:spcAft>
-            </a:pPr>
-            <a:r>
-              <a:rPr sz="1500" b="1">
-                <a:solidFill>
-                  <a:srgbClr val="141B2D"/>
-                </a:solidFill>
-                <a:latin typeface="Segoe UI"/>
-              </a:rPr>
-              <a:t>through a window</a:t>
-            </a:r>
-          </a:p>
-        </p:txBody>
-      </p:sp>
-      <p:sp>
-        <p:nvSpPr>
-          <p:cNvPr id="8" name="TextBox 7"/>
-          <p:cNvSpPr txBox="1"/>
-          <p:nvPr/>
-        </p:nvSpPr>
-        <p:spPr>
-          <a:xfrm>
-            <a:off x="868680" y="6172200"/>
-            <a:ext cx="10607040" cy="457200"/>
-          </a:xfrm>
-          <a:prstGeom prst="rect">
-            <a:avLst/>
-          </a:prstGeom>
-          <a:noFill/>
-        </p:spPr>
-        <p:txBody>
-          <a:bodyPr wrap="square">
-            <a:spAutoFit/>
-          </a:bodyPr>
-          <a:lstStyle/>
-          <a:p>
-            <a:pPr algn="l">
-              <a:lnSpc>
-                <a:spcPct val="115000"/>
-              </a:lnSpc>
-              <a:spcAft>
-                <a:spcPts val="0"/>
-              </a:spcAft>
-            </a:pPr>
-            <a:r>
-              <a:rPr sz="1100" b="0">
+            <a:off x="868680" y="6272784"/>
+            <a:ext cx="10607040" cy="502920"/>
+          </a:xfrm>
+          <a:prstGeom prst="rect">
+            <a:avLst/>
+          </a:prstGeom>
+          <a:noFill/>
+        </p:spPr>
+        <p:txBody>
+          <a:bodyPr wrap="square">
+            <a:spAutoFit/>
+          </a:bodyPr>
+          <a:lstStyle/>
+          <a:p>
+            <a:pPr algn="l">
+              <a:lnSpc>
+                <a:spcPct val="125000"/>
+              </a:lnSpc>
+            </a:pPr>
+            <a:r>
+              <a:rPr sz="1100" b="0" i="0">
                 <a:solidFill>
                   <a:srgbClr val="5A667A"/>
                 </a:solidFill>
                 <a:latin typeface="Segoe UI"/>
               </a:rPr>
-              <a:t>Published results, MNIST-PRO (arXiv:2608.31022). The gap is active perception, not recognition.</a:t>
+              <a:t>Left: the player's window. Right: the model's, with the thought it is acting on. Neither lane can see the other's canvas. Captured with a scripted opponent for a stable screenshot - the model quotes later in this deck are verbatim.</a:t>
             </a:r>
           </a:p>
         </p:txBody>
@@ -6179,18 +8988,15 @@
               <a:lnSpc>
                 <a:spcPct val="115000"/>
               </a:lnSpc>
-              <a:spcAft>
-                <a:spcPts val="0"/>
-              </a:spcAft>
-            </a:pPr>
-            <a:r>
-              <a:rPr sz="1100" b="1">
+            </a:pPr>
+            <a:r>
+              <a:rPr sz="1100" b="1" i="0">
                 <a:solidFill>
                   <a:srgbClr val="5A667A"/>
                 </a:solidFill>
                 <a:latin typeface="Segoe UI"/>
               </a:rPr>
-              <a:t>HOW TO PLAY</a:t>
+              <a:t>RULES</a:t>
             </a:r>
           </a:p>
         </p:txBody>
@@ -6204,7 +9010,7 @@
         <p:spPr>
           <a:xfrm>
             <a:off x="841248" y="841248"/>
-            <a:ext cx="10607040" cy="731520"/>
+            <a:ext cx="10607040" cy="566928"/>
           </a:xfrm>
           <a:prstGeom prst="rect">
             <a:avLst/>
@@ -6221,18 +9027,15 @@
               <a:lnSpc>
                 <a:spcPct val="115000"/>
               </a:lnSpc>
-              <a:spcAft>
-                <a:spcPts val="0"/>
-              </a:spcAft>
-            </a:pPr>
-            <a:r>
-              <a:rPr sz="3000" b="1">
+            </a:pPr>
+            <a:r>
+              <a:rPr sz="2800" b="1" i="0">
                 <a:solidFill>
                   <a:srgbClr val="141B2D"/>
                 </a:solidFill>
                 <a:latin typeface="Segoe UI"/>
               </a:rPr>
-              <a:t>MNIST-PRO, in four steps</a:t>
+              <a:t>Fewest sensing steps wins - not fastest</a:t>
             </a:r>
           </a:p>
         </p:txBody>
@@ -6245,8 +9048,8 @@
         </p:nvSpPr>
         <p:spPr>
           <a:xfrm>
-            <a:off x="868680" y="1874519"/>
-            <a:ext cx="10607040" cy="255270"/>
+            <a:off x="868680" y="1783080"/>
+            <a:ext cx="10607040" cy="246761"/>
           </a:xfrm>
           <a:prstGeom prst="rect">
             <a:avLst/>
@@ -6263,18 +9066,15 @@
               <a:lnSpc>
                 <a:spcPct val="115000"/>
               </a:lnSpc>
-              <a:spcAft>
-                <a:spcPts val="0"/>
-              </a:spcAft>
-            </a:pPr>
-            <a:r>
-              <a:rPr sz="1500" b="1">
+            </a:pPr>
+            <a:r>
+              <a:rPr sz="1450" b="1" i="0">
                 <a:solidFill>
                   <a:srgbClr val="141B2D"/>
                 </a:solidFill>
                 <a:latin typeface="Segoe UI"/>
               </a:rPr>
-              <a:t>1.  Start a round.</a:t>
+              <a:t>Correctness gates everything.</a:t>
             </a:r>
           </a:p>
         </p:txBody>
@@ -6287,8 +9087,8 @@
         </p:nvSpPr>
         <p:spPr>
           <a:xfrm>
-            <a:off x="868680" y="2175510"/>
-            <a:ext cx="10607040" cy="215900"/>
+            <a:off x="868680" y="2066416"/>
+            <a:ext cx="10607040" cy="207264"/>
           </a:xfrm>
           <a:prstGeom prst="rect">
             <a:avLst/>
@@ -6305,18 +9105,15 @@
               <a:lnSpc>
                 <a:spcPct val="125000"/>
               </a:lnSpc>
-              <a:spcAft>
-                <a:spcPts val="0"/>
-              </a:spcAft>
-            </a:pPr>
-            <a:r>
-              <a:rPr sz="1250" b="0">
+            </a:pPr>
+            <a:r>
+              <a:rPr sz="1200" b="0" i="0">
                 <a:solidFill>
                   <a:srgbClr val="5A667A"/>
                 </a:solidFill>
                 <a:latin typeface="Segoe UI"/>
               </a:rPr>
-              <a:t>You begin centred on part of the digit, never on blank canvas.</a:t>
+              <a:t>A lucky one-step guess never beats a careful correct answer.</a:t>
             </a:r>
           </a:p>
         </p:txBody>
@@ -6329,8 +9126,8 @@
         </p:nvSpPr>
         <p:spPr>
           <a:xfrm>
-            <a:off x="868680" y="2556002"/>
-            <a:ext cx="10607040" cy="255270"/>
+            <a:off x="868680" y="2474849"/>
+            <a:ext cx="10607040" cy="246761"/>
           </a:xfrm>
           <a:prstGeom prst="rect">
             <a:avLst/>
@@ -6347,18 +9144,15 @@
               <a:lnSpc>
                 <a:spcPct val="115000"/>
               </a:lnSpc>
-              <a:spcAft>
-                <a:spcPts val="0"/>
-              </a:spcAft>
-            </a:pPr>
-            <a:r>
-              <a:rPr sz="1500" b="1">
+            </a:pPr>
+            <a:r>
+              <a:rPr sz="1450" b="1" i="0">
                 <a:solidFill>
                   <a:srgbClr val="141B2D"/>
                 </a:solidFill>
                 <a:latin typeface="Segoe UI"/>
               </a:rPr>
-              <a:t>2.  Move the window.</a:t>
+              <a:t>Between two correct answers, fewer sensing steps wins. Equal counts are a tie.</a:t>
             </a:r>
           </a:p>
         </p:txBody>
@@ -6371,8 +9165,47 @@
         </p:nvSpPr>
         <p:spPr>
           <a:xfrm>
-            <a:off x="868680" y="2856992"/>
-            <a:ext cx="10607040" cy="215900"/>
+            <a:off x="868680" y="2959354"/>
+            <a:ext cx="10607040" cy="246761"/>
+          </a:xfrm>
+          <a:prstGeom prst="rect">
+            <a:avLst/>
+          </a:prstGeom>
+          <a:noFill/>
+        </p:spPr>
+        <p:txBody>
+          <a:bodyPr wrap="square">
+            <a:spAutoFit/>
+          </a:bodyPr>
+          <a:lstStyle/>
+          <a:p>
+            <a:pPr algn="l">
+              <a:lnSpc>
+                <a:spcPct val="115000"/>
+              </a:lnSpc>
+            </a:pPr>
+            <a:r>
+              <a:rPr sz="1450" b="1" i="0">
+                <a:solidFill>
+                  <a:srgbClr val="141B2D"/>
+                </a:solidFill>
+                <a:latin typeface="Segoe UI"/>
+              </a:rPr>
+              <a:t>Time is deliberately not scored.</a:t>
+            </a:r>
+          </a:p>
+        </p:txBody>
+      </p:sp>
+      <p:sp>
+        <p:nvSpPr>
+          <p:cNvPr id="10" name="TextBox 9"/>
+          <p:cNvSpPr txBox="1"/>
+          <p:nvPr/>
+        </p:nvSpPr>
+        <p:spPr>
+          <a:xfrm>
+            <a:off x="868680" y="3242691"/>
+            <a:ext cx="10607040" cy="207264"/>
           </a:xfrm>
           <a:prstGeom prst="rect">
             <a:avLst/>
@@ -6389,32 +9222,29 @@
               <a:lnSpc>
                 <a:spcPct val="125000"/>
               </a:lnSpc>
-              <a:spcAft>
-                <a:spcPts val="0"/>
-              </a:spcAft>
-            </a:pPr>
-            <a:r>
-              <a:rPr sz="1250" b="0">
+            </a:pPr>
+            <a:r>
+              <a:rPr sz="1200" b="0" i="0">
                 <a:solidFill>
                   <a:srgbClr val="5A667A"/>
                 </a:solidFill>
                 <a:latin typeface="Segoe UI"/>
               </a:rPr>
-              <a:t>Arrow keys or the on-screen pad. Follow the ink.</a:t>
-            </a:r>
-          </a:p>
-        </p:txBody>
-      </p:sp>
-      <p:sp>
-        <p:nvSpPr>
-          <p:cNvPr id="10" name="TextBox 9"/>
-          <p:cNvSpPr txBox="1"/>
-          <p:nvPr/>
-        </p:nvSpPr>
-        <p:spPr>
-          <a:xfrm>
-            <a:off x="868680" y="3237484"/>
-            <a:ext cx="10607040" cy="255270"/>
+              <a:t>The model answers over a network. Timing the race would measure API latency and connection speed rather than anyone's judgement.</a:t>
+            </a:r>
+          </a:p>
+        </p:txBody>
+      </p:sp>
+      <p:sp>
+        <p:nvSpPr>
+          <p:cNvPr id="11" name="TextBox 10"/>
+          <p:cNvSpPr txBox="1"/>
+          <p:nvPr/>
+        </p:nvSpPr>
+        <p:spPr>
+          <a:xfrm>
+            <a:off x="868680" y="3651123"/>
+            <a:ext cx="10607040" cy="246761"/>
           </a:xfrm>
           <a:prstGeom prst="rect">
             <a:avLst/>
@@ -6431,32 +9261,29 @@
               <a:lnSpc>
                 <a:spcPct val="115000"/>
               </a:lnSpc>
-              <a:spcAft>
-                <a:spcPts val="0"/>
-              </a:spcAft>
-            </a:pPr>
-            <a:r>
-              <a:rPr sz="1500" b="1">
+            </a:pPr>
+            <a:r>
+              <a:rPr sz="1450" b="1" i="0">
                 <a:solidFill>
                   <a:srgbClr val="141B2D"/>
                 </a:solidFill>
                 <a:latin typeface="Segoe UI"/>
               </a:rPr>
-              <a:t>3.  Name the digit.</a:t>
-            </a:r>
-          </a:p>
-        </p:txBody>
-      </p:sp>
-      <p:sp>
-        <p:nvSpPr>
-          <p:cNvPr id="11" name="TextBox 10"/>
-          <p:cNvSpPr txBox="1"/>
-          <p:nvPr/>
-        </p:nvSpPr>
-        <p:spPr>
-          <a:xfrm>
-            <a:off x="868680" y="3538474"/>
-            <a:ext cx="10607040" cy="215900"/>
+              <a:t>This mirrors the benchmark's own reward.</a:t>
+            </a:r>
+          </a:p>
+        </p:txBody>
+      </p:sp>
+      <p:sp>
+        <p:nvSpPr>
+          <p:cNvPr id="12" name="TextBox 11"/>
+          <p:cNvSpPr txBox="1"/>
+          <p:nvPr/>
+        </p:nvSpPr>
+        <p:spPr>
+          <a:xfrm>
+            <a:off x="868680" y="3934460"/>
+            <a:ext cx="10607040" cy="414528"/>
           </a:xfrm>
           <a:prstGeom prst="rect">
             <a:avLst/>
@@ -6473,186 +9300,15 @@
               <a:lnSpc>
                 <a:spcPct val="125000"/>
               </a:lnSpc>
-              <a:spcAft>
-                <a:spcPts val="0"/>
-              </a:spcAft>
-            </a:pPr>
-            <a:r>
-              <a:rPr sz="1250" b="0">
+            </a:pPr>
+            <a:r>
+              <a:rPr sz="1200" b="0" i="0">
                 <a:solidFill>
                   <a:srgbClr val="5A667A"/>
                 </a:solidFill>
                 <a:latin typeface="Segoe UI"/>
               </a:rPr>
-              <a:t>Press 0-9 when you are sure. You are asked to confirm, because you only get one answer.</a:t>
-            </a:r>
-          </a:p>
-        </p:txBody>
-      </p:sp>
-      <p:sp>
-        <p:nvSpPr>
-          <p:cNvPr id="12" name="TextBox 11"/>
-          <p:cNvSpPr txBox="1"/>
-          <p:nvPr/>
-        </p:nvSpPr>
-        <p:spPr>
-          <a:xfrm>
-            <a:off x="868680" y="3918965"/>
-            <a:ext cx="10607040" cy="255270"/>
-          </a:xfrm>
-          <a:prstGeom prst="rect">
-            <a:avLst/>
-          </a:prstGeom>
-          <a:noFill/>
-        </p:spPr>
-        <p:txBody>
-          <a:bodyPr wrap="square">
-            <a:spAutoFit/>
-          </a:bodyPr>
-          <a:lstStyle/>
-          <a:p>
-            <a:pPr algn="l">
-              <a:lnSpc>
-                <a:spcPct val="115000"/>
-              </a:lnSpc>
-              <a:spcAft>
-                <a:spcPts val="0"/>
-              </a:spcAft>
-            </a:pPr>
-            <a:r>
-              <a:rPr sz="1500" b="1">
-                <a:solidFill>
-                  <a:srgbClr val="141B2D"/>
-                </a:solidFill>
-                <a:latin typeface="Segoe UI"/>
-              </a:rPr>
-              <a:t>4.  Compare.</a:t>
-            </a:r>
-          </a:p>
-        </p:txBody>
-      </p:sp>
-      <p:sp>
-        <p:nvSpPr>
-          <p:cNvPr id="13" name="TextBox 12"/>
-          <p:cNvSpPr txBox="1"/>
-          <p:nvPr/>
-        </p:nvSpPr>
-        <p:spPr>
-          <a:xfrm>
-            <a:off x="868680" y="4219955"/>
-            <a:ext cx="10607040" cy="215900"/>
-          </a:xfrm>
-          <a:prstGeom prst="rect">
-            <a:avLst/>
-          </a:prstGeom>
-          <a:noFill/>
-        </p:spPr>
-        <p:txBody>
-          <a:bodyPr wrap="square">
-            <a:spAutoFit/>
-          </a:bodyPr>
-          <a:lstStyle/>
-          <a:p>
-            <a:pPr algn="l">
-              <a:lnSpc>
-                <a:spcPct val="125000"/>
-              </a:lnSpc>
-              <a:spcAft>
-                <a:spcPts val="0"/>
-              </a:spcAft>
-            </a:pPr>
-            <a:r>
-              <a:rPr sz="1250" b="0">
-                <a:solidFill>
-                  <a:srgbClr val="5A667A"/>
-                </a:solidFill>
-                <a:latin typeface="Segoe UI"/>
-              </a:rPr>
-              <a:t>Your sensing steps against the model's.</a:t>
-            </a:r>
-          </a:p>
-        </p:txBody>
-      </p:sp>
-      <p:sp>
-        <p:nvSpPr>
-          <p:cNvPr id="14" name="TextBox 13"/>
-          <p:cNvSpPr txBox="1"/>
-          <p:nvPr/>
-        </p:nvSpPr>
-        <p:spPr>
-          <a:xfrm>
-            <a:off x="868680" y="4600447"/>
-            <a:ext cx="10607040" cy="255270"/>
-          </a:xfrm>
-          <a:prstGeom prst="rect">
-            <a:avLst/>
-          </a:prstGeom>
-          <a:noFill/>
-        </p:spPr>
-        <p:txBody>
-          <a:bodyPr wrap="square">
-            <a:spAutoFit/>
-          </a:bodyPr>
-          <a:lstStyle/>
-          <a:p>
-            <a:pPr algn="l">
-              <a:lnSpc>
-                <a:spcPct val="115000"/>
-              </a:lnSpc>
-              <a:spcAft>
-                <a:spcPts val="0"/>
-              </a:spcAft>
-            </a:pPr>
-            <a:r>
-              <a:rPr sz="1500" b="1">
-                <a:solidFill>
-                  <a:srgbClr val="141B2D"/>
-                </a:solidFill>
-                <a:latin typeface="Segoe UI"/>
-              </a:rPr>
-              <a:t>Optional: race the AI.</a:t>
-            </a:r>
-          </a:p>
-        </p:txBody>
-      </p:sp>
-      <p:sp>
-        <p:nvSpPr>
-          <p:cNvPr id="15" name="TextBox 14"/>
-          <p:cNvSpPr txBox="1"/>
-          <p:nvPr/>
-        </p:nvSpPr>
-        <p:spPr>
-          <a:xfrm>
-            <a:off x="868680" y="4901437"/>
-            <a:ext cx="10607040" cy="215900"/>
-          </a:xfrm>
-          <a:prstGeom prst="rect">
-            <a:avLst/>
-          </a:prstGeom>
-          <a:noFill/>
-        </p:spPr>
-        <p:txBody>
-          <a:bodyPr wrap="square">
-            <a:spAutoFit/>
-          </a:bodyPr>
-          <a:lstStyle/>
-          <a:p>
-            <a:pPr algn="l">
-              <a:lnSpc>
-                <a:spcPct val="125000"/>
-              </a:lnSpc>
-              <a:spcAft>
-                <a:spcPts val="0"/>
-              </a:spcAft>
-            </a:pPr>
-            <a:r>
-              <a:rPr sz="1250" b="0">
-                <a:solidFill>
-                  <a:srgbClr val="5A667A"/>
-                </a:solidFill>
-                <a:latin typeface="Segoe UI"/>
-              </a:rPr>
-              <a:t>Needs your own OpenRouter key, kept in your browser and sent only to openrouter.ai. Solo play needs nothing.</a:t>
+              <a:t>-0.1 per move against +10 for a correct answer and -10 for a wrong one already means 'fewest steps wins'. The game did not invent a scoring rule.</a:t>
             </a:r>
           </a:p>
         </p:txBody>
@@ -6789,12 +9445,9 @@
               <a:lnSpc>
                 <a:spcPct val="115000"/>
               </a:lnSpc>
-              <a:spcAft>
-                <a:spcPts val="0"/>
-              </a:spcAft>
-            </a:pPr>
-            <a:r>
-              <a:rPr sz="1100" b="1">
+            </a:pPr>
+            <a:r>
+              <a:rPr sz="1100" b="1" i="0">
                 <a:solidFill>
                   <a:srgbClr val="5A667A"/>
                 </a:solidFill>
@@ -6814,7 +9467,7 @@
         <p:spPr>
           <a:xfrm>
             <a:off x="841248" y="841248"/>
-            <a:ext cx="10607040" cy="731520"/>
+            <a:ext cx="10607040" cy="566928"/>
           </a:xfrm>
           <a:prstGeom prst="rect">
             <a:avLst/>
@@ -6831,18 +9484,15 @@
               <a:lnSpc>
                 <a:spcPct val="115000"/>
               </a:lnSpc>
-              <a:spcAft>
-                <a:spcPts val="0"/>
-              </a:spcAft>
-            </a:pPr>
-            <a:r>
-              <a:rPr sz="3000" b="1">
+            </a:pPr>
+            <a:r>
+              <a:rPr sz="2800" b="1" i="0">
                 <a:solidFill>
                   <a:srgbClr val="141B2D"/>
                 </a:solidFill>
                 <a:latin typeface="Segoe UI"/>
               </a:rPr>
-              <a:t>ARC Race - infer the rule</a:t>
+              <a:t>ARC Race - infer the hidden rule</a:t>
             </a:r>
           </a:p>
         </p:txBody>
@@ -6855,8 +9505,8 @@
         </p:nvSpPr>
         <p:spPr>
           <a:xfrm>
-            <a:off x="868680" y="1874519"/>
-            <a:ext cx="10607040" cy="255270"/>
+            <a:off x="868680" y="1783080"/>
+            <a:ext cx="10607040" cy="246761"/>
           </a:xfrm>
           <a:prstGeom prst="rect">
             <a:avLst/>
@@ -6873,12 +9523,9 @@
               <a:lnSpc>
                 <a:spcPct val="115000"/>
               </a:lnSpc>
-              <a:spcAft>
-                <a:spcPts val="0"/>
-              </a:spcAft>
-            </a:pPr>
-            <a:r>
-              <a:rPr sz="1500" b="1">
+            </a:pPr>
+            <a:r>
+              <a:rPr sz="1450" b="1" i="0">
                 <a:solidFill>
                   <a:srgbClr val="141B2D"/>
                 </a:solidFill>
@@ -6897,8 +9544,8 @@
         </p:nvSpPr>
         <p:spPr>
           <a:xfrm>
-            <a:off x="868680" y="2175510"/>
-            <a:ext cx="10607040" cy="215900"/>
+            <a:off x="868680" y="2066416"/>
+            <a:ext cx="10607040" cy="207264"/>
           </a:xfrm>
           <a:prstGeom prst="rect">
             <a:avLst/>
@@ -6915,12 +9562,9 @@
               <a:lnSpc>
                 <a:spcPct val="125000"/>
               </a:lnSpc>
-              <a:spcAft>
-                <a:spcPts val="0"/>
-              </a:spcAft>
-            </a:pPr>
-            <a:r>
-              <a:rPr sz="1250" b="0">
+            </a:pPr>
+            <a:r>
+              <a:rPr sz="1200" b="0" i="0">
                 <a:solidFill>
                   <a:srgbClr val="5A667A"/>
                 </a:solidFill>
@@ -6939,8 +9583,8 @@
         </p:nvSpPr>
         <p:spPr>
           <a:xfrm>
-            <a:off x="868680" y="2537714"/>
-            <a:ext cx="10607040" cy="255270"/>
+            <a:off x="868680" y="2392552"/>
+            <a:ext cx="10607040" cy="246761"/>
           </a:xfrm>
           <a:prstGeom prst="rect">
             <a:avLst/>
@@ -6957,12 +9601,9 @@
               <a:lnSpc>
                 <a:spcPct val="115000"/>
               </a:lnSpc>
-              <a:spcAft>
-                <a:spcPts val="0"/>
-              </a:spcAft>
-            </a:pPr>
-            <a:r>
-              <a:rPr sz="1500" b="1">
+            </a:pPr>
+            <a:r>
+              <a:rPr sz="1450" b="1" i="0">
                 <a:solidFill>
                   <a:srgbClr val="141B2D"/>
                 </a:solidFill>
@@ -6981,8 +9622,8 @@
         </p:nvSpPr>
         <p:spPr>
           <a:xfrm>
-            <a:off x="868680" y="2838704"/>
-            <a:ext cx="10607040" cy="431800"/>
+            <a:off x="868680" y="2675889"/>
+            <a:ext cx="10607040" cy="414528"/>
           </a:xfrm>
           <a:prstGeom prst="rect">
             <a:avLst/>
@@ -6999,18 +9640,15 @@
               <a:lnSpc>
                 <a:spcPct val="125000"/>
               </a:lnSpc>
-              <a:spcAft>
-                <a:spcPts val="0"/>
-              </a:spcAft>
-            </a:pPr>
-            <a:r>
-              <a:rPr sz="1250" b="0">
+            </a:pPr>
+            <a:r>
+              <a:rPr sz="1200" b="0" i="0">
                 <a:solidFill>
                   <a:srgbClr val="5A667A"/>
                 </a:solidFill>
                 <a:latin typeface="Segoe UI"/>
               </a:rPr>
-              <a:t>A classifier fits simple rules - rotations, mirrors, recolours, scaling, tiling - to all 400 ARC-AGI-1 training tasks. 19 are fully explained by one rule that also predicts the held-out answer. Those 19 are the Easy tier, and the game opens on them.</a:t>
+              <a:t>A classifier fits simple rules - rotations, mirrors, recolours, scaling, tiling - to all 400 ARC-AGI-1 training tasks. 19 are fully explained by one rule that also predicts the held-out answer. Those 19 are the Easy tier, and the game opens there.</a:t>
             </a:r>
           </a:p>
         </p:txBody>
@@ -7023,8 +9661,8 @@
         </p:nvSpPr>
         <p:spPr>
           <a:xfrm>
-            <a:off x="868680" y="3416808"/>
-            <a:ext cx="10607040" cy="255270"/>
+            <a:off x="868680" y="3209289"/>
+            <a:ext cx="10607040" cy="246761"/>
           </a:xfrm>
           <a:prstGeom prst="rect">
             <a:avLst/>
@@ -7041,18 +9679,15 @@
               <a:lnSpc>
                 <a:spcPct val="115000"/>
               </a:lnSpc>
-              <a:spcAft>
-                <a:spcPts val="0"/>
-              </a:spcAft>
-            </a:pPr>
-            <a:r>
-              <a:rPr sz="1500" b="1">
+            </a:pPr>
+            <a:r>
+              <a:rPr sz="1450" b="1" i="0">
                 <a:solidFill>
                   <a:srgbClr val="141B2D"/>
                 </a:solidFill>
                 <a:latin typeface="Segoe UI"/>
               </a:rPr>
-              <a:t>Every easy puzzle carries an opt-in hint naming its rule.</a:t>
+              <a:t>Answers are never sent to the browser.</a:t>
             </a:r>
           </a:p>
         </p:txBody>
@@ -7065,8 +9700,8 @@
         </p:nvSpPr>
         <p:spPr>
           <a:xfrm>
-            <a:off x="868680" y="3717798"/>
-            <a:ext cx="10607040" cy="215900"/>
+            <a:off x="868680" y="3492627"/>
+            <a:ext cx="10607040" cy="414528"/>
           </a:xfrm>
           <a:prstGeom prst="rect">
             <a:avLst/>
@@ -7083,18 +9718,15 @@
               <a:lnSpc>
                 <a:spcPct val="125000"/>
               </a:lnSpc>
-              <a:spcAft>
-                <a:spcPts val="0"/>
-              </a:spcAft>
-            </a:pPr>
-            <a:r>
-              <a:rPr sz="1250" b="0">
+            </a:pPr>
+            <a:r>
+              <a:rPr sz="1200" b="0" i="0">
                 <a:solidFill>
                   <a:srgbClr val="5A667A"/>
                 </a:solidFill>
                 <a:latin typeface="Segoe UI"/>
               </a:rPr>
-              <a:t>The answer itself is never shipped - only a SHA-256 of it.</a:t>
+              <a:t>Each task ships a SHA-256 of its answer. A submission is graded by hashing it and comparing digests, so the solution is not readable in the page.</a:t>
             </a:r>
           </a:p>
         </p:txBody>
@@ -7107,8 +9739,8 @@
         </p:nvSpPr>
         <p:spPr>
           <a:xfrm>
-            <a:off x="868680" y="4080002"/>
-            <a:ext cx="10607040" cy="255270"/>
+            <a:off x="868680" y="4026026"/>
+            <a:ext cx="10607040" cy="246761"/>
           </a:xfrm>
           <a:prstGeom prst="rect">
             <a:avLst/>
@@ -7125,18 +9757,15 @@
               <a:lnSpc>
                 <a:spcPct val="115000"/>
               </a:lnSpc>
-              <a:spcAft>
-                <a:spcPts val="0"/>
-              </a:spcAft>
-            </a:pPr>
-            <a:r>
-              <a:rPr sz="1500" b="1">
+            </a:pPr>
+            <a:r>
+              <a:rPr sz="1450" b="1" i="0">
                 <a:solidFill>
                   <a:srgbClr val="141B2D"/>
                 </a:solidFill>
                 <a:latin typeface="Segoe UI"/>
               </a:rPr>
-              <a:t>The puzzle list shows the size of the answer, not the input.</a:t>
+              <a:t>The puzzle list shows the size of the ANSWER, not the input.</a:t>
             </a:r>
           </a:p>
         </p:txBody>
@@ -7149,8 +9778,8 @@
         </p:nvSpPr>
         <p:spPr>
           <a:xfrm>
-            <a:off x="868680" y="4380992"/>
-            <a:ext cx="10607040" cy="215900"/>
+            <a:off x="868680" y="4309364"/>
+            <a:ext cx="10607040" cy="414528"/>
           </a:xfrm>
           <a:prstGeom prst="rect">
             <a:avLst/>
@@ -7167,18 +9796,15 @@
               <a:lnSpc>
                 <a:spcPct val="125000"/>
               </a:lnSpc>
-              <a:spcAft>
-                <a:spcPts val="0"/>
-              </a:spcAft>
-            </a:pPr>
-            <a:r>
-              <a:rPr sz="1250" b="0">
+            </a:pPr>
+            <a:r>
+              <a:rPr sz="1200" b="0" i="0">
                 <a:solidFill>
                   <a:srgbClr val="5A667A"/>
                 </a:solidFill>
                 <a:latin typeface="Segoe UI"/>
               </a:rPr>
-              <a:t>109 of 386 need more than 150 cells painted and are flagged 'slow to paint'.</a:t>
+              <a:t>It used to show the input, which made a 400-cell job look gentle. 109 of 386 need more than 150 cells painted and are now flagged as slow to paint.</a:t>
             </a:r>
           </a:p>
         </p:txBody>
@@ -7216,7 +9842,7 @@
             <a:avLst/>
           </a:prstGeom>
           <a:solidFill>
-            <a:srgbClr val="FAFBFD"/>
+            <a:srgbClr val="0E1A2B"/>
           </a:solidFill>
           <a:ln>
             <a:noFill/>
@@ -7253,8 +9879,8 @@
         </p:nvSpPr>
         <p:spPr>
           <a:xfrm>
-            <a:off x="640080" y="566928"/>
-            <a:ext cx="82296" cy="420624"/>
+            <a:off x="0" y="2788920"/>
+            <a:ext cx="12191695" cy="36576"/>
           </a:xfrm>
           <a:prstGeom prst="rect">
             <a:avLst/>
@@ -7297,8 +9923,8 @@
         </p:nvSpPr>
         <p:spPr>
           <a:xfrm>
-            <a:off x="868680" y="502920"/>
-            <a:ext cx="10058400" cy="310896"/>
+            <a:off x="914400" y="1874519"/>
+            <a:ext cx="10515600" cy="384048"/>
           </a:xfrm>
           <a:prstGeom prst="rect">
             <a:avLst/>
@@ -7315,18 +9941,15 @@
               <a:lnSpc>
                 <a:spcPct val="115000"/>
               </a:lnSpc>
-              <a:spcAft>
-                <a:spcPts val="0"/>
-              </a:spcAft>
-            </a:pPr>
-            <a:r>
-              <a:rPr sz="1100" b="1">
-                <a:solidFill>
-                  <a:srgbClr val="5A667A"/>
-                </a:solidFill>
-                <a:latin typeface="Segoe UI"/>
-              </a:rPr>
-              <a:t>HOW IT IS BUILT</a:t>
+            </a:pPr>
+            <a:r>
+              <a:rPr sz="1300" b="1" i="0">
+                <a:solidFill>
+                  <a:srgbClr val="00A8BF"/>
+                </a:solidFill>
+                <a:latin typeface="Segoe UI"/>
+              </a:rPr>
+              <a:t>PART TWO</a:t>
             </a:r>
           </a:p>
         </p:txBody>
@@ -7339,8 +9962,8 @@
         </p:nvSpPr>
         <p:spPr>
           <a:xfrm>
-            <a:off x="841248" y="841248"/>
-            <a:ext cx="10607040" cy="731520"/>
+            <a:off x="914400" y="2240280"/>
+            <a:ext cx="10515600" cy="640080"/>
           </a:xfrm>
           <a:prstGeom prst="rect">
             <a:avLst/>
@@ -7357,18 +9980,15 @@
               <a:lnSpc>
                 <a:spcPct val="115000"/>
               </a:lnSpc>
-              <a:spcAft>
-                <a:spcPts val="0"/>
-              </a:spcAft>
-            </a:pPr>
-            <a:r>
-              <a:rPr sz="3000" b="1">
-                <a:solidFill>
-                  <a:srgbClr val="141B2D"/>
-                </a:solidFill>
-                <a:latin typeface="Segoe UI"/>
-              </a:rPr>
-              <a:t>A static site that still keeps secrets</a:t>
+            </a:pPr>
+            <a:r>
+              <a:rPr sz="3400" b="1" i="0">
+                <a:solidFill>
+                  <a:srgbClr val="FFFFFF"/>
+                </a:solidFill>
+                <a:latin typeface="Segoe UI"/>
+              </a:rPr>
+              <a:t>What the AI can actually do</a:t>
             </a:r>
           </a:p>
         </p:txBody>
@@ -7381,330 +10001,33 @@
         </p:nvSpPr>
         <p:spPr>
           <a:xfrm>
-            <a:off x="868680" y="1874519"/>
-            <a:ext cx="10607040" cy="255270"/>
-          </a:xfrm>
-          <a:prstGeom prst="rect">
-            <a:avLst/>
-          </a:prstGeom>
-          <a:noFill/>
-        </p:spPr>
-        <p:txBody>
-          <a:bodyPr wrap="square">
-            <a:spAutoFit/>
-          </a:bodyPr>
-          <a:lstStyle/>
-          <a:p>
-            <a:pPr algn="l">
-              <a:lnSpc>
-                <a:spcPct val="115000"/>
-              </a:lnSpc>
-              <a:spcAft>
-                <a:spcPts val="0"/>
-              </a:spcAft>
-            </a:pPr>
-            <a:r>
-              <a:rPr sz="1500" b="1">
-                <a:solidFill>
-                  <a:srgbClr val="141B2D"/>
-                </a:solidFill>
-                <a:latin typeface="Segoe UI"/>
-              </a:rPr>
-              <a:t>GitHub Pages serves files and cannot run code.</a:t>
-            </a:r>
-          </a:p>
-        </p:txBody>
-      </p:sp>
-      <p:sp>
-        <p:nvSpPr>
-          <p:cNvPr id="7" name="TextBox 6"/>
-          <p:cNvSpPr txBox="1"/>
-          <p:nvPr/>
-        </p:nvSpPr>
-        <p:spPr>
-          <a:xfrm>
-            <a:off x="868680" y="2175510"/>
-            <a:ext cx="10607040" cy="215900"/>
-          </a:xfrm>
-          <a:prstGeom prst="rect">
-            <a:avLst/>
-          </a:prstGeom>
-          <a:noFill/>
-        </p:spPr>
-        <p:txBody>
-          <a:bodyPr wrap="square">
-            <a:spAutoFit/>
-          </a:bodyPr>
-          <a:lstStyle/>
-          <a:p>
-            <a:pPr algn="l">
-              <a:lnSpc>
-                <a:spcPct val="125000"/>
-              </a:lnSpc>
-              <a:spcAft>
-                <a:spcPts val="0"/>
-              </a:spcAft>
-            </a:pPr>
-            <a:r>
-              <a:rPr sz="1250" b="0">
-                <a:solidFill>
-                  <a:srgbClr val="5A667A"/>
-                </a:solidFill>
-                <a:latin typeface="Segoe UI"/>
-              </a:rPr>
-              <a:t>So the whole race runs in the browser. There is no server to attack and nothing to host.</a:t>
-            </a:r>
-          </a:p>
-        </p:txBody>
-      </p:sp>
-      <p:sp>
-        <p:nvSpPr>
-          <p:cNvPr id="8" name="TextBox 7"/>
-          <p:cNvSpPr txBox="1"/>
-          <p:nvPr/>
-        </p:nvSpPr>
-        <p:spPr>
-          <a:xfrm>
-            <a:off x="868680" y="2537714"/>
-            <a:ext cx="10607040" cy="255270"/>
-          </a:xfrm>
-          <a:prstGeom prst="rect">
-            <a:avLst/>
-          </a:prstGeom>
-          <a:noFill/>
-        </p:spPr>
-        <p:txBody>
-          <a:bodyPr wrap="square">
-            <a:spAutoFit/>
-          </a:bodyPr>
-          <a:lstStyle/>
-          <a:p>
-            <a:pPr algn="l">
-              <a:lnSpc>
-                <a:spcPct val="115000"/>
-              </a:lnSpc>
-              <a:spcAft>
-                <a:spcPts val="0"/>
-              </a:spcAft>
-            </a:pPr>
-            <a:r>
-              <a:rPr sz="1500" b="1">
-                <a:solidFill>
-                  <a:srgbClr val="141B2D"/>
-                </a:solidFill>
-                <a:latin typeface="Segoe UI"/>
-              </a:rPr>
-              <a:t>ARC answers are never sent to the browser.</a:t>
-            </a:r>
-          </a:p>
-        </p:txBody>
-      </p:sp>
-      <p:sp>
-        <p:nvSpPr>
-          <p:cNvPr id="9" name="TextBox 8"/>
-          <p:cNvSpPr txBox="1"/>
-          <p:nvPr/>
-        </p:nvSpPr>
-        <p:spPr>
-          <a:xfrm>
-            <a:off x="868680" y="2838704"/>
-            <a:ext cx="10607040" cy="431800"/>
-          </a:xfrm>
-          <a:prstGeom prst="rect">
-            <a:avLst/>
-          </a:prstGeom>
-          <a:noFill/>
-        </p:spPr>
-        <p:txBody>
-          <a:bodyPr wrap="square">
-            <a:spAutoFit/>
-          </a:bodyPr>
-          <a:lstStyle/>
-          <a:p>
-            <a:pPr algn="l">
-              <a:lnSpc>
-                <a:spcPct val="125000"/>
-              </a:lnSpc>
-              <a:spcAft>
-                <a:spcPts val="0"/>
-              </a:spcAft>
-            </a:pPr>
-            <a:r>
-              <a:rPr sz="1250" b="0">
-                <a:solidFill>
-                  <a:srgbClr val="5A667A"/>
-                </a:solidFill>
-                <a:latin typeface="Segoe UI"/>
-              </a:rPr>
-              <a:t>Each task ships a SHA-256 of its answer. A submission is graded by hashing it and comparing digests, so the solution is not readable in the page.</a:t>
-            </a:r>
-          </a:p>
-        </p:txBody>
-      </p:sp>
-      <p:sp>
-        <p:nvSpPr>
-          <p:cNvPr id="10" name="TextBox 9"/>
-          <p:cNvSpPr txBox="1"/>
-          <p:nvPr/>
-        </p:nvSpPr>
-        <p:spPr>
-          <a:xfrm>
-            <a:off x="868680" y="3416808"/>
-            <a:ext cx="10607040" cy="255270"/>
-          </a:xfrm>
-          <a:prstGeom prst="rect">
-            <a:avLst/>
-          </a:prstGeom>
-          <a:noFill/>
-        </p:spPr>
-        <p:txBody>
-          <a:bodyPr wrap="square">
-            <a:spAutoFit/>
-          </a:bodyPr>
-          <a:lstStyle/>
-          <a:p>
-            <a:pPr algn="l">
-              <a:lnSpc>
-                <a:spcPct val="115000"/>
-              </a:lnSpc>
-              <a:spcAft>
-                <a:spcPts val="0"/>
-              </a:spcAft>
-            </a:pPr>
-            <a:r>
-              <a:rPr sz="1500" b="1">
-                <a:solidFill>
-                  <a:srgbClr val="141B2D"/>
-                </a:solidFill>
-                <a:latin typeface="Segoe UI"/>
-              </a:rPr>
-              <a:t>No API key is ever in the site.</a:t>
-            </a:r>
-          </a:p>
-        </p:txBody>
-      </p:sp>
-      <p:sp>
-        <p:nvSpPr>
-          <p:cNvPr id="11" name="TextBox 10"/>
-          <p:cNvSpPr txBox="1"/>
-          <p:nvPr/>
-        </p:nvSpPr>
-        <p:spPr>
-          <a:xfrm>
-            <a:off x="868680" y="3717798"/>
-            <a:ext cx="10607040" cy="431800"/>
-          </a:xfrm>
-          <a:prstGeom prst="rect">
-            <a:avLst/>
-          </a:prstGeom>
-          <a:noFill/>
-        </p:spPr>
-        <p:txBody>
-          <a:bodyPr wrap="square">
-            <a:spAutoFit/>
-          </a:bodyPr>
-          <a:lstStyle/>
-          <a:p>
-            <a:pPr algn="l">
-              <a:lnSpc>
-                <a:spcPct val="125000"/>
-              </a:lnSpc>
-              <a:spcAft>
-                <a:spcPts val="0"/>
-              </a:spcAft>
-            </a:pPr>
-            <a:r>
-              <a:rPr sz="1250" b="0">
-                <a:solidFill>
-                  <a:srgbClr val="5A667A"/>
-                </a:solidFill>
-                <a:latin typeface="Segoe UI"/>
-              </a:rPr>
-              <a:t>Solo play needs no key at all. To race the AI, a visitor supplies their own, held in their browser and sent only to openrouter.ai. The project's own key has never been in the repository.</a:t>
-            </a:r>
-          </a:p>
-        </p:txBody>
-      </p:sp>
-      <p:sp>
-        <p:nvSpPr>
-          <p:cNvPr id="12" name="TextBox 11"/>
-          <p:cNvSpPr txBox="1"/>
-          <p:nvPr/>
-        </p:nvSpPr>
-        <p:spPr>
-          <a:xfrm>
-            <a:off x="868680" y="4295902"/>
-            <a:ext cx="10607040" cy="255270"/>
-          </a:xfrm>
-          <a:prstGeom prst="rect">
-            <a:avLst/>
-          </a:prstGeom>
-          <a:noFill/>
-        </p:spPr>
-        <p:txBody>
-          <a:bodyPr wrap="square">
-            <a:spAutoFit/>
-          </a:bodyPr>
-          <a:lstStyle/>
-          <a:p>
-            <a:pPr algn="l">
-              <a:lnSpc>
-                <a:spcPct val="115000"/>
-              </a:lnSpc>
-              <a:spcAft>
-                <a:spcPts val="0"/>
-              </a:spcAft>
-            </a:pPr>
-            <a:r>
-              <a:rPr sz="1500" b="1">
-                <a:solidFill>
-                  <a:srgbClr val="141B2D"/>
-                </a:solidFill>
-                <a:latin typeface="Segoe UI"/>
-              </a:rPr>
-              <a:t>An optional FastAPI backend exists for a hosted AI lane.</a:t>
-            </a:r>
-          </a:p>
-        </p:txBody>
-      </p:sp>
-      <p:sp>
-        <p:nvSpPr>
-          <p:cNvPr id="13" name="TextBox 12"/>
-          <p:cNvSpPr txBox="1"/>
-          <p:nvPr/>
-        </p:nvSpPr>
-        <p:spPr>
-          <a:xfrm>
-            <a:off x="868680" y="4596892"/>
-            <a:ext cx="10607040" cy="215900"/>
-          </a:xfrm>
-          <a:prstGeom prst="rect">
-            <a:avLst/>
-          </a:prstGeom>
-          <a:noFill/>
-        </p:spPr>
-        <p:txBody>
-          <a:bodyPr wrap="square">
-            <a:spAutoFit/>
-          </a:bodyPr>
-          <a:lstStyle/>
-          <a:p>
-            <a:pPr algn="l">
-              <a:lnSpc>
-                <a:spcPct val="125000"/>
-              </a:lnSpc>
-              <a:spcAft>
-                <a:spcPts val="0"/>
-              </a:spcAft>
-            </a:pPr>
-            <a:r>
-              <a:rPr sz="1250" b="0">
-                <a:solidFill>
-                  <a:srgbClr val="5A667A"/>
-                </a:solidFill>
-                <a:latin typeface="Segoe UI"/>
-              </a:rPr>
-              <a:t>There the key stays server-side and is never returned to a client.</a:t>
+            <a:off x="914400" y="3063240"/>
+            <a:ext cx="9601200" cy="731520"/>
+          </a:xfrm>
+          <a:prstGeom prst="rect">
+            <a:avLst/>
+          </a:prstGeom>
+          <a:noFill/>
+        </p:spPr>
+        <p:txBody>
+          <a:bodyPr wrap="square">
+            <a:spAutoFit/>
+          </a:bodyPr>
+          <a:lstStyle/>
+          <a:p>
+            <a:pPr algn="l">
+              <a:lnSpc>
+                <a:spcPct val="135000"/>
+              </a:lnSpc>
+            </a:pPr>
+            <a:r>
+              <a:rPr sz="1500" b="0" i="0">
+                <a:solidFill>
+                  <a:srgbClr val="B6C3D4"/>
+                </a:solidFill>
+                <a:latin typeface="Segoe UI"/>
+              </a:rPr>
+              <a:t>Published results, and verbatim reasoning from rounds played against the live site. Both the good and the bad are real output, not illustration.</a:t>
             </a:r>
           </a:p>
         </p:txBody>
@@ -7841,18 +10164,15 @@
               <a:lnSpc>
                 <a:spcPct val="115000"/>
               </a:lnSpc>
-              <a:spcAft>
-                <a:spcPts val="0"/>
-              </a:spcAft>
-            </a:pPr>
-            <a:r>
-              <a:rPr sz="1100" b="1">
+            </a:pPr>
+            <a:r>
+              <a:rPr sz="1100" b="1" i="0">
                 <a:solidFill>
                   <a:srgbClr val="5A667A"/>
                 </a:solidFill>
                 <a:latin typeface="Segoe UI"/>
               </a:rPr>
-              <a:t>FIDELITY</a:t>
+              <a:t>THE HEADLINE</a:t>
             </a:r>
           </a:p>
         </p:txBody>
@@ -7866,7 +10186,7 @@
         <p:spPr>
           <a:xfrm>
             <a:off x="841248" y="841248"/>
-            <a:ext cx="10607040" cy="731520"/>
+            <a:ext cx="10607040" cy="566928"/>
           </a:xfrm>
           <a:prstGeom prst="rect">
             <a:avLst/>
@@ -7883,32 +10203,186 @@
               <a:lnSpc>
                 <a:spcPct val="115000"/>
               </a:lnSpc>
-              <a:spcAft>
-                <a:spcPts val="0"/>
-              </a:spcAft>
-            </a:pPr>
-            <a:r>
-              <a:rPr sz="3000" b="1">
+            </a:pPr>
+            <a:r>
+              <a:rPr sz="2800" b="1" i="0">
                 <a:solidFill>
                   <a:srgbClr val="141B2D"/>
                 </a:solidFill>
                 <a:latin typeface="Segoe UI"/>
               </a:rPr>
-              <a:t>Built on the benchmark, and checked against it</a:t>
-            </a:r>
-          </a:p>
-        </p:txBody>
-      </p:sp>
-      <p:sp>
-        <p:nvSpPr>
-          <p:cNvPr id="6" name="TextBox 5"/>
-          <p:cNvSpPr txBox="1"/>
-          <p:nvPr/>
-        </p:nvSpPr>
-        <p:spPr>
-          <a:xfrm>
-            <a:off x="868680" y="1874519"/>
-            <a:ext cx="10607040" cy="255270"/>
+              <a:t>Whole digits are easy. Exploring for one is not.</a:t>
+            </a:r>
+          </a:p>
+        </p:txBody>
+      </p:sp>
+      <p:pic>
+        <p:nvPicPr>
+          <p:cNvPr id="6" name="Picture 5" descr="chart_accuracy.png"/>
+          <p:cNvPicPr>
+            <a:picLocks noChangeAspect="1"/>
+          </p:cNvPicPr>
+          <p:nvPr/>
+        </p:nvPicPr>
+        <p:blipFill>
+          <a:blip r:embed="rId2"/>
+          <a:stretch>
+            <a:fillRect/>
+          </a:stretch>
+        </p:blipFill>
+        <p:spPr>
+          <a:xfrm>
+            <a:off x="868680" y="1691640"/>
+            <a:ext cx="8229600" cy="4023360"/>
+          </a:xfrm>
+          <a:prstGeom prst="rect">
+            <a:avLst/>
+          </a:prstGeom>
+        </p:spPr>
+      </p:pic>
+      <p:sp>
+        <p:nvSpPr>
+          <p:cNvPr id="7" name="TextBox 6"/>
+          <p:cNvSpPr txBox="1"/>
+          <p:nvPr/>
+        </p:nvSpPr>
+        <p:spPr>
+          <a:xfrm>
+            <a:off x="9372600" y="1965960"/>
+            <a:ext cx="2377440" cy="2926080"/>
+          </a:xfrm>
+          <a:prstGeom prst="rect">
+            <a:avLst/>
+          </a:prstGeom>
+          <a:noFill/>
+        </p:spPr>
+        <p:txBody>
+          <a:bodyPr wrap="square">
+            <a:spAutoFit/>
+          </a:bodyPr>
+          <a:lstStyle/>
+          <a:p>
+            <a:pPr algn="l">
+              <a:lnSpc>
+                <a:spcPct val="140000"/>
+              </a:lnSpc>
+            </a:pPr>
+            <a:r>
+              <a:rPr sz="1350" b="1" i="0">
+                <a:solidFill>
+                  <a:srgbClr val="141B2D"/>
+                </a:solidFill>
+                <a:latin typeface="Segoe UI"/>
+              </a:rPr>
+              <a:t>92-98%</a:t>
+            </a:r>
+          </a:p>
+          <a:p>
+            <a:pPr algn="l">
+              <a:lnSpc>
+                <a:spcPct val="140000"/>
+              </a:lnSpc>
+            </a:pPr>
+            <a:r>
+              <a:rPr sz="1350" b="1" i="0">
+                <a:solidFill>
+                  <a:srgbClr val="141B2D"/>
+                </a:solidFill>
+                <a:latin typeface="Segoe UI"/>
+              </a:rPr>
+              <a:t>shown the whole digit</a:t>
+            </a:r>
+          </a:p>
+          <a:p>
+            <a:pPr algn="l">
+              <a:lnSpc>
+                <a:spcPct val="140000"/>
+              </a:lnSpc>
+            </a:pPr>
+          </a:p>
+          <a:p>
+            <a:pPr algn="l">
+              <a:lnSpc>
+                <a:spcPct val="140000"/>
+              </a:lnSpc>
+            </a:pPr>
+            <a:r>
+              <a:rPr sz="1350" b="1" i="0">
+                <a:solidFill>
+                  <a:srgbClr val="141B2D"/>
+                </a:solidFill>
+                <a:latin typeface="Segoe UI"/>
+              </a:rPr>
+              <a:t>6.5-61%</a:t>
+            </a:r>
+          </a:p>
+          <a:p>
+            <a:pPr algn="l">
+              <a:lnSpc>
+                <a:spcPct val="140000"/>
+              </a:lnSpc>
+            </a:pPr>
+            <a:r>
+              <a:rPr sz="1350" b="1" i="0">
+                <a:solidFill>
+                  <a:srgbClr val="141B2D"/>
+                </a:solidFill>
+                <a:latin typeface="Segoe UI"/>
+              </a:rPr>
+              <a:t>through a window</a:t>
+            </a:r>
+          </a:p>
+          <a:p>
+            <a:pPr algn="l">
+              <a:lnSpc>
+                <a:spcPct val="140000"/>
+              </a:lnSpc>
+            </a:pPr>
+          </a:p>
+          <a:p>
+            <a:pPr algn="l">
+              <a:lnSpc>
+                <a:spcPct val="140000"/>
+              </a:lnSpc>
+            </a:pPr>
+            <a:r>
+              <a:rPr sz="1350" b="1" i="0">
+                <a:solidFill>
+                  <a:srgbClr val="141B2D"/>
+                </a:solidFill>
+                <a:latin typeface="Segoe UI"/>
+              </a:rPr>
+              <a:t>Best: 61%</a:t>
+            </a:r>
+          </a:p>
+          <a:p>
+            <a:pPr algn="l">
+              <a:lnSpc>
+                <a:spcPct val="140000"/>
+              </a:lnSpc>
+            </a:pPr>
+            <a:r>
+              <a:rPr sz="1350" b="1" i="0">
+                <a:solidFill>
+                  <a:srgbClr val="141B2D"/>
+                </a:solidFill>
+                <a:latin typeface="Segoe UI"/>
+              </a:rPr>
+              <a:t>Gemini 3.7 Flash</a:t>
+            </a:r>
+          </a:p>
+        </p:txBody>
+      </p:sp>
+      <p:sp>
+        <p:nvSpPr>
+          <p:cNvPr id="8" name="TextBox 7"/>
+          <p:cNvSpPr txBox="1"/>
+          <p:nvPr/>
+        </p:nvSpPr>
+        <p:spPr>
+          <a:xfrm>
+            <a:off x="868680" y="6126480"/>
+            <a:ext cx="10607040" cy="457200"/>
           </a:xfrm>
           <a:prstGeom prst="rect">
             <a:avLst/>
@@ -7925,312 +10399,15 @@
               <a:lnSpc>
                 <a:spcPct val="115000"/>
               </a:lnSpc>
-              <a:spcAft>
-                <a:spcPts val="0"/>
-              </a:spcAft>
-            </a:pPr>
-            <a:r>
-              <a:rPr sz="1500" b="1">
-                <a:solidFill>
-                  <a:srgbClr val="141B2D"/>
-                </a:solidFill>
-                <a:latin typeface="Segoe UI"/>
-              </a:rPr>
-              <a:t>Canvases come from the upstream generators, not a lookalike.</a:t>
-            </a:r>
-          </a:p>
-        </p:txBody>
-      </p:sp>
-      <p:sp>
-        <p:nvSpPr>
-          <p:cNvPr id="7" name="TextBox 6"/>
-          <p:cNvSpPr txBox="1"/>
-          <p:nvPr/>
-        </p:nvSpPr>
-        <p:spPr>
-          <a:xfrm>
-            <a:off x="868680" y="2175510"/>
-            <a:ext cx="10607040" cy="431800"/>
-          </a:xfrm>
-          <a:prstGeom prst="rect">
-            <a:avLst/>
-          </a:prstGeom>
-          <a:noFill/>
-        </p:spPr>
-        <p:txBody>
-          <a:bodyPr wrap="square">
-            <a:spAutoFit/>
-          </a:bodyPr>
-          <a:lstStyle/>
-          <a:p>
-            <a:pPr algn="l">
-              <a:lnSpc>
-                <a:spcPct val="125000"/>
-              </a:lnSpc>
-              <a:spcAft>
-                <a:spcPts val="0"/>
-              </a:spcAft>
-            </a:pPr>
-            <a:r>
-              <a:rPr sz="1250" b="0">
+            </a:pPr>
+            <a:r>
+              <a:rPr sz="1100" b="0" i="0">
                 <a:solidFill>
                   <a:srgbClr val="5A667A"/>
                 </a:solidFill>
                 <a:latin typeface="Segoe UI"/>
               </a:rPr>
-              <a:t>build_canvas and deterministic_start produce every canvas; episodes are sampled with their own sample_balanced at seed 42, so episode 0 here is episode 0 of the published runs.</a:t>
-            </a:r>
-          </a:p>
-        </p:txBody>
-      </p:sp>
-      <p:sp>
-        <p:nvSpPr>
-          <p:cNvPr id="8" name="TextBox 7"/>
-          <p:cNvSpPr txBox="1"/>
-          <p:nvPr/>
-        </p:nvSpPr>
-        <p:spPr>
-          <a:xfrm>
-            <a:off x="868680" y="2735326"/>
-            <a:ext cx="10607040" cy="255270"/>
-          </a:xfrm>
-          <a:prstGeom prst="rect">
-            <a:avLst/>
-          </a:prstGeom>
-          <a:noFill/>
-        </p:spPr>
-        <p:txBody>
-          <a:bodyPr wrap="square">
-            <a:spAutoFit/>
-          </a:bodyPr>
-          <a:lstStyle/>
-          <a:p>
-            <a:pPr algn="l">
-              <a:lnSpc>
-                <a:spcPct val="115000"/>
-              </a:lnSpc>
-              <a:spcAft>
-                <a:spcPts val="0"/>
-              </a:spcAft>
-            </a:pPr>
-            <a:r>
-              <a:rPr sz="1500" b="1">
-                <a:solidFill>
-                  <a:srgbClr val="141B2D"/>
-                </a:solidFill>
-                <a:latin typeface="Segoe UI"/>
-              </a:rPr>
-              <a:t>Verified against their golden manifest.</a:t>
-            </a:r>
-          </a:p>
-        </p:txBody>
-      </p:sp>
-      <p:sp>
-        <p:nvSpPr>
-          <p:cNvPr id="9" name="TextBox 8"/>
-          <p:cNvSpPr txBox="1"/>
-          <p:nvPr/>
-        </p:nvSpPr>
-        <p:spPr>
-          <a:xfrm>
-            <a:off x="868680" y="3036316"/>
-            <a:ext cx="10607040" cy="215900"/>
-          </a:xfrm>
-          <a:prstGeom prst="rect">
-            <a:avLst/>
-          </a:prstGeom>
-          <a:noFill/>
-        </p:spPr>
-        <p:txBody>
-          <a:bodyPr wrap="square">
-            <a:spAutoFit/>
-          </a:bodyPr>
-          <a:lstStyle/>
-          <a:p>
-            <a:pPr algn="l">
-              <a:lnSpc>
-                <a:spcPct val="125000"/>
-              </a:lnSpc>
-              <a:spcAft>
-                <a:spcPts val="0"/>
-              </a:spcAft>
-            </a:pPr>
-            <a:r>
-              <a:rPr sz="1250" b="0">
-                <a:solidFill>
-                  <a:srgbClr val="5A667A"/>
-                </a:solidFill>
-                <a:latin typeface="Segoe UI"/>
-              </a:rPr>
-              <a:t>Episode 0 starts at [130,130]; two 'up' moves give [130,98] then [130,66] - exactly the trajectory their recorded run produced.</a:t>
-            </a:r>
-          </a:p>
-        </p:txBody>
-      </p:sp>
-      <p:sp>
-        <p:nvSpPr>
-          <p:cNvPr id="10" name="TextBox 9"/>
-          <p:cNvSpPr txBox="1"/>
-          <p:nvPr/>
-        </p:nvSpPr>
-        <p:spPr>
-          <a:xfrm>
-            <a:off x="868680" y="3380232"/>
-            <a:ext cx="10607040" cy="255270"/>
-          </a:xfrm>
-          <a:prstGeom prst="rect">
-            <a:avLst/>
-          </a:prstGeom>
-          <a:noFill/>
-        </p:spPr>
-        <p:txBody>
-          <a:bodyPr wrap="square">
-            <a:spAutoFit/>
-          </a:bodyPr>
-          <a:lstStyle/>
-          <a:p>
-            <a:pPr algn="l">
-              <a:lnSpc>
-                <a:spcPct val="115000"/>
-              </a:lnSpc>
-              <a:spcAft>
-                <a:spcPts val="0"/>
-              </a:spcAft>
-            </a:pPr>
-            <a:r>
-              <a:rPr sz="1500" b="1">
-                <a:solidFill>
-                  <a:srgbClr val="141B2D"/>
-                </a:solidFill>
-                <a:latin typeface="Segoe UI"/>
-              </a:rPr>
-              <a:t>The rendered canvas matches the shipped bitmap pixel for pixel.</a:t>
-            </a:r>
-          </a:p>
-        </p:txBody>
-      </p:sp>
-      <p:sp>
-        <p:nvSpPr>
-          <p:cNvPr id="11" name="TextBox 10"/>
-          <p:cNvSpPr txBox="1"/>
-          <p:nvPr/>
-        </p:nvSpPr>
-        <p:spPr>
-          <a:xfrm>
-            <a:off x="868680" y="3681222"/>
-            <a:ext cx="10607040" cy="215900"/>
-          </a:xfrm>
-          <a:prstGeom prst="rect">
-            <a:avLst/>
-          </a:prstGeom>
-          <a:noFill/>
-        </p:spPr>
-        <p:txBody>
-          <a:bodyPr wrap="square">
-            <a:spAutoFit/>
-          </a:bodyPr>
-          <a:lstStyle/>
-          <a:p>
-            <a:pPr algn="l">
-              <a:lnSpc>
-                <a:spcPct val="125000"/>
-              </a:lnSpc>
-              <a:spcAft>
-                <a:spcPts val="0"/>
-              </a:spcAft>
-            </a:pPr>
-            <a:r>
-              <a:rPr sz="1250" b="0">
-                <a:solidFill>
-                  <a:srgbClr val="5A667A"/>
-                </a:solidFill>
-                <a:latin typeface="Segoe UI"/>
-              </a:rPr>
-              <a:t>Masking is measured by reading pixels back off the canvas, not eyeballed.</a:t>
-            </a:r>
-          </a:p>
-        </p:txBody>
-      </p:sp>
-      <p:sp>
-        <p:nvSpPr>
-          <p:cNvPr id="12" name="TextBox 11"/>
-          <p:cNvSpPr txBox="1"/>
-          <p:nvPr/>
-        </p:nvSpPr>
-        <p:spPr>
-          <a:xfrm>
-            <a:off x="868680" y="4025138"/>
-            <a:ext cx="10607040" cy="255270"/>
-          </a:xfrm>
-          <a:prstGeom prst="rect">
-            <a:avLst/>
-          </a:prstGeom>
-          <a:noFill/>
-        </p:spPr>
-        <p:txBody>
-          <a:bodyPr wrap="square">
-            <a:spAutoFit/>
-          </a:bodyPr>
-          <a:lstStyle/>
-          <a:p>
-            <a:pPr algn="l">
-              <a:lnSpc>
-                <a:spcPct val="115000"/>
-              </a:lnSpc>
-              <a:spcAft>
-                <a:spcPts val="0"/>
-              </a:spcAft>
-            </a:pPr>
-            <a:r>
-              <a:rPr sz="1500" b="1">
-                <a:solidFill>
-                  <a:srgbClr val="141B2D"/>
-                </a:solidFill>
-                <a:latin typeface="Segoe UI"/>
-              </a:rPr>
-              <a:t>Both games are checked in a real browser on the live site.</a:t>
-            </a:r>
-          </a:p>
-        </p:txBody>
-      </p:sp>
-      <p:sp>
-        <p:nvSpPr>
-          <p:cNvPr id="13" name="TextBox 12"/>
-          <p:cNvSpPr txBox="1"/>
-          <p:nvPr/>
-        </p:nvSpPr>
-        <p:spPr>
-          <a:xfrm>
-            <a:off x="868680" y="4326128"/>
-            <a:ext cx="10607040" cy="215900"/>
-          </a:xfrm>
-          <a:prstGeom prst="rect">
-            <a:avLst/>
-          </a:prstGeom>
-          <a:noFill/>
-        </p:spPr>
-        <p:txBody>
-          <a:bodyPr wrap="square">
-            <a:spAutoFit/>
-          </a:bodyPr>
-          <a:lstStyle/>
-          <a:p>
-            <a:pPr algn="l">
-              <a:lnSpc>
-                <a:spcPct val="125000"/>
-              </a:lnSpc>
-              <a:spcAft>
-                <a:spcPts val="0"/>
-              </a:spcAft>
-            </a:pPr>
-            <a:r>
-              <a:rPr sz="1250" b="0">
-                <a:solidFill>
-                  <a:srgbClr val="5A667A"/>
-                </a:solidFill>
-                <a:latin typeface="Segoe UI"/>
-              </a:rPr>
-              <a:t>Puzzle grading is tested in both directions: a wrong answer must be rejected and the right one accepted.</a:t>
+              <a:t>Published results, MNIST-PRO (arXiv:2608.31022). The gap is active perception, not recognition.</a:t>
             </a:r>
           </a:p>
         </p:txBody>

--- a/docs/MNIST-PRO-overview.pptx
+++ b/docs/MNIST-PRO-overview.pptx
@@ -24,6 +24,12 @@
     <p:sldId id="272" r:id="rId23"/>
     <p:sldId id="273" r:id="rId24"/>
     <p:sldId id="274" r:id="rId25"/>
+    <p:sldId id="275" r:id="rId26"/>
+    <p:sldId id="276" r:id="rId27"/>
+    <p:sldId id="277" r:id="rId28"/>
+    <p:sldId id="278" r:id="rId29"/>
+    <p:sldId id="279" r:id="rId30"/>
+    <p:sldId id="280" r:id="rId31"/>
   </p:sldIdLst>
   <p:sldSz cx="12191695" cy="6858000" type="screen4x3"/>
   <p:notesSz cx="6858000" cy="9144000"/>
@@ -5814,7 +5820,7 @@
                 </a:solidFill>
                 <a:latin typeface="Segoe UI"/>
               </a:rPr>
-              <a:t>DESIGN</a:t>
+              <a:t>HIGH-LEVEL DESIGN</a:t>
             </a:r>
           </a:p>
         </p:txBody>
@@ -5853,323 +5859,35 @@
                 </a:solidFill>
                 <a:latin typeface="Segoe UI"/>
               </a:rPr>
-              <a:t>Decisions, and why they went that way</a:t>
-            </a:r>
-          </a:p>
-        </p:txBody>
-      </p:sp>
-      <p:sp>
-        <p:nvSpPr>
-          <p:cNvPr id="6" name="TextBox 5"/>
-          <p:cNvSpPr txBox="1"/>
-          <p:nvPr/>
-        </p:nvSpPr>
-        <p:spPr>
-          <a:xfrm>
-            <a:off x="868680" y="1783080"/>
-            <a:ext cx="10607040" cy="246761"/>
-          </a:xfrm>
-          <a:prstGeom prst="rect">
-            <a:avLst/>
-          </a:prstGeom>
-          <a:noFill/>
-        </p:spPr>
-        <p:txBody>
-          <a:bodyPr wrap="square">
-            <a:spAutoFit/>
-          </a:bodyPr>
-          <a:lstStyle/>
-          <a:p>
-            <a:pPr algn="l">
-              <a:lnSpc>
-                <a:spcPct val="115000"/>
-              </a:lnSpc>
-            </a:pPr>
-            <a:r>
-              <a:rPr sz="1450" b="1" i="0">
-                <a:solidFill>
-                  <a:srgbClr val="141B2D"/>
-                </a:solidFill>
-                <a:latin typeface="Segoe UI"/>
-              </a:rPr>
-              <a:t>ARC first, MNIST-PRO second.</a:t>
-            </a:r>
-          </a:p>
-        </p:txBody>
-      </p:sp>
-      <p:sp>
-        <p:nvSpPr>
-          <p:cNvPr id="7" name="TextBox 6"/>
-          <p:cNvSpPr txBox="1"/>
-          <p:nvPr/>
-        </p:nvSpPr>
-        <p:spPr>
-          <a:xfrm>
-            <a:off x="868680" y="2066416"/>
-            <a:ext cx="10607040" cy="414528"/>
-          </a:xfrm>
-          <a:prstGeom prst="rect">
-            <a:avLst/>
-          </a:prstGeom>
-          <a:noFill/>
-        </p:spPr>
-        <p:txBody>
-          <a:bodyPr wrap="square">
-            <a:spAutoFit/>
-          </a:bodyPr>
-          <a:lstStyle/>
-          <a:p>
-            <a:pPr algn="l">
-              <a:lnSpc>
-                <a:spcPct val="125000"/>
-              </a:lnSpc>
-            </a:pPr>
-            <a:r>
-              <a:rPr sz="1200" b="0" i="0">
-                <a:solidFill>
-                  <a:srgbClr val="5A667A"/>
-                </a:solidFill>
-                <a:latin typeface="Segoe UI"/>
-              </a:rPr>
-              <a:t>ARC asks you to infer a rule in five minutes. That turned out to be the wrong kind of hard for a party game, so a task needing no prior knowledge became the front page.</a:t>
-            </a:r>
-          </a:p>
-        </p:txBody>
-      </p:sp>
-      <p:sp>
-        <p:nvSpPr>
-          <p:cNvPr id="8" name="TextBox 7"/>
-          <p:cNvSpPr txBox="1"/>
-          <p:nvPr/>
-        </p:nvSpPr>
-        <p:spPr>
-          <a:xfrm>
-            <a:off x="868680" y="2590673"/>
-            <a:ext cx="10607040" cy="246761"/>
-          </a:xfrm>
-          <a:prstGeom prst="rect">
-            <a:avLst/>
-          </a:prstGeom>
-          <a:noFill/>
-        </p:spPr>
-        <p:txBody>
-          <a:bodyPr wrap="square">
-            <a:spAutoFit/>
-          </a:bodyPr>
-          <a:lstStyle/>
-          <a:p>
-            <a:pPr algn="l">
-              <a:lnSpc>
-                <a:spcPct val="115000"/>
-              </a:lnSpc>
-            </a:pPr>
-            <a:r>
-              <a:rPr sz="1450" b="1" i="0">
-                <a:solidFill>
-                  <a:srgbClr val="141B2D"/>
-                </a:solidFill>
-                <a:latin typeface="Segoe UI"/>
-              </a:rPr>
-              <a:t>Difficulty measured rather than asserted.</a:t>
-            </a:r>
-          </a:p>
-        </p:txBody>
-      </p:sp>
-      <p:sp>
-        <p:nvSpPr>
-          <p:cNvPr id="9" name="TextBox 8"/>
-          <p:cNvSpPr txBox="1"/>
-          <p:nvPr/>
-        </p:nvSpPr>
-        <p:spPr>
-          <a:xfrm>
-            <a:off x="868680" y="2874010"/>
-            <a:ext cx="10607040" cy="414528"/>
-          </a:xfrm>
-          <a:prstGeom prst="rect">
-            <a:avLst/>
-          </a:prstGeom>
-          <a:noFill/>
-        </p:spPr>
-        <p:txBody>
-          <a:bodyPr wrap="square">
-            <a:spAutoFit/>
-          </a:bodyPr>
-          <a:lstStyle/>
-          <a:p>
-            <a:pPr algn="l">
-              <a:lnSpc>
-                <a:spcPct val="125000"/>
-              </a:lnSpc>
-            </a:pPr>
-            <a:r>
-              <a:rPr sz="1200" b="0" i="0">
-                <a:solidFill>
-                  <a:srgbClr val="5A667A"/>
-                </a:solidFill>
-                <a:latin typeface="Segoe UI"/>
-              </a:rPr>
-              <a:t>For ARC, a classifier found the 19 tasks a single rule explains. For MNIST-PRO, a simulation of 400 digits set the window size: 8x8 tiles end a round in 2 glimpses, 2x2 in 15. 4x4 was the playable middle.</a:t>
-            </a:r>
-          </a:p>
-        </p:txBody>
-      </p:sp>
-      <p:sp>
-        <p:nvSpPr>
-          <p:cNvPr id="10" name="TextBox 9"/>
-          <p:cNvSpPr txBox="1"/>
-          <p:nvPr/>
-        </p:nvSpPr>
-        <p:spPr>
-          <a:xfrm>
-            <a:off x="868680" y="3398266"/>
-            <a:ext cx="10607040" cy="246761"/>
-          </a:xfrm>
-          <a:prstGeom prst="rect">
-            <a:avLst/>
-          </a:prstGeom>
-          <a:noFill/>
-        </p:spPr>
-        <p:txBody>
-          <a:bodyPr wrap="square">
-            <a:spAutoFit/>
-          </a:bodyPr>
-          <a:lstStyle/>
-          <a:p>
-            <a:pPr algn="l">
-              <a:lnSpc>
-                <a:spcPct val="115000"/>
-              </a:lnSpc>
-            </a:pPr>
-            <a:r>
-              <a:rPr sz="1450" b="1" i="0">
-                <a:solidFill>
-                  <a:srgbClr val="141B2D"/>
-                </a:solidFill>
-                <a:latin typeface="Segoe UI"/>
-              </a:rPr>
-              <a:t>Steps, not seconds.</a:t>
-            </a:r>
-          </a:p>
-        </p:txBody>
-      </p:sp>
-      <p:sp>
-        <p:nvSpPr>
-          <p:cNvPr id="11" name="TextBox 10"/>
-          <p:cNvSpPr txBox="1"/>
-          <p:nvPr/>
-        </p:nvSpPr>
-        <p:spPr>
-          <a:xfrm>
-            <a:off x="868680" y="3681603"/>
-            <a:ext cx="10607040" cy="207264"/>
-          </a:xfrm>
-          <a:prstGeom prst="rect">
-            <a:avLst/>
-          </a:prstGeom>
-          <a:noFill/>
-        </p:spPr>
-        <p:txBody>
-          <a:bodyPr wrap="square">
-            <a:spAutoFit/>
-          </a:bodyPr>
-          <a:lstStyle/>
-          <a:p>
-            <a:pPr algn="l">
-              <a:lnSpc>
-                <a:spcPct val="125000"/>
-              </a:lnSpc>
-            </a:pPr>
-            <a:r>
-              <a:rPr sz="1200" b="0" i="0">
-                <a:solidFill>
-                  <a:srgbClr val="5A667A"/>
-                </a:solidFill>
-                <a:latin typeface="Segoe UI"/>
-              </a:rPr>
-              <a:t>Suggested by the first player to look at it, and correct: timing a networked opponent measures latency.</a:t>
-            </a:r>
-          </a:p>
-        </p:txBody>
-      </p:sp>
-      <p:sp>
-        <p:nvSpPr>
-          <p:cNvPr id="12" name="TextBox 11"/>
-          <p:cNvSpPr txBox="1"/>
-          <p:nvPr/>
-        </p:nvSpPr>
-        <p:spPr>
-          <a:xfrm>
-            <a:off x="868680" y="3998595"/>
-            <a:ext cx="10607040" cy="246761"/>
-          </a:xfrm>
-          <a:prstGeom prst="rect">
-            <a:avLst/>
-          </a:prstGeom>
-          <a:noFill/>
-        </p:spPr>
-        <p:txBody>
-          <a:bodyPr wrap="square">
-            <a:spAutoFit/>
-          </a:bodyPr>
-          <a:lstStyle/>
-          <a:p>
-            <a:pPr algn="l">
-              <a:lnSpc>
-                <a:spcPct val="115000"/>
-              </a:lnSpc>
-            </a:pPr>
-            <a:r>
-              <a:rPr sz="1450" b="1" i="0">
-                <a:solidFill>
-                  <a:srgbClr val="141B2D"/>
-                </a:solidFill>
-                <a:latin typeface="Segoe UI"/>
-              </a:rPr>
-              <a:t>The rules panel collapsed by default.</a:t>
-            </a:r>
-          </a:p>
-        </p:txBody>
-      </p:sp>
-      <p:sp>
-        <p:nvSpPr>
-          <p:cNvPr id="13" name="TextBox 12"/>
-          <p:cNvSpPr txBox="1"/>
-          <p:nvPr/>
-        </p:nvSpPr>
-        <p:spPr>
-          <a:xfrm>
-            <a:off x="868680" y="4281932"/>
-            <a:ext cx="10607040" cy="207264"/>
-          </a:xfrm>
-          <a:prstGeom prst="rect">
-            <a:avLst/>
-          </a:prstGeom>
-          <a:noFill/>
-        </p:spPr>
-        <p:txBody>
-          <a:bodyPr wrap="square">
-            <a:spAutoFit/>
-          </a:bodyPr>
-          <a:lstStyle/>
-          <a:p>
-            <a:pPr algn="l">
-              <a:lnSpc>
-                <a:spcPct val="125000"/>
-              </a:lnSpc>
-            </a:pPr>
-            <a:r>
-              <a:rPr sz="1200" b="0" i="0">
-                <a:solidFill>
-                  <a:srgbClr val="5A667A"/>
-                </a:solidFill>
-                <a:latin typeface="Segoe UI"/>
-              </a:rPr>
-              <a:t>It occupied the top of both games before anyone had pressed anything.</a:t>
-            </a:r>
-          </a:p>
-        </p:txBody>
-      </p:sp>
+              <a:t>Three parties, one of them optional</a:t>
+            </a:r>
+          </a:p>
+        </p:txBody>
+      </p:sp>
+      <p:pic>
+        <p:nvPicPr>
+          <p:cNvPr id="6" name="Picture 5" descr="chart_hld.png"/>
+          <p:cNvPicPr>
+            <a:picLocks noChangeAspect="1"/>
+          </p:cNvPicPr>
+          <p:nvPr/>
+        </p:nvPicPr>
+        <p:blipFill>
+          <a:blip r:embed="rId2"/>
+          <a:stretch>
+            <a:fillRect/>
+          </a:stretch>
+        </p:blipFill>
+        <p:spPr>
+          <a:xfrm>
+            <a:off x="868680" y="1600200"/>
+            <a:ext cx="10424160" cy="4572000"/>
+          </a:xfrm>
+          <a:prstGeom prst="rect">
+            <a:avLst/>
+          </a:prstGeom>
+        </p:spPr>
+      </p:pic>
     </p:spTree>
   </p:cSld>
   <p:clrMapOvr>
@@ -6310,7 +6028,7 @@
                 </a:solidFill>
                 <a:latin typeface="Segoe UI"/>
               </a:rPr>
-              <a:t>WHAT BUILDING IT TAUGHT US</a:t>
+              <a:t>HIGH-LEVEL DESIGN</a:t>
             </a:r>
           </a:p>
         </p:txBody>
@@ -6349,7 +6067,7 @@
                 </a:solidFill>
                 <a:latin typeface="Segoe UI"/>
               </a:rPr>
-              <a:t>The tests agreed with me more often than they should have</a:t>
+              <a:t>Where the trust boundaries fall</a:t>
             </a:r>
           </a:p>
         </p:txBody>
@@ -6388,7 +6106,7 @@
                 </a:solidFill>
                 <a:latin typeface="Segoe UI"/>
               </a:rPr>
-              <a:t>Five real bugs were caught by looking at screenshots, not by assertions.</a:t>
+              <a:t>The static origin holds no secrets, because it cannot hold anything.</a:t>
             </a:r>
           </a:p>
         </p:txBody>
@@ -6427,7 +6145,7 @@
                 </a:solidFill>
                 <a:latin typeface="Segoe UI"/>
               </a:rPr>
-              <a:t>A correct answer reported as 'Wrong - it answered null'. Panels frozen on a stale state. Overlays sitting on top of live canvases. Sensible actions rejected on formatting. A reply cut off by a token budget and scored as malformed.</a:t>
+              <a:t>GitHub Pages serves bytes. Every ARC answer it serves is a SHA-256 digest, and every MNIST canvas is a packed bitmap - correct to render, useless as an answer key.</a:t>
             </a:r>
           </a:p>
         </p:txBody>
@@ -6440,7 +6158,7 @@
         </p:nvSpPr>
         <p:spPr>
           <a:xfrm>
-            <a:off x="868680" y="2581529"/>
+            <a:off x="868680" y="2599817"/>
             <a:ext cx="10607040" cy="246761"/>
           </a:xfrm>
           <a:prstGeom prst="rect">
@@ -6466,7 +6184,7 @@
                 </a:solidFill>
                 <a:latin typeface="Segoe UI"/>
               </a:rPr>
-              <a:t>The common thread: asserting intent instead of outcome.</a:t>
+              <a:t>The browser is the only place a key exists, and only if the visitor brings one.</a:t>
             </a:r>
           </a:p>
         </p:txBody>
@@ -6479,7 +6197,7 @@
         </p:nvSpPr>
         <p:spPr>
           <a:xfrm>
-            <a:off x="868680" y="2864866"/>
+            <a:off x="868680" y="2883154"/>
             <a:ext cx="10607040" cy="414528"/>
           </a:xfrm>
           <a:prstGeom prst="rect">
@@ -6505,7 +6223,7 @@
                 </a:solidFill>
                 <a:latin typeface="Segoe UI"/>
               </a:rPr>
-              <a:t>Tests checked that hidden was set - it was - while the element stayed on screen, because an explicit CSS display beats the hidden attribute. Every such test passed throughout.</a:t>
+              <a:t>Held in localStorage, sent to openrouter.ai and nowhere else. Solo play never needs one, and the project's own key has never been in the repository.</a:t>
             </a:r>
           </a:p>
         </p:txBody>
@@ -6518,7 +6236,7 @@
         </p:nvSpPr>
         <p:spPr>
           <a:xfrm>
-            <a:off x="868680" y="3379978"/>
+            <a:off x="868680" y="3416553"/>
             <a:ext cx="10607040" cy="246761"/>
           </a:xfrm>
           <a:prstGeom prst="rect">
@@ -6544,7 +6262,7 @@
                 </a:solidFill>
                 <a:latin typeface="Segoe UI"/>
               </a:rPr>
-              <a:t>Fixes applied per-place rather than once come back.</a:t>
+              <a:t>The model sees one glimpse at a time and nothing else.</a:t>
             </a:r>
           </a:p>
         </p:txBody>
@@ -6557,7 +6275,85 @@
         </p:nvSpPr>
         <p:spPr>
           <a:xfrm>
-            <a:off x="868680" y="3663314"/>
+            <a:off x="868680" y="3699890"/>
+            <a:ext cx="10607040" cy="207264"/>
+          </a:xfrm>
+          <a:prstGeom prst="rect">
+            <a:avLst/>
+          </a:prstGeom>
+          <a:noFill/>
+        </p:spPr>
+        <p:txBody>
+          <a:bodyPr wrap="square">
+            <a:spAutoFit/>
+          </a:bodyPr>
+          <a:lstStyle/>
+          <a:p>
+            <a:pPr algn="l">
+              <a:lnSpc>
+                <a:spcPct val="125000"/>
+              </a:lnSpc>
+            </a:pPr>
+            <a:r>
+              <a:rPr sz="1200" b="0" i="0">
+                <a:solidFill>
+                  <a:srgbClr val="5A667A"/>
+                </a:solidFill>
+                <a:latin typeface="Segoe UI"/>
+              </a:rPr>
+              <a:t>A PNG of the current window plus the running transcript. It never receives the whole canvas, the label, or the human's progress.</a:t>
+            </a:r>
+          </a:p>
+        </p:txBody>
+      </p:sp>
+      <p:sp>
+        <p:nvSpPr>
+          <p:cNvPr id="12" name="TextBox 11"/>
+          <p:cNvSpPr txBox="1"/>
+          <p:nvPr/>
+        </p:nvSpPr>
+        <p:spPr>
+          <a:xfrm>
+            <a:off x="868680" y="4026026"/>
+            <a:ext cx="10607040" cy="246761"/>
+          </a:xfrm>
+          <a:prstGeom prst="rect">
+            <a:avLst/>
+          </a:prstGeom>
+          <a:noFill/>
+        </p:spPr>
+        <p:txBody>
+          <a:bodyPr wrap="square">
+            <a:spAutoFit/>
+          </a:bodyPr>
+          <a:lstStyle/>
+          <a:p>
+            <a:pPr algn="l">
+              <a:lnSpc>
+                <a:spcPct val="115000"/>
+              </a:lnSpc>
+            </a:pPr>
+            <a:r>
+              <a:rPr sz="1450" b="1" i="0">
+                <a:solidFill>
+                  <a:srgbClr val="141B2D"/>
+                </a:solidFill>
+                <a:latin typeface="Segoe UI"/>
+              </a:rPr>
+              <a:t>The backend is optional and currently undeployed.</a:t>
+            </a:r>
+          </a:p>
+        </p:txBody>
+      </p:sp>
+      <p:sp>
+        <p:nvSpPr>
+          <p:cNvPr id="13" name="TextBox 12"/>
+          <p:cNvSpPr txBox="1"/>
+          <p:nvPr/>
+        </p:nvSpPr>
+        <p:spPr>
+          <a:xfrm>
+            <a:off x="868680" y="4309364"/>
             <a:ext cx="10607040" cy="414528"/>
           </a:xfrm>
           <a:prstGeom prst="rect">
@@ -6583,85 +6379,7 @@
                 </a:solidFill>
                 <a:latin typeface="Segoe UI"/>
               </a:rPr>
-              <a:t>The hidden-attribute bug was patched in four components before being fixed globally. The token-budget check existed in two other code paths and was missing from the third.</a:t>
-            </a:r>
-          </a:p>
-        </p:txBody>
-      </p:sp>
-      <p:sp>
-        <p:nvSpPr>
-          <p:cNvPr id="12" name="TextBox 11"/>
-          <p:cNvSpPr txBox="1"/>
-          <p:nvPr/>
-        </p:nvSpPr>
-        <p:spPr>
-          <a:xfrm>
-            <a:off x="868680" y="4178427"/>
-            <a:ext cx="10607040" cy="246761"/>
-          </a:xfrm>
-          <a:prstGeom prst="rect">
-            <a:avLst/>
-          </a:prstGeom>
-          <a:noFill/>
-        </p:spPr>
-        <p:txBody>
-          <a:bodyPr wrap="square">
-            <a:spAutoFit/>
-          </a:bodyPr>
-          <a:lstStyle/>
-          <a:p>
-            <a:pPr algn="l">
-              <a:lnSpc>
-                <a:spcPct val="115000"/>
-              </a:lnSpc>
-            </a:pPr>
-            <a:r>
-              <a:rPr sz="1450" b="1" i="0">
-                <a:solidFill>
-                  <a:srgbClr val="141B2D"/>
-                </a:solidFill>
-                <a:latin typeface="Segoe UI"/>
-              </a:rPr>
-              <a:t>Diagnostics are a feature.</a:t>
-            </a:r>
-          </a:p>
-        </p:txBody>
-      </p:sp>
-      <p:sp>
-        <p:nvSpPr>
-          <p:cNvPr id="13" name="TextBox 12"/>
-          <p:cNvSpPr txBox="1"/>
-          <p:nvPr/>
-        </p:nvSpPr>
-        <p:spPr>
-          <a:xfrm>
-            <a:off x="868680" y="4461764"/>
-            <a:ext cx="10607040" cy="207264"/>
-          </a:xfrm>
-          <a:prstGeom prst="rect">
-            <a:avLst/>
-          </a:prstGeom>
-          <a:noFill/>
-        </p:spPr>
-        <p:txBody>
-          <a:bodyPr wrap="square">
-            <a:spAutoFit/>
-          </a:bodyPr>
-          <a:lstStyle/>
-          <a:p>
-            <a:pPr algn="l">
-              <a:lnSpc>
-                <a:spcPct val="125000"/>
-              </a:lnSpc>
-            </a:pPr>
-            <a:r>
-              <a:rPr sz="1200" b="0" i="0">
-                <a:solidFill>
-                  <a:srgbClr val="5A667A"/>
-                </a:solidFill>
-                <a:latin typeface="Segoe UI"/>
-              </a:rPr>
-              <a:t>The failure message now shows the model's actual reply. The bug that took three rounds to identify would have been obvious in one.</a:t>
+              <a:t>It exists for a hosted AI lane where the key stays server-side. Neither game needs it, which is why there is no server to operate or attack.</a:t>
             </a:r>
           </a:p>
         </p:txBody>
@@ -6806,7 +6524,7 @@
                 </a:solidFill>
                 <a:latin typeface="Segoe UI"/>
               </a:rPr>
-              <a:t>CREDITS</a:t>
+              <a:t>LOW-LEVEL DESIGN</a:t>
             </a:r>
           </a:p>
         </p:txBody>
@@ -6845,7 +6563,7 @@
                 </a:solidFill>
                 <a:latin typeface="Segoe UI"/>
               </a:rPr>
-              <a:t>Standing on other people's work</a:t>
+              <a:t>What each file is responsible for</a:t>
             </a:r>
           </a:p>
         </p:txBody>
@@ -6884,7 +6602,7 @@
                 </a:solidFill>
                 <a:latin typeface="Segoe UI"/>
               </a:rPr>
-              <a:t>MNIST-PRO  -  MIT</a:t>
+              <a:t>docs/js/mnistpro.js  -  746 lines</a:t>
             </a:r>
           </a:p>
         </p:txBody>
@@ -6923,7 +6641,7 @@
                 </a:solidFill>
                 <a:latin typeface="Segoe UI"/>
               </a:rPr>
-              <a:t>Toh, Majumder, Liu, Chen and Poria. DeCLaRe Lab, Nanyang Technological University, and A*STAR. arXiv:2608.31022  ·  github.com/declare-lab/MNIST-PRO</a:t>
+              <a:t>The MNIST-PRO client. Ports env.py: newLane, move, applyAction, and a REASON enum of answered / step_limit / invalid_action / stopped. Plus draw() mirroring render_observation, and the agent loop: runAi, callModel, extractJson, normaliseAction.</a:t>
             </a:r>
           </a:p>
         </p:txBody>
@@ -6936,7 +6654,7 @@
         </p:nvSpPr>
         <p:spPr>
           <a:xfrm>
-            <a:off x="868680" y="2663825"/>
+            <a:off x="868680" y="2581529"/>
             <a:ext cx="10607040" cy="246761"/>
           </a:xfrm>
           <a:prstGeom prst="rect">
@@ -6962,7 +6680,7 @@
                 </a:solidFill>
                 <a:latin typeface="Segoe UI"/>
               </a:rPr>
-              <a:t>MNIST  -  CC BY-SA 3.0</a:t>
+              <a:t>docs/js/game.js  -  971 lines</a:t>
             </a:r>
           </a:p>
         </p:txBody>
@@ -6975,7 +6693,7 @@
         </p:nvSpPr>
         <p:spPr>
           <a:xfrm>
-            <a:off x="868680" y="2947162"/>
+            <a:off x="868680" y="2864866"/>
             <a:ext cx="10607040" cy="207264"/>
           </a:xfrm>
           <a:prstGeom prst="rect">
@@ -7001,7 +6719,7 @@
                 </a:solidFill>
                 <a:latin typeface="Segoe UI"/>
               </a:rPr>
-              <a:t>LeCun, Cortes and Burges, derived from NIST Special Database 19.</a:t>
+              <a:t>The ARC client: grid editor, SHA-256 grading, five-minute clock, its own agent loop.</a:t>
             </a:r>
           </a:p>
         </p:txBody>
@@ -7014,7 +6732,7 @@
         </p:nvSpPr>
         <p:spPr>
           <a:xfrm>
-            <a:off x="868680" y="3337306"/>
+            <a:off x="868680" y="3172713"/>
             <a:ext cx="10607040" cy="246761"/>
           </a:xfrm>
           <a:prstGeom prst="rect">
@@ -7040,7 +6758,7 @@
                 </a:solidFill>
                 <a:latin typeface="Segoe UI"/>
               </a:rPr>
-              <a:t>ARC-AGI-1  -  Apache 2.0</a:t>
+              <a:t>docs/css/styles.css  -  1026 lines  ·  index.html, arc.html, guide.html</a:t>
             </a:r>
           </a:p>
         </p:txBody>
@@ -7053,7 +6771,7 @@
         </p:nvSpPr>
         <p:spPr>
           <a:xfrm>
-            <a:off x="868680" y="3620643"/>
+            <a:off x="868680" y="3456050"/>
             <a:ext cx="10607040" cy="207264"/>
           </a:xfrm>
           <a:prstGeom prst="rect">
@@ -7079,7 +6797,7 @@
                 </a:solidFill>
                 <a:latin typeface="Segoe UI"/>
               </a:rPr>
-              <a:t>Francois Chollet. The public training set, used unmodified.</a:t>
+              <a:t>One stylesheet for both games. No framework, no build step, no bundler.</a:t>
             </a:r>
           </a:p>
         </p:txBody>
@@ -7092,7 +6810,7 @@
         </p:nvSpPr>
         <p:spPr>
           <a:xfrm>
-            <a:off x="868680" y="4010787"/>
+            <a:off x="868680" y="3763899"/>
             <a:ext cx="10607040" cy="246761"/>
           </a:xfrm>
           <a:prstGeom prst="rect">
@@ -7118,7 +6836,7 @@
                 </a:solidFill>
                 <a:latin typeface="Segoe UI"/>
               </a:rPr>
-              <a:t>Licences are retained in the repository.</a:t>
+              <a:t>backend/app/  -  optional FastAPI service</a:t>
             </a:r>
           </a:p>
         </p:txBody>
@@ -7131,8 +6849,8 @@
         </p:nvSpPr>
         <p:spPr>
           <a:xfrm>
-            <a:off x="868680" y="4294124"/>
-            <a:ext cx="10607040" cy="207264"/>
+            <a:off x="868680" y="4047236"/>
+            <a:ext cx="10607040" cy="414528"/>
           </a:xfrm>
           <a:prstGeom prst="rect">
             <a:avLst/>
@@ -7157,7 +6875,7 @@
                 </a:solidFill>
                 <a:latin typeface="Segoe UI"/>
               </a:rPr>
-              <a:t>third_party/mnist-pro/LICENSE, with attribution files beside the generated data.</a:t>
+              <a:t>core/config.py holds the only secret; services/ has arc_service, session_manager and openrouter_agent; schemas/models.py validates every grid before it is trusted.</a:t>
             </a:r>
           </a:p>
         </p:txBody>
@@ -7195,7 +6913,7 @@
             <a:avLst/>
           </a:prstGeom>
           <a:solidFill>
-            <a:srgbClr val="0E1A2B"/>
+            <a:srgbClr val="FAFBFD"/>
           </a:solidFill>
           <a:ln>
             <a:noFill/>
@@ -7232,8 +6950,8 @@
         </p:nvSpPr>
         <p:spPr>
           <a:xfrm>
-            <a:off x="0" y="2697480"/>
-            <a:ext cx="12191695" cy="41148"/>
+            <a:off x="640080" y="566928"/>
+            <a:ext cx="82296" cy="420624"/>
           </a:xfrm>
           <a:prstGeom prst="rect">
             <a:avLst/>
@@ -7276,8 +6994,8 @@
         </p:nvSpPr>
         <p:spPr>
           <a:xfrm>
-            <a:off x="914400" y="1645920"/>
-            <a:ext cx="10515600" cy="822960"/>
+            <a:off x="868680" y="502920"/>
+            <a:ext cx="10058400" cy="310896"/>
           </a:xfrm>
           <a:prstGeom prst="rect">
             <a:avLst/>
@@ -7296,13 +7014,13 @@
               </a:lnSpc>
             </a:pPr>
             <a:r>
-              <a:rPr sz="3800" b="1" i="0">
-                <a:solidFill>
-                  <a:srgbClr val="FFFFFF"/>
-                </a:solidFill>
-                <a:latin typeface="Segoe UI"/>
-              </a:rPr>
-              <a:t>Play it</a:t>
+              <a:rPr sz="1100" b="1" i="0">
+                <a:solidFill>
+                  <a:srgbClr val="5A667A"/>
+                </a:solidFill>
+                <a:latin typeface="Segoe UI"/>
+              </a:rPr>
+              <a:t>LOW-LEVEL DESIGN</a:t>
             </a:r>
           </a:p>
         </p:txBody>
@@ -7315,81 +7033,33 @@
         </p:nvSpPr>
         <p:spPr>
           <a:xfrm>
-            <a:off x="914400" y="2971800"/>
-            <a:ext cx="10515600" cy="2194560"/>
-          </a:xfrm>
-          <a:prstGeom prst="rect">
-            <a:avLst/>
-          </a:prstGeom>
-          <a:noFill/>
-        </p:spPr>
-        <p:txBody>
-          <a:bodyPr wrap="square">
-            <a:spAutoFit/>
-          </a:bodyPr>
-          <a:lstStyle/>
-          <a:p>
-            <a:pPr algn="l">
-              <a:lnSpc>
-                <a:spcPct val="190000"/>
-              </a:lnSpc>
-            </a:pPr>
-            <a:r>
-              <a:rPr sz="1550" b="0" i="0">
-                <a:solidFill>
-                  <a:srgbClr val="D4DEEA"/>
-                </a:solidFill>
-                <a:latin typeface="Segoe UI"/>
-              </a:rPr>
-              <a:t>MNIST-PRO        panandi.github.io/mnistpro</a:t>
-            </a:r>
-          </a:p>
-          <a:p>
-            <a:pPr algn="l">
-              <a:lnSpc>
-                <a:spcPct val="190000"/>
-              </a:lnSpc>
-            </a:pPr>
-            <a:r>
-              <a:rPr sz="1550" b="0" i="0">
-                <a:solidFill>
-                  <a:srgbClr val="D4DEEA"/>
-                </a:solidFill>
-                <a:latin typeface="Segoe UI"/>
-              </a:rPr>
-              <a:t>ARC Race         panandi.github.io/mnistpro/arc.html</a:t>
-            </a:r>
-          </a:p>
-          <a:p>
-            <a:pPr algn="l">
-              <a:lnSpc>
-                <a:spcPct val="190000"/>
-              </a:lnSpc>
-            </a:pPr>
-            <a:r>
-              <a:rPr sz="1550" b="0" i="0">
-                <a:solidFill>
-                  <a:srgbClr val="D4DEEA"/>
-                </a:solidFill>
-                <a:latin typeface="Segoe UI"/>
-              </a:rPr>
-              <a:t>Player's guide   panandi.github.io/mnistpro/guide.html</a:t>
-            </a:r>
-          </a:p>
-          <a:p>
-            <a:pPr algn="l">
-              <a:lnSpc>
-                <a:spcPct val="190000"/>
-              </a:lnSpc>
-            </a:pPr>
-            <a:r>
-              <a:rPr sz="1550" b="0" i="0">
-                <a:solidFill>
-                  <a:srgbClr val="D4DEEA"/>
-                </a:solidFill>
-                <a:latin typeface="Segoe UI"/>
-              </a:rPr>
-              <a:t>Source           github.com/panandi/mnistpro</a:t>
+            <a:off x="841248" y="841248"/>
+            <a:ext cx="10607040" cy="566928"/>
+          </a:xfrm>
+          <a:prstGeom prst="rect">
+            <a:avLst/>
+          </a:prstGeom>
+          <a:noFill/>
+        </p:spPr>
+        <p:txBody>
+          <a:bodyPr wrap="square">
+            <a:spAutoFit/>
+          </a:bodyPr>
+          <a:lstStyle/>
+          <a:p>
+            <a:pPr algn="l">
+              <a:lnSpc>
+                <a:spcPct val="115000"/>
+              </a:lnSpc>
+            </a:pPr>
+            <a:r>
+              <a:rPr sz="2800" b="1" i="0">
+                <a:solidFill>
+                  <a:srgbClr val="141B2D"/>
+                </a:solidFill>
+                <a:latin typeface="Segoe UI"/>
+              </a:rPr>
+              <a:t>One AI step, end to end</a:t>
             </a:r>
           </a:p>
         </p:txBody>
@@ -7402,8 +7072,8 @@
         </p:nvSpPr>
         <p:spPr>
           <a:xfrm>
-            <a:off x="914400" y="5715000"/>
-            <a:ext cx="10515600" cy="548640"/>
+            <a:off x="868680" y="1783080"/>
+            <a:ext cx="10607040" cy="246761"/>
           </a:xfrm>
           <a:prstGeom prst="rect">
             <a:avLst/>
@@ -7422,13 +7092,286 @@
               </a:lnSpc>
             </a:pPr>
             <a:r>
-              <a:rPr sz="1300" b="0" i="0">
-                <a:solidFill>
-                  <a:srgbClr val="8D9DB2"/>
-                </a:solidFill>
-                <a:latin typeface="Segoe UI"/>
-              </a:rPr>
-              <a:t>No install, no sign-up, no key needed to play solo. Bring an OpenRouter key if you want to race the model.</a:t>
+              <a:rPr sz="1450" b="1" i="0">
+                <a:solidFill>
+                  <a:srgbClr val="141B2D"/>
+                </a:solidFill>
+                <a:latin typeface="Segoe UI"/>
+              </a:rPr>
+              <a:t>1.  Render the observation.</a:t>
+            </a:r>
+          </a:p>
+        </p:txBody>
+      </p:sp>
+      <p:sp>
+        <p:nvSpPr>
+          <p:cNvPr id="7" name="TextBox 6"/>
+          <p:cNvSpPr txBox="1"/>
+          <p:nvPr/>
+        </p:nvSpPr>
+        <p:spPr>
+          <a:xfrm>
+            <a:off x="868680" y="2066416"/>
+            <a:ext cx="10607040" cy="414528"/>
+          </a:xfrm>
+          <a:prstGeom prst="rect">
+            <a:avLst/>
+          </a:prstGeom>
+          <a:noFill/>
+        </p:spPr>
+        <p:txBody>
+          <a:bodyPr wrap="square">
+            <a:spAutoFit/>
+          </a:bodyPr>
+          <a:lstStyle/>
+          <a:p>
+            <a:pPr algn="l">
+              <a:lnSpc>
+                <a:spcPct val="125000"/>
+              </a:lnSpc>
+            </a:pPr>
+            <a:r>
+              <a:rPr sz="1200" b="0" i="0">
+                <a:solidFill>
+                  <a:srgbClr val="5A667A"/>
+                </a:solidFill>
+                <a:latin typeface="Segoe UI"/>
+              </a:rPr>
+              <a:t>draw() fills the canvas grey, pastes the 64px window from the unpacked bitmap and strokes the cyan border - the same masking render_observation performs. observationPng() forces a single window even when the spectator view shows a trail.</a:t>
+            </a:r>
+          </a:p>
+        </p:txBody>
+      </p:sp>
+      <p:sp>
+        <p:nvSpPr>
+          <p:cNvPr id="8" name="TextBox 7"/>
+          <p:cNvSpPr txBox="1"/>
+          <p:nvPr/>
+        </p:nvSpPr>
+        <p:spPr>
+          <a:xfrm>
+            <a:off x="868680" y="2572385"/>
+            <a:ext cx="10607040" cy="246761"/>
+          </a:xfrm>
+          <a:prstGeom prst="rect">
+            <a:avLst/>
+          </a:prstGeom>
+          <a:noFill/>
+        </p:spPr>
+        <p:txBody>
+          <a:bodyPr wrap="square">
+            <a:spAutoFit/>
+          </a:bodyPr>
+          <a:lstStyle/>
+          <a:p>
+            <a:pPr algn="l">
+              <a:lnSpc>
+                <a:spcPct val="115000"/>
+              </a:lnSpc>
+            </a:pPr>
+            <a:r>
+              <a:rPr sz="1450" b="1" i="0">
+                <a:solidFill>
+                  <a:srgbClr val="141B2D"/>
+                </a:solidFill>
+                <a:latin typeface="Segoe UI"/>
+              </a:rPr>
+              <a:t>2.  Ask the model.</a:t>
+            </a:r>
+          </a:p>
+        </p:txBody>
+      </p:sp>
+      <p:sp>
+        <p:nvSpPr>
+          <p:cNvPr id="9" name="TextBox 8"/>
+          <p:cNvSpPr txBox="1"/>
+          <p:nvPr/>
+        </p:nvSpPr>
+        <p:spPr>
+          <a:xfrm>
+            <a:off x="868680" y="2855722"/>
+            <a:ext cx="10607040" cy="414528"/>
+          </a:xfrm>
+          <a:prstGeom prst="rect">
+            <a:avLst/>
+          </a:prstGeom>
+          <a:noFill/>
+        </p:spPr>
+        <p:txBody>
+          <a:bodyPr wrap="square">
+            <a:spAutoFit/>
+          </a:bodyPr>
+          <a:lstStyle/>
+          <a:p>
+            <a:pPr algn="l">
+              <a:lnSpc>
+                <a:spcPct val="125000"/>
+              </a:lnSpc>
+            </a:pPr>
+            <a:r>
+              <a:rPr sz="1200" b="0" i="0">
+                <a:solidFill>
+                  <a:srgbClr val="5A667A"/>
+                </a:solidFill>
+                <a:latin typeface="Segoe UI"/>
+              </a:rPr>
+              <a:t>callModel posts the PNG plus the transcript, max_tokens 2000, and reads finish_reason. A truncated reply is retried with double the budget rather than repeated unchanged.</a:t>
+            </a:r>
+          </a:p>
+        </p:txBody>
+      </p:sp>
+      <p:sp>
+        <p:nvSpPr>
+          <p:cNvPr id="10" name="TextBox 9"/>
+          <p:cNvSpPr txBox="1"/>
+          <p:nvPr/>
+        </p:nvSpPr>
+        <p:spPr>
+          <a:xfrm>
+            <a:off x="868680" y="3361690"/>
+            <a:ext cx="10607040" cy="246761"/>
+          </a:xfrm>
+          <a:prstGeom prst="rect">
+            <a:avLst/>
+          </a:prstGeom>
+          <a:noFill/>
+        </p:spPr>
+        <p:txBody>
+          <a:bodyPr wrap="square">
+            <a:spAutoFit/>
+          </a:bodyPr>
+          <a:lstStyle/>
+          <a:p>
+            <a:pPr algn="l">
+              <a:lnSpc>
+                <a:spcPct val="115000"/>
+              </a:lnSpc>
+            </a:pPr>
+            <a:r>
+              <a:rPr sz="1450" b="1" i="0">
+                <a:solidFill>
+                  <a:srgbClr val="141B2D"/>
+                </a:solidFill>
+                <a:latin typeface="Segoe UI"/>
+              </a:rPr>
+              <a:t>3.  Read the action.</a:t>
+            </a:r>
+          </a:p>
+        </p:txBody>
+      </p:sp>
+      <p:sp>
+        <p:nvSpPr>
+          <p:cNvPr id="11" name="TextBox 10"/>
+          <p:cNvSpPr txBox="1"/>
+          <p:nvPr/>
+        </p:nvSpPr>
+        <p:spPr>
+          <a:xfrm>
+            <a:off x="868680" y="3645027"/>
+            <a:ext cx="10607040" cy="414528"/>
+          </a:xfrm>
+          <a:prstGeom prst="rect">
+            <a:avLst/>
+          </a:prstGeom>
+          <a:noFill/>
+        </p:spPr>
+        <p:txBody>
+          <a:bodyPr wrap="square">
+            <a:spAutoFit/>
+          </a:bodyPr>
+          <a:lstStyle/>
+          <a:p>
+            <a:pPr algn="l">
+              <a:lnSpc>
+                <a:spcPct val="125000"/>
+              </a:lnSpc>
+            </a:pPr>
+            <a:r>
+              <a:rPr sz="1200" b="0" i="0">
+                <a:solidFill>
+                  <a:srgbClr val="5A667A"/>
+                </a:solidFill>
+                <a:latin typeface="Segoe UI"/>
+              </a:rPr>
+              <a:t>extractJson strips code fences and scans every balanced object, preferring the last one that names an action. normaliseAction trims and lowercases it, so "Right." is honoured - an unrecognised verb still ends the episode, as the benchmark intends.</a:t>
+            </a:r>
+          </a:p>
+        </p:txBody>
+      </p:sp>
+      <p:sp>
+        <p:nvSpPr>
+          <p:cNvPr id="12" name="TextBox 11"/>
+          <p:cNvSpPr txBox="1"/>
+          <p:nvPr/>
+        </p:nvSpPr>
+        <p:spPr>
+          <a:xfrm>
+            <a:off x="868680" y="4150995"/>
+            <a:ext cx="10607040" cy="246761"/>
+          </a:xfrm>
+          <a:prstGeom prst="rect">
+            <a:avLst/>
+          </a:prstGeom>
+          <a:noFill/>
+        </p:spPr>
+        <p:txBody>
+          <a:bodyPr wrap="square">
+            <a:spAutoFit/>
+          </a:bodyPr>
+          <a:lstStyle/>
+          <a:p>
+            <a:pPr algn="l">
+              <a:lnSpc>
+                <a:spcPct val="115000"/>
+              </a:lnSpc>
+            </a:pPr>
+            <a:r>
+              <a:rPr sz="1450" b="1" i="0">
+                <a:solidFill>
+                  <a:srgbClr val="141B2D"/>
+                </a:solidFill>
+                <a:latin typeface="Segoe UI"/>
+              </a:rPr>
+              <a:t>4.  Apply it, or refuse and say why.</a:t>
+            </a:r>
+          </a:p>
+        </p:txBody>
+      </p:sp>
+      <p:sp>
+        <p:nvSpPr>
+          <p:cNvPr id="13" name="TextBox 12"/>
+          <p:cNvSpPr txBox="1"/>
+          <p:nvPr/>
+        </p:nvSpPr>
+        <p:spPr>
+          <a:xfrm>
+            <a:off x="868680" y="4434332"/>
+            <a:ext cx="10607040" cy="207264"/>
+          </a:xfrm>
+          <a:prstGeom prst="rect">
+            <a:avLst/>
+          </a:prstGeom>
+          <a:noFill/>
+        </p:spPr>
+        <p:txBody>
+          <a:bodyPr wrap="square">
+            <a:spAutoFit/>
+          </a:bodyPr>
+          <a:lstStyle/>
+          <a:p>
+            <a:pPr algn="l">
+              <a:lnSpc>
+                <a:spcPct val="125000"/>
+              </a:lnSpc>
+            </a:pPr>
+            <a:r>
+              <a:rPr sz="1200" b="0" i="0">
+                <a:solidFill>
+                  <a:srgbClr val="5A667A"/>
+                </a:solidFill>
+                <a:latin typeface="Segoe UI"/>
+              </a:rPr>
+              <a:t>applyAction reports whether it applied. A reply arriving after the round ended is discarded and logged rather than scored.</a:t>
             </a:r>
           </a:p>
         </p:txBody>
@@ -7886,6 +7829,2757 @@
                 <a:latin typeface="Segoe UI"/>
               </a:rPr>
               <a:t>Passive perception is not active perception. A model that reads an image perfectly can still be poor at deciding what to look at.</a:t>
+            </a:r>
+          </a:p>
+        </p:txBody>
+      </p:sp>
+    </p:spTree>
+  </p:cSld>
+  <p:clrMapOvr>
+    <a:masterClrMapping/>
+  </p:clrMapOvr>
+</p:sld>
+</file>
+
+<file path=ppt/slides/slide20.xml><?xml version="1.0" encoding="utf-8"?>
+<p:sld xmlns:a="http://schemas.openxmlformats.org/drawingml/2006/main" xmlns:p="http://schemas.openxmlformats.org/presentationml/2006/main" xmlns:r="http://schemas.openxmlformats.org/officeDocument/2006/relationships">
+  <p:cSld>
+    <p:spTree>
+      <p:nvGrpSpPr>
+        <p:cNvPr id="1" name=""/>
+        <p:cNvGrpSpPr/>
+        <p:nvPr/>
+      </p:nvGrpSpPr>
+      <p:grpSpPr/>
+      <p:sp>
+        <p:nvSpPr>
+          <p:cNvPr id="2" name="Rectangle 1"/>
+          <p:cNvSpPr/>
+          <p:nvPr/>
+        </p:nvSpPr>
+        <p:spPr>
+          <a:xfrm>
+            <a:off x="0" y="0"/>
+            <a:ext cx="12191695" cy="6858000"/>
+          </a:xfrm>
+          <a:prstGeom prst="rect">
+            <a:avLst/>
+          </a:prstGeom>
+          <a:solidFill>
+            <a:srgbClr val="FAFBFD"/>
+          </a:solidFill>
+          <a:ln>
+            <a:noFill/>
+          </a:ln>
+          <a:effectLst/>
+        </p:spPr>
+        <p:style>
+          <a:lnRef idx="1">
+            <a:schemeClr val="accent1"/>
+          </a:lnRef>
+          <a:fillRef idx="3">
+            <a:schemeClr val="accent1"/>
+          </a:fillRef>
+          <a:effectRef idx="2">
+            <a:schemeClr val="accent1"/>
+          </a:effectRef>
+          <a:fontRef idx="minor">
+            <a:schemeClr val="lt1"/>
+          </a:fontRef>
+        </p:style>
+        <p:txBody>
+          <a:bodyPr rtlCol="0" anchor="ctr"/>
+          <a:lstStyle/>
+          <a:p>
+            <a:pPr algn="ctr"/>
+          </a:p>
+        </p:txBody>
+      </p:sp>
+      <p:sp>
+        <p:nvSpPr>
+          <p:cNvPr id="3" name="Rectangle 2"/>
+          <p:cNvSpPr/>
+          <p:nvPr/>
+        </p:nvSpPr>
+        <p:spPr>
+          <a:xfrm>
+            <a:off x="640080" y="566928"/>
+            <a:ext cx="82296" cy="420624"/>
+          </a:xfrm>
+          <a:prstGeom prst="rect">
+            <a:avLst/>
+          </a:prstGeom>
+          <a:solidFill>
+            <a:srgbClr val="00A8BF"/>
+          </a:solidFill>
+          <a:ln>
+            <a:noFill/>
+          </a:ln>
+          <a:effectLst/>
+        </p:spPr>
+        <p:style>
+          <a:lnRef idx="1">
+            <a:schemeClr val="accent1"/>
+          </a:lnRef>
+          <a:fillRef idx="3">
+            <a:schemeClr val="accent1"/>
+          </a:fillRef>
+          <a:effectRef idx="2">
+            <a:schemeClr val="accent1"/>
+          </a:effectRef>
+          <a:fontRef idx="minor">
+            <a:schemeClr val="lt1"/>
+          </a:fontRef>
+        </p:style>
+        <p:txBody>
+          <a:bodyPr rtlCol="0" anchor="ctr"/>
+          <a:lstStyle/>
+          <a:p>
+            <a:pPr algn="ctr"/>
+          </a:p>
+        </p:txBody>
+      </p:sp>
+      <p:sp>
+        <p:nvSpPr>
+          <p:cNvPr id="4" name="TextBox 3"/>
+          <p:cNvSpPr txBox="1"/>
+          <p:nvPr/>
+        </p:nvSpPr>
+        <p:spPr>
+          <a:xfrm>
+            <a:off x="868680" y="502920"/>
+            <a:ext cx="10058400" cy="310896"/>
+          </a:xfrm>
+          <a:prstGeom prst="rect">
+            <a:avLst/>
+          </a:prstGeom>
+          <a:noFill/>
+        </p:spPr>
+        <p:txBody>
+          <a:bodyPr wrap="square">
+            <a:spAutoFit/>
+          </a:bodyPr>
+          <a:lstStyle/>
+          <a:p>
+            <a:pPr algn="l">
+              <a:lnSpc>
+                <a:spcPct val="115000"/>
+              </a:lnSpc>
+            </a:pPr>
+            <a:r>
+              <a:rPr sz="1100" b="1" i="0">
+                <a:solidFill>
+                  <a:srgbClr val="5A667A"/>
+                </a:solidFill>
+                <a:latin typeface="Segoe UI"/>
+              </a:rPr>
+              <a:t>LOW-LEVEL DESIGN</a:t>
+            </a:r>
+          </a:p>
+        </p:txBody>
+      </p:sp>
+      <p:sp>
+        <p:nvSpPr>
+          <p:cNvPr id="5" name="TextBox 4"/>
+          <p:cNvSpPr txBox="1"/>
+          <p:nvPr/>
+        </p:nvSpPr>
+        <p:spPr>
+          <a:xfrm>
+            <a:off x="841248" y="841248"/>
+            <a:ext cx="10607040" cy="566928"/>
+          </a:xfrm>
+          <a:prstGeom prst="rect">
+            <a:avLst/>
+          </a:prstGeom>
+          <a:noFill/>
+        </p:spPr>
+        <p:txBody>
+          <a:bodyPr wrap="square">
+            <a:spAutoFit/>
+          </a:bodyPr>
+          <a:lstStyle/>
+          <a:p>
+            <a:pPr algn="l">
+              <a:lnSpc>
+                <a:spcPct val="115000"/>
+              </a:lnSpc>
+            </a:pPr>
+            <a:r>
+              <a:rPr sz="2800" b="1" i="0">
+                <a:solidFill>
+                  <a:srgbClr val="141B2D"/>
+                </a:solidFill>
+                <a:latin typeface="Segoe UI"/>
+              </a:rPr>
+              <a:t>The two data contracts</a:t>
+            </a:r>
+          </a:p>
+        </p:txBody>
+      </p:sp>
+      <p:sp>
+        <p:nvSpPr>
+          <p:cNvPr id="6" name="TextBox 5"/>
+          <p:cNvSpPr txBox="1"/>
+          <p:nvPr/>
+        </p:nvSpPr>
+        <p:spPr>
+          <a:xfrm>
+            <a:off x="868680" y="1783080"/>
+            <a:ext cx="10607040" cy="246761"/>
+          </a:xfrm>
+          <a:prstGeom prst="rect">
+            <a:avLst/>
+          </a:prstGeom>
+          <a:noFill/>
+        </p:spPr>
+        <p:txBody>
+          <a:bodyPr wrap="square">
+            <a:spAutoFit/>
+          </a:bodyPr>
+          <a:lstStyle/>
+          <a:p>
+            <a:pPr algn="l">
+              <a:lnSpc>
+                <a:spcPct val="115000"/>
+              </a:lnSpc>
+            </a:pPr>
+            <a:r>
+              <a:rPr sz="1450" b="1" i="0">
+                <a:solidFill>
+                  <a:srgbClr val="141B2D"/>
+                </a:solidFill>
+                <a:latin typeface="Segoe UI"/>
+              </a:rPr>
+              <a:t>MNIST-PRO episode  -  data/mnistpro/episodes/epNNN.json</a:t>
+            </a:r>
+          </a:p>
+        </p:txBody>
+      </p:sp>
+      <p:sp>
+        <p:nvSpPr>
+          <p:cNvPr id="7" name="TextBox 6"/>
+          <p:cNvSpPr txBox="1"/>
+          <p:nvPr/>
+        </p:nvSpPr>
+        <p:spPr>
+          <a:xfrm>
+            <a:off x="868680" y="2066416"/>
+            <a:ext cx="10607040" cy="414528"/>
+          </a:xfrm>
+          <a:prstGeom prst="rect">
+            <a:avLst/>
+          </a:prstGeom>
+          <a:noFill/>
+        </p:spPr>
+        <p:txBody>
+          <a:bodyPr wrap="square">
+            <a:spAutoFit/>
+          </a:bodyPr>
+          <a:lstStyle/>
+          <a:p>
+            <a:pPr algn="l">
+              <a:lnSpc>
+                <a:spcPct val="125000"/>
+              </a:lnSpc>
+            </a:pPr>
+            <a:r>
+              <a:rPr sz="1200" b="0" i="0">
+                <a:solidFill>
+                  <a:srgbClr val="5A667A"/>
+                </a:solidFill>
+                <a:latin typeface="Segoe UI"/>
+              </a:rPr>
+              <a:t>id, label, source_index, width 224, height 224, box_size 64, step_size 32, max_steps 36, start [x,y], and bits: the stroke bitmap packed one pixel per bit as base64. 200 episodes, 2.5 MB, gzipped to a few hundred bytes each in transit.</a:t>
+            </a:r>
+          </a:p>
+        </p:txBody>
+      </p:sp>
+      <p:sp>
+        <p:nvSpPr>
+          <p:cNvPr id="8" name="TextBox 7"/>
+          <p:cNvSpPr txBox="1"/>
+          <p:nvPr/>
+        </p:nvSpPr>
+        <p:spPr>
+          <a:xfrm>
+            <a:off x="868680" y="2581529"/>
+            <a:ext cx="10607040" cy="246761"/>
+          </a:xfrm>
+          <a:prstGeom prst="rect">
+            <a:avLst/>
+          </a:prstGeom>
+          <a:noFill/>
+        </p:spPr>
+        <p:txBody>
+          <a:bodyPr wrap="square">
+            <a:spAutoFit/>
+          </a:bodyPr>
+          <a:lstStyle/>
+          <a:p>
+            <a:pPr algn="l">
+              <a:lnSpc>
+                <a:spcPct val="115000"/>
+              </a:lnSpc>
+            </a:pPr>
+            <a:r>
+              <a:rPr sz="1450" b="1" i="0">
+                <a:solidFill>
+                  <a:srgbClr val="141B2D"/>
+                </a:solidFill>
+                <a:latin typeface="Segoe UI"/>
+              </a:rPr>
+              <a:t>ARC task  -  data/tasks/&lt;id&gt;.json</a:t>
+            </a:r>
+          </a:p>
+        </p:txBody>
+      </p:sp>
+      <p:sp>
+        <p:nvSpPr>
+          <p:cNvPr id="9" name="TextBox 8"/>
+          <p:cNvSpPr txBox="1"/>
+          <p:nvPr/>
+        </p:nvSpPr>
+        <p:spPr>
+          <a:xfrm>
+            <a:off x="868680" y="2864866"/>
+            <a:ext cx="10607040" cy="414528"/>
+          </a:xfrm>
+          <a:prstGeom prst="rect">
+            <a:avLst/>
+          </a:prstGeom>
+          <a:noFill/>
+        </p:spPr>
+        <p:txBody>
+          <a:bodyPr wrap="square">
+            <a:spAutoFit/>
+          </a:bodyPr>
+          <a:lstStyle/>
+          <a:p>
+            <a:pPr algn="l">
+              <a:lnSpc>
+                <a:spcPct val="125000"/>
+              </a:lnSpc>
+            </a:pPr>
+            <a:r>
+              <a:rPr sz="1200" b="0" i="0">
+                <a:solidFill>
+                  <a:srgbClr val="5A667A"/>
+                </a:solidFill>
+                <a:latin typeface="Segoe UI"/>
+              </a:rPr>
+              <a:t>id, train, test_input, answer_sha256, answer_rows, answer_cols, and for the easy tier a tier and hint. The answer itself is never present. 386 tasks, 1.4 MB.</a:t>
+            </a:r>
+          </a:p>
+        </p:txBody>
+      </p:sp>
+      <p:sp>
+        <p:nvSpPr>
+          <p:cNvPr id="10" name="TextBox 9"/>
+          <p:cNvSpPr txBox="1"/>
+          <p:nvPr/>
+        </p:nvSpPr>
+        <p:spPr>
+          <a:xfrm>
+            <a:off x="868680" y="3379978"/>
+            <a:ext cx="10607040" cy="246761"/>
+          </a:xfrm>
+          <a:prstGeom prst="rect">
+            <a:avLst/>
+          </a:prstGeom>
+          <a:noFill/>
+        </p:spPr>
+        <p:txBody>
+          <a:bodyPr wrap="square">
+            <a:spAutoFit/>
+          </a:bodyPr>
+          <a:lstStyle/>
+          <a:p>
+            <a:pPr algn="l">
+              <a:lnSpc>
+                <a:spcPct val="115000"/>
+              </a:lnSpc>
+            </a:pPr>
+            <a:r>
+              <a:rPr sz="1450" b="1" i="0">
+                <a:solidFill>
+                  <a:srgbClr val="141B2D"/>
+                </a:solidFill>
+                <a:latin typeface="Segoe UI"/>
+              </a:rPr>
+              <a:t>Grading is a hash comparison, not a lookup.</a:t>
+            </a:r>
+          </a:p>
+        </p:txBody>
+      </p:sp>
+      <p:sp>
+        <p:nvSpPr>
+          <p:cNvPr id="11" name="TextBox 10"/>
+          <p:cNvSpPr txBox="1"/>
+          <p:nvPr/>
+        </p:nvSpPr>
+        <p:spPr>
+          <a:xfrm>
+            <a:off x="868680" y="3663314"/>
+            <a:ext cx="10607040" cy="207264"/>
+          </a:xfrm>
+          <a:prstGeom prst="rect">
+            <a:avLst/>
+          </a:prstGeom>
+          <a:noFill/>
+        </p:spPr>
+        <p:txBody>
+          <a:bodyPr wrap="square">
+            <a:spAutoFit/>
+          </a:bodyPr>
+          <a:lstStyle/>
+          <a:p>
+            <a:pPr algn="l">
+              <a:lnSpc>
+                <a:spcPct val="125000"/>
+              </a:lnSpc>
+            </a:pPr>
+            <a:r>
+              <a:rPr sz="1200" b="0" i="0">
+                <a:solidFill>
+                  <a:srgbClr val="5A667A"/>
+                </a:solidFill>
+                <a:latin typeface="Segoe UI"/>
+              </a:rPr>
+              <a:t>The browser hashes the submitted grid and compares digests, so a correct answer is recognised without the answer being in the page.</a:t>
+            </a:r>
+          </a:p>
+        </p:txBody>
+      </p:sp>
+      <p:sp>
+        <p:nvSpPr>
+          <p:cNvPr id="12" name="TextBox 11"/>
+          <p:cNvSpPr txBox="1"/>
+          <p:nvPr/>
+        </p:nvSpPr>
+        <p:spPr>
+          <a:xfrm>
+            <a:off x="868680" y="3971163"/>
+            <a:ext cx="10607040" cy="246761"/>
+          </a:xfrm>
+          <a:prstGeom prst="rect">
+            <a:avLst/>
+          </a:prstGeom>
+          <a:noFill/>
+        </p:spPr>
+        <p:txBody>
+          <a:bodyPr wrap="square">
+            <a:spAutoFit/>
+          </a:bodyPr>
+          <a:lstStyle/>
+          <a:p>
+            <a:pPr algn="l">
+              <a:lnSpc>
+                <a:spcPct val="115000"/>
+              </a:lnSpc>
+            </a:pPr>
+            <a:r>
+              <a:rPr sz="1450" b="1" i="0">
+                <a:solidFill>
+                  <a:srgbClr val="141B2D"/>
+                </a:solidFill>
+                <a:latin typeface="Segoe UI"/>
+              </a:rPr>
+              <a:t>Episode ids are the benchmark's own.</a:t>
+            </a:r>
+          </a:p>
+        </p:txBody>
+      </p:sp>
+      <p:sp>
+        <p:nvSpPr>
+          <p:cNvPr id="13" name="TextBox 12"/>
+          <p:cNvSpPr txBox="1"/>
+          <p:nvPr/>
+        </p:nvSpPr>
+        <p:spPr>
+          <a:xfrm>
+            <a:off x="868680" y="4254500"/>
+            <a:ext cx="10607040" cy="207264"/>
+          </a:xfrm>
+          <a:prstGeom prst="rect">
+            <a:avLst/>
+          </a:prstGeom>
+          <a:noFill/>
+        </p:spPr>
+        <p:txBody>
+          <a:bodyPr wrap="square">
+            <a:spAutoFit/>
+          </a:bodyPr>
+          <a:lstStyle/>
+          <a:p>
+            <a:pPr algn="l">
+              <a:lnSpc>
+                <a:spcPct val="125000"/>
+              </a:lnSpc>
+            </a:pPr>
+            <a:r>
+              <a:rPr sz="1200" b="0" i="0">
+                <a:solidFill>
+                  <a:srgbClr val="5A667A"/>
+                </a:solidFill>
+                <a:latin typeface="Segoe UI"/>
+              </a:rPr>
+              <a:t>Sampled with its sample_balanced at seed 42, so episode 0 here is episode 0 of the published runs - checked against their golden manifest.</a:t>
+            </a:r>
+          </a:p>
+        </p:txBody>
+      </p:sp>
+    </p:spTree>
+  </p:cSld>
+  <p:clrMapOvr>
+    <a:masterClrMapping/>
+  </p:clrMapOvr>
+</p:sld>
+</file>
+
+<file path=ppt/slides/slide21.xml><?xml version="1.0" encoding="utf-8"?>
+<p:sld xmlns:a="http://schemas.openxmlformats.org/drawingml/2006/main" xmlns:p="http://schemas.openxmlformats.org/presentationml/2006/main" xmlns:r="http://schemas.openxmlformats.org/officeDocument/2006/relationships">
+  <p:cSld>
+    <p:spTree>
+      <p:nvGrpSpPr>
+        <p:cNvPr id="1" name=""/>
+        <p:cNvGrpSpPr/>
+        <p:nvPr/>
+      </p:nvGrpSpPr>
+      <p:grpSpPr/>
+      <p:sp>
+        <p:nvSpPr>
+          <p:cNvPr id="2" name="Rectangle 1"/>
+          <p:cNvSpPr/>
+          <p:nvPr/>
+        </p:nvSpPr>
+        <p:spPr>
+          <a:xfrm>
+            <a:off x="0" y="0"/>
+            <a:ext cx="12191695" cy="6858000"/>
+          </a:xfrm>
+          <a:prstGeom prst="rect">
+            <a:avLst/>
+          </a:prstGeom>
+          <a:solidFill>
+            <a:srgbClr val="FAFBFD"/>
+          </a:solidFill>
+          <a:ln>
+            <a:noFill/>
+          </a:ln>
+          <a:effectLst/>
+        </p:spPr>
+        <p:style>
+          <a:lnRef idx="1">
+            <a:schemeClr val="accent1"/>
+          </a:lnRef>
+          <a:fillRef idx="3">
+            <a:schemeClr val="accent1"/>
+          </a:fillRef>
+          <a:effectRef idx="2">
+            <a:schemeClr val="accent1"/>
+          </a:effectRef>
+          <a:fontRef idx="minor">
+            <a:schemeClr val="lt1"/>
+          </a:fontRef>
+        </p:style>
+        <p:txBody>
+          <a:bodyPr rtlCol="0" anchor="ctr"/>
+          <a:lstStyle/>
+          <a:p>
+            <a:pPr algn="ctr"/>
+          </a:p>
+        </p:txBody>
+      </p:sp>
+      <p:sp>
+        <p:nvSpPr>
+          <p:cNvPr id="3" name="Rectangle 2"/>
+          <p:cNvSpPr/>
+          <p:nvPr/>
+        </p:nvSpPr>
+        <p:spPr>
+          <a:xfrm>
+            <a:off x="640080" y="566928"/>
+            <a:ext cx="82296" cy="420624"/>
+          </a:xfrm>
+          <a:prstGeom prst="rect">
+            <a:avLst/>
+          </a:prstGeom>
+          <a:solidFill>
+            <a:srgbClr val="00A8BF"/>
+          </a:solidFill>
+          <a:ln>
+            <a:noFill/>
+          </a:ln>
+          <a:effectLst/>
+        </p:spPr>
+        <p:style>
+          <a:lnRef idx="1">
+            <a:schemeClr val="accent1"/>
+          </a:lnRef>
+          <a:fillRef idx="3">
+            <a:schemeClr val="accent1"/>
+          </a:fillRef>
+          <a:effectRef idx="2">
+            <a:schemeClr val="accent1"/>
+          </a:effectRef>
+          <a:fontRef idx="minor">
+            <a:schemeClr val="lt1"/>
+          </a:fontRef>
+        </p:style>
+        <p:txBody>
+          <a:bodyPr rtlCol="0" anchor="ctr"/>
+          <a:lstStyle/>
+          <a:p>
+            <a:pPr algn="ctr"/>
+          </a:p>
+        </p:txBody>
+      </p:sp>
+      <p:sp>
+        <p:nvSpPr>
+          <p:cNvPr id="4" name="TextBox 3"/>
+          <p:cNvSpPr txBox="1"/>
+          <p:nvPr/>
+        </p:nvSpPr>
+        <p:spPr>
+          <a:xfrm>
+            <a:off x="868680" y="502920"/>
+            <a:ext cx="10058400" cy="310896"/>
+          </a:xfrm>
+          <a:prstGeom prst="rect">
+            <a:avLst/>
+          </a:prstGeom>
+          <a:noFill/>
+        </p:spPr>
+        <p:txBody>
+          <a:bodyPr wrap="square">
+            <a:spAutoFit/>
+          </a:bodyPr>
+          <a:lstStyle/>
+          <a:p>
+            <a:pPr algn="l">
+              <a:lnSpc>
+                <a:spcPct val="115000"/>
+              </a:lnSpc>
+            </a:pPr>
+            <a:r>
+              <a:rPr sz="1100" b="1" i="0">
+                <a:solidFill>
+                  <a:srgbClr val="5A667A"/>
+                </a:solidFill>
+                <a:latin typeface="Segoe UI"/>
+              </a:rPr>
+              <a:t>LOW-LEVEL DESIGN</a:t>
+            </a:r>
+          </a:p>
+        </p:txBody>
+      </p:sp>
+      <p:sp>
+        <p:nvSpPr>
+          <p:cNvPr id="5" name="TextBox 4"/>
+          <p:cNvSpPr txBox="1"/>
+          <p:nvPr/>
+        </p:nvSpPr>
+        <p:spPr>
+          <a:xfrm>
+            <a:off x="841248" y="841248"/>
+            <a:ext cx="10607040" cy="566928"/>
+          </a:xfrm>
+          <a:prstGeom prst="rect">
+            <a:avLst/>
+          </a:prstGeom>
+          <a:noFill/>
+        </p:spPr>
+        <p:txBody>
+          <a:bodyPr wrap="square">
+            <a:spAutoFit/>
+          </a:bodyPr>
+          <a:lstStyle/>
+          <a:p>
+            <a:pPr algn="l">
+              <a:lnSpc>
+                <a:spcPct val="115000"/>
+              </a:lnSpc>
+            </a:pPr>
+            <a:r>
+              <a:rPr sz="2800" b="1" i="0">
+                <a:solidFill>
+                  <a:srgbClr val="141B2D"/>
+                </a:solidFill>
+                <a:latin typeface="Segoe UI"/>
+              </a:rPr>
+              <a:t>How a lane can end, and who decides</a:t>
+            </a:r>
+          </a:p>
+        </p:txBody>
+      </p:sp>
+      <p:sp>
+        <p:nvSpPr>
+          <p:cNvPr id="6" name="TextBox 5"/>
+          <p:cNvSpPr txBox="1"/>
+          <p:nvPr/>
+        </p:nvSpPr>
+        <p:spPr>
+          <a:xfrm>
+            <a:off x="868680" y="1783080"/>
+            <a:ext cx="10607040" cy="246761"/>
+          </a:xfrm>
+          <a:prstGeom prst="rect">
+            <a:avLst/>
+          </a:prstGeom>
+          <a:noFill/>
+        </p:spPr>
+        <p:txBody>
+          <a:bodyPr wrap="square">
+            <a:spAutoFit/>
+          </a:bodyPr>
+          <a:lstStyle/>
+          <a:p>
+            <a:pPr algn="l">
+              <a:lnSpc>
+                <a:spcPct val="115000"/>
+              </a:lnSpc>
+            </a:pPr>
+            <a:r>
+              <a:rPr sz="1450" b="1" i="0">
+                <a:solidFill>
+                  <a:srgbClr val="141B2D"/>
+                </a:solidFill>
+                <a:latin typeface="Segoe UI"/>
+              </a:rPr>
+              <a:t>answered  -  the only outcome that can win.</a:t>
+            </a:r>
+          </a:p>
+        </p:txBody>
+      </p:sp>
+      <p:sp>
+        <p:nvSpPr>
+          <p:cNvPr id="7" name="TextBox 6"/>
+          <p:cNvSpPr txBox="1"/>
+          <p:nvPr/>
+        </p:nvSpPr>
+        <p:spPr>
+          <a:xfrm>
+            <a:off x="868680" y="2066416"/>
+            <a:ext cx="10607040" cy="207264"/>
+          </a:xfrm>
+          <a:prstGeom prst="rect">
+            <a:avLst/>
+          </a:prstGeom>
+          <a:noFill/>
+        </p:spPr>
+        <p:txBody>
+          <a:bodyPr wrap="square">
+            <a:spAutoFit/>
+          </a:bodyPr>
+          <a:lstStyle/>
+          <a:p>
+            <a:pPr algn="l">
+              <a:lnSpc>
+                <a:spcPct val="125000"/>
+              </a:lnSpc>
+            </a:pPr>
+            <a:r>
+              <a:rPr sz="1200" b="0" i="0">
+                <a:solidFill>
+                  <a:srgbClr val="5A667A"/>
+                </a:solidFill>
+                <a:latin typeface="Segoe UI"/>
+              </a:rPr>
+              <a:t>One answer per round: correct ends it, and so does wrong.</a:t>
+            </a:r>
+          </a:p>
+        </p:txBody>
+      </p:sp>
+      <p:sp>
+        <p:nvSpPr>
+          <p:cNvPr id="8" name="TextBox 7"/>
+          <p:cNvSpPr txBox="1"/>
+          <p:nvPr/>
+        </p:nvSpPr>
+        <p:spPr>
+          <a:xfrm>
+            <a:off x="868680" y="2419985"/>
+            <a:ext cx="10607040" cy="246761"/>
+          </a:xfrm>
+          <a:prstGeom prst="rect">
+            <a:avLst/>
+          </a:prstGeom>
+          <a:noFill/>
+        </p:spPr>
+        <p:txBody>
+          <a:bodyPr wrap="square">
+            <a:spAutoFit/>
+          </a:bodyPr>
+          <a:lstStyle/>
+          <a:p>
+            <a:pPr algn="l">
+              <a:lnSpc>
+                <a:spcPct val="115000"/>
+              </a:lnSpc>
+            </a:pPr>
+            <a:r>
+              <a:rPr sz="1450" b="1" i="0">
+                <a:solidFill>
+                  <a:srgbClr val="141B2D"/>
+                </a:solidFill>
+                <a:latin typeface="Segoe UI"/>
+              </a:rPr>
+              <a:t>step_limit  -  36 actions spent without answering.</a:t>
+            </a:r>
+          </a:p>
+        </p:txBody>
+      </p:sp>
+      <p:sp>
+        <p:nvSpPr>
+          <p:cNvPr id="9" name="TextBox 8"/>
+          <p:cNvSpPr txBox="1"/>
+          <p:nvPr/>
+        </p:nvSpPr>
+        <p:spPr>
+          <a:xfrm>
+            <a:off x="868680" y="2703322"/>
+            <a:ext cx="10607040" cy="207264"/>
+          </a:xfrm>
+          <a:prstGeom prst="rect">
+            <a:avLst/>
+          </a:prstGeom>
+          <a:noFill/>
+        </p:spPr>
+        <p:txBody>
+          <a:bodyPr wrap="square">
+            <a:spAutoFit/>
+          </a:bodyPr>
+          <a:lstStyle/>
+          <a:p>
+            <a:pPr algn="l">
+              <a:lnSpc>
+                <a:spcPct val="125000"/>
+              </a:lnSpc>
+            </a:pPr>
+            <a:r>
+              <a:rPr sz="1200" b="0" i="0">
+                <a:solidFill>
+                  <a:srgbClr val="5A667A"/>
+                </a:solidFill>
+                <a:latin typeface="Segoe UI"/>
+              </a:rPr>
+              <a:t>36 is exactly the number of distinct window positions.</a:t>
+            </a:r>
+          </a:p>
+        </p:txBody>
+      </p:sp>
+      <p:sp>
+        <p:nvSpPr>
+          <p:cNvPr id="10" name="TextBox 9"/>
+          <p:cNvSpPr txBox="1"/>
+          <p:nvPr/>
+        </p:nvSpPr>
+        <p:spPr>
+          <a:xfrm>
+            <a:off x="868680" y="3056890"/>
+            <a:ext cx="10607040" cy="246761"/>
+          </a:xfrm>
+          <a:prstGeom prst="rect">
+            <a:avLst/>
+          </a:prstGeom>
+          <a:noFill/>
+        </p:spPr>
+        <p:txBody>
+          <a:bodyPr wrap="square">
+            <a:spAutoFit/>
+          </a:bodyPr>
+          <a:lstStyle/>
+          <a:p>
+            <a:pPr algn="l">
+              <a:lnSpc>
+                <a:spcPct val="115000"/>
+              </a:lnSpc>
+            </a:pPr>
+            <a:r>
+              <a:rPr sz="1450" b="1" i="0">
+                <a:solidFill>
+                  <a:srgbClr val="141B2D"/>
+                </a:solidFill>
+                <a:latin typeface="Segoe UI"/>
+              </a:rPr>
+              <a:t>invalid_action  -  an unrecognised verb, or no usable action after three attempts.</a:t>
+            </a:r>
+          </a:p>
+        </p:txBody>
+      </p:sp>
+      <p:sp>
+        <p:nvSpPr>
+          <p:cNvPr id="11" name="TextBox 10"/>
+          <p:cNvSpPr txBox="1"/>
+          <p:nvPr/>
+        </p:nvSpPr>
+        <p:spPr>
+          <a:xfrm>
+            <a:off x="868680" y="3340227"/>
+            <a:ext cx="10607040" cy="414528"/>
+          </a:xfrm>
+          <a:prstGeom prst="rect">
+            <a:avLst/>
+          </a:prstGeom>
+          <a:noFill/>
+        </p:spPr>
+        <p:txBody>
+          <a:bodyPr wrap="square">
+            <a:spAutoFit/>
+          </a:bodyPr>
+          <a:lstStyle/>
+          <a:p>
+            <a:pPr algn="l">
+              <a:lnSpc>
+                <a:spcPct val="125000"/>
+              </a:lnSpc>
+            </a:pPr>
+            <a:r>
+              <a:rPr sz="1200" b="0" i="0">
+                <a:solidFill>
+                  <a:srgbClr val="5A667A"/>
+                </a:solidFill>
+                <a:latin typeface="Segoe UI"/>
+              </a:rPr>
+              <a:t>The benchmark scores malformed actions rather than raising, and so does this. The reply is now shown on screen, so the cause is visible instead of guessed at.</a:t>
+            </a:r>
+          </a:p>
+        </p:txBody>
+      </p:sp>
+      <p:sp>
+        <p:nvSpPr>
+          <p:cNvPr id="12" name="TextBox 11"/>
+          <p:cNvSpPr txBox="1"/>
+          <p:nvPr/>
+        </p:nvSpPr>
+        <p:spPr>
+          <a:xfrm>
+            <a:off x="868680" y="3901059"/>
+            <a:ext cx="10607040" cy="246761"/>
+          </a:xfrm>
+          <a:prstGeom prst="rect">
+            <a:avLst/>
+          </a:prstGeom>
+          <a:noFill/>
+        </p:spPr>
+        <p:txBody>
+          <a:bodyPr wrap="square">
+            <a:spAutoFit/>
+          </a:bodyPr>
+          <a:lstStyle/>
+          <a:p>
+            <a:pPr algn="l">
+              <a:lnSpc>
+                <a:spcPct val="115000"/>
+              </a:lnSpc>
+            </a:pPr>
+            <a:r>
+              <a:rPr sz="1450" b="1" i="0">
+                <a:solidFill>
+                  <a:srgbClr val="141B2D"/>
+                </a:solidFill>
+                <a:latin typeface="Segoe UI"/>
+              </a:rPr>
+              <a:t>stopped  -  a person pressed STOP.</a:t>
+            </a:r>
+          </a:p>
+        </p:txBody>
+      </p:sp>
+      <p:sp>
+        <p:nvSpPr>
+          <p:cNvPr id="13" name="TextBox 12"/>
+          <p:cNvSpPr txBox="1"/>
+          <p:nvPr/>
+        </p:nvSpPr>
+        <p:spPr>
+          <a:xfrm>
+            <a:off x="868680" y="4184396"/>
+            <a:ext cx="10607040" cy="207264"/>
+          </a:xfrm>
+          <a:prstGeom prst="rect">
+            <a:avLst/>
+          </a:prstGeom>
+          <a:noFill/>
+        </p:spPr>
+        <p:txBody>
+          <a:bodyPr wrap="square">
+            <a:spAutoFit/>
+          </a:bodyPr>
+          <a:lstStyle/>
+          <a:p>
+            <a:pPr algn="l">
+              <a:lnSpc>
+                <a:spcPct val="125000"/>
+              </a:lnSpc>
+            </a:pPr>
+            <a:r>
+              <a:rPr sz="1200" b="0" i="0">
+                <a:solidFill>
+                  <a:srgbClr val="5A667A"/>
+                </a:solidFill>
+                <a:latin typeface="Segoe UI"/>
+              </a:rPr>
+              <a:t>Kept distinct from running out of steps, because reporting it as the latter was a lie the interface told for several days.</a:t>
+            </a:r>
+          </a:p>
+        </p:txBody>
+      </p:sp>
+    </p:spTree>
+  </p:cSld>
+  <p:clrMapOvr>
+    <a:masterClrMapping/>
+  </p:clrMapOvr>
+</p:sld>
+</file>
+
+<file path=ppt/slides/slide22.xml><?xml version="1.0" encoding="utf-8"?>
+<p:sld xmlns:a="http://schemas.openxmlformats.org/drawingml/2006/main" xmlns:p="http://schemas.openxmlformats.org/presentationml/2006/main" xmlns:r="http://schemas.openxmlformats.org/officeDocument/2006/relationships">
+  <p:cSld>
+    <p:spTree>
+      <p:nvGrpSpPr>
+        <p:cNvPr id="1" name=""/>
+        <p:cNvGrpSpPr/>
+        <p:nvPr/>
+      </p:nvGrpSpPr>
+      <p:grpSpPr/>
+      <p:sp>
+        <p:nvSpPr>
+          <p:cNvPr id="2" name="Rectangle 1"/>
+          <p:cNvSpPr/>
+          <p:nvPr/>
+        </p:nvSpPr>
+        <p:spPr>
+          <a:xfrm>
+            <a:off x="0" y="0"/>
+            <a:ext cx="12191695" cy="6858000"/>
+          </a:xfrm>
+          <a:prstGeom prst="rect">
+            <a:avLst/>
+          </a:prstGeom>
+          <a:solidFill>
+            <a:srgbClr val="FAFBFD"/>
+          </a:solidFill>
+          <a:ln>
+            <a:noFill/>
+          </a:ln>
+          <a:effectLst/>
+        </p:spPr>
+        <p:style>
+          <a:lnRef idx="1">
+            <a:schemeClr val="accent1"/>
+          </a:lnRef>
+          <a:fillRef idx="3">
+            <a:schemeClr val="accent1"/>
+          </a:fillRef>
+          <a:effectRef idx="2">
+            <a:schemeClr val="accent1"/>
+          </a:effectRef>
+          <a:fontRef idx="minor">
+            <a:schemeClr val="lt1"/>
+          </a:fontRef>
+        </p:style>
+        <p:txBody>
+          <a:bodyPr rtlCol="0" anchor="ctr"/>
+          <a:lstStyle/>
+          <a:p>
+            <a:pPr algn="ctr"/>
+          </a:p>
+        </p:txBody>
+      </p:sp>
+      <p:sp>
+        <p:nvSpPr>
+          <p:cNvPr id="3" name="Rectangle 2"/>
+          <p:cNvSpPr/>
+          <p:nvPr/>
+        </p:nvSpPr>
+        <p:spPr>
+          <a:xfrm>
+            <a:off x="640080" y="566928"/>
+            <a:ext cx="82296" cy="420624"/>
+          </a:xfrm>
+          <a:prstGeom prst="rect">
+            <a:avLst/>
+          </a:prstGeom>
+          <a:solidFill>
+            <a:srgbClr val="00A8BF"/>
+          </a:solidFill>
+          <a:ln>
+            <a:noFill/>
+          </a:ln>
+          <a:effectLst/>
+        </p:spPr>
+        <p:style>
+          <a:lnRef idx="1">
+            <a:schemeClr val="accent1"/>
+          </a:lnRef>
+          <a:fillRef idx="3">
+            <a:schemeClr val="accent1"/>
+          </a:fillRef>
+          <a:effectRef idx="2">
+            <a:schemeClr val="accent1"/>
+          </a:effectRef>
+          <a:fontRef idx="minor">
+            <a:schemeClr val="lt1"/>
+          </a:fontRef>
+        </p:style>
+        <p:txBody>
+          <a:bodyPr rtlCol="0" anchor="ctr"/>
+          <a:lstStyle/>
+          <a:p>
+            <a:pPr algn="ctr"/>
+          </a:p>
+        </p:txBody>
+      </p:sp>
+      <p:sp>
+        <p:nvSpPr>
+          <p:cNvPr id="4" name="TextBox 3"/>
+          <p:cNvSpPr txBox="1"/>
+          <p:nvPr/>
+        </p:nvSpPr>
+        <p:spPr>
+          <a:xfrm>
+            <a:off x="868680" y="502920"/>
+            <a:ext cx="10058400" cy="310896"/>
+          </a:xfrm>
+          <a:prstGeom prst="rect">
+            <a:avLst/>
+          </a:prstGeom>
+          <a:noFill/>
+        </p:spPr>
+        <p:txBody>
+          <a:bodyPr wrap="square">
+            <a:spAutoFit/>
+          </a:bodyPr>
+          <a:lstStyle/>
+          <a:p>
+            <a:pPr algn="l">
+              <a:lnSpc>
+                <a:spcPct val="115000"/>
+              </a:lnSpc>
+            </a:pPr>
+            <a:r>
+              <a:rPr sz="1100" b="1" i="0">
+                <a:solidFill>
+                  <a:srgbClr val="5A667A"/>
+                </a:solidFill>
+                <a:latin typeface="Segoe UI"/>
+              </a:rPr>
+              <a:t>DESIGN</a:t>
+            </a:r>
+          </a:p>
+        </p:txBody>
+      </p:sp>
+      <p:sp>
+        <p:nvSpPr>
+          <p:cNvPr id="5" name="TextBox 4"/>
+          <p:cNvSpPr txBox="1"/>
+          <p:nvPr/>
+        </p:nvSpPr>
+        <p:spPr>
+          <a:xfrm>
+            <a:off x="841248" y="841248"/>
+            <a:ext cx="10607040" cy="566928"/>
+          </a:xfrm>
+          <a:prstGeom prst="rect">
+            <a:avLst/>
+          </a:prstGeom>
+          <a:noFill/>
+        </p:spPr>
+        <p:txBody>
+          <a:bodyPr wrap="square">
+            <a:spAutoFit/>
+          </a:bodyPr>
+          <a:lstStyle/>
+          <a:p>
+            <a:pPr algn="l">
+              <a:lnSpc>
+                <a:spcPct val="115000"/>
+              </a:lnSpc>
+            </a:pPr>
+            <a:r>
+              <a:rPr sz="2800" b="1" i="0">
+                <a:solidFill>
+                  <a:srgbClr val="141B2D"/>
+                </a:solidFill>
+                <a:latin typeface="Segoe UI"/>
+              </a:rPr>
+              <a:t>Decisions, and why they went that way</a:t>
+            </a:r>
+          </a:p>
+        </p:txBody>
+      </p:sp>
+      <p:sp>
+        <p:nvSpPr>
+          <p:cNvPr id="6" name="TextBox 5"/>
+          <p:cNvSpPr txBox="1"/>
+          <p:nvPr/>
+        </p:nvSpPr>
+        <p:spPr>
+          <a:xfrm>
+            <a:off x="868680" y="1783080"/>
+            <a:ext cx="10607040" cy="246761"/>
+          </a:xfrm>
+          <a:prstGeom prst="rect">
+            <a:avLst/>
+          </a:prstGeom>
+          <a:noFill/>
+        </p:spPr>
+        <p:txBody>
+          <a:bodyPr wrap="square">
+            <a:spAutoFit/>
+          </a:bodyPr>
+          <a:lstStyle/>
+          <a:p>
+            <a:pPr algn="l">
+              <a:lnSpc>
+                <a:spcPct val="115000"/>
+              </a:lnSpc>
+            </a:pPr>
+            <a:r>
+              <a:rPr sz="1450" b="1" i="0">
+                <a:solidFill>
+                  <a:srgbClr val="141B2D"/>
+                </a:solidFill>
+                <a:latin typeface="Segoe UI"/>
+              </a:rPr>
+              <a:t>ARC first, MNIST-PRO second.</a:t>
+            </a:r>
+          </a:p>
+        </p:txBody>
+      </p:sp>
+      <p:sp>
+        <p:nvSpPr>
+          <p:cNvPr id="7" name="TextBox 6"/>
+          <p:cNvSpPr txBox="1"/>
+          <p:nvPr/>
+        </p:nvSpPr>
+        <p:spPr>
+          <a:xfrm>
+            <a:off x="868680" y="2066416"/>
+            <a:ext cx="10607040" cy="414528"/>
+          </a:xfrm>
+          <a:prstGeom prst="rect">
+            <a:avLst/>
+          </a:prstGeom>
+          <a:noFill/>
+        </p:spPr>
+        <p:txBody>
+          <a:bodyPr wrap="square">
+            <a:spAutoFit/>
+          </a:bodyPr>
+          <a:lstStyle/>
+          <a:p>
+            <a:pPr algn="l">
+              <a:lnSpc>
+                <a:spcPct val="125000"/>
+              </a:lnSpc>
+            </a:pPr>
+            <a:r>
+              <a:rPr sz="1200" b="0" i="0">
+                <a:solidFill>
+                  <a:srgbClr val="5A667A"/>
+                </a:solidFill>
+                <a:latin typeface="Segoe UI"/>
+              </a:rPr>
+              <a:t>ARC asks you to infer a rule in five minutes. That turned out to be the wrong kind of hard for a party game, so a task needing no prior knowledge became the front page.</a:t>
+            </a:r>
+          </a:p>
+        </p:txBody>
+      </p:sp>
+      <p:sp>
+        <p:nvSpPr>
+          <p:cNvPr id="8" name="TextBox 7"/>
+          <p:cNvSpPr txBox="1"/>
+          <p:nvPr/>
+        </p:nvSpPr>
+        <p:spPr>
+          <a:xfrm>
+            <a:off x="868680" y="2590673"/>
+            <a:ext cx="10607040" cy="246761"/>
+          </a:xfrm>
+          <a:prstGeom prst="rect">
+            <a:avLst/>
+          </a:prstGeom>
+          <a:noFill/>
+        </p:spPr>
+        <p:txBody>
+          <a:bodyPr wrap="square">
+            <a:spAutoFit/>
+          </a:bodyPr>
+          <a:lstStyle/>
+          <a:p>
+            <a:pPr algn="l">
+              <a:lnSpc>
+                <a:spcPct val="115000"/>
+              </a:lnSpc>
+            </a:pPr>
+            <a:r>
+              <a:rPr sz="1450" b="1" i="0">
+                <a:solidFill>
+                  <a:srgbClr val="141B2D"/>
+                </a:solidFill>
+                <a:latin typeface="Segoe UI"/>
+              </a:rPr>
+              <a:t>Difficulty measured rather than asserted.</a:t>
+            </a:r>
+          </a:p>
+        </p:txBody>
+      </p:sp>
+      <p:sp>
+        <p:nvSpPr>
+          <p:cNvPr id="9" name="TextBox 8"/>
+          <p:cNvSpPr txBox="1"/>
+          <p:nvPr/>
+        </p:nvSpPr>
+        <p:spPr>
+          <a:xfrm>
+            <a:off x="868680" y="2874010"/>
+            <a:ext cx="10607040" cy="414528"/>
+          </a:xfrm>
+          <a:prstGeom prst="rect">
+            <a:avLst/>
+          </a:prstGeom>
+          <a:noFill/>
+        </p:spPr>
+        <p:txBody>
+          <a:bodyPr wrap="square">
+            <a:spAutoFit/>
+          </a:bodyPr>
+          <a:lstStyle/>
+          <a:p>
+            <a:pPr algn="l">
+              <a:lnSpc>
+                <a:spcPct val="125000"/>
+              </a:lnSpc>
+            </a:pPr>
+            <a:r>
+              <a:rPr sz="1200" b="0" i="0">
+                <a:solidFill>
+                  <a:srgbClr val="5A667A"/>
+                </a:solidFill>
+                <a:latin typeface="Segoe UI"/>
+              </a:rPr>
+              <a:t>For ARC, a classifier found the 19 tasks a single rule explains. For MNIST-PRO, a simulation of 400 digits set the window size: 8x8 tiles end a round in 2 glimpses, 2x2 in 15. 4x4 was the playable middle.</a:t>
+            </a:r>
+          </a:p>
+        </p:txBody>
+      </p:sp>
+      <p:sp>
+        <p:nvSpPr>
+          <p:cNvPr id="10" name="TextBox 9"/>
+          <p:cNvSpPr txBox="1"/>
+          <p:nvPr/>
+        </p:nvSpPr>
+        <p:spPr>
+          <a:xfrm>
+            <a:off x="868680" y="3398266"/>
+            <a:ext cx="10607040" cy="246761"/>
+          </a:xfrm>
+          <a:prstGeom prst="rect">
+            <a:avLst/>
+          </a:prstGeom>
+          <a:noFill/>
+        </p:spPr>
+        <p:txBody>
+          <a:bodyPr wrap="square">
+            <a:spAutoFit/>
+          </a:bodyPr>
+          <a:lstStyle/>
+          <a:p>
+            <a:pPr algn="l">
+              <a:lnSpc>
+                <a:spcPct val="115000"/>
+              </a:lnSpc>
+            </a:pPr>
+            <a:r>
+              <a:rPr sz="1450" b="1" i="0">
+                <a:solidFill>
+                  <a:srgbClr val="141B2D"/>
+                </a:solidFill>
+                <a:latin typeface="Segoe UI"/>
+              </a:rPr>
+              <a:t>Steps, not seconds.</a:t>
+            </a:r>
+          </a:p>
+        </p:txBody>
+      </p:sp>
+      <p:sp>
+        <p:nvSpPr>
+          <p:cNvPr id="11" name="TextBox 10"/>
+          <p:cNvSpPr txBox="1"/>
+          <p:nvPr/>
+        </p:nvSpPr>
+        <p:spPr>
+          <a:xfrm>
+            <a:off x="868680" y="3681603"/>
+            <a:ext cx="10607040" cy="207264"/>
+          </a:xfrm>
+          <a:prstGeom prst="rect">
+            <a:avLst/>
+          </a:prstGeom>
+          <a:noFill/>
+        </p:spPr>
+        <p:txBody>
+          <a:bodyPr wrap="square">
+            <a:spAutoFit/>
+          </a:bodyPr>
+          <a:lstStyle/>
+          <a:p>
+            <a:pPr algn="l">
+              <a:lnSpc>
+                <a:spcPct val="125000"/>
+              </a:lnSpc>
+            </a:pPr>
+            <a:r>
+              <a:rPr sz="1200" b="0" i="0">
+                <a:solidFill>
+                  <a:srgbClr val="5A667A"/>
+                </a:solidFill>
+                <a:latin typeface="Segoe UI"/>
+              </a:rPr>
+              <a:t>Suggested by the first player to look at it, and correct: timing a networked opponent measures latency.</a:t>
+            </a:r>
+          </a:p>
+        </p:txBody>
+      </p:sp>
+      <p:sp>
+        <p:nvSpPr>
+          <p:cNvPr id="12" name="TextBox 11"/>
+          <p:cNvSpPr txBox="1"/>
+          <p:nvPr/>
+        </p:nvSpPr>
+        <p:spPr>
+          <a:xfrm>
+            <a:off x="868680" y="3998595"/>
+            <a:ext cx="10607040" cy="246761"/>
+          </a:xfrm>
+          <a:prstGeom prst="rect">
+            <a:avLst/>
+          </a:prstGeom>
+          <a:noFill/>
+        </p:spPr>
+        <p:txBody>
+          <a:bodyPr wrap="square">
+            <a:spAutoFit/>
+          </a:bodyPr>
+          <a:lstStyle/>
+          <a:p>
+            <a:pPr algn="l">
+              <a:lnSpc>
+                <a:spcPct val="115000"/>
+              </a:lnSpc>
+            </a:pPr>
+            <a:r>
+              <a:rPr sz="1450" b="1" i="0">
+                <a:solidFill>
+                  <a:srgbClr val="141B2D"/>
+                </a:solidFill>
+                <a:latin typeface="Segoe UI"/>
+              </a:rPr>
+              <a:t>The rules panel collapsed by default.</a:t>
+            </a:r>
+          </a:p>
+        </p:txBody>
+      </p:sp>
+      <p:sp>
+        <p:nvSpPr>
+          <p:cNvPr id="13" name="TextBox 12"/>
+          <p:cNvSpPr txBox="1"/>
+          <p:nvPr/>
+        </p:nvSpPr>
+        <p:spPr>
+          <a:xfrm>
+            <a:off x="868680" y="4281932"/>
+            <a:ext cx="10607040" cy="207264"/>
+          </a:xfrm>
+          <a:prstGeom prst="rect">
+            <a:avLst/>
+          </a:prstGeom>
+          <a:noFill/>
+        </p:spPr>
+        <p:txBody>
+          <a:bodyPr wrap="square">
+            <a:spAutoFit/>
+          </a:bodyPr>
+          <a:lstStyle/>
+          <a:p>
+            <a:pPr algn="l">
+              <a:lnSpc>
+                <a:spcPct val="125000"/>
+              </a:lnSpc>
+            </a:pPr>
+            <a:r>
+              <a:rPr sz="1200" b="0" i="0">
+                <a:solidFill>
+                  <a:srgbClr val="5A667A"/>
+                </a:solidFill>
+                <a:latin typeface="Segoe UI"/>
+              </a:rPr>
+              <a:t>It occupied the top of both games before anyone had pressed anything.</a:t>
+            </a:r>
+          </a:p>
+        </p:txBody>
+      </p:sp>
+    </p:spTree>
+  </p:cSld>
+  <p:clrMapOvr>
+    <a:masterClrMapping/>
+  </p:clrMapOvr>
+</p:sld>
+</file>
+
+<file path=ppt/slides/slide23.xml><?xml version="1.0" encoding="utf-8"?>
+<p:sld xmlns:a="http://schemas.openxmlformats.org/drawingml/2006/main" xmlns:p="http://schemas.openxmlformats.org/presentationml/2006/main" xmlns:r="http://schemas.openxmlformats.org/officeDocument/2006/relationships">
+  <p:cSld>
+    <p:spTree>
+      <p:nvGrpSpPr>
+        <p:cNvPr id="1" name=""/>
+        <p:cNvGrpSpPr/>
+        <p:nvPr/>
+      </p:nvGrpSpPr>
+      <p:grpSpPr/>
+      <p:sp>
+        <p:nvSpPr>
+          <p:cNvPr id="2" name="Rectangle 1"/>
+          <p:cNvSpPr/>
+          <p:nvPr/>
+        </p:nvSpPr>
+        <p:spPr>
+          <a:xfrm>
+            <a:off x="0" y="0"/>
+            <a:ext cx="12191695" cy="6858000"/>
+          </a:xfrm>
+          <a:prstGeom prst="rect">
+            <a:avLst/>
+          </a:prstGeom>
+          <a:solidFill>
+            <a:srgbClr val="FAFBFD"/>
+          </a:solidFill>
+          <a:ln>
+            <a:noFill/>
+          </a:ln>
+          <a:effectLst/>
+        </p:spPr>
+        <p:style>
+          <a:lnRef idx="1">
+            <a:schemeClr val="accent1"/>
+          </a:lnRef>
+          <a:fillRef idx="3">
+            <a:schemeClr val="accent1"/>
+          </a:fillRef>
+          <a:effectRef idx="2">
+            <a:schemeClr val="accent1"/>
+          </a:effectRef>
+          <a:fontRef idx="minor">
+            <a:schemeClr val="lt1"/>
+          </a:fontRef>
+        </p:style>
+        <p:txBody>
+          <a:bodyPr rtlCol="0" anchor="ctr"/>
+          <a:lstStyle/>
+          <a:p>
+            <a:pPr algn="ctr"/>
+          </a:p>
+        </p:txBody>
+      </p:sp>
+      <p:sp>
+        <p:nvSpPr>
+          <p:cNvPr id="3" name="Rectangle 2"/>
+          <p:cNvSpPr/>
+          <p:nvPr/>
+        </p:nvSpPr>
+        <p:spPr>
+          <a:xfrm>
+            <a:off x="640080" y="566928"/>
+            <a:ext cx="82296" cy="420624"/>
+          </a:xfrm>
+          <a:prstGeom prst="rect">
+            <a:avLst/>
+          </a:prstGeom>
+          <a:solidFill>
+            <a:srgbClr val="00A8BF"/>
+          </a:solidFill>
+          <a:ln>
+            <a:noFill/>
+          </a:ln>
+          <a:effectLst/>
+        </p:spPr>
+        <p:style>
+          <a:lnRef idx="1">
+            <a:schemeClr val="accent1"/>
+          </a:lnRef>
+          <a:fillRef idx="3">
+            <a:schemeClr val="accent1"/>
+          </a:fillRef>
+          <a:effectRef idx="2">
+            <a:schemeClr val="accent1"/>
+          </a:effectRef>
+          <a:fontRef idx="minor">
+            <a:schemeClr val="lt1"/>
+          </a:fontRef>
+        </p:style>
+        <p:txBody>
+          <a:bodyPr rtlCol="0" anchor="ctr"/>
+          <a:lstStyle/>
+          <a:p>
+            <a:pPr algn="ctr"/>
+          </a:p>
+        </p:txBody>
+      </p:sp>
+      <p:sp>
+        <p:nvSpPr>
+          <p:cNvPr id="4" name="TextBox 3"/>
+          <p:cNvSpPr txBox="1"/>
+          <p:nvPr/>
+        </p:nvSpPr>
+        <p:spPr>
+          <a:xfrm>
+            <a:off x="868680" y="502920"/>
+            <a:ext cx="10058400" cy="310896"/>
+          </a:xfrm>
+          <a:prstGeom prst="rect">
+            <a:avLst/>
+          </a:prstGeom>
+          <a:noFill/>
+        </p:spPr>
+        <p:txBody>
+          <a:bodyPr wrap="square">
+            <a:spAutoFit/>
+          </a:bodyPr>
+          <a:lstStyle/>
+          <a:p>
+            <a:pPr algn="l">
+              <a:lnSpc>
+                <a:spcPct val="115000"/>
+              </a:lnSpc>
+            </a:pPr>
+            <a:r>
+              <a:rPr sz="1100" b="1" i="0">
+                <a:solidFill>
+                  <a:srgbClr val="5A667A"/>
+                </a:solidFill>
+                <a:latin typeface="Segoe UI"/>
+              </a:rPr>
+              <a:t>WHAT BUILDING IT TAUGHT US</a:t>
+            </a:r>
+          </a:p>
+        </p:txBody>
+      </p:sp>
+      <p:sp>
+        <p:nvSpPr>
+          <p:cNvPr id="5" name="TextBox 4"/>
+          <p:cNvSpPr txBox="1"/>
+          <p:nvPr/>
+        </p:nvSpPr>
+        <p:spPr>
+          <a:xfrm>
+            <a:off x="841248" y="841248"/>
+            <a:ext cx="10607040" cy="566928"/>
+          </a:xfrm>
+          <a:prstGeom prst="rect">
+            <a:avLst/>
+          </a:prstGeom>
+          <a:noFill/>
+        </p:spPr>
+        <p:txBody>
+          <a:bodyPr wrap="square">
+            <a:spAutoFit/>
+          </a:bodyPr>
+          <a:lstStyle/>
+          <a:p>
+            <a:pPr algn="l">
+              <a:lnSpc>
+                <a:spcPct val="115000"/>
+              </a:lnSpc>
+            </a:pPr>
+            <a:r>
+              <a:rPr sz="2800" b="1" i="0">
+                <a:solidFill>
+                  <a:srgbClr val="141B2D"/>
+                </a:solidFill>
+                <a:latin typeface="Segoe UI"/>
+              </a:rPr>
+              <a:t>The tests agreed with me more often than they should have</a:t>
+            </a:r>
+          </a:p>
+        </p:txBody>
+      </p:sp>
+      <p:sp>
+        <p:nvSpPr>
+          <p:cNvPr id="6" name="TextBox 5"/>
+          <p:cNvSpPr txBox="1"/>
+          <p:nvPr/>
+        </p:nvSpPr>
+        <p:spPr>
+          <a:xfrm>
+            <a:off x="868680" y="1783080"/>
+            <a:ext cx="10607040" cy="246761"/>
+          </a:xfrm>
+          <a:prstGeom prst="rect">
+            <a:avLst/>
+          </a:prstGeom>
+          <a:noFill/>
+        </p:spPr>
+        <p:txBody>
+          <a:bodyPr wrap="square">
+            <a:spAutoFit/>
+          </a:bodyPr>
+          <a:lstStyle/>
+          <a:p>
+            <a:pPr algn="l">
+              <a:lnSpc>
+                <a:spcPct val="115000"/>
+              </a:lnSpc>
+            </a:pPr>
+            <a:r>
+              <a:rPr sz="1450" b="1" i="0">
+                <a:solidFill>
+                  <a:srgbClr val="141B2D"/>
+                </a:solidFill>
+                <a:latin typeface="Segoe UI"/>
+              </a:rPr>
+              <a:t>Five real bugs were caught by looking at screenshots, not by assertions.</a:t>
+            </a:r>
+          </a:p>
+        </p:txBody>
+      </p:sp>
+      <p:sp>
+        <p:nvSpPr>
+          <p:cNvPr id="7" name="TextBox 6"/>
+          <p:cNvSpPr txBox="1"/>
+          <p:nvPr/>
+        </p:nvSpPr>
+        <p:spPr>
+          <a:xfrm>
+            <a:off x="868680" y="2066416"/>
+            <a:ext cx="10607040" cy="414528"/>
+          </a:xfrm>
+          <a:prstGeom prst="rect">
+            <a:avLst/>
+          </a:prstGeom>
+          <a:noFill/>
+        </p:spPr>
+        <p:txBody>
+          <a:bodyPr wrap="square">
+            <a:spAutoFit/>
+          </a:bodyPr>
+          <a:lstStyle/>
+          <a:p>
+            <a:pPr algn="l">
+              <a:lnSpc>
+                <a:spcPct val="125000"/>
+              </a:lnSpc>
+            </a:pPr>
+            <a:r>
+              <a:rPr sz="1200" b="0" i="0">
+                <a:solidFill>
+                  <a:srgbClr val="5A667A"/>
+                </a:solidFill>
+                <a:latin typeface="Segoe UI"/>
+              </a:rPr>
+              <a:t>A correct answer reported as 'Wrong - it answered null'. Panels frozen on a stale state. Overlays sitting on top of live canvases. Sensible actions rejected on formatting. A reply cut off by a token budget and scored as malformed.</a:t>
+            </a:r>
+          </a:p>
+        </p:txBody>
+      </p:sp>
+      <p:sp>
+        <p:nvSpPr>
+          <p:cNvPr id="8" name="TextBox 7"/>
+          <p:cNvSpPr txBox="1"/>
+          <p:nvPr/>
+        </p:nvSpPr>
+        <p:spPr>
+          <a:xfrm>
+            <a:off x="868680" y="2581529"/>
+            <a:ext cx="10607040" cy="246761"/>
+          </a:xfrm>
+          <a:prstGeom prst="rect">
+            <a:avLst/>
+          </a:prstGeom>
+          <a:noFill/>
+        </p:spPr>
+        <p:txBody>
+          <a:bodyPr wrap="square">
+            <a:spAutoFit/>
+          </a:bodyPr>
+          <a:lstStyle/>
+          <a:p>
+            <a:pPr algn="l">
+              <a:lnSpc>
+                <a:spcPct val="115000"/>
+              </a:lnSpc>
+            </a:pPr>
+            <a:r>
+              <a:rPr sz="1450" b="1" i="0">
+                <a:solidFill>
+                  <a:srgbClr val="141B2D"/>
+                </a:solidFill>
+                <a:latin typeface="Segoe UI"/>
+              </a:rPr>
+              <a:t>The common thread: asserting intent instead of outcome.</a:t>
+            </a:r>
+          </a:p>
+        </p:txBody>
+      </p:sp>
+      <p:sp>
+        <p:nvSpPr>
+          <p:cNvPr id="9" name="TextBox 8"/>
+          <p:cNvSpPr txBox="1"/>
+          <p:nvPr/>
+        </p:nvSpPr>
+        <p:spPr>
+          <a:xfrm>
+            <a:off x="868680" y="2864866"/>
+            <a:ext cx="10607040" cy="414528"/>
+          </a:xfrm>
+          <a:prstGeom prst="rect">
+            <a:avLst/>
+          </a:prstGeom>
+          <a:noFill/>
+        </p:spPr>
+        <p:txBody>
+          <a:bodyPr wrap="square">
+            <a:spAutoFit/>
+          </a:bodyPr>
+          <a:lstStyle/>
+          <a:p>
+            <a:pPr algn="l">
+              <a:lnSpc>
+                <a:spcPct val="125000"/>
+              </a:lnSpc>
+            </a:pPr>
+            <a:r>
+              <a:rPr sz="1200" b="0" i="0">
+                <a:solidFill>
+                  <a:srgbClr val="5A667A"/>
+                </a:solidFill>
+                <a:latin typeface="Segoe UI"/>
+              </a:rPr>
+              <a:t>Tests checked that hidden was set - it was - while the element stayed on screen, because an explicit CSS display beats the hidden attribute. Every such test passed throughout.</a:t>
+            </a:r>
+          </a:p>
+        </p:txBody>
+      </p:sp>
+      <p:sp>
+        <p:nvSpPr>
+          <p:cNvPr id="10" name="TextBox 9"/>
+          <p:cNvSpPr txBox="1"/>
+          <p:nvPr/>
+        </p:nvSpPr>
+        <p:spPr>
+          <a:xfrm>
+            <a:off x="868680" y="3379978"/>
+            <a:ext cx="10607040" cy="246761"/>
+          </a:xfrm>
+          <a:prstGeom prst="rect">
+            <a:avLst/>
+          </a:prstGeom>
+          <a:noFill/>
+        </p:spPr>
+        <p:txBody>
+          <a:bodyPr wrap="square">
+            <a:spAutoFit/>
+          </a:bodyPr>
+          <a:lstStyle/>
+          <a:p>
+            <a:pPr algn="l">
+              <a:lnSpc>
+                <a:spcPct val="115000"/>
+              </a:lnSpc>
+            </a:pPr>
+            <a:r>
+              <a:rPr sz="1450" b="1" i="0">
+                <a:solidFill>
+                  <a:srgbClr val="141B2D"/>
+                </a:solidFill>
+                <a:latin typeface="Segoe UI"/>
+              </a:rPr>
+              <a:t>Fixes applied per-place rather than once come back.</a:t>
+            </a:r>
+          </a:p>
+        </p:txBody>
+      </p:sp>
+      <p:sp>
+        <p:nvSpPr>
+          <p:cNvPr id="11" name="TextBox 10"/>
+          <p:cNvSpPr txBox="1"/>
+          <p:nvPr/>
+        </p:nvSpPr>
+        <p:spPr>
+          <a:xfrm>
+            <a:off x="868680" y="3663314"/>
+            <a:ext cx="10607040" cy="414528"/>
+          </a:xfrm>
+          <a:prstGeom prst="rect">
+            <a:avLst/>
+          </a:prstGeom>
+          <a:noFill/>
+        </p:spPr>
+        <p:txBody>
+          <a:bodyPr wrap="square">
+            <a:spAutoFit/>
+          </a:bodyPr>
+          <a:lstStyle/>
+          <a:p>
+            <a:pPr algn="l">
+              <a:lnSpc>
+                <a:spcPct val="125000"/>
+              </a:lnSpc>
+            </a:pPr>
+            <a:r>
+              <a:rPr sz="1200" b="0" i="0">
+                <a:solidFill>
+                  <a:srgbClr val="5A667A"/>
+                </a:solidFill>
+                <a:latin typeface="Segoe UI"/>
+              </a:rPr>
+              <a:t>The hidden-attribute bug was patched in four components before being fixed globally. The token-budget check existed in two other code paths and was missing from the third.</a:t>
+            </a:r>
+          </a:p>
+        </p:txBody>
+      </p:sp>
+      <p:sp>
+        <p:nvSpPr>
+          <p:cNvPr id="12" name="TextBox 11"/>
+          <p:cNvSpPr txBox="1"/>
+          <p:nvPr/>
+        </p:nvSpPr>
+        <p:spPr>
+          <a:xfrm>
+            <a:off x="868680" y="4178427"/>
+            <a:ext cx="10607040" cy="246761"/>
+          </a:xfrm>
+          <a:prstGeom prst="rect">
+            <a:avLst/>
+          </a:prstGeom>
+          <a:noFill/>
+        </p:spPr>
+        <p:txBody>
+          <a:bodyPr wrap="square">
+            <a:spAutoFit/>
+          </a:bodyPr>
+          <a:lstStyle/>
+          <a:p>
+            <a:pPr algn="l">
+              <a:lnSpc>
+                <a:spcPct val="115000"/>
+              </a:lnSpc>
+            </a:pPr>
+            <a:r>
+              <a:rPr sz="1450" b="1" i="0">
+                <a:solidFill>
+                  <a:srgbClr val="141B2D"/>
+                </a:solidFill>
+                <a:latin typeface="Segoe UI"/>
+              </a:rPr>
+              <a:t>Diagnostics are a feature.</a:t>
+            </a:r>
+          </a:p>
+        </p:txBody>
+      </p:sp>
+      <p:sp>
+        <p:nvSpPr>
+          <p:cNvPr id="13" name="TextBox 12"/>
+          <p:cNvSpPr txBox="1"/>
+          <p:nvPr/>
+        </p:nvSpPr>
+        <p:spPr>
+          <a:xfrm>
+            <a:off x="868680" y="4461764"/>
+            <a:ext cx="10607040" cy="207264"/>
+          </a:xfrm>
+          <a:prstGeom prst="rect">
+            <a:avLst/>
+          </a:prstGeom>
+          <a:noFill/>
+        </p:spPr>
+        <p:txBody>
+          <a:bodyPr wrap="square">
+            <a:spAutoFit/>
+          </a:bodyPr>
+          <a:lstStyle/>
+          <a:p>
+            <a:pPr algn="l">
+              <a:lnSpc>
+                <a:spcPct val="125000"/>
+              </a:lnSpc>
+            </a:pPr>
+            <a:r>
+              <a:rPr sz="1200" b="0" i="0">
+                <a:solidFill>
+                  <a:srgbClr val="5A667A"/>
+                </a:solidFill>
+                <a:latin typeface="Segoe UI"/>
+              </a:rPr>
+              <a:t>The failure message now shows the model's actual reply. The bug that took three rounds to identify would have been obvious in one.</a:t>
+            </a:r>
+          </a:p>
+        </p:txBody>
+      </p:sp>
+    </p:spTree>
+  </p:cSld>
+  <p:clrMapOvr>
+    <a:masterClrMapping/>
+  </p:clrMapOvr>
+</p:sld>
+</file>
+
+<file path=ppt/slides/slide24.xml><?xml version="1.0" encoding="utf-8"?>
+<p:sld xmlns:a="http://schemas.openxmlformats.org/drawingml/2006/main" xmlns:p="http://schemas.openxmlformats.org/presentationml/2006/main" xmlns:r="http://schemas.openxmlformats.org/officeDocument/2006/relationships">
+  <p:cSld>
+    <p:spTree>
+      <p:nvGrpSpPr>
+        <p:cNvPr id="1" name=""/>
+        <p:cNvGrpSpPr/>
+        <p:nvPr/>
+      </p:nvGrpSpPr>
+      <p:grpSpPr/>
+      <p:sp>
+        <p:nvSpPr>
+          <p:cNvPr id="2" name="Rectangle 1"/>
+          <p:cNvSpPr/>
+          <p:nvPr/>
+        </p:nvSpPr>
+        <p:spPr>
+          <a:xfrm>
+            <a:off x="0" y="0"/>
+            <a:ext cx="12191695" cy="6858000"/>
+          </a:xfrm>
+          <a:prstGeom prst="rect">
+            <a:avLst/>
+          </a:prstGeom>
+          <a:solidFill>
+            <a:srgbClr val="FAFBFD"/>
+          </a:solidFill>
+          <a:ln>
+            <a:noFill/>
+          </a:ln>
+          <a:effectLst/>
+        </p:spPr>
+        <p:style>
+          <a:lnRef idx="1">
+            <a:schemeClr val="accent1"/>
+          </a:lnRef>
+          <a:fillRef idx="3">
+            <a:schemeClr val="accent1"/>
+          </a:fillRef>
+          <a:effectRef idx="2">
+            <a:schemeClr val="accent1"/>
+          </a:effectRef>
+          <a:fontRef idx="minor">
+            <a:schemeClr val="lt1"/>
+          </a:fontRef>
+        </p:style>
+        <p:txBody>
+          <a:bodyPr rtlCol="0" anchor="ctr"/>
+          <a:lstStyle/>
+          <a:p>
+            <a:pPr algn="ctr"/>
+          </a:p>
+        </p:txBody>
+      </p:sp>
+      <p:sp>
+        <p:nvSpPr>
+          <p:cNvPr id="3" name="Rectangle 2"/>
+          <p:cNvSpPr/>
+          <p:nvPr/>
+        </p:nvSpPr>
+        <p:spPr>
+          <a:xfrm>
+            <a:off x="640080" y="566928"/>
+            <a:ext cx="82296" cy="420624"/>
+          </a:xfrm>
+          <a:prstGeom prst="rect">
+            <a:avLst/>
+          </a:prstGeom>
+          <a:solidFill>
+            <a:srgbClr val="00A8BF"/>
+          </a:solidFill>
+          <a:ln>
+            <a:noFill/>
+          </a:ln>
+          <a:effectLst/>
+        </p:spPr>
+        <p:style>
+          <a:lnRef idx="1">
+            <a:schemeClr val="accent1"/>
+          </a:lnRef>
+          <a:fillRef idx="3">
+            <a:schemeClr val="accent1"/>
+          </a:fillRef>
+          <a:effectRef idx="2">
+            <a:schemeClr val="accent1"/>
+          </a:effectRef>
+          <a:fontRef idx="minor">
+            <a:schemeClr val="lt1"/>
+          </a:fontRef>
+        </p:style>
+        <p:txBody>
+          <a:bodyPr rtlCol="0" anchor="ctr"/>
+          <a:lstStyle/>
+          <a:p>
+            <a:pPr algn="ctr"/>
+          </a:p>
+        </p:txBody>
+      </p:sp>
+      <p:sp>
+        <p:nvSpPr>
+          <p:cNvPr id="4" name="TextBox 3"/>
+          <p:cNvSpPr txBox="1"/>
+          <p:nvPr/>
+        </p:nvSpPr>
+        <p:spPr>
+          <a:xfrm>
+            <a:off x="868680" y="502920"/>
+            <a:ext cx="10058400" cy="310896"/>
+          </a:xfrm>
+          <a:prstGeom prst="rect">
+            <a:avLst/>
+          </a:prstGeom>
+          <a:noFill/>
+        </p:spPr>
+        <p:txBody>
+          <a:bodyPr wrap="square">
+            <a:spAutoFit/>
+          </a:bodyPr>
+          <a:lstStyle/>
+          <a:p>
+            <a:pPr algn="l">
+              <a:lnSpc>
+                <a:spcPct val="115000"/>
+              </a:lnSpc>
+            </a:pPr>
+            <a:r>
+              <a:rPr sz="1100" b="1" i="0">
+                <a:solidFill>
+                  <a:srgbClr val="5A667A"/>
+                </a:solidFill>
+                <a:latin typeface="Segoe UI"/>
+              </a:rPr>
+              <a:t>CREDITS</a:t>
+            </a:r>
+          </a:p>
+        </p:txBody>
+      </p:sp>
+      <p:sp>
+        <p:nvSpPr>
+          <p:cNvPr id="5" name="TextBox 4"/>
+          <p:cNvSpPr txBox="1"/>
+          <p:nvPr/>
+        </p:nvSpPr>
+        <p:spPr>
+          <a:xfrm>
+            <a:off x="841248" y="841248"/>
+            <a:ext cx="10607040" cy="566928"/>
+          </a:xfrm>
+          <a:prstGeom prst="rect">
+            <a:avLst/>
+          </a:prstGeom>
+          <a:noFill/>
+        </p:spPr>
+        <p:txBody>
+          <a:bodyPr wrap="square">
+            <a:spAutoFit/>
+          </a:bodyPr>
+          <a:lstStyle/>
+          <a:p>
+            <a:pPr algn="l">
+              <a:lnSpc>
+                <a:spcPct val="115000"/>
+              </a:lnSpc>
+            </a:pPr>
+            <a:r>
+              <a:rPr sz="2800" b="1" i="0">
+                <a:solidFill>
+                  <a:srgbClr val="141B2D"/>
+                </a:solidFill>
+                <a:latin typeface="Segoe UI"/>
+              </a:rPr>
+              <a:t>Standing on other people's work</a:t>
+            </a:r>
+          </a:p>
+        </p:txBody>
+      </p:sp>
+      <p:sp>
+        <p:nvSpPr>
+          <p:cNvPr id="6" name="TextBox 5"/>
+          <p:cNvSpPr txBox="1"/>
+          <p:nvPr/>
+        </p:nvSpPr>
+        <p:spPr>
+          <a:xfrm>
+            <a:off x="868680" y="1783080"/>
+            <a:ext cx="10607040" cy="246761"/>
+          </a:xfrm>
+          <a:prstGeom prst="rect">
+            <a:avLst/>
+          </a:prstGeom>
+          <a:noFill/>
+        </p:spPr>
+        <p:txBody>
+          <a:bodyPr wrap="square">
+            <a:spAutoFit/>
+          </a:bodyPr>
+          <a:lstStyle/>
+          <a:p>
+            <a:pPr algn="l">
+              <a:lnSpc>
+                <a:spcPct val="115000"/>
+              </a:lnSpc>
+            </a:pPr>
+            <a:r>
+              <a:rPr sz="1450" b="1" i="0">
+                <a:solidFill>
+                  <a:srgbClr val="141B2D"/>
+                </a:solidFill>
+                <a:latin typeface="Segoe UI"/>
+              </a:rPr>
+              <a:t>MNIST-PRO  -  MIT</a:t>
+            </a:r>
+          </a:p>
+        </p:txBody>
+      </p:sp>
+      <p:sp>
+        <p:nvSpPr>
+          <p:cNvPr id="7" name="TextBox 6"/>
+          <p:cNvSpPr txBox="1"/>
+          <p:nvPr/>
+        </p:nvSpPr>
+        <p:spPr>
+          <a:xfrm>
+            <a:off x="868680" y="2066416"/>
+            <a:ext cx="10607040" cy="414528"/>
+          </a:xfrm>
+          <a:prstGeom prst="rect">
+            <a:avLst/>
+          </a:prstGeom>
+          <a:noFill/>
+        </p:spPr>
+        <p:txBody>
+          <a:bodyPr wrap="square">
+            <a:spAutoFit/>
+          </a:bodyPr>
+          <a:lstStyle/>
+          <a:p>
+            <a:pPr algn="l">
+              <a:lnSpc>
+                <a:spcPct val="125000"/>
+              </a:lnSpc>
+            </a:pPr>
+            <a:r>
+              <a:rPr sz="1200" b="0" i="0">
+                <a:solidFill>
+                  <a:srgbClr val="5A667A"/>
+                </a:solidFill>
+                <a:latin typeface="Segoe UI"/>
+              </a:rPr>
+              <a:t>Toh, Majumder, Liu, Chen and Poria. DeCLaRe Lab, Nanyang Technological University, and A*STAR. arXiv:2608.31022  ·  github.com/declare-lab/MNIST-PRO</a:t>
+            </a:r>
+          </a:p>
+        </p:txBody>
+      </p:sp>
+      <p:sp>
+        <p:nvSpPr>
+          <p:cNvPr id="8" name="TextBox 7"/>
+          <p:cNvSpPr txBox="1"/>
+          <p:nvPr/>
+        </p:nvSpPr>
+        <p:spPr>
+          <a:xfrm>
+            <a:off x="868680" y="2663825"/>
+            <a:ext cx="10607040" cy="246761"/>
+          </a:xfrm>
+          <a:prstGeom prst="rect">
+            <a:avLst/>
+          </a:prstGeom>
+          <a:noFill/>
+        </p:spPr>
+        <p:txBody>
+          <a:bodyPr wrap="square">
+            <a:spAutoFit/>
+          </a:bodyPr>
+          <a:lstStyle/>
+          <a:p>
+            <a:pPr algn="l">
+              <a:lnSpc>
+                <a:spcPct val="115000"/>
+              </a:lnSpc>
+            </a:pPr>
+            <a:r>
+              <a:rPr sz="1450" b="1" i="0">
+                <a:solidFill>
+                  <a:srgbClr val="141B2D"/>
+                </a:solidFill>
+                <a:latin typeface="Segoe UI"/>
+              </a:rPr>
+              <a:t>MNIST  -  CC BY-SA 3.0</a:t>
+            </a:r>
+          </a:p>
+        </p:txBody>
+      </p:sp>
+      <p:sp>
+        <p:nvSpPr>
+          <p:cNvPr id="9" name="TextBox 8"/>
+          <p:cNvSpPr txBox="1"/>
+          <p:nvPr/>
+        </p:nvSpPr>
+        <p:spPr>
+          <a:xfrm>
+            <a:off x="868680" y="2947162"/>
+            <a:ext cx="10607040" cy="207264"/>
+          </a:xfrm>
+          <a:prstGeom prst="rect">
+            <a:avLst/>
+          </a:prstGeom>
+          <a:noFill/>
+        </p:spPr>
+        <p:txBody>
+          <a:bodyPr wrap="square">
+            <a:spAutoFit/>
+          </a:bodyPr>
+          <a:lstStyle/>
+          <a:p>
+            <a:pPr algn="l">
+              <a:lnSpc>
+                <a:spcPct val="125000"/>
+              </a:lnSpc>
+            </a:pPr>
+            <a:r>
+              <a:rPr sz="1200" b="0" i="0">
+                <a:solidFill>
+                  <a:srgbClr val="5A667A"/>
+                </a:solidFill>
+                <a:latin typeface="Segoe UI"/>
+              </a:rPr>
+              <a:t>LeCun, Cortes and Burges, derived from NIST Special Database 19.</a:t>
+            </a:r>
+          </a:p>
+        </p:txBody>
+      </p:sp>
+      <p:sp>
+        <p:nvSpPr>
+          <p:cNvPr id="10" name="TextBox 9"/>
+          <p:cNvSpPr txBox="1"/>
+          <p:nvPr/>
+        </p:nvSpPr>
+        <p:spPr>
+          <a:xfrm>
+            <a:off x="868680" y="3337306"/>
+            <a:ext cx="10607040" cy="246761"/>
+          </a:xfrm>
+          <a:prstGeom prst="rect">
+            <a:avLst/>
+          </a:prstGeom>
+          <a:noFill/>
+        </p:spPr>
+        <p:txBody>
+          <a:bodyPr wrap="square">
+            <a:spAutoFit/>
+          </a:bodyPr>
+          <a:lstStyle/>
+          <a:p>
+            <a:pPr algn="l">
+              <a:lnSpc>
+                <a:spcPct val="115000"/>
+              </a:lnSpc>
+            </a:pPr>
+            <a:r>
+              <a:rPr sz="1450" b="1" i="0">
+                <a:solidFill>
+                  <a:srgbClr val="141B2D"/>
+                </a:solidFill>
+                <a:latin typeface="Segoe UI"/>
+              </a:rPr>
+              <a:t>ARC-AGI-1  -  Apache 2.0</a:t>
+            </a:r>
+          </a:p>
+        </p:txBody>
+      </p:sp>
+      <p:sp>
+        <p:nvSpPr>
+          <p:cNvPr id="11" name="TextBox 10"/>
+          <p:cNvSpPr txBox="1"/>
+          <p:nvPr/>
+        </p:nvSpPr>
+        <p:spPr>
+          <a:xfrm>
+            <a:off x="868680" y="3620643"/>
+            <a:ext cx="10607040" cy="207264"/>
+          </a:xfrm>
+          <a:prstGeom prst="rect">
+            <a:avLst/>
+          </a:prstGeom>
+          <a:noFill/>
+        </p:spPr>
+        <p:txBody>
+          <a:bodyPr wrap="square">
+            <a:spAutoFit/>
+          </a:bodyPr>
+          <a:lstStyle/>
+          <a:p>
+            <a:pPr algn="l">
+              <a:lnSpc>
+                <a:spcPct val="125000"/>
+              </a:lnSpc>
+            </a:pPr>
+            <a:r>
+              <a:rPr sz="1200" b="0" i="0">
+                <a:solidFill>
+                  <a:srgbClr val="5A667A"/>
+                </a:solidFill>
+                <a:latin typeface="Segoe UI"/>
+              </a:rPr>
+              <a:t>Francois Chollet. The public training set, used unmodified.</a:t>
+            </a:r>
+          </a:p>
+        </p:txBody>
+      </p:sp>
+      <p:sp>
+        <p:nvSpPr>
+          <p:cNvPr id="12" name="TextBox 11"/>
+          <p:cNvSpPr txBox="1"/>
+          <p:nvPr/>
+        </p:nvSpPr>
+        <p:spPr>
+          <a:xfrm>
+            <a:off x="868680" y="4010787"/>
+            <a:ext cx="10607040" cy="246761"/>
+          </a:xfrm>
+          <a:prstGeom prst="rect">
+            <a:avLst/>
+          </a:prstGeom>
+          <a:noFill/>
+        </p:spPr>
+        <p:txBody>
+          <a:bodyPr wrap="square">
+            <a:spAutoFit/>
+          </a:bodyPr>
+          <a:lstStyle/>
+          <a:p>
+            <a:pPr algn="l">
+              <a:lnSpc>
+                <a:spcPct val="115000"/>
+              </a:lnSpc>
+            </a:pPr>
+            <a:r>
+              <a:rPr sz="1450" b="1" i="0">
+                <a:solidFill>
+                  <a:srgbClr val="141B2D"/>
+                </a:solidFill>
+                <a:latin typeface="Segoe UI"/>
+              </a:rPr>
+              <a:t>Licences are retained in the repository.</a:t>
+            </a:r>
+          </a:p>
+        </p:txBody>
+      </p:sp>
+      <p:sp>
+        <p:nvSpPr>
+          <p:cNvPr id="13" name="TextBox 12"/>
+          <p:cNvSpPr txBox="1"/>
+          <p:nvPr/>
+        </p:nvSpPr>
+        <p:spPr>
+          <a:xfrm>
+            <a:off x="868680" y="4294124"/>
+            <a:ext cx="10607040" cy="207264"/>
+          </a:xfrm>
+          <a:prstGeom prst="rect">
+            <a:avLst/>
+          </a:prstGeom>
+          <a:noFill/>
+        </p:spPr>
+        <p:txBody>
+          <a:bodyPr wrap="square">
+            <a:spAutoFit/>
+          </a:bodyPr>
+          <a:lstStyle/>
+          <a:p>
+            <a:pPr algn="l">
+              <a:lnSpc>
+                <a:spcPct val="125000"/>
+              </a:lnSpc>
+            </a:pPr>
+            <a:r>
+              <a:rPr sz="1200" b="0" i="0">
+                <a:solidFill>
+                  <a:srgbClr val="5A667A"/>
+                </a:solidFill>
+                <a:latin typeface="Segoe UI"/>
+              </a:rPr>
+              <a:t>third_party/mnist-pro/LICENSE, with attribution files beside the generated data.</a:t>
+            </a:r>
+          </a:p>
+        </p:txBody>
+      </p:sp>
+    </p:spTree>
+  </p:cSld>
+  <p:clrMapOvr>
+    <a:masterClrMapping/>
+  </p:clrMapOvr>
+</p:sld>
+</file>
+
+<file path=ppt/slides/slide25.xml><?xml version="1.0" encoding="utf-8"?>
+<p:sld xmlns:a="http://schemas.openxmlformats.org/drawingml/2006/main" xmlns:p="http://schemas.openxmlformats.org/presentationml/2006/main" xmlns:r="http://schemas.openxmlformats.org/officeDocument/2006/relationships">
+  <p:cSld>
+    <p:spTree>
+      <p:nvGrpSpPr>
+        <p:cNvPr id="1" name=""/>
+        <p:cNvGrpSpPr/>
+        <p:nvPr/>
+      </p:nvGrpSpPr>
+      <p:grpSpPr/>
+      <p:sp>
+        <p:nvSpPr>
+          <p:cNvPr id="2" name="Rectangle 1"/>
+          <p:cNvSpPr/>
+          <p:nvPr/>
+        </p:nvSpPr>
+        <p:spPr>
+          <a:xfrm>
+            <a:off x="0" y="0"/>
+            <a:ext cx="12191695" cy="6858000"/>
+          </a:xfrm>
+          <a:prstGeom prst="rect">
+            <a:avLst/>
+          </a:prstGeom>
+          <a:solidFill>
+            <a:srgbClr val="0E1A2B"/>
+          </a:solidFill>
+          <a:ln>
+            <a:noFill/>
+          </a:ln>
+          <a:effectLst/>
+        </p:spPr>
+        <p:style>
+          <a:lnRef idx="1">
+            <a:schemeClr val="accent1"/>
+          </a:lnRef>
+          <a:fillRef idx="3">
+            <a:schemeClr val="accent1"/>
+          </a:fillRef>
+          <a:effectRef idx="2">
+            <a:schemeClr val="accent1"/>
+          </a:effectRef>
+          <a:fontRef idx="minor">
+            <a:schemeClr val="lt1"/>
+          </a:fontRef>
+        </p:style>
+        <p:txBody>
+          <a:bodyPr rtlCol="0" anchor="ctr"/>
+          <a:lstStyle/>
+          <a:p>
+            <a:pPr algn="ctr"/>
+          </a:p>
+        </p:txBody>
+      </p:sp>
+      <p:sp>
+        <p:nvSpPr>
+          <p:cNvPr id="3" name="Rectangle 2"/>
+          <p:cNvSpPr/>
+          <p:nvPr/>
+        </p:nvSpPr>
+        <p:spPr>
+          <a:xfrm>
+            <a:off x="0" y="2697480"/>
+            <a:ext cx="12191695" cy="41148"/>
+          </a:xfrm>
+          <a:prstGeom prst="rect">
+            <a:avLst/>
+          </a:prstGeom>
+          <a:solidFill>
+            <a:srgbClr val="00A8BF"/>
+          </a:solidFill>
+          <a:ln>
+            <a:noFill/>
+          </a:ln>
+          <a:effectLst/>
+        </p:spPr>
+        <p:style>
+          <a:lnRef idx="1">
+            <a:schemeClr val="accent1"/>
+          </a:lnRef>
+          <a:fillRef idx="3">
+            <a:schemeClr val="accent1"/>
+          </a:fillRef>
+          <a:effectRef idx="2">
+            <a:schemeClr val="accent1"/>
+          </a:effectRef>
+          <a:fontRef idx="minor">
+            <a:schemeClr val="lt1"/>
+          </a:fontRef>
+        </p:style>
+        <p:txBody>
+          <a:bodyPr rtlCol="0" anchor="ctr"/>
+          <a:lstStyle/>
+          <a:p>
+            <a:pPr algn="ctr"/>
+          </a:p>
+        </p:txBody>
+      </p:sp>
+      <p:sp>
+        <p:nvSpPr>
+          <p:cNvPr id="4" name="TextBox 3"/>
+          <p:cNvSpPr txBox="1"/>
+          <p:nvPr/>
+        </p:nvSpPr>
+        <p:spPr>
+          <a:xfrm>
+            <a:off x="914400" y="1645920"/>
+            <a:ext cx="10515600" cy="822960"/>
+          </a:xfrm>
+          <a:prstGeom prst="rect">
+            <a:avLst/>
+          </a:prstGeom>
+          <a:noFill/>
+        </p:spPr>
+        <p:txBody>
+          <a:bodyPr wrap="square">
+            <a:spAutoFit/>
+          </a:bodyPr>
+          <a:lstStyle/>
+          <a:p>
+            <a:pPr algn="l">
+              <a:lnSpc>
+                <a:spcPct val="115000"/>
+              </a:lnSpc>
+            </a:pPr>
+            <a:r>
+              <a:rPr sz="3800" b="1" i="0">
+                <a:solidFill>
+                  <a:srgbClr val="FFFFFF"/>
+                </a:solidFill>
+                <a:latin typeface="Segoe UI"/>
+              </a:rPr>
+              <a:t>Play it</a:t>
+            </a:r>
+          </a:p>
+        </p:txBody>
+      </p:sp>
+      <p:sp>
+        <p:nvSpPr>
+          <p:cNvPr id="5" name="TextBox 4"/>
+          <p:cNvSpPr txBox="1"/>
+          <p:nvPr/>
+        </p:nvSpPr>
+        <p:spPr>
+          <a:xfrm>
+            <a:off x="914400" y="2971800"/>
+            <a:ext cx="10515600" cy="2194560"/>
+          </a:xfrm>
+          <a:prstGeom prst="rect">
+            <a:avLst/>
+          </a:prstGeom>
+          <a:noFill/>
+        </p:spPr>
+        <p:txBody>
+          <a:bodyPr wrap="square">
+            <a:spAutoFit/>
+          </a:bodyPr>
+          <a:lstStyle/>
+          <a:p>
+            <a:pPr algn="l">
+              <a:lnSpc>
+                <a:spcPct val="190000"/>
+              </a:lnSpc>
+            </a:pPr>
+            <a:r>
+              <a:rPr sz="1550" b="0" i="0">
+                <a:solidFill>
+                  <a:srgbClr val="D4DEEA"/>
+                </a:solidFill>
+                <a:latin typeface="Segoe UI"/>
+              </a:rPr>
+              <a:t>MNIST-PRO        panandi.github.io/mnistpro</a:t>
+            </a:r>
+          </a:p>
+          <a:p>
+            <a:pPr algn="l">
+              <a:lnSpc>
+                <a:spcPct val="190000"/>
+              </a:lnSpc>
+            </a:pPr>
+            <a:r>
+              <a:rPr sz="1550" b="0" i="0">
+                <a:solidFill>
+                  <a:srgbClr val="D4DEEA"/>
+                </a:solidFill>
+                <a:latin typeface="Segoe UI"/>
+              </a:rPr>
+              <a:t>ARC Race         panandi.github.io/mnistpro/arc.html</a:t>
+            </a:r>
+          </a:p>
+          <a:p>
+            <a:pPr algn="l">
+              <a:lnSpc>
+                <a:spcPct val="190000"/>
+              </a:lnSpc>
+            </a:pPr>
+            <a:r>
+              <a:rPr sz="1550" b="0" i="0">
+                <a:solidFill>
+                  <a:srgbClr val="D4DEEA"/>
+                </a:solidFill>
+                <a:latin typeface="Segoe UI"/>
+              </a:rPr>
+              <a:t>Player's guide   panandi.github.io/mnistpro/guide.html</a:t>
+            </a:r>
+          </a:p>
+          <a:p>
+            <a:pPr algn="l">
+              <a:lnSpc>
+                <a:spcPct val="190000"/>
+              </a:lnSpc>
+            </a:pPr>
+            <a:r>
+              <a:rPr sz="1550" b="0" i="0">
+                <a:solidFill>
+                  <a:srgbClr val="D4DEEA"/>
+                </a:solidFill>
+                <a:latin typeface="Segoe UI"/>
+              </a:rPr>
+              <a:t>Source           github.com/panandi/mnistpro</a:t>
+            </a:r>
+          </a:p>
+        </p:txBody>
+      </p:sp>
+      <p:sp>
+        <p:nvSpPr>
+          <p:cNvPr id="6" name="TextBox 5"/>
+          <p:cNvSpPr txBox="1"/>
+          <p:nvPr/>
+        </p:nvSpPr>
+        <p:spPr>
+          <a:xfrm>
+            <a:off x="914400" y="5715000"/>
+            <a:ext cx="10515600" cy="548640"/>
+          </a:xfrm>
+          <a:prstGeom prst="rect">
+            <a:avLst/>
+          </a:prstGeom>
+          <a:noFill/>
+        </p:spPr>
+        <p:txBody>
+          <a:bodyPr wrap="square">
+            <a:spAutoFit/>
+          </a:bodyPr>
+          <a:lstStyle/>
+          <a:p>
+            <a:pPr algn="l">
+              <a:lnSpc>
+                <a:spcPct val="115000"/>
+              </a:lnSpc>
+            </a:pPr>
+            <a:r>
+              <a:rPr sz="1300" b="0" i="0">
+                <a:solidFill>
+                  <a:srgbClr val="8D9DB2"/>
+                </a:solidFill>
+                <a:latin typeface="Segoe UI"/>
+              </a:rPr>
+              <a:t>No install, no sign-up, no key needed to play solo. Bring an OpenRouter key if you want to race the model.</a:t>
             </a:r>
           </a:p>
         </p:txBody>

--- a/docs/MNIST-PRO-overview.pptx
+++ b/docs/MNIST-PRO-overview.pptx
@@ -30,6 +30,11 @@
     <p:sldId id="278" r:id="rId29"/>
     <p:sldId id="279" r:id="rId30"/>
     <p:sldId id="280" r:id="rId31"/>
+    <p:sldId id="281" r:id="rId32"/>
+    <p:sldId id="282" r:id="rId33"/>
+    <p:sldId id="283" r:id="rId34"/>
+    <p:sldId id="284" r:id="rId35"/>
+    <p:sldId id="285" r:id="rId36"/>
   </p:sldIdLst>
   <p:sldSz cx="12191695" cy="6858000" type="screen4x3"/>
   <p:notesSz cx="6858000" cy="9144000"/>
@@ -8965,7 +8970,7 @@
                 </a:solidFill>
                 <a:latin typeface="Segoe UI"/>
               </a:rPr>
-              <a:t>DESIGN</a:t>
+              <a:t>LOW-LEVEL DESIGN</a:t>
             </a:r>
           </a:p>
         </p:txBody>
@@ -9004,323 +9009,35 @@
                 </a:solidFill>
                 <a:latin typeface="Segoe UI"/>
               </a:rPr>
-              <a:t>Decisions, and why they went that way</a:t>
-            </a:r>
-          </a:p>
-        </p:txBody>
-      </p:sp>
-      <p:sp>
-        <p:nvSpPr>
-          <p:cNvPr id="6" name="TextBox 5"/>
-          <p:cNvSpPr txBox="1"/>
-          <p:nvPr/>
-        </p:nvSpPr>
-        <p:spPr>
-          <a:xfrm>
-            <a:off x="868680" y="1783080"/>
-            <a:ext cx="10607040" cy="246761"/>
-          </a:xfrm>
-          <a:prstGeom prst="rect">
-            <a:avLst/>
-          </a:prstGeom>
-          <a:noFill/>
-        </p:spPr>
-        <p:txBody>
-          <a:bodyPr wrap="square">
-            <a:spAutoFit/>
-          </a:bodyPr>
-          <a:lstStyle/>
-          <a:p>
-            <a:pPr algn="l">
-              <a:lnSpc>
-                <a:spcPct val="115000"/>
-              </a:lnSpc>
-            </a:pPr>
-            <a:r>
-              <a:rPr sz="1450" b="1" i="0">
-                <a:solidFill>
-                  <a:srgbClr val="141B2D"/>
-                </a:solidFill>
-                <a:latin typeface="Segoe UI"/>
-              </a:rPr>
-              <a:t>ARC first, MNIST-PRO second.</a:t>
-            </a:r>
-          </a:p>
-        </p:txBody>
-      </p:sp>
-      <p:sp>
-        <p:nvSpPr>
-          <p:cNvPr id="7" name="TextBox 6"/>
-          <p:cNvSpPr txBox="1"/>
-          <p:nvPr/>
-        </p:nvSpPr>
-        <p:spPr>
-          <a:xfrm>
-            <a:off x="868680" y="2066416"/>
-            <a:ext cx="10607040" cy="414528"/>
-          </a:xfrm>
-          <a:prstGeom prst="rect">
-            <a:avLst/>
-          </a:prstGeom>
-          <a:noFill/>
-        </p:spPr>
-        <p:txBody>
-          <a:bodyPr wrap="square">
-            <a:spAutoFit/>
-          </a:bodyPr>
-          <a:lstStyle/>
-          <a:p>
-            <a:pPr algn="l">
-              <a:lnSpc>
-                <a:spcPct val="125000"/>
-              </a:lnSpc>
-            </a:pPr>
-            <a:r>
-              <a:rPr sz="1200" b="0" i="0">
-                <a:solidFill>
-                  <a:srgbClr val="5A667A"/>
-                </a:solidFill>
-                <a:latin typeface="Segoe UI"/>
-              </a:rPr>
-              <a:t>ARC asks you to infer a rule in five minutes. That turned out to be the wrong kind of hard for a party game, so a task needing no prior knowledge became the front page.</a:t>
-            </a:r>
-          </a:p>
-        </p:txBody>
-      </p:sp>
-      <p:sp>
-        <p:nvSpPr>
-          <p:cNvPr id="8" name="TextBox 7"/>
-          <p:cNvSpPr txBox="1"/>
-          <p:nvPr/>
-        </p:nvSpPr>
-        <p:spPr>
-          <a:xfrm>
-            <a:off x="868680" y="2590673"/>
-            <a:ext cx="10607040" cy="246761"/>
-          </a:xfrm>
-          <a:prstGeom prst="rect">
-            <a:avLst/>
-          </a:prstGeom>
-          <a:noFill/>
-        </p:spPr>
-        <p:txBody>
-          <a:bodyPr wrap="square">
-            <a:spAutoFit/>
-          </a:bodyPr>
-          <a:lstStyle/>
-          <a:p>
-            <a:pPr algn="l">
-              <a:lnSpc>
-                <a:spcPct val="115000"/>
-              </a:lnSpc>
-            </a:pPr>
-            <a:r>
-              <a:rPr sz="1450" b="1" i="0">
-                <a:solidFill>
-                  <a:srgbClr val="141B2D"/>
-                </a:solidFill>
-                <a:latin typeface="Segoe UI"/>
-              </a:rPr>
-              <a:t>Difficulty measured rather than asserted.</a:t>
-            </a:r>
-          </a:p>
-        </p:txBody>
-      </p:sp>
-      <p:sp>
-        <p:nvSpPr>
-          <p:cNvPr id="9" name="TextBox 8"/>
-          <p:cNvSpPr txBox="1"/>
-          <p:nvPr/>
-        </p:nvSpPr>
-        <p:spPr>
-          <a:xfrm>
-            <a:off x="868680" y="2874010"/>
-            <a:ext cx="10607040" cy="414528"/>
-          </a:xfrm>
-          <a:prstGeom prst="rect">
-            <a:avLst/>
-          </a:prstGeom>
-          <a:noFill/>
-        </p:spPr>
-        <p:txBody>
-          <a:bodyPr wrap="square">
-            <a:spAutoFit/>
-          </a:bodyPr>
-          <a:lstStyle/>
-          <a:p>
-            <a:pPr algn="l">
-              <a:lnSpc>
-                <a:spcPct val="125000"/>
-              </a:lnSpc>
-            </a:pPr>
-            <a:r>
-              <a:rPr sz="1200" b="0" i="0">
-                <a:solidFill>
-                  <a:srgbClr val="5A667A"/>
-                </a:solidFill>
-                <a:latin typeface="Segoe UI"/>
-              </a:rPr>
-              <a:t>For ARC, a classifier found the 19 tasks a single rule explains. For MNIST-PRO, a simulation of 400 digits set the window size: 8x8 tiles end a round in 2 glimpses, 2x2 in 15. 4x4 was the playable middle.</a:t>
-            </a:r>
-          </a:p>
-        </p:txBody>
-      </p:sp>
-      <p:sp>
-        <p:nvSpPr>
-          <p:cNvPr id="10" name="TextBox 9"/>
-          <p:cNvSpPr txBox="1"/>
-          <p:nvPr/>
-        </p:nvSpPr>
-        <p:spPr>
-          <a:xfrm>
-            <a:off x="868680" y="3398266"/>
-            <a:ext cx="10607040" cy="246761"/>
-          </a:xfrm>
-          <a:prstGeom prst="rect">
-            <a:avLst/>
-          </a:prstGeom>
-          <a:noFill/>
-        </p:spPr>
-        <p:txBody>
-          <a:bodyPr wrap="square">
-            <a:spAutoFit/>
-          </a:bodyPr>
-          <a:lstStyle/>
-          <a:p>
-            <a:pPr algn="l">
-              <a:lnSpc>
-                <a:spcPct val="115000"/>
-              </a:lnSpc>
-            </a:pPr>
-            <a:r>
-              <a:rPr sz="1450" b="1" i="0">
-                <a:solidFill>
-                  <a:srgbClr val="141B2D"/>
-                </a:solidFill>
-                <a:latin typeface="Segoe UI"/>
-              </a:rPr>
-              <a:t>Steps, not seconds.</a:t>
-            </a:r>
-          </a:p>
-        </p:txBody>
-      </p:sp>
-      <p:sp>
-        <p:nvSpPr>
-          <p:cNvPr id="11" name="TextBox 10"/>
-          <p:cNvSpPr txBox="1"/>
-          <p:nvPr/>
-        </p:nvSpPr>
-        <p:spPr>
-          <a:xfrm>
-            <a:off x="868680" y="3681603"/>
-            <a:ext cx="10607040" cy="207264"/>
-          </a:xfrm>
-          <a:prstGeom prst="rect">
-            <a:avLst/>
-          </a:prstGeom>
-          <a:noFill/>
-        </p:spPr>
-        <p:txBody>
-          <a:bodyPr wrap="square">
-            <a:spAutoFit/>
-          </a:bodyPr>
-          <a:lstStyle/>
-          <a:p>
-            <a:pPr algn="l">
-              <a:lnSpc>
-                <a:spcPct val="125000"/>
-              </a:lnSpc>
-            </a:pPr>
-            <a:r>
-              <a:rPr sz="1200" b="0" i="0">
-                <a:solidFill>
-                  <a:srgbClr val="5A667A"/>
-                </a:solidFill>
-                <a:latin typeface="Segoe UI"/>
-              </a:rPr>
-              <a:t>Suggested by the first player to look at it, and correct: timing a networked opponent measures latency.</a:t>
-            </a:r>
-          </a:p>
-        </p:txBody>
-      </p:sp>
-      <p:sp>
-        <p:nvSpPr>
-          <p:cNvPr id="12" name="TextBox 11"/>
-          <p:cNvSpPr txBox="1"/>
-          <p:nvPr/>
-        </p:nvSpPr>
-        <p:spPr>
-          <a:xfrm>
-            <a:off x="868680" y="3998595"/>
-            <a:ext cx="10607040" cy="246761"/>
-          </a:xfrm>
-          <a:prstGeom prst="rect">
-            <a:avLst/>
-          </a:prstGeom>
-          <a:noFill/>
-        </p:spPr>
-        <p:txBody>
-          <a:bodyPr wrap="square">
-            <a:spAutoFit/>
-          </a:bodyPr>
-          <a:lstStyle/>
-          <a:p>
-            <a:pPr algn="l">
-              <a:lnSpc>
-                <a:spcPct val="115000"/>
-              </a:lnSpc>
-            </a:pPr>
-            <a:r>
-              <a:rPr sz="1450" b="1" i="0">
-                <a:solidFill>
-                  <a:srgbClr val="141B2D"/>
-                </a:solidFill>
-                <a:latin typeface="Segoe UI"/>
-              </a:rPr>
-              <a:t>The rules panel collapsed by default.</a:t>
-            </a:r>
-          </a:p>
-        </p:txBody>
-      </p:sp>
-      <p:sp>
-        <p:nvSpPr>
-          <p:cNvPr id="13" name="TextBox 12"/>
-          <p:cNvSpPr txBox="1"/>
-          <p:nvPr/>
-        </p:nvSpPr>
-        <p:spPr>
-          <a:xfrm>
-            <a:off x="868680" y="4281932"/>
-            <a:ext cx="10607040" cy="207264"/>
-          </a:xfrm>
-          <a:prstGeom prst="rect">
-            <a:avLst/>
-          </a:prstGeom>
-          <a:noFill/>
-        </p:spPr>
-        <p:txBody>
-          <a:bodyPr wrap="square">
-            <a:spAutoFit/>
-          </a:bodyPr>
-          <a:lstStyle/>
-          <a:p>
-            <a:pPr algn="l">
-              <a:lnSpc>
-                <a:spcPct val="125000"/>
-              </a:lnSpc>
-            </a:pPr>
-            <a:r>
-              <a:rPr sz="1200" b="0" i="0">
-                <a:solidFill>
-                  <a:srgbClr val="5A667A"/>
-                </a:solidFill>
-                <a:latin typeface="Segoe UI"/>
-              </a:rPr>
-              <a:t>It occupied the top of both games before anyone had pressed anything.</a:t>
-            </a:r>
-          </a:p>
-        </p:txBody>
-      </p:sp>
+              <a:t>Human and AI over one round</a:t>
+            </a:r>
+          </a:p>
+        </p:txBody>
+      </p:sp>
+      <p:pic>
+        <p:nvPicPr>
+          <p:cNvPr id="6" name="Picture 5" descr="chart_sequence.png"/>
+          <p:cNvPicPr>
+            <a:picLocks noChangeAspect="1"/>
+          </p:cNvPicPr>
+          <p:nvPr/>
+        </p:nvPicPr>
+        <p:blipFill>
+          <a:blip r:embed="rId2"/>
+          <a:stretch>
+            <a:fillRect/>
+          </a:stretch>
+        </p:blipFill>
+        <p:spPr>
+          <a:xfrm>
+            <a:off x="868680" y="1572768"/>
+            <a:ext cx="10424160" cy="4937760"/>
+          </a:xfrm>
+          <a:prstGeom prst="rect">
+            <a:avLst/>
+          </a:prstGeom>
+        </p:spPr>
+      </p:pic>
     </p:spTree>
   </p:cSld>
   <p:clrMapOvr>
@@ -9461,7 +9178,7 @@
                 </a:solidFill>
                 <a:latin typeface="Segoe UI"/>
               </a:rPr>
-              <a:t>WHAT BUILDING IT TAUGHT US</a:t>
+              <a:t>HOW THE AI DECIDES</a:t>
             </a:r>
           </a:p>
         </p:txBody>
@@ -9500,323 +9217,35 @@
                 </a:solidFill>
                 <a:latin typeface="Segoe UI"/>
               </a:rPr>
-              <a:t>The tests agreed with me more often than they should have</a:t>
-            </a:r>
-          </a:p>
-        </p:txBody>
-      </p:sp>
-      <p:sp>
-        <p:nvSpPr>
-          <p:cNvPr id="6" name="TextBox 5"/>
-          <p:cNvSpPr txBox="1"/>
-          <p:nvPr/>
-        </p:nvSpPr>
-        <p:spPr>
-          <a:xfrm>
-            <a:off x="868680" y="1783080"/>
-            <a:ext cx="10607040" cy="246761"/>
-          </a:xfrm>
-          <a:prstGeom prst="rect">
-            <a:avLst/>
-          </a:prstGeom>
-          <a:noFill/>
-        </p:spPr>
-        <p:txBody>
-          <a:bodyPr wrap="square">
-            <a:spAutoFit/>
-          </a:bodyPr>
-          <a:lstStyle/>
-          <a:p>
-            <a:pPr algn="l">
-              <a:lnSpc>
-                <a:spcPct val="115000"/>
-              </a:lnSpc>
-            </a:pPr>
-            <a:r>
-              <a:rPr sz="1450" b="1" i="0">
-                <a:solidFill>
-                  <a:srgbClr val="141B2D"/>
-                </a:solidFill>
-                <a:latin typeface="Segoe UI"/>
-              </a:rPr>
-              <a:t>Five real bugs were caught by looking at screenshots, not by assertions.</a:t>
-            </a:r>
-          </a:p>
-        </p:txBody>
-      </p:sp>
-      <p:sp>
-        <p:nvSpPr>
-          <p:cNvPr id="7" name="TextBox 6"/>
-          <p:cNvSpPr txBox="1"/>
-          <p:nvPr/>
-        </p:nvSpPr>
-        <p:spPr>
-          <a:xfrm>
-            <a:off x="868680" y="2066416"/>
-            <a:ext cx="10607040" cy="414528"/>
-          </a:xfrm>
-          <a:prstGeom prst="rect">
-            <a:avLst/>
-          </a:prstGeom>
-          <a:noFill/>
-        </p:spPr>
-        <p:txBody>
-          <a:bodyPr wrap="square">
-            <a:spAutoFit/>
-          </a:bodyPr>
-          <a:lstStyle/>
-          <a:p>
-            <a:pPr algn="l">
-              <a:lnSpc>
-                <a:spcPct val="125000"/>
-              </a:lnSpc>
-            </a:pPr>
-            <a:r>
-              <a:rPr sz="1200" b="0" i="0">
-                <a:solidFill>
-                  <a:srgbClr val="5A667A"/>
-                </a:solidFill>
-                <a:latin typeface="Segoe UI"/>
-              </a:rPr>
-              <a:t>A correct answer reported as 'Wrong - it answered null'. Panels frozen on a stale state. Overlays sitting on top of live canvases. Sensible actions rejected on formatting. A reply cut off by a token budget and scored as malformed.</a:t>
-            </a:r>
-          </a:p>
-        </p:txBody>
-      </p:sp>
-      <p:sp>
-        <p:nvSpPr>
-          <p:cNvPr id="8" name="TextBox 7"/>
-          <p:cNvSpPr txBox="1"/>
-          <p:nvPr/>
-        </p:nvSpPr>
-        <p:spPr>
-          <a:xfrm>
-            <a:off x="868680" y="2581529"/>
-            <a:ext cx="10607040" cy="246761"/>
-          </a:xfrm>
-          <a:prstGeom prst="rect">
-            <a:avLst/>
-          </a:prstGeom>
-          <a:noFill/>
-        </p:spPr>
-        <p:txBody>
-          <a:bodyPr wrap="square">
-            <a:spAutoFit/>
-          </a:bodyPr>
-          <a:lstStyle/>
-          <a:p>
-            <a:pPr algn="l">
-              <a:lnSpc>
-                <a:spcPct val="115000"/>
-              </a:lnSpc>
-            </a:pPr>
-            <a:r>
-              <a:rPr sz="1450" b="1" i="0">
-                <a:solidFill>
-                  <a:srgbClr val="141B2D"/>
-                </a:solidFill>
-                <a:latin typeface="Segoe UI"/>
-              </a:rPr>
-              <a:t>The common thread: asserting intent instead of outcome.</a:t>
-            </a:r>
-          </a:p>
-        </p:txBody>
-      </p:sp>
-      <p:sp>
-        <p:nvSpPr>
-          <p:cNvPr id="9" name="TextBox 8"/>
-          <p:cNvSpPr txBox="1"/>
-          <p:nvPr/>
-        </p:nvSpPr>
-        <p:spPr>
-          <a:xfrm>
-            <a:off x="868680" y="2864866"/>
-            <a:ext cx="10607040" cy="414528"/>
-          </a:xfrm>
-          <a:prstGeom prst="rect">
-            <a:avLst/>
-          </a:prstGeom>
-          <a:noFill/>
-        </p:spPr>
-        <p:txBody>
-          <a:bodyPr wrap="square">
-            <a:spAutoFit/>
-          </a:bodyPr>
-          <a:lstStyle/>
-          <a:p>
-            <a:pPr algn="l">
-              <a:lnSpc>
-                <a:spcPct val="125000"/>
-              </a:lnSpc>
-            </a:pPr>
-            <a:r>
-              <a:rPr sz="1200" b="0" i="0">
-                <a:solidFill>
-                  <a:srgbClr val="5A667A"/>
-                </a:solidFill>
-                <a:latin typeface="Segoe UI"/>
-              </a:rPr>
-              <a:t>Tests checked that hidden was set - it was - while the element stayed on screen, because an explicit CSS display beats the hidden attribute. Every such test passed throughout.</a:t>
-            </a:r>
-          </a:p>
-        </p:txBody>
-      </p:sp>
-      <p:sp>
-        <p:nvSpPr>
-          <p:cNvPr id="10" name="TextBox 9"/>
-          <p:cNvSpPr txBox="1"/>
-          <p:nvPr/>
-        </p:nvSpPr>
-        <p:spPr>
-          <a:xfrm>
-            <a:off x="868680" y="3379978"/>
-            <a:ext cx="10607040" cy="246761"/>
-          </a:xfrm>
-          <a:prstGeom prst="rect">
-            <a:avLst/>
-          </a:prstGeom>
-          <a:noFill/>
-        </p:spPr>
-        <p:txBody>
-          <a:bodyPr wrap="square">
-            <a:spAutoFit/>
-          </a:bodyPr>
-          <a:lstStyle/>
-          <a:p>
-            <a:pPr algn="l">
-              <a:lnSpc>
-                <a:spcPct val="115000"/>
-              </a:lnSpc>
-            </a:pPr>
-            <a:r>
-              <a:rPr sz="1450" b="1" i="0">
-                <a:solidFill>
-                  <a:srgbClr val="141B2D"/>
-                </a:solidFill>
-                <a:latin typeface="Segoe UI"/>
-              </a:rPr>
-              <a:t>Fixes applied per-place rather than once come back.</a:t>
-            </a:r>
-          </a:p>
-        </p:txBody>
-      </p:sp>
-      <p:sp>
-        <p:nvSpPr>
-          <p:cNvPr id="11" name="TextBox 10"/>
-          <p:cNvSpPr txBox="1"/>
-          <p:nvPr/>
-        </p:nvSpPr>
-        <p:spPr>
-          <a:xfrm>
-            <a:off x="868680" y="3663314"/>
-            <a:ext cx="10607040" cy="414528"/>
-          </a:xfrm>
-          <a:prstGeom prst="rect">
-            <a:avLst/>
-          </a:prstGeom>
-          <a:noFill/>
-        </p:spPr>
-        <p:txBody>
-          <a:bodyPr wrap="square">
-            <a:spAutoFit/>
-          </a:bodyPr>
-          <a:lstStyle/>
-          <a:p>
-            <a:pPr algn="l">
-              <a:lnSpc>
-                <a:spcPct val="125000"/>
-              </a:lnSpc>
-            </a:pPr>
-            <a:r>
-              <a:rPr sz="1200" b="0" i="0">
-                <a:solidFill>
-                  <a:srgbClr val="5A667A"/>
-                </a:solidFill>
-                <a:latin typeface="Segoe UI"/>
-              </a:rPr>
-              <a:t>The hidden-attribute bug was patched in four components before being fixed globally. The token-budget check existed in two other code paths and was missing from the third.</a:t>
-            </a:r>
-          </a:p>
-        </p:txBody>
-      </p:sp>
-      <p:sp>
-        <p:nvSpPr>
-          <p:cNvPr id="12" name="TextBox 11"/>
-          <p:cNvSpPr txBox="1"/>
-          <p:nvPr/>
-        </p:nvSpPr>
-        <p:spPr>
-          <a:xfrm>
-            <a:off x="868680" y="4178427"/>
-            <a:ext cx="10607040" cy="246761"/>
-          </a:xfrm>
-          <a:prstGeom prst="rect">
-            <a:avLst/>
-          </a:prstGeom>
-          <a:noFill/>
-        </p:spPr>
-        <p:txBody>
-          <a:bodyPr wrap="square">
-            <a:spAutoFit/>
-          </a:bodyPr>
-          <a:lstStyle/>
-          <a:p>
-            <a:pPr algn="l">
-              <a:lnSpc>
-                <a:spcPct val="115000"/>
-              </a:lnSpc>
-            </a:pPr>
-            <a:r>
-              <a:rPr sz="1450" b="1" i="0">
-                <a:solidFill>
-                  <a:srgbClr val="141B2D"/>
-                </a:solidFill>
-                <a:latin typeface="Segoe UI"/>
-              </a:rPr>
-              <a:t>Diagnostics are a feature.</a:t>
-            </a:r>
-          </a:p>
-        </p:txBody>
-      </p:sp>
-      <p:sp>
-        <p:nvSpPr>
-          <p:cNvPr id="13" name="TextBox 12"/>
-          <p:cNvSpPr txBox="1"/>
-          <p:nvPr/>
-        </p:nvSpPr>
-        <p:spPr>
-          <a:xfrm>
-            <a:off x="868680" y="4461764"/>
-            <a:ext cx="10607040" cy="207264"/>
-          </a:xfrm>
-          <a:prstGeom prst="rect">
-            <a:avLst/>
-          </a:prstGeom>
-          <a:noFill/>
-        </p:spPr>
-        <p:txBody>
-          <a:bodyPr wrap="square">
-            <a:spAutoFit/>
-          </a:bodyPr>
-          <a:lstStyle/>
-          <a:p>
-            <a:pPr algn="l">
-              <a:lnSpc>
-                <a:spcPct val="125000"/>
-              </a:lnSpc>
-            </a:pPr>
-            <a:r>
-              <a:rPr sz="1200" b="0" i="0">
-                <a:solidFill>
-                  <a:srgbClr val="5A667A"/>
-                </a:solidFill>
-                <a:latin typeface="Segoe UI"/>
-              </a:rPr>
-              <a:t>The failure message now shows the model's actual reply. The bug that took three rounds to identify would have been obvious in one.</a:t>
-            </a:r>
-          </a:p>
-        </p:txBody>
-      </p:sp>
+              <a:t>The agent loop, and every way it can end</a:t>
+            </a:r>
+          </a:p>
+        </p:txBody>
+      </p:sp>
+      <p:pic>
+        <p:nvPicPr>
+          <p:cNvPr id="6" name="Picture 5" descr="chart_agentloop.png"/>
+          <p:cNvPicPr>
+            <a:picLocks noChangeAspect="1"/>
+          </p:cNvPicPr>
+          <p:nvPr/>
+        </p:nvPicPr>
+        <p:blipFill>
+          <a:blip r:embed="rId2"/>
+          <a:stretch>
+            <a:fillRect/>
+          </a:stretch>
+        </p:blipFill>
+        <p:spPr>
+          <a:xfrm>
+            <a:off x="868680" y="1572768"/>
+            <a:ext cx="10424160" cy="4754880"/>
+          </a:xfrm>
+          <a:prstGeom prst="rect">
+            <a:avLst/>
+          </a:prstGeom>
+        </p:spPr>
+      </p:pic>
     </p:spTree>
   </p:cSld>
   <p:clrMapOvr>
@@ -9957,7 +9386,7 @@
                 </a:solidFill>
                 <a:latin typeface="Segoe UI"/>
               </a:rPr>
-              <a:t>CREDITS</a:t>
+              <a:t>HOW THE AI DECIDES</a:t>
             </a:r>
           </a:p>
         </p:txBody>
@@ -9996,7 +9425,7 @@
                 </a:solidFill>
                 <a:latin typeface="Segoe UI"/>
               </a:rPr>
-              <a:t>Standing on other people's work</a:t>
+              <a:t>What the model is actually sent</a:t>
             </a:r>
           </a:p>
         </p:txBody>
@@ -10035,7 +9464,7 @@
                 </a:solidFill>
                 <a:latin typeface="Segoe UI"/>
               </a:rPr>
-              <a:t>MNIST-PRO  -  MIT</a:t>
+              <a:t>System instruction - verbatim from the benchmark's specs.py</a:t>
             </a:r>
           </a:p>
         </p:txBody>
@@ -10049,6 +9478,84 @@
         <p:spPr>
           <a:xfrm>
             <a:off x="868680" y="2066416"/>
+            <a:ext cx="10607040" cy="621792"/>
+          </a:xfrm>
+          <a:prstGeom prst="rect">
+            <a:avLst/>
+          </a:prstGeom>
+          <a:noFill/>
+        </p:spPr>
+        <p:txBody>
+          <a:bodyPr wrap="square">
+            <a:spAutoFit/>
+          </a:bodyPr>
+          <a:lstStyle/>
+          <a:p>
+            <a:pPr algn="l">
+              <a:lnSpc>
+                <a:spcPct val="125000"/>
+              </a:lnSpc>
+            </a:pPr>
+            <a:r>
+              <a:rPr sz="1200" b="0" i="0">
+                <a:solidFill>
+                  <a:srgbClr val="5A667A"/>
+                </a:solidFill>
+                <a:latin typeface="Segoe UI"/>
+              </a:rPr>
+              <a:t>"You are an active vision agent playing a game to identify an MNIST digit... The digit is drawn in black on a white background, and unseen areas are masked in dark gray... you only have one chance to provide the final answer." Move as {"action":"move","direction":"up"}; answer as {"action":"answer","value":&lt;digit&gt;}.</a:t>
+            </a:r>
+          </a:p>
+        </p:txBody>
+      </p:sp>
+      <p:sp>
+        <p:nvSpPr>
+          <p:cNvPr id="8" name="TextBox 7"/>
+          <p:cNvSpPr txBox="1"/>
+          <p:nvPr/>
+        </p:nvSpPr>
+        <p:spPr>
+          <a:xfrm>
+            <a:off x="868680" y="2788793"/>
+            <a:ext cx="10607040" cy="246761"/>
+          </a:xfrm>
+          <a:prstGeom prst="rect">
+            <a:avLst/>
+          </a:prstGeom>
+          <a:noFill/>
+        </p:spPr>
+        <p:txBody>
+          <a:bodyPr wrap="square">
+            <a:spAutoFit/>
+          </a:bodyPr>
+          <a:lstStyle/>
+          <a:p>
+            <a:pPr algn="l">
+              <a:lnSpc>
+                <a:spcPct val="115000"/>
+              </a:lnSpc>
+            </a:pPr>
+            <a:r>
+              <a:rPr sz="1450" b="1" i="0">
+                <a:solidFill>
+                  <a:srgbClr val="141B2D"/>
+                </a:solidFill>
+                <a:latin typeface="Segoe UI"/>
+              </a:rPr>
+              <a:t>Each turn carries one PNG and nothing else.</a:t>
+            </a:r>
+          </a:p>
+        </p:txBody>
+      </p:sp>
+      <p:sp>
+        <p:nvSpPr>
+          <p:cNvPr id="9" name="TextBox 8"/>
+          <p:cNvSpPr txBox="1"/>
+          <p:nvPr/>
+        </p:nvSpPr>
+        <p:spPr>
+          <a:xfrm>
+            <a:off x="868680" y="3072130"/>
             <a:ext cx="10607040" cy="414528"/>
           </a:xfrm>
           <a:prstGeom prst="rect">
@@ -10074,20 +9581,20 @@
                 </a:solidFill>
                 <a:latin typeface="Segoe UI"/>
               </a:rPr>
-              <a:t>Toh, Majumder, Liu, Chen and Poria. DeCLaRe Lab, Nanyang Technological University, and A*STAR. arXiv:2608.31022  ·  github.com/declare-lab/MNIST-PRO</a:t>
-            </a:r>
-          </a:p>
-        </p:txBody>
-      </p:sp>
-      <p:sp>
-        <p:nvSpPr>
-          <p:cNvPr id="8" name="TextBox 7"/>
-          <p:cNvSpPr txBox="1"/>
-          <p:nvPr/>
-        </p:nvSpPr>
-        <p:spPr>
-          <a:xfrm>
-            <a:off x="868680" y="2663825"/>
+              <a:t>The 224x224 canvas masked to the current 64px window - the same bytes drawn on screen. Never the whole canvas, never the label, never the human's progress.</a:t>
+            </a:r>
+          </a:p>
+        </p:txBody>
+      </p:sp>
+      <p:sp>
+        <p:nvSpPr>
+          <p:cNvPr id="10" name="TextBox 9"/>
+          <p:cNvSpPr txBox="1"/>
+          <p:nvPr/>
+        </p:nvSpPr>
+        <p:spPr>
+          <a:xfrm>
+            <a:off x="868680" y="3587242"/>
             <a:ext cx="10607040" cy="246761"/>
           </a:xfrm>
           <a:prstGeom prst="rect">
@@ -10113,20 +9620,98 @@
                 </a:solidFill>
                 <a:latin typeface="Segoe UI"/>
               </a:rPr>
-              <a:t>MNIST  -  CC BY-SA 3.0</a:t>
-            </a:r>
-          </a:p>
-        </p:txBody>
-      </p:sp>
-      <p:sp>
-        <p:nvSpPr>
-          <p:cNvPr id="9" name="TextBox 8"/>
-          <p:cNvSpPr txBox="1"/>
-          <p:nvPr/>
-        </p:nvSpPr>
-        <p:spPr>
-          <a:xfrm>
-            <a:off x="868680" y="2947162"/>
+              <a:t>The transcript grows; the instruction is sent once.</a:t>
+            </a:r>
+          </a:p>
+        </p:txBody>
+      </p:sp>
+      <p:sp>
+        <p:nvSpPr>
+          <p:cNvPr id="11" name="TextBox 10"/>
+          <p:cNvSpPr txBox="1"/>
+          <p:nvPr/>
+        </p:nvSpPr>
+        <p:spPr>
+          <a:xfrm>
+            <a:off x="868680" y="3870578"/>
+            <a:ext cx="10607040" cy="414528"/>
+          </a:xfrm>
+          <a:prstGeom prst="rect">
+            <a:avLst/>
+          </a:prstGeom>
+          <a:noFill/>
+        </p:spPr>
+        <p:txBody>
+          <a:bodyPr wrap="square">
+            <a:spAutoFit/>
+          </a:bodyPr>
+          <a:lstStyle/>
+          <a:p>
+            <a:pPr algn="l">
+              <a:lnSpc>
+                <a:spcPct val="125000"/>
+              </a:lnSpc>
+            </a:pPr>
+            <a:r>
+              <a:rPr sz="1200" b="0" i="0">
+                <a:solidFill>
+                  <a:srgbClr val="5A667A"/>
+                </a:solidFill>
+                <a:latin typeface="Segoe UI"/>
+              </a:rPr>
+              <a:t>Mirrors the benchmark's natural turn mode: the text instruction goes in the first user turn only, each later turn is just the new image, and the model's own replies stay between them. By step 20 it is reasoning over 20 images and its own 19 answers.</a:t>
+            </a:r>
+          </a:p>
+        </p:txBody>
+      </p:sp>
+      <p:sp>
+        <p:nvSpPr>
+          <p:cNvPr id="12" name="TextBox 11"/>
+          <p:cNvSpPr txBox="1"/>
+          <p:nvPr/>
+        </p:nvSpPr>
+        <p:spPr>
+          <a:xfrm>
+            <a:off x="868680" y="4385691"/>
+            <a:ext cx="10607040" cy="246761"/>
+          </a:xfrm>
+          <a:prstGeom prst="rect">
+            <a:avLst/>
+          </a:prstGeom>
+          <a:noFill/>
+        </p:spPr>
+        <p:txBody>
+          <a:bodyPr wrap="square">
+            <a:spAutoFit/>
+          </a:bodyPr>
+          <a:lstStyle/>
+          <a:p>
+            <a:pPr algn="l">
+              <a:lnSpc>
+                <a:spcPct val="115000"/>
+              </a:lnSpc>
+            </a:pPr>
+            <a:r>
+              <a:rPr sz="1450" b="1" i="0">
+                <a:solidFill>
+                  <a:srgbClr val="141B2D"/>
+                </a:solidFill>
+                <a:latin typeface="Segoe UI"/>
+              </a:rPr>
+              <a:t>It is asked for a 'thought' key, and that is what you watch on screen.</a:t>
+            </a:r>
+          </a:p>
+        </p:txBody>
+      </p:sp>
+      <p:sp>
+        <p:nvSpPr>
+          <p:cNvPr id="13" name="TextBox 12"/>
+          <p:cNvSpPr txBox="1"/>
+          <p:nvPr/>
+        </p:nvSpPr>
+        <p:spPr>
+          <a:xfrm>
+            <a:off x="868680" y="4669028"/>
             <a:ext cx="10607040" cy="207264"/>
           </a:xfrm>
           <a:prstGeom prst="rect">
@@ -10152,163 +9737,7 @@
                 </a:solidFill>
                 <a:latin typeface="Segoe UI"/>
               </a:rPr>
-              <a:t>LeCun, Cortes and Burges, derived from NIST Special Database 19.</a:t>
-            </a:r>
-          </a:p>
-        </p:txBody>
-      </p:sp>
-      <p:sp>
-        <p:nvSpPr>
-          <p:cNvPr id="10" name="TextBox 9"/>
-          <p:cNvSpPr txBox="1"/>
-          <p:nvPr/>
-        </p:nvSpPr>
-        <p:spPr>
-          <a:xfrm>
-            <a:off x="868680" y="3337306"/>
-            <a:ext cx="10607040" cy="246761"/>
-          </a:xfrm>
-          <a:prstGeom prst="rect">
-            <a:avLst/>
-          </a:prstGeom>
-          <a:noFill/>
-        </p:spPr>
-        <p:txBody>
-          <a:bodyPr wrap="square">
-            <a:spAutoFit/>
-          </a:bodyPr>
-          <a:lstStyle/>
-          <a:p>
-            <a:pPr algn="l">
-              <a:lnSpc>
-                <a:spcPct val="115000"/>
-              </a:lnSpc>
-            </a:pPr>
-            <a:r>
-              <a:rPr sz="1450" b="1" i="0">
-                <a:solidFill>
-                  <a:srgbClr val="141B2D"/>
-                </a:solidFill>
-                <a:latin typeface="Segoe UI"/>
-              </a:rPr>
-              <a:t>ARC-AGI-1  -  Apache 2.0</a:t>
-            </a:r>
-          </a:p>
-        </p:txBody>
-      </p:sp>
-      <p:sp>
-        <p:nvSpPr>
-          <p:cNvPr id="11" name="TextBox 10"/>
-          <p:cNvSpPr txBox="1"/>
-          <p:nvPr/>
-        </p:nvSpPr>
-        <p:spPr>
-          <a:xfrm>
-            <a:off x="868680" y="3620643"/>
-            <a:ext cx="10607040" cy="207264"/>
-          </a:xfrm>
-          <a:prstGeom prst="rect">
-            <a:avLst/>
-          </a:prstGeom>
-          <a:noFill/>
-        </p:spPr>
-        <p:txBody>
-          <a:bodyPr wrap="square">
-            <a:spAutoFit/>
-          </a:bodyPr>
-          <a:lstStyle/>
-          <a:p>
-            <a:pPr algn="l">
-              <a:lnSpc>
-                <a:spcPct val="125000"/>
-              </a:lnSpc>
-            </a:pPr>
-            <a:r>
-              <a:rPr sz="1200" b="0" i="0">
-                <a:solidFill>
-                  <a:srgbClr val="5A667A"/>
-                </a:solidFill>
-                <a:latin typeface="Segoe UI"/>
-              </a:rPr>
-              <a:t>Francois Chollet. The public training set, used unmodified.</a:t>
-            </a:r>
-          </a:p>
-        </p:txBody>
-      </p:sp>
-      <p:sp>
-        <p:nvSpPr>
-          <p:cNvPr id="12" name="TextBox 11"/>
-          <p:cNvSpPr txBox="1"/>
-          <p:nvPr/>
-        </p:nvSpPr>
-        <p:spPr>
-          <a:xfrm>
-            <a:off x="868680" y="4010787"/>
-            <a:ext cx="10607040" cy="246761"/>
-          </a:xfrm>
-          <a:prstGeom prst="rect">
-            <a:avLst/>
-          </a:prstGeom>
-          <a:noFill/>
-        </p:spPr>
-        <p:txBody>
-          <a:bodyPr wrap="square">
-            <a:spAutoFit/>
-          </a:bodyPr>
-          <a:lstStyle/>
-          <a:p>
-            <a:pPr algn="l">
-              <a:lnSpc>
-                <a:spcPct val="115000"/>
-              </a:lnSpc>
-            </a:pPr>
-            <a:r>
-              <a:rPr sz="1450" b="1" i="0">
-                <a:solidFill>
-                  <a:srgbClr val="141B2D"/>
-                </a:solidFill>
-                <a:latin typeface="Segoe UI"/>
-              </a:rPr>
-              <a:t>Licences are retained in the repository.</a:t>
-            </a:r>
-          </a:p>
-        </p:txBody>
-      </p:sp>
-      <p:sp>
-        <p:nvSpPr>
-          <p:cNvPr id="13" name="TextBox 12"/>
-          <p:cNvSpPr txBox="1"/>
-          <p:nvPr/>
-        </p:nvSpPr>
-        <p:spPr>
-          <a:xfrm>
-            <a:off x="868680" y="4294124"/>
-            <a:ext cx="10607040" cy="207264"/>
-          </a:xfrm>
-          <a:prstGeom prst="rect">
-            <a:avLst/>
-          </a:prstGeom>
-          <a:noFill/>
-        </p:spPr>
-        <p:txBody>
-          <a:bodyPr wrap="square">
-            <a:spAutoFit/>
-          </a:bodyPr>
-          <a:lstStyle/>
-          <a:p>
-            <a:pPr algn="l">
-              <a:lnSpc>
-                <a:spcPct val="125000"/>
-              </a:lnSpc>
-            </a:pPr>
-            <a:r>
-              <a:rPr sz="1200" b="0" i="0">
-                <a:solidFill>
-                  <a:srgbClr val="5A667A"/>
-                </a:solidFill>
-                <a:latin typeface="Segoe UI"/>
-              </a:rPr>
-              <a:t>third_party/mnist-pro/LICENSE, with attribution files beside the generated data.</a:t>
+              <a:t>The narration is the benchmark's textual_state memory condition, not decoration.</a:t>
             </a:r>
           </a:p>
         </p:txBody>
@@ -10346,7 +9775,7 @@
             <a:avLst/>
           </a:prstGeom>
           <a:solidFill>
-            <a:srgbClr val="0E1A2B"/>
+            <a:srgbClr val="FAFBFD"/>
           </a:solidFill>
           <a:ln>
             <a:noFill/>
@@ -10383,8 +9812,8 @@
         </p:nvSpPr>
         <p:spPr>
           <a:xfrm>
-            <a:off x="0" y="2697480"/>
-            <a:ext cx="12191695" cy="41148"/>
+            <a:off x="640080" y="566928"/>
+            <a:ext cx="82296" cy="420624"/>
           </a:xfrm>
           <a:prstGeom prst="rect">
             <a:avLst/>
@@ -10427,8 +9856,8 @@
         </p:nvSpPr>
         <p:spPr>
           <a:xfrm>
-            <a:off x="914400" y="1645920"/>
-            <a:ext cx="10515600" cy="822960"/>
+            <a:off x="868680" y="502920"/>
+            <a:ext cx="10058400" cy="310896"/>
           </a:xfrm>
           <a:prstGeom prst="rect">
             <a:avLst/>
@@ -10447,13 +9876,13 @@
               </a:lnSpc>
             </a:pPr>
             <a:r>
-              <a:rPr sz="3800" b="1" i="0">
-                <a:solidFill>
-                  <a:srgbClr val="FFFFFF"/>
-                </a:solidFill>
-                <a:latin typeface="Segoe UI"/>
-              </a:rPr>
-              <a:t>Play it</a:t>
+              <a:rPr sz="1100" b="1" i="0">
+                <a:solidFill>
+                  <a:srgbClr val="5A667A"/>
+                </a:solidFill>
+                <a:latin typeface="Segoe UI"/>
+              </a:rPr>
+              <a:t>LOW-LEVEL DESIGN</a:t>
             </a:r>
           </a:p>
         </p:txBody>
@@ -10466,81 +9895,33 @@
         </p:nvSpPr>
         <p:spPr>
           <a:xfrm>
-            <a:off x="914400" y="2971800"/>
-            <a:ext cx="10515600" cy="2194560"/>
-          </a:xfrm>
-          <a:prstGeom prst="rect">
-            <a:avLst/>
-          </a:prstGeom>
-          <a:noFill/>
-        </p:spPr>
-        <p:txBody>
-          <a:bodyPr wrap="square">
-            <a:spAutoFit/>
-          </a:bodyPr>
-          <a:lstStyle/>
-          <a:p>
-            <a:pPr algn="l">
-              <a:lnSpc>
-                <a:spcPct val="190000"/>
-              </a:lnSpc>
-            </a:pPr>
-            <a:r>
-              <a:rPr sz="1550" b="0" i="0">
-                <a:solidFill>
-                  <a:srgbClr val="D4DEEA"/>
-                </a:solidFill>
-                <a:latin typeface="Segoe UI"/>
-              </a:rPr>
-              <a:t>MNIST-PRO        panandi.github.io/mnistpro</a:t>
-            </a:r>
-          </a:p>
-          <a:p>
-            <a:pPr algn="l">
-              <a:lnSpc>
-                <a:spcPct val="190000"/>
-              </a:lnSpc>
-            </a:pPr>
-            <a:r>
-              <a:rPr sz="1550" b="0" i="0">
-                <a:solidFill>
-                  <a:srgbClr val="D4DEEA"/>
-                </a:solidFill>
-                <a:latin typeface="Segoe UI"/>
-              </a:rPr>
-              <a:t>ARC Race         panandi.github.io/mnistpro/arc.html</a:t>
-            </a:r>
-          </a:p>
-          <a:p>
-            <a:pPr algn="l">
-              <a:lnSpc>
-                <a:spcPct val="190000"/>
-              </a:lnSpc>
-            </a:pPr>
-            <a:r>
-              <a:rPr sz="1550" b="0" i="0">
-                <a:solidFill>
-                  <a:srgbClr val="D4DEEA"/>
-                </a:solidFill>
-                <a:latin typeface="Segoe UI"/>
-              </a:rPr>
-              <a:t>Player's guide   panandi.github.io/mnistpro/guide.html</a:t>
-            </a:r>
-          </a:p>
-          <a:p>
-            <a:pPr algn="l">
-              <a:lnSpc>
-                <a:spcPct val="190000"/>
-              </a:lnSpc>
-            </a:pPr>
-            <a:r>
-              <a:rPr sz="1550" b="0" i="0">
-                <a:solidFill>
-                  <a:srgbClr val="D4DEEA"/>
-                </a:solidFill>
-                <a:latin typeface="Segoe UI"/>
-              </a:rPr>
-              <a:t>Source           github.com/panandi/mnistpro</a:t>
+            <a:off x="841248" y="841248"/>
+            <a:ext cx="10607040" cy="566928"/>
+          </a:xfrm>
+          <a:prstGeom prst="rect">
+            <a:avLst/>
+          </a:prstGeom>
+          <a:noFill/>
+        </p:spPr>
+        <p:txBody>
+          <a:bodyPr wrap="square">
+            <a:spAutoFit/>
+          </a:bodyPr>
+          <a:lstStyle/>
+          <a:p>
+            <a:pPr algn="l">
+              <a:lnSpc>
+                <a:spcPct val="115000"/>
+              </a:lnSpc>
+            </a:pPr>
+            <a:r>
+              <a:rPr sz="2800" b="1" i="0">
+                <a:solidFill>
+                  <a:srgbClr val="141B2D"/>
+                </a:solidFill>
+                <a:latin typeface="Segoe UI"/>
+              </a:rPr>
+              <a:t>Lane state, and the ported environment</a:t>
             </a:r>
           </a:p>
         </p:txBody>
@@ -10553,8 +9934,8 @@
         </p:nvSpPr>
         <p:spPr>
           <a:xfrm>
-            <a:off x="914400" y="5715000"/>
-            <a:ext cx="10515600" cy="548640"/>
+            <a:off x="868680" y="1783080"/>
+            <a:ext cx="10607040" cy="246761"/>
           </a:xfrm>
           <a:prstGeom prst="rect">
             <a:avLst/>
@@ -10573,13 +9954,2231 @@
               </a:lnSpc>
             </a:pPr>
             <a:r>
-              <a:rPr sz="1300" b="0" i="0">
-                <a:solidFill>
-                  <a:srgbClr val="8D9DB2"/>
-                </a:solidFill>
-                <a:latin typeface="Segoe UI"/>
-              </a:rPr>
-              <a:t>No install, no sign-up, no key needed to play solo. Bring an OpenRouter key if you want to race the model.</a:t>
+              <a:rPr sz="1450" b="1" i="0">
+                <a:solidFill>
+                  <a:srgbClr val="141B2D"/>
+                </a:solidFill>
+                <a:latin typeface="Segoe UI"/>
+              </a:rPr>
+              <a:t>Each lane is one object, identical for human and model.</a:t>
+            </a:r>
+          </a:p>
+        </p:txBody>
+      </p:sp>
+      <p:sp>
+        <p:nvSpPr>
+          <p:cNvPr id="7" name="TextBox 6"/>
+          <p:cNvSpPr txBox="1"/>
+          <p:nvPr/>
+        </p:nvSpPr>
+        <p:spPr>
+          <a:xfrm>
+            <a:off x="868680" y="2066416"/>
+            <a:ext cx="10607040" cy="414528"/>
+          </a:xfrm>
+          <a:prstGeom prst="rect">
+            <a:avLst/>
+          </a:prstGeom>
+          <a:noFill/>
+        </p:spPr>
+        <p:txBody>
+          <a:bodyPr wrap="square">
+            <a:spAutoFit/>
+          </a:bodyPr>
+          <a:lstStyle/>
+          <a:p>
+            <a:pPr algn="l">
+              <a:lnSpc>
+                <a:spcPct val="125000"/>
+              </a:lnSpc>
+            </a:pPr>
+            <a:r>
+              <a:rPr sz="1200" b="0" i="0">
+                <a:solidFill>
+                  <a:srgbClr val="5A667A"/>
+                </a:solidFill>
+                <a:latin typeface="Segoe UI"/>
+              </a:rPr>
+              <a:t>{ x, y, steps, moves, visited[], done, reason, answer, success } - so the same applyAction() scores both, and neither can be given a rule the other lacks.</a:t>
+            </a:r>
+          </a:p>
+        </p:txBody>
+      </p:sp>
+      <p:sp>
+        <p:nvSpPr>
+          <p:cNvPr id="8" name="TextBox 7"/>
+          <p:cNvSpPr txBox="1"/>
+          <p:nvPr/>
+        </p:nvSpPr>
+        <p:spPr>
+          <a:xfrm>
+            <a:off x="868680" y="2581529"/>
+            <a:ext cx="10607040" cy="246761"/>
+          </a:xfrm>
+          <a:prstGeom prst="rect">
+            <a:avLst/>
+          </a:prstGeom>
+          <a:noFill/>
+        </p:spPr>
+        <p:txBody>
+          <a:bodyPr wrap="square">
+            <a:spAutoFit/>
+          </a:bodyPr>
+          <a:lstStyle/>
+          <a:p>
+            <a:pPr algn="l">
+              <a:lnSpc>
+                <a:spcPct val="115000"/>
+              </a:lnSpc>
+            </a:pPr>
+            <a:r>
+              <a:rPr sz="1450" b="1" i="0">
+                <a:solidFill>
+                  <a:srgbClr val="141B2D"/>
+                </a:solidFill>
+                <a:latin typeface="Segoe UI"/>
+              </a:rPr>
+              <a:t>Movement is clamped, never wrapped.</a:t>
+            </a:r>
+          </a:p>
+        </p:txBody>
+      </p:sp>
+      <p:sp>
+        <p:nvSpPr>
+          <p:cNvPr id="9" name="TextBox 8"/>
+          <p:cNvSpPr txBox="1"/>
+          <p:nvPr/>
+        </p:nvSpPr>
+        <p:spPr>
+          <a:xfrm>
+            <a:off x="868680" y="2864866"/>
+            <a:ext cx="10607040" cy="414528"/>
+          </a:xfrm>
+          <a:prstGeom prst="rect">
+            <a:avLst/>
+          </a:prstGeom>
+          <a:noFill/>
+        </p:spPr>
+        <p:txBody>
+          <a:bodyPr wrap="square">
+            <a:spAutoFit/>
+          </a:bodyPr>
+          <a:lstStyle/>
+          <a:p>
+            <a:pPr algn="l">
+              <a:lnSpc>
+                <a:spcPct val="125000"/>
+              </a:lnSpc>
+            </a:pPr>
+            <a:r>
+              <a:rPr sz="1200" b="0" i="0">
+                <a:solidFill>
+                  <a:srgbClr val="5A667A"/>
+                </a:solidFill>
+                <a:latin typeface="Segoe UI"/>
+              </a:rPr>
+              <a:t>up: y = max(0, y - 32)   ·   down: y = min(height - box, y + 32), and the same for x. From [130,130] an 'up' gives [130,98] - the trajectory the published run recorded.</a:t>
+            </a:r>
+          </a:p>
+        </p:txBody>
+      </p:sp>
+      <p:sp>
+        <p:nvSpPr>
+          <p:cNvPr id="10" name="TextBox 9"/>
+          <p:cNvSpPr txBox="1"/>
+          <p:nvPr/>
+        </p:nvSpPr>
+        <p:spPr>
+          <a:xfrm>
+            <a:off x="868680" y="3379978"/>
+            <a:ext cx="10607040" cy="246761"/>
+          </a:xfrm>
+          <a:prstGeom prst="rect">
+            <a:avLst/>
+          </a:prstGeom>
+          <a:noFill/>
+        </p:spPr>
+        <p:txBody>
+          <a:bodyPr wrap="square">
+            <a:spAutoFit/>
+          </a:bodyPr>
+          <a:lstStyle/>
+          <a:p>
+            <a:pPr algn="l">
+              <a:lnSpc>
+                <a:spcPct val="115000"/>
+              </a:lnSpc>
+            </a:pPr>
+            <a:r>
+              <a:rPr sz="1450" b="1" i="0">
+                <a:solidFill>
+                  <a:srgbClr val="141B2D"/>
+                </a:solidFill>
+                <a:latin typeface="Segoe UI"/>
+              </a:rPr>
+              <a:t>steps counts every action; moves counts only sensing.</a:t>
+            </a:r>
+          </a:p>
+        </p:txBody>
+      </p:sp>
+      <p:sp>
+        <p:nvSpPr>
+          <p:cNvPr id="11" name="TextBox 10"/>
+          <p:cNvSpPr txBox="1"/>
+          <p:nvPr/>
+        </p:nvSpPr>
+        <p:spPr>
+          <a:xfrm>
+            <a:off x="868680" y="3663314"/>
+            <a:ext cx="10607040" cy="207264"/>
+          </a:xfrm>
+          <a:prstGeom prst="rect">
+            <a:avLst/>
+          </a:prstGeom>
+          <a:noFill/>
+        </p:spPr>
+        <p:txBody>
+          <a:bodyPr wrap="square">
+            <a:spAutoFit/>
+          </a:bodyPr>
+          <a:lstStyle/>
+          <a:p>
+            <a:pPr algn="l">
+              <a:lnSpc>
+                <a:spcPct val="125000"/>
+              </a:lnSpc>
+            </a:pPr>
+            <a:r>
+              <a:rPr sz="1200" b="0" i="0">
+                <a:solidFill>
+                  <a:srgbClr val="5A667A"/>
+                </a:solidFill>
+                <a:latin typeface="Segoe UI"/>
+              </a:rPr>
+              <a:t>The answer costs a step but not a move, which is why the scoreboard reads 'sensing steps' and decide() compares lane.moves.</a:t>
+            </a:r>
+          </a:p>
+        </p:txBody>
+      </p:sp>
+      <p:sp>
+        <p:nvSpPr>
+          <p:cNvPr id="12" name="TextBox 11"/>
+          <p:cNvSpPr txBox="1"/>
+          <p:nvPr/>
+        </p:nvSpPr>
+        <p:spPr>
+          <a:xfrm>
+            <a:off x="868680" y="3971163"/>
+            <a:ext cx="10607040" cy="246761"/>
+          </a:xfrm>
+          <a:prstGeom prst="rect">
+            <a:avLst/>
+          </a:prstGeom>
+          <a:noFill/>
+        </p:spPr>
+        <p:txBody>
+          <a:bodyPr wrap="square">
+            <a:spAutoFit/>
+          </a:bodyPr>
+          <a:lstStyle/>
+          <a:p>
+            <a:pPr algn="l">
+              <a:lnSpc>
+                <a:spcPct val="115000"/>
+              </a:lnSpc>
+            </a:pPr>
+            <a:r>
+              <a:rPr sz="1450" b="1" i="0">
+                <a:solidFill>
+                  <a:srgbClr val="141B2D"/>
+                </a:solidFill>
+                <a:latin typeface="Segoe UI"/>
+              </a:rPr>
+              <a:t>36 steps, one answer, four terminal reasons.</a:t>
+            </a:r>
+          </a:p>
+        </p:txBody>
+      </p:sp>
+      <p:sp>
+        <p:nvSpPr>
+          <p:cNvPr id="13" name="TextBox 12"/>
+          <p:cNvSpPr txBox="1"/>
+          <p:nvPr/>
+        </p:nvSpPr>
+        <p:spPr>
+          <a:xfrm>
+            <a:off x="868680" y="4254500"/>
+            <a:ext cx="10607040" cy="207264"/>
+          </a:xfrm>
+          <a:prstGeom prst="rect">
+            <a:avLst/>
+          </a:prstGeom>
+          <a:noFill/>
+        </p:spPr>
+        <p:txBody>
+          <a:bodyPr wrap="square">
+            <a:spAutoFit/>
+          </a:bodyPr>
+          <a:lstStyle/>
+          <a:p>
+            <a:pPr algn="l">
+              <a:lnSpc>
+                <a:spcPct val="125000"/>
+              </a:lnSpc>
+            </a:pPr>
+            <a:r>
+              <a:rPr sz="1200" b="0" i="0">
+                <a:solidFill>
+                  <a:srgbClr val="5A667A"/>
+                </a:solidFill>
+                <a:latin typeface="Segoe UI"/>
+              </a:rPr>
+              <a:t>answered, step_limit, invalid_action, stopped. applyAction returns false on a finished lane, so a late reply cannot be scored.</a:t>
+            </a:r>
+          </a:p>
+        </p:txBody>
+      </p:sp>
+    </p:spTree>
+  </p:cSld>
+  <p:clrMapOvr>
+    <a:masterClrMapping/>
+  </p:clrMapOvr>
+</p:sld>
+</file>
+
+<file path=ppt/slides/slide26.xml><?xml version="1.0" encoding="utf-8"?>
+<p:sld xmlns:a="http://schemas.openxmlformats.org/drawingml/2006/main" xmlns:p="http://schemas.openxmlformats.org/presentationml/2006/main" xmlns:r="http://schemas.openxmlformats.org/officeDocument/2006/relationships">
+  <p:cSld>
+    <p:spTree>
+      <p:nvGrpSpPr>
+        <p:cNvPr id="1" name=""/>
+        <p:cNvGrpSpPr/>
+        <p:nvPr/>
+      </p:nvGrpSpPr>
+      <p:grpSpPr/>
+      <p:sp>
+        <p:nvSpPr>
+          <p:cNvPr id="2" name="Rectangle 1"/>
+          <p:cNvSpPr/>
+          <p:nvPr/>
+        </p:nvSpPr>
+        <p:spPr>
+          <a:xfrm>
+            <a:off x="0" y="0"/>
+            <a:ext cx="12191695" cy="6858000"/>
+          </a:xfrm>
+          <a:prstGeom prst="rect">
+            <a:avLst/>
+          </a:prstGeom>
+          <a:solidFill>
+            <a:srgbClr val="FAFBFD"/>
+          </a:solidFill>
+          <a:ln>
+            <a:noFill/>
+          </a:ln>
+          <a:effectLst/>
+        </p:spPr>
+        <p:style>
+          <a:lnRef idx="1">
+            <a:schemeClr val="accent1"/>
+          </a:lnRef>
+          <a:fillRef idx="3">
+            <a:schemeClr val="accent1"/>
+          </a:fillRef>
+          <a:effectRef idx="2">
+            <a:schemeClr val="accent1"/>
+          </a:effectRef>
+          <a:fontRef idx="minor">
+            <a:schemeClr val="lt1"/>
+          </a:fontRef>
+        </p:style>
+        <p:txBody>
+          <a:bodyPr rtlCol="0" anchor="ctr"/>
+          <a:lstStyle/>
+          <a:p>
+            <a:pPr algn="ctr"/>
+          </a:p>
+        </p:txBody>
+      </p:sp>
+      <p:sp>
+        <p:nvSpPr>
+          <p:cNvPr id="3" name="Rectangle 2"/>
+          <p:cNvSpPr/>
+          <p:nvPr/>
+        </p:nvSpPr>
+        <p:spPr>
+          <a:xfrm>
+            <a:off x="640080" y="566928"/>
+            <a:ext cx="82296" cy="420624"/>
+          </a:xfrm>
+          <a:prstGeom prst="rect">
+            <a:avLst/>
+          </a:prstGeom>
+          <a:solidFill>
+            <a:srgbClr val="00A8BF"/>
+          </a:solidFill>
+          <a:ln>
+            <a:noFill/>
+          </a:ln>
+          <a:effectLst/>
+        </p:spPr>
+        <p:style>
+          <a:lnRef idx="1">
+            <a:schemeClr val="accent1"/>
+          </a:lnRef>
+          <a:fillRef idx="3">
+            <a:schemeClr val="accent1"/>
+          </a:fillRef>
+          <a:effectRef idx="2">
+            <a:schemeClr val="accent1"/>
+          </a:effectRef>
+          <a:fontRef idx="minor">
+            <a:schemeClr val="lt1"/>
+          </a:fontRef>
+        </p:style>
+        <p:txBody>
+          <a:bodyPr rtlCol="0" anchor="ctr"/>
+          <a:lstStyle/>
+          <a:p>
+            <a:pPr algn="ctr"/>
+          </a:p>
+        </p:txBody>
+      </p:sp>
+      <p:sp>
+        <p:nvSpPr>
+          <p:cNvPr id="4" name="TextBox 3"/>
+          <p:cNvSpPr txBox="1"/>
+          <p:nvPr/>
+        </p:nvSpPr>
+        <p:spPr>
+          <a:xfrm>
+            <a:off x="868680" y="502920"/>
+            <a:ext cx="10058400" cy="310896"/>
+          </a:xfrm>
+          <a:prstGeom prst="rect">
+            <a:avLst/>
+          </a:prstGeom>
+          <a:noFill/>
+        </p:spPr>
+        <p:txBody>
+          <a:bodyPr wrap="square">
+            <a:spAutoFit/>
+          </a:bodyPr>
+          <a:lstStyle/>
+          <a:p>
+            <a:pPr algn="l">
+              <a:lnSpc>
+                <a:spcPct val="115000"/>
+              </a:lnSpc>
+            </a:pPr>
+            <a:r>
+              <a:rPr sz="1100" b="1" i="0">
+                <a:solidFill>
+                  <a:srgbClr val="5A667A"/>
+                </a:solidFill>
+                <a:latin typeface="Segoe UI"/>
+              </a:rPr>
+              <a:t>LOW-LEVEL DESIGN</a:t>
+            </a:r>
+          </a:p>
+        </p:txBody>
+      </p:sp>
+      <p:sp>
+        <p:nvSpPr>
+          <p:cNvPr id="5" name="TextBox 4"/>
+          <p:cNvSpPr txBox="1"/>
+          <p:nvPr/>
+        </p:nvSpPr>
+        <p:spPr>
+          <a:xfrm>
+            <a:off x="841248" y="841248"/>
+            <a:ext cx="10607040" cy="566928"/>
+          </a:xfrm>
+          <a:prstGeom prst="rect">
+            <a:avLst/>
+          </a:prstGeom>
+          <a:noFill/>
+        </p:spPr>
+        <p:txBody>
+          <a:bodyPr wrap="square">
+            <a:spAutoFit/>
+          </a:bodyPr>
+          <a:lstStyle/>
+          <a:p>
+            <a:pPr algn="l">
+              <a:lnSpc>
+                <a:spcPct val="115000"/>
+              </a:lnSpc>
+            </a:pPr>
+            <a:r>
+              <a:rPr sz="2800" b="1" i="0">
+                <a:solidFill>
+                  <a:srgbClr val="141B2D"/>
+                </a:solidFill>
+                <a:latin typeface="Segoe UI"/>
+              </a:rPr>
+              <a:t>decide(): who wins, in full</a:t>
+            </a:r>
+          </a:p>
+        </p:txBody>
+      </p:sp>
+      <p:sp>
+        <p:nvSpPr>
+          <p:cNvPr id="6" name="TextBox 5"/>
+          <p:cNvSpPr txBox="1"/>
+          <p:nvPr/>
+        </p:nvSpPr>
+        <p:spPr>
+          <a:xfrm>
+            <a:off x="868680" y="1783080"/>
+            <a:ext cx="10607040" cy="246761"/>
+          </a:xfrm>
+          <a:prstGeom prst="rect">
+            <a:avLst/>
+          </a:prstGeom>
+          <a:noFill/>
+        </p:spPr>
+        <p:txBody>
+          <a:bodyPr wrap="square">
+            <a:spAutoFit/>
+          </a:bodyPr>
+          <a:lstStyle/>
+          <a:p>
+            <a:pPr algn="l">
+              <a:lnSpc>
+                <a:spcPct val="115000"/>
+              </a:lnSpc>
+            </a:pPr>
+            <a:r>
+              <a:rPr sz="1450" b="1" i="0">
+                <a:solidFill>
+                  <a:srgbClr val="141B2D"/>
+                </a:solidFill>
+                <a:latin typeface="Segoe UI"/>
+              </a:rPr>
+              <a:t>if both correct  -&gt;  fewer moves wins; equal moves is a tie.</a:t>
+            </a:r>
+          </a:p>
+        </p:txBody>
+      </p:sp>
+      <p:sp>
+        <p:nvSpPr>
+          <p:cNvPr id="7" name="TextBox 6"/>
+          <p:cNvSpPr txBox="1"/>
+          <p:nvPr/>
+        </p:nvSpPr>
+        <p:spPr>
+          <a:xfrm>
+            <a:off x="868680" y="2212721"/>
+            <a:ext cx="10607040" cy="246761"/>
+          </a:xfrm>
+          <a:prstGeom prst="rect">
+            <a:avLst/>
+          </a:prstGeom>
+          <a:noFill/>
+        </p:spPr>
+        <p:txBody>
+          <a:bodyPr wrap="square">
+            <a:spAutoFit/>
+          </a:bodyPr>
+          <a:lstStyle/>
+          <a:p>
+            <a:pPr algn="l">
+              <a:lnSpc>
+                <a:spcPct val="115000"/>
+              </a:lnSpc>
+            </a:pPr>
+            <a:r>
+              <a:rPr sz="1450" b="1" i="0">
+                <a:solidFill>
+                  <a:srgbClr val="141B2D"/>
+                </a:solidFill>
+                <a:latin typeface="Segoe UI"/>
+              </a:rPr>
+              <a:t>if exactly one correct  -&gt;  that lane wins, regardless of moves.</a:t>
+            </a:r>
+          </a:p>
+        </p:txBody>
+      </p:sp>
+      <p:sp>
+        <p:nvSpPr>
+          <p:cNvPr id="8" name="TextBox 7"/>
+          <p:cNvSpPr txBox="1"/>
+          <p:nvPr/>
+        </p:nvSpPr>
+        <p:spPr>
+          <a:xfrm>
+            <a:off x="868680" y="2496058"/>
+            <a:ext cx="10607040" cy="207264"/>
+          </a:xfrm>
+          <a:prstGeom prst="rect">
+            <a:avLst/>
+          </a:prstGeom>
+          <a:noFill/>
+        </p:spPr>
+        <p:txBody>
+          <a:bodyPr wrap="square">
+            <a:spAutoFit/>
+          </a:bodyPr>
+          <a:lstStyle/>
+          <a:p>
+            <a:pPr algn="l">
+              <a:lnSpc>
+                <a:spcPct val="125000"/>
+              </a:lnSpc>
+            </a:pPr>
+            <a:r>
+              <a:rPr sz="1200" b="0" i="0">
+                <a:solidFill>
+                  <a:srgbClr val="5A667A"/>
+                </a:solidFill>
+                <a:latin typeface="Segoe UI"/>
+              </a:rPr>
+              <a:t>A wrong answer in 2 steps never beats a correct answer in 20.</a:t>
+            </a:r>
+          </a:p>
+        </p:txBody>
+      </p:sp>
+      <p:sp>
+        <p:nvSpPr>
+          <p:cNvPr id="9" name="TextBox 8"/>
+          <p:cNvSpPr txBox="1"/>
+          <p:nvPr/>
+        </p:nvSpPr>
+        <p:spPr>
+          <a:xfrm>
+            <a:off x="868680" y="2849626"/>
+            <a:ext cx="10607040" cy="246761"/>
+          </a:xfrm>
+          <a:prstGeom prst="rect">
+            <a:avLst/>
+          </a:prstGeom>
+          <a:noFill/>
+        </p:spPr>
+        <p:txBody>
+          <a:bodyPr wrap="square">
+            <a:spAutoFit/>
+          </a:bodyPr>
+          <a:lstStyle/>
+          <a:p>
+            <a:pPr algn="l">
+              <a:lnSpc>
+                <a:spcPct val="115000"/>
+              </a:lnSpc>
+            </a:pPr>
+            <a:r>
+              <a:rPr sz="1450" b="1" i="0">
+                <a:solidFill>
+                  <a:srgbClr val="141B2D"/>
+                </a:solidFill>
+                <a:latin typeface="Segoe UI"/>
+              </a:rPr>
+              <a:t>if neither correct  -&gt;  no winner.</a:t>
+            </a:r>
+          </a:p>
+        </p:txBody>
+      </p:sp>
+      <p:sp>
+        <p:nvSpPr>
+          <p:cNvPr id="10" name="TextBox 9"/>
+          <p:cNvSpPr txBox="1"/>
+          <p:nvPr/>
+        </p:nvSpPr>
+        <p:spPr>
+          <a:xfrm>
+            <a:off x="868680" y="3132963"/>
+            <a:ext cx="10607040" cy="207264"/>
+          </a:xfrm>
+          <a:prstGeom prst="rect">
+            <a:avLst/>
+          </a:prstGeom>
+          <a:noFill/>
+        </p:spPr>
+        <p:txBody>
+          <a:bodyPr wrap="square">
+            <a:spAutoFit/>
+          </a:bodyPr>
+          <a:lstStyle/>
+          <a:p>
+            <a:pPr algn="l">
+              <a:lnSpc>
+                <a:spcPct val="125000"/>
+              </a:lnSpc>
+            </a:pPr>
+            <a:r>
+              <a:rPr sz="1200" b="0" i="0">
+                <a:solidFill>
+                  <a:srgbClr val="5A667A"/>
+                </a:solidFill>
+                <a:latin typeface="Segoe UI"/>
+              </a:rPr>
+              <a:t>Running out of steps and answering wrongly are both losses, but they are reported separately on the scoreboard.</a:t>
+            </a:r>
+          </a:p>
+        </p:txBody>
+      </p:sp>
+      <p:sp>
+        <p:nvSpPr>
+          <p:cNvPr id="11" name="TextBox 10"/>
+          <p:cNvSpPr txBox="1"/>
+          <p:nvPr/>
+        </p:nvSpPr>
+        <p:spPr>
+          <a:xfrm>
+            <a:off x="868680" y="3486531"/>
+            <a:ext cx="10607040" cy="246761"/>
+          </a:xfrm>
+          <a:prstGeom prst="rect">
+            <a:avLst/>
+          </a:prstGeom>
+          <a:noFill/>
+        </p:spPr>
+        <p:txBody>
+          <a:bodyPr wrap="square">
+            <a:spAutoFit/>
+          </a:bodyPr>
+          <a:lstStyle/>
+          <a:p>
+            <a:pPr algn="l">
+              <a:lnSpc>
+                <a:spcPct val="115000"/>
+              </a:lnSpc>
+            </a:pPr>
+            <a:r>
+              <a:rPr sz="1450" b="1" i="0">
+                <a:solidFill>
+                  <a:srgbClr val="141B2D"/>
+                </a:solidFill>
+                <a:latin typeface="Segoe UI"/>
+              </a:rPr>
+              <a:t>Latency is never consulted.</a:t>
+            </a:r>
+          </a:p>
+        </p:txBody>
+      </p:sp>
+      <p:sp>
+        <p:nvSpPr>
+          <p:cNvPr id="12" name="TextBox 11"/>
+          <p:cNvSpPr txBox="1"/>
+          <p:nvPr/>
+        </p:nvSpPr>
+        <p:spPr>
+          <a:xfrm>
+            <a:off x="868680" y="3769867"/>
+            <a:ext cx="10607040" cy="414528"/>
+          </a:xfrm>
+          <a:prstGeom prst="rect">
+            <a:avLst/>
+          </a:prstGeom>
+          <a:noFill/>
+        </p:spPr>
+        <p:txBody>
+          <a:bodyPr wrap="square">
+            <a:spAutoFit/>
+          </a:bodyPr>
+          <a:lstStyle/>
+          <a:p>
+            <a:pPr algn="l">
+              <a:lnSpc>
+                <a:spcPct val="125000"/>
+              </a:lnSpc>
+            </a:pPr>
+            <a:r>
+              <a:rPr sz="1200" b="0" i="0">
+                <a:solidFill>
+                  <a:srgbClr val="5A667A"/>
+                </a:solidFill>
+                <a:latin typeface="Segoe UI"/>
+              </a:rPr>
+              <a:t>The human lane resolves in microseconds and the model lane over a network. Scoring on elapsed time would measure the connection, so decide() only ever reads moves and success - and maybeFinish() waits for the human lane before ending the race at all.</a:t>
+            </a:r>
+          </a:p>
+        </p:txBody>
+      </p:sp>
+    </p:spTree>
+  </p:cSld>
+  <p:clrMapOvr>
+    <a:masterClrMapping/>
+  </p:clrMapOvr>
+</p:sld>
+</file>
+
+<file path=ppt/slides/slide27.xml><?xml version="1.0" encoding="utf-8"?>
+<p:sld xmlns:a="http://schemas.openxmlformats.org/drawingml/2006/main" xmlns:p="http://schemas.openxmlformats.org/presentationml/2006/main" xmlns:r="http://schemas.openxmlformats.org/officeDocument/2006/relationships">
+  <p:cSld>
+    <p:spTree>
+      <p:nvGrpSpPr>
+        <p:cNvPr id="1" name=""/>
+        <p:cNvGrpSpPr/>
+        <p:nvPr/>
+      </p:nvGrpSpPr>
+      <p:grpSpPr/>
+      <p:sp>
+        <p:nvSpPr>
+          <p:cNvPr id="2" name="Rectangle 1"/>
+          <p:cNvSpPr/>
+          <p:nvPr/>
+        </p:nvSpPr>
+        <p:spPr>
+          <a:xfrm>
+            <a:off x="0" y="0"/>
+            <a:ext cx="12191695" cy="6858000"/>
+          </a:xfrm>
+          <a:prstGeom prst="rect">
+            <a:avLst/>
+          </a:prstGeom>
+          <a:solidFill>
+            <a:srgbClr val="FAFBFD"/>
+          </a:solidFill>
+          <a:ln>
+            <a:noFill/>
+          </a:ln>
+          <a:effectLst/>
+        </p:spPr>
+        <p:style>
+          <a:lnRef idx="1">
+            <a:schemeClr val="accent1"/>
+          </a:lnRef>
+          <a:fillRef idx="3">
+            <a:schemeClr val="accent1"/>
+          </a:fillRef>
+          <a:effectRef idx="2">
+            <a:schemeClr val="accent1"/>
+          </a:effectRef>
+          <a:fontRef idx="minor">
+            <a:schemeClr val="lt1"/>
+          </a:fontRef>
+        </p:style>
+        <p:txBody>
+          <a:bodyPr rtlCol="0" anchor="ctr"/>
+          <a:lstStyle/>
+          <a:p>
+            <a:pPr algn="ctr"/>
+          </a:p>
+        </p:txBody>
+      </p:sp>
+      <p:sp>
+        <p:nvSpPr>
+          <p:cNvPr id="3" name="Rectangle 2"/>
+          <p:cNvSpPr/>
+          <p:nvPr/>
+        </p:nvSpPr>
+        <p:spPr>
+          <a:xfrm>
+            <a:off x="640080" y="566928"/>
+            <a:ext cx="82296" cy="420624"/>
+          </a:xfrm>
+          <a:prstGeom prst="rect">
+            <a:avLst/>
+          </a:prstGeom>
+          <a:solidFill>
+            <a:srgbClr val="00A8BF"/>
+          </a:solidFill>
+          <a:ln>
+            <a:noFill/>
+          </a:ln>
+          <a:effectLst/>
+        </p:spPr>
+        <p:style>
+          <a:lnRef idx="1">
+            <a:schemeClr val="accent1"/>
+          </a:lnRef>
+          <a:fillRef idx="3">
+            <a:schemeClr val="accent1"/>
+          </a:fillRef>
+          <a:effectRef idx="2">
+            <a:schemeClr val="accent1"/>
+          </a:effectRef>
+          <a:fontRef idx="minor">
+            <a:schemeClr val="lt1"/>
+          </a:fontRef>
+        </p:style>
+        <p:txBody>
+          <a:bodyPr rtlCol="0" anchor="ctr"/>
+          <a:lstStyle/>
+          <a:p>
+            <a:pPr algn="ctr"/>
+          </a:p>
+        </p:txBody>
+      </p:sp>
+      <p:sp>
+        <p:nvSpPr>
+          <p:cNvPr id="4" name="TextBox 3"/>
+          <p:cNvSpPr txBox="1"/>
+          <p:nvPr/>
+        </p:nvSpPr>
+        <p:spPr>
+          <a:xfrm>
+            <a:off x="868680" y="502920"/>
+            <a:ext cx="10058400" cy="310896"/>
+          </a:xfrm>
+          <a:prstGeom prst="rect">
+            <a:avLst/>
+          </a:prstGeom>
+          <a:noFill/>
+        </p:spPr>
+        <p:txBody>
+          <a:bodyPr wrap="square">
+            <a:spAutoFit/>
+          </a:bodyPr>
+          <a:lstStyle/>
+          <a:p>
+            <a:pPr algn="l">
+              <a:lnSpc>
+                <a:spcPct val="115000"/>
+              </a:lnSpc>
+            </a:pPr>
+            <a:r>
+              <a:rPr sz="1100" b="1" i="0">
+                <a:solidFill>
+                  <a:srgbClr val="5A667A"/>
+                </a:solidFill>
+                <a:latin typeface="Segoe UI"/>
+              </a:rPr>
+              <a:t>DESIGN</a:t>
+            </a:r>
+          </a:p>
+        </p:txBody>
+      </p:sp>
+      <p:sp>
+        <p:nvSpPr>
+          <p:cNvPr id="5" name="TextBox 4"/>
+          <p:cNvSpPr txBox="1"/>
+          <p:nvPr/>
+        </p:nvSpPr>
+        <p:spPr>
+          <a:xfrm>
+            <a:off x="841248" y="841248"/>
+            <a:ext cx="10607040" cy="566928"/>
+          </a:xfrm>
+          <a:prstGeom prst="rect">
+            <a:avLst/>
+          </a:prstGeom>
+          <a:noFill/>
+        </p:spPr>
+        <p:txBody>
+          <a:bodyPr wrap="square">
+            <a:spAutoFit/>
+          </a:bodyPr>
+          <a:lstStyle/>
+          <a:p>
+            <a:pPr algn="l">
+              <a:lnSpc>
+                <a:spcPct val="115000"/>
+              </a:lnSpc>
+            </a:pPr>
+            <a:r>
+              <a:rPr sz="2800" b="1" i="0">
+                <a:solidFill>
+                  <a:srgbClr val="141B2D"/>
+                </a:solidFill>
+                <a:latin typeface="Segoe UI"/>
+              </a:rPr>
+              <a:t>Decisions, and why they went that way</a:t>
+            </a:r>
+          </a:p>
+        </p:txBody>
+      </p:sp>
+      <p:sp>
+        <p:nvSpPr>
+          <p:cNvPr id="6" name="TextBox 5"/>
+          <p:cNvSpPr txBox="1"/>
+          <p:nvPr/>
+        </p:nvSpPr>
+        <p:spPr>
+          <a:xfrm>
+            <a:off x="868680" y="1783080"/>
+            <a:ext cx="10607040" cy="246761"/>
+          </a:xfrm>
+          <a:prstGeom prst="rect">
+            <a:avLst/>
+          </a:prstGeom>
+          <a:noFill/>
+        </p:spPr>
+        <p:txBody>
+          <a:bodyPr wrap="square">
+            <a:spAutoFit/>
+          </a:bodyPr>
+          <a:lstStyle/>
+          <a:p>
+            <a:pPr algn="l">
+              <a:lnSpc>
+                <a:spcPct val="115000"/>
+              </a:lnSpc>
+            </a:pPr>
+            <a:r>
+              <a:rPr sz="1450" b="1" i="0">
+                <a:solidFill>
+                  <a:srgbClr val="141B2D"/>
+                </a:solidFill>
+                <a:latin typeface="Segoe UI"/>
+              </a:rPr>
+              <a:t>ARC first, MNIST-PRO second.</a:t>
+            </a:r>
+          </a:p>
+        </p:txBody>
+      </p:sp>
+      <p:sp>
+        <p:nvSpPr>
+          <p:cNvPr id="7" name="TextBox 6"/>
+          <p:cNvSpPr txBox="1"/>
+          <p:nvPr/>
+        </p:nvSpPr>
+        <p:spPr>
+          <a:xfrm>
+            <a:off x="868680" y="2066416"/>
+            <a:ext cx="10607040" cy="414528"/>
+          </a:xfrm>
+          <a:prstGeom prst="rect">
+            <a:avLst/>
+          </a:prstGeom>
+          <a:noFill/>
+        </p:spPr>
+        <p:txBody>
+          <a:bodyPr wrap="square">
+            <a:spAutoFit/>
+          </a:bodyPr>
+          <a:lstStyle/>
+          <a:p>
+            <a:pPr algn="l">
+              <a:lnSpc>
+                <a:spcPct val="125000"/>
+              </a:lnSpc>
+            </a:pPr>
+            <a:r>
+              <a:rPr sz="1200" b="0" i="0">
+                <a:solidFill>
+                  <a:srgbClr val="5A667A"/>
+                </a:solidFill>
+                <a:latin typeface="Segoe UI"/>
+              </a:rPr>
+              <a:t>ARC asks you to infer a rule in five minutes. That turned out to be the wrong kind of hard for a party game, so a task needing no prior knowledge became the front page.</a:t>
+            </a:r>
+          </a:p>
+        </p:txBody>
+      </p:sp>
+      <p:sp>
+        <p:nvSpPr>
+          <p:cNvPr id="8" name="TextBox 7"/>
+          <p:cNvSpPr txBox="1"/>
+          <p:nvPr/>
+        </p:nvSpPr>
+        <p:spPr>
+          <a:xfrm>
+            <a:off x="868680" y="2590673"/>
+            <a:ext cx="10607040" cy="246761"/>
+          </a:xfrm>
+          <a:prstGeom prst="rect">
+            <a:avLst/>
+          </a:prstGeom>
+          <a:noFill/>
+        </p:spPr>
+        <p:txBody>
+          <a:bodyPr wrap="square">
+            <a:spAutoFit/>
+          </a:bodyPr>
+          <a:lstStyle/>
+          <a:p>
+            <a:pPr algn="l">
+              <a:lnSpc>
+                <a:spcPct val="115000"/>
+              </a:lnSpc>
+            </a:pPr>
+            <a:r>
+              <a:rPr sz="1450" b="1" i="0">
+                <a:solidFill>
+                  <a:srgbClr val="141B2D"/>
+                </a:solidFill>
+                <a:latin typeface="Segoe UI"/>
+              </a:rPr>
+              <a:t>Difficulty measured rather than asserted.</a:t>
+            </a:r>
+          </a:p>
+        </p:txBody>
+      </p:sp>
+      <p:sp>
+        <p:nvSpPr>
+          <p:cNvPr id="9" name="TextBox 8"/>
+          <p:cNvSpPr txBox="1"/>
+          <p:nvPr/>
+        </p:nvSpPr>
+        <p:spPr>
+          <a:xfrm>
+            <a:off x="868680" y="2874010"/>
+            <a:ext cx="10607040" cy="414528"/>
+          </a:xfrm>
+          <a:prstGeom prst="rect">
+            <a:avLst/>
+          </a:prstGeom>
+          <a:noFill/>
+        </p:spPr>
+        <p:txBody>
+          <a:bodyPr wrap="square">
+            <a:spAutoFit/>
+          </a:bodyPr>
+          <a:lstStyle/>
+          <a:p>
+            <a:pPr algn="l">
+              <a:lnSpc>
+                <a:spcPct val="125000"/>
+              </a:lnSpc>
+            </a:pPr>
+            <a:r>
+              <a:rPr sz="1200" b="0" i="0">
+                <a:solidFill>
+                  <a:srgbClr val="5A667A"/>
+                </a:solidFill>
+                <a:latin typeface="Segoe UI"/>
+              </a:rPr>
+              <a:t>For ARC, a classifier found the 19 tasks a single rule explains. For MNIST-PRO, a simulation of 400 digits set the window size: 8x8 tiles end a round in 2 glimpses, 2x2 in 15. 4x4 was the playable middle.</a:t>
+            </a:r>
+          </a:p>
+        </p:txBody>
+      </p:sp>
+      <p:sp>
+        <p:nvSpPr>
+          <p:cNvPr id="10" name="TextBox 9"/>
+          <p:cNvSpPr txBox="1"/>
+          <p:nvPr/>
+        </p:nvSpPr>
+        <p:spPr>
+          <a:xfrm>
+            <a:off x="868680" y="3398266"/>
+            <a:ext cx="10607040" cy="246761"/>
+          </a:xfrm>
+          <a:prstGeom prst="rect">
+            <a:avLst/>
+          </a:prstGeom>
+          <a:noFill/>
+        </p:spPr>
+        <p:txBody>
+          <a:bodyPr wrap="square">
+            <a:spAutoFit/>
+          </a:bodyPr>
+          <a:lstStyle/>
+          <a:p>
+            <a:pPr algn="l">
+              <a:lnSpc>
+                <a:spcPct val="115000"/>
+              </a:lnSpc>
+            </a:pPr>
+            <a:r>
+              <a:rPr sz="1450" b="1" i="0">
+                <a:solidFill>
+                  <a:srgbClr val="141B2D"/>
+                </a:solidFill>
+                <a:latin typeface="Segoe UI"/>
+              </a:rPr>
+              <a:t>Steps, not seconds.</a:t>
+            </a:r>
+          </a:p>
+        </p:txBody>
+      </p:sp>
+      <p:sp>
+        <p:nvSpPr>
+          <p:cNvPr id="11" name="TextBox 10"/>
+          <p:cNvSpPr txBox="1"/>
+          <p:nvPr/>
+        </p:nvSpPr>
+        <p:spPr>
+          <a:xfrm>
+            <a:off x="868680" y="3681603"/>
+            <a:ext cx="10607040" cy="207264"/>
+          </a:xfrm>
+          <a:prstGeom prst="rect">
+            <a:avLst/>
+          </a:prstGeom>
+          <a:noFill/>
+        </p:spPr>
+        <p:txBody>
+          <a:bodyPr wrap="square">
+            <a:spAutoFit/>
+          </a:bodyPr>
+          <a:lstStyle/>
+          <a:p>
+            <a:pPr algn="l">
+              <a:lnSpc>
+                <a:spcPct val="125000"/>
+              </a:lnSpc>
+            </a:pPr>
+            <a:r>
+              <a:rPr sz="1200" b="0" i="0">
+                <a:solidFill>
+                  <a:srgbClr val="5A667A"/>
+                </a:solidFill>
+                <a:latin typeface="Segoe UI"/>
+              </a:rPr>
+              <a:t>Suggested by the first player to look at it, and correct: timing a networked opponent measures latency.</a:t>
+            </a:r>
+          </a:p>
+        </p:txBody>
+      </p:sp>
+      <p:sp>
+        <p:nvSpPr>
+          <p:cNvPr id="12" name="TextBox 11"/>
+          <p:cNvSpPr txBox="1"/>
+          <p:nvPr/>
+        </p:nvSpPr>
+        <p:spPr>
+          <a:xfrm>
+            <a:off x="868680" y="3998595"/>
+            <a:ext cx="10607040" cy="246761"/>
+          </a:xfrm>
+          <a:prstGeom prst="rect">
+            <a:avLst/>
+          </a:prstGeom>
+          <a:noFill/>
+        </p:spPr>
+        <p:txBody>
+          <a:bodyPr wrap="square">
+            <a:spAutoFit/>
+          </a:bodyPr>
+          <a:lstStyle/>
+          <a:p>
+            <a:pPr algn="l">
+              <a:lnSpc>
+                <a:spcPct val="115000"/>
+              </a:lnSpc>
+            </a:pPr>
+            <a:r>
+              <a:rPr sz="1450" b="1" i="0">
+                <a:solidFill>
+                  <a:srgbClr val="141B2D"/>
+                </a:solidFill>
+                <a:latin typeface="Segoe UI"/>
+              </a:rPr>
+              <a:t>The rules panel collapsed by default.</a:t>
+            </a:r>
+          </a:p>
+        </p:txBody>
+      </p:sp>
+      <p:sp>
+        <p:nvSpPr>
+          <p:cNvPr id="13" name="TextBox 12"/>
+          <p:cNvSpPr txBox="1"/>
+          <p:nvPr/>
+        </p:nvSpPr>
+        <p:spPr>
+          <a:xfrm>
+            <a:off x="868680" y="4281932"/>
+            <a:ext cx="10607040" cy="207264"/>
+          </a:xfrm>
+          <a:prstGeom prst="rect">
+            <a:avLst/>
+          </a:prstGeom>
+          <a:noFill/>
+        </p:spPr>
+        <p:txBody>
+          <a:bodyPr wrap="square">
+            <a:spAutoFit/>
+          </a:bodyPr>
+          <a:lstStyle/>
+          <a:p>
+            <a:pPr algn="l">
+              <a:lnSpc>
+                <a:spcPct val="125000"/>
+              </a:lnSpc>
+            </a:pPr>
+            <a:r>
+              <a:rPr sz="1200" b="0" i="0">
+                <a:solidFill>
+                  <a:srgbClr val="5A667A"/>
+                </a:solidFill>
+                <a:latin typeface="Segoe UI"/>
+              </a:rPr>
+              <a:t>It occupied the top of both games before anyone had pressed anything.</a:t>
+            </a:r>
+          </a:p>
+        </p:txBody>
+      </p:sp>
+    </p:spTree>
+  </p:cSld>
+  <p:clrMapOvr>
+    <a:masterClrMapping/>
+  </p:clrMapOvr>
+</p:sld>
+</file>
+
+<file path=ppt/slides/slide28.xml><?xml version="1.0" encoding="utf-8"?>
+<p:sld xmlns:a="http://schemas.openxmlformats.org/drawingml/2006/main" xmlns:p="http://schemas.openxmlformats.org/presentationml/2006/main" xmlns:r="http://schemas.openxmlformats.org/officeDocument/2006/relationships">
+  <p:cSld>
+    <p:spTree>
+      <p:nvGrpSpPr>
+        <p:cNvPr id="1" name=""/>
+        <p:cNvGrpSpPr/>
+        <p:nvPr/>
+      </p:nvGrpSpPr>
+      <p:grpSpPr/>
+      <p:sp>
+        <p:nvSpPr>
+          <p:cNvPr id="2" name="Rectangle 1"/>
+          <p:cNvSpPr/>
+          <p:nvPr/>
+        </p:nvSpPr>
+        <p:spPr>
+          <a:xfrm>
+            <a:off x="0" y="0"/>
+            <a:ext cx="12191695" cy="6858000"/>
+          </a:xfrm>
+          <a:prstGeom prst="rect">
+            <a:avLst/>
+          </a:prstGeom>
+          <a:solidFill>
+            <a:srgbClr val="FAFBFD"/>
+          </a:solidFill>
+          <a:ln>
+            <a:noFill/>
+          </a:ln>
+          <a:effectLst/>
+        </p:spPr>
+        <p:style>
+          <a:lnRef idx="1">
+            <a:schemeClr val="accent1"/>
+          </a:lnRef>
+          <a:fillRef idx="3">
+            <a:schemeClr val="accent1"/>
+          </a:fillRef>
+          <a:effectRef idx="2">
+            <a:schemeClr val="accent1"/>
+          </a:effectRef>
+          <a:fontRef idx="minor">
+            <a:schemeClr val="lt1"/>
+          </a:fontRef>
+        </p:style>
+        <p:txBody>
+          <a:bodyPr rtlCol="0" anchor="ctr"/>
+          <a:lstStyle/>
+          <a:p>
+            <a:pPr algn="ctr"/>
+          </a:p>
+        </p:txBody>
+      </p:sp>
+      <p:sp>
+        <p:nvSpPr>
+          <p:cNvPr id="3" name="Rectangle 2"/>
+          <p:cNvSpPr/>
+          <p:nvPr/>
+        </p:nvSpPr>
+        <p:spPr>
+          <a:xfrm>
+            <a:off x="640080" y="566928"/>
+            <a:ext cx="82296" cy="420624"/>
+          </a:xfrm>
+          <a:prstGeom prst="rect">
+            <a:avLst/>
+          </a:prstGeom>
+          <a:solidFill>
+            <a:srgbClr val="00A8BF"/>
+          </a:solidFill>
+          <a:ln>
+            <a:noFill/>
+          </a:ln>
+          <a:effectLst/>
+        </p:spPr>
+        <p:style>
+          <a:lnRef idx="1">
+            <a:schemeClr val="accent1"/>
+          </a:lnRef>
+          <a:fillRef idx="3">
+            <a:schemeClr val="accent1"/>
+          </a:fillRef>
+          <a:effectRef idx="2">
+            <a:schemeClr val="accent1"/>
+          </a:effectRef>
+          <a:fontRef idx="minor">
+            <a:schemeClr val="lt1"/>
+          </a:fontRef>
+        </p:style>
+        <p:txBody>
+          <a:bodyPr rtlCol="0" anchor="ctr"/>
+          <a:lstStyle/>
+          <a:p>
+            <a:pPr algn="ctr"/>
+          </a:p>
+        </p:txBody>
+      </p:sp>
+      <p:sp>
+        <p:nvSpPr>
+          <p:cNvPr id="4" name="TextBox 3"/>
+          <p:cNvSpPr txBox="1"/>
+          <p:nvPr/>
+        </p:nvSpPr>
+        <p:spPr>
+          <a:xfrm>
+            <a:off x="868680" y="502920"/>
+            <a:ext cx="10058400" cy="310896"/>
+          </a:xfrm>
+          <a:prstGeom prst="rect">
+            <a:avLst/>
+          </a:prstGeom>
+          <a:noFill/>
+        </p:spPr>
+        <p:txBody>
+          <a:bodyPr wrap="square">
+            <a:spAutoFit/>
+          </a:bodyPr>
+          <a:lstStyle/>
+          <a:p>
+            <a:pPr algn="l">
+              <a:lnSpc>
+                <a:spcPct val="115000"/>
+              </a:lnSpc>
+            </a:pPr>
+            <a:r>
+              <a:rPr sz="1100" b="1" i="0">
+                <a:solidFill>
+                  <a:srgbClr val="5A667A"/>
+                </a:solidFill>
+                <a:latin typeface="Segoe UI"/>
+              </a:rPr>
+              <a:t>WHAT BUILDING IT TAUGHT US</a:t>
+            </a:r>
+          </a:p>
+        </p:txBody>
+      </p:sp>
+      <p:sp>
+        <p:nvSpPr>
+          <p:cNvPr id="5" name="TextBox 4"/>
+          <p:cNvSpPr txBox="1"/>
+          <p:nvPr/>
+        </p:nvSpPr>
+        <p:spPr>
+          <a:xfrm>
+            <a:off x="841248" y="841248"/>
+            <a:ext cx="10607040" cy="566928"/>
+          </a:xfrm>
+          <a:prstGeom prst="rect">
+            <a:avLst/>
+          </a:prstGeom>
+          <a:noFill/>
+        </p:spPr>
+        <p:txBody>
+          <a:bodyPr wrap="square">
+            <a:spAutoFit/>
+          </a:bodyPr>
+          <a:lstStyle/>
+          <a:p>
+            <a:pPr algn="l">
+              <a:lnSpc>
+                <a:spcPct val="115000"/>
+              </a:lnSpc>
+            </a:pPr>
+            <a:r>
+              <a:rPr sz="2800" b="1" i="0">
+                <a:solidFill>
+                  <a:srgbClr val="141B2D"/>
+                </a:solidFill>
+                <a:latin typeface="Segoe UI"/>
+              </a:rPr>
+              <a:t>The tests agreed with me more often than they should have</a:t>
+            </a:r>
+          </a:p>
+        </p:txBody>
+      </p:sp>
+      <p:sp>
+        <p:nvSpPr>
+          <p:cNvPr id="6" name="TextBox 5"/>
+          <p:cNvSpPr txBox="1"/>
+          <p:nvPr/>
+        </p:nvSpPr>
+        <p:spPr>
+          <a:xfrm>
+            <a:off x="868680" y="1783080"/>
+            <a:ext cx="10607040" cy="246761"/>
+          </a:xfrm>
+          <a:prstGeom prst="rect">
+            <a:avLst/>
+          </a:prstGeom>
+          <a:noFill/>
+        </p:spPr>
+        <p:txBody>
+          <a:bodyPr wrap="square">
+            <a:spAutoFit/>
+          </a:bodyPr>
+          <a:lstStyle/>
+          <a:p>
+            <a:pPr algn="l">
+              <a:lnSpc>
+                <a:spcPct val="115000"/>
+              </a:lnSpc>
+            </a:pPr>
+            <a:r>
+              <a:rPr sz="1450" b="1" i="0">
+                <a:solidFill>
+                  <a:srgbClr val="141B2D"/>
+                </a:solidFill>
+                <a:latin typeface="Segoe UI"/>
+              </a:rPr>
+              <a:t>Five real bugs were caught by looking at screenshots, not by assertions.</a:t>
+            </a:r>
+          </a:p>
+        </p:txBody>
+      </p:sp>
+      <p:sp>
+        <p:nvSpPr>
+          <p:cNvPr id="7" name="TextBox 6"/>
+          <p:cNvSpPr txBox="1"/>
+          <p:nvPr/>
+        </p:nvSpPr>
+        <p:spPr>
+          <a:xfrm>
+            <a:off x="868680" y="2066416"/>
+            <a:ext cx="10607040" cy="414528"/>
+          </a:xfrm>
+          <a:prstGeom prst="rect">
+            <a:avLst/>
+          </a:prstGeom>
+          <a:noFill/>
+        </p:spPr>
+        <p:txBody>
+          <a:bodyPr wrap="square">
+            <a:spAutoFit/>
+          </a:bodyPr>
+          <a:lstStyle/>
+          <a:p>
+            <a:pPr algn="l">
+              <a:lnSpc>
+                <a:spcPct val="125000"/>
+              </a:lnSpc>
+            </a:pPr>
+            <a:r>
+              <a:rPr sz="1200" b="0" i="0">
+                <a:solidFill>
+                  <a:srgbClr val="5A667A"/>
+                </a:solidFill>
+                <a:latin typeface="Segoe UI"/>
+              </a:rPr>
+              <a:t>A correct answer reported as 'Wrong - it answered null'. Panels frozen on a stale state. Overlays sitting on top of live canvases. Sensible actions rejected on formatting. A reply cut off by a token budget and scored as malformed.</a:t>
+            </a:r>
+          </a:p>
+        </p:txBody>
+      </p:sp>
+      <p:sp>
+        <p:nvSpPr>
+          <p:cNvPr id="8" name="TextBox 7"/>
+          <p:cNvSpPr txBox="1"/>
+          <p:nvPr/>
+        </p:nvSpPr>
+        <p:spPr>
+          <a:xfrm>
+            <a:off x="868680" y="2581529"/>
+            <a:ext cx="10607040" cy="246761"/>
+          </a:xfrm>
+          <a:prstGeom prst="rect">
+            <a:avLst/>
+          </a:prstGeom>
+          <a:noFill/>
+        </p:spPr>
+        <p:txBody>
+          <a:bodyPr wrap="square">
+            <a:spAutoFit/>
+          </a:bodyPr>
+          <a:lstStyle/>
+          <a:p>
+            <a:pPr algn="l">
+              <a:lnSpc>
+                <a:spcPct val="115000"/>
+              </a:lnSpc>
+            </a:pPr>
+            <a:r>
+              <a:rPr sz="1450" b="1" i="0">
+                <a:solidFill>
+                  <a:srgbClr val="141B2D"/>
+                </a:solidFill>
+                <a:latin typeface="Segoe UI"/>
+              </a:rPr>
+              <a:t>The common thread: asserting intent instead of outcome.</a:t>
+            </a:r>
+          </a:p>
+        </p:txBody>
+      </p:sp>
+      <p:sp>
+        <p:nvSpPr>
+          <p:cNvPr id="9" name="TextBox 8"/>
+          <p:cNvSpPr txBox="1"/>
+          <p:nvPr/>
+        </p:nvSpPr>
+        <p:spPr>
+          <a:xfrm>
+            <a:off x="868680" y="2864866"/>
+            <a:ext cx="10607040" cy="414528"/>
+          </a:xfrm>
+          <a:prstGeom prst="rect">
+            <a:avLst/>
+          </a:prstGeom>
+          <a:noFill/>
+        </p:spPr>
+        <p:txBody>
+          <a:bodyPr wrap="square">
+            <a:spAutoFit/>
+          </a:bodyPr>
+          <a:lstStyle/>
+          <a:p>
+            <a:pPr algn="l">
+              <a:lnSpc>
+                <a:spcPct val="125000"/>
+              </a:lnSpc>
+            </a:pPr>
+            <a:r>
+              <a:rPr sz="1200" b="0" i="0">
+                <a:solidFill>
+                  <a:srgbClr val="5A667A"/>
+                </a:solidFill>
+                <a:latin typeface="Segoe UI"/>
+              </a:rPr>
+              <a:t>Tests checked that hidden was set - it was - while the element stayed on screen, because an explicit CSS display beats the hidden attribute. Every such test passed throughout.</a:t>
+            </a:r>
+          </a:p>
+        </p:txBody>
+      </p:sp>
+      <p:sp>
+        <p:nvSpPr>
+          <p:cNvPr id="10" name="TextBox 9"/>
+          <p:cNvSpPr txBox="1"/>
+          <p:nvPr/>
+        </p:nvSpPr>
+        <p:spPr>
+          <a:xfrm>
+            <a:off x="868680" y="3379978"/>
+            <a:ext cx="10607040" cy="246761"/>
+          </a:xfrm>
+          <a:prstGeom prst="rect">
+            <a:avLst/>
+          </a:prstGeom>
+          <a:noFill/>
+        </p:spPr>
+        <p:txBody>
+          <a:bodyPr wrap="square">
+            <a:spAutoFit/>
+          </a:bodyPr>
+          <a:lstStyle/>
+          <a:p>
+            <a:pPr algn="l">
+              <a:lnSpc>
+                <a:spcPct val="115000"/>
+              </a:lnSpc>
+            </a:pPr>
+            <a:r>
+              <a:rPr sz="1450" b="1" i="0">
+                <a:solidFill>
+                  <a:srgbClr val="141B2D"/>
+                </a:solidFill>
+                <a:latin typeface="Segoe UI"/>
+              </a:rPr>
+              <a:t>Fixes applied per-place rather than once come back.</a:t>
+            </a:r>
+          </a:p>
+        </p:txBody>
+      </p:sp>
+      <p:sp>
+        <p:nvSpPr>
+          <p:cNvPr id="11" name="TextBox 10"/>
+          <p:cNvSpPr txBox="1"/>
+          <p:nvPr/>
+        </p:nvSpPr>
+        <p:spPr>
+          <a:xfrm>
+            <a:off x="868680" y="3663314"/>
+            <a:ext cx="10607040" cy="414528"/>
+          </a:xfrm>
+          <a:prstGeom prst="rect">
+            <a:avLst/>
+          </a:prstGeom>
+          <a:noFill/>
+        </p:spPr>
+        <p:txBody>
+          <a:bodyPr wrap="square">
+            <a:spAutoFit/>
+          </a:bodyPr>
+          <a:lstStyle/>
+          <a:p>
+            <a:pPr algn="l">
+              <a:lnSpc>
+                <a:spcPct val="125000"/>
+              </a:lnSpc>
+            </a:pPr>
+            <a:r>
+              <a:rPr sz="1200" b="0" i="0">
+                <a:solidFill>
+                  <a:srgbClr val="5A667A"/>
+                </a:solidFill>
+                <a:latin typeface="Segoe UI"/>
+              </a:rPr>
+              <a:t>The hidden-attribute bug was patched in four components before being fixed globally. The token-budget check existed in two other code paths and was missing from the third.</a:t>
+            </a:r>
+          </a:p>
+        </p:txBody>
+      </p:sp>
+      <p:sp>
+        <p:nvSpPr>
+          <p:cNvPr id="12" name="TextBox 11"/>
+          <p:cNvSpPr txBox="1"/>
+          <p:nvPr/>
+        </p:nvSpPr>
+        <p:spPr>
+          <a:xfrm>
+            <a:off x="868680" y="4178427"/>
+            <a:ext cx="10607040" cy="246761"/>
+          </a:xfrm>
+          <a:prstGeom prst="rect">
+            <a:avLst/>
+          </a:prstGeom>
+          <a:noFill/>
+        </p:spPr>
+        <p:txBody>
+          <a:bodyPr wrap="square">
+            <a:spAutoFit/>
+          </a:bodyPr>
+          <a:lstStyle/>
+          <a:p>
+            <a:pPr algn="l">
+              <a:lnSpc>
+                <a:spcPct val="115000"/>
+              </a:lnSpc>
+            </a:pPr>
+            <a:r>
+              <a:rPr sz="1450" b="1" i="0">
+                <a:solidFill>
+                  <a:srgbClr val="141B2D"/>
+                </a:solidFill>
+                <a:latin typeface="Segoe UI"/>
+              </a:rPr>
+              <a:t>Diagnostics are a feature.</a:t>
+            </a:r>
+          </a:p>
+        </p:txBody>
+      </p:sp>
+      <p:sp>
+        <p:nvSpPr>
+          <p:cNvPr id="13" name="TextBox 12"/>
+          <p:cNvSpPr txBox="1"/>
+          <p:nvPr/>
+        </p:nvSpPr>
+        <p:spPr>
+          <a:xfrm>
+            <a:off x="868680" y="4461764"/>
+            <a:ext cx="10607040" cy="207264"/>
+          </a:xfrm>
+          <a:prstGeom prst="rect">
+            <a:avLst/>
+          </a:prstGeom>
+          <a:noFill/>
+        </p:spPr>
+        <p:txBody>
+          <a:bodyPr wrap="square">
+            <a:spAutoFit/>
+          </a:bodyPr>
+          <a:lstStyle/>
+          <a:p>
+            <a:pPr algn="l">
+              <a:lnSpc>
+                <a:spcPct val="125000"/>
+              </a:lnSpc>
+            </a:pPr>
+            <a:r>
+              <a:rPr sz="1200" b="0" i="0">
+                <a:solidFill>
+                  <a:srgbClr val="5A667A"/>
+                </a:solidFill>
+                <a:latin typeface="Segoe UI"/>
+              </a:rPr>
+              <a:t>The failure message now shows the model's actual reply. The bug that took three rounds to identify would have been obvious in one.</a:t>
+            </a:r>
+          </a:p>
+        </p:txBody>
+      </p:sp>
+    </p:spTree>
+  </p:cSld>
+  <p:clrMapOvr>
+    <a:masterClrMapping/>
+  </p:clrMapOvr>
+</p:sld>
+</file>
+
+<file path=ppt/slides/slide29.xml><?xml version="1.0" encoding="utf-8"?>
+<p:sld xmlns:a="http://schemas.openxmlformats.org/drawingml/2006/main" xmlns:p="http://schemas.openxmlformats.org/presentationml/2006/main" xmlns:r="http://schemas.openxmlformats.org/officeDocument/2006/relationships">
+  <p:cSld>
+    <p:spTree>
+      <p:nvGrpSpPr>
+        <p:cNvPr id="1" name=""/>
+        <p:cNvGrpSpPr/>
+        <p:nvPr/>
+      </p:nvGrpSpPr>
+      <p:grpSpPr/>
+      <p:sp>
+        <p:nvSpPr>
+          <p:cNvPr id="2" name="Rectangle 1"/>
+          <p:cNvSpPr/>
+          <p:nvPr/>
+        </p:nvSpPr>
+        <p:spPr>
+          <a:xfrm>
+            <a:off x="0" y="0"/>
+            <a:ext cx="12191695" cy="6858000"/>
+          </a:xfrm>
+          <a:prstGeom prst="rect">
+            <a:avLst/>
+          </a:prstGeom>
+          <a:solidFill>
+            <a:srgbClr val="FAFBFD"/>
+          </a:solidFill>
+          <a:ln>
+            <a:noFill/>
+          </a:ln>
+          <a:effectLst/>
+        </p:spPr>
+        <p:style>
+          <a:lnRef idx="1">
+            <a:schemeClr val="accent1"/>
+          </a:lnRef>
+          <a:fillRef idx="3">
+            <a:schemeClr val="accent1"/>
+          </a:fillRef>
+          <a:effectRef idx="2">
+            <a:schemeClr val="accent1"/>
+          </a:effectRef>
+          <a:fontRef idx="minor">
+            <a:schemeClr val="lt1"/>
+          </a:fontRef>
+        </p:style>
+        <p:txBody>
+          <a:bodyPr rtlCol="0" anchor="ctr"/>
+          <a:lstStyle/>
+          <a:p>
+            <a:pPr algn="ctr"/>
+          </a:p>
+        </p:txBody>
+      </p:sp>
+      <p:sp>
+        <p:nvSpPr>
+          <p:cNvPr id="3" name="Rectangle 2"/>
+          <p:cNvSpPr/>
+          <p:nvPr/>
+        </p:nvSpPr>
+        <p:spPr>
+          <a:xfrm>
+            <a:off x="640080" y="566928"/>
+            <a:ext cx="82296" cy="420624"/>
+          </a:xfrm>
+          <a:prstGeom prst="rect">
+            <a:avLst/>
+          </a:prstGeom>
+          <a:solidFill>
+            <a:srgbClr val="00A8BF"/>
+          </a:solidFill>
+          <a:ln>
+            <a:noFill/>
+          </a:ln>
+          <a:effectLst/>
+        </p:spPr>
+        <p:style>
+          <a:lnRef idx="1">
+            <a:schemeClr val="accent1"/>
+          </a:lnRef>
+          <a:fillRef idx="3">
+            <a:schemeClr val="accent1"/>
+          </a:fillRef>
+          <a:effectRef idx="2">
+            <a:schemeClr val="accent1"/>
+          </a:effectRef>
+          <a:fontRef idx="minor">
+            <a:schemeClr val="lt1"/>
+          </a:fontRef>
+        </p:style>
+        <p:txBody>
+          <a:bodyPr rtlCol="0" anchor="ctr"/>
+          <a:lstStyle/>
+          <a:p>
+            <a:pPr algn="ctr"/>
+          </a:p>
+        </p:txBody>
+      </p:sp>
+      <p:sp>
+        <p:nvSpPr>
+          <p:cNvPr id="4" name="TextBox 3"/>
+          <p:cNvSpPr txBox="1"/>
+          <p:nvPr/>
+        </p:nvSpPr>
+        <p:spPr>
+          <a:xfrm>
+            <a:off x="868680" y="502920"/>
+            <a:ext cx="10058400" cy="310896"/>
+          </a:xfrm>
+          <a:prstGeom prst="rect">
+            <a:avLst/>
+          </a:prstGeom>
+          <a:noFill/>
+        </p:spPr>
+        <p:txBody>
+          <a:bodyPr wrap="square">
+            <a:spAutoFit/>
+          </a:bodyPr>
+          <a:lstStyle/>
+          <a:p>
+            <a:pPr algn="l">
+              <a:lnSpc>
+                <a:spcPct val="115000"/>
+              </a:lnSpc>
+            </a:pPr>
+            <a:r>
+              <a:rPr sz="1100" b="1" i="0">
+                <a:solidFill>
+                  <a:srgbClr val="5A667A"/>
+                </a:solidFill>
+                <a:latin typeface="Segoe UI"/>
+              </a:rPr>
+              <a:t>CREDITS</a:t>
+            </a:r>
+          </a:p>
+        </p:txBody>
+      </p:sp>
+      <p:sp>
+        <p:nvSpPr>
+          <p:cNvPr id="5" name="TextBox 4"/>
+          <p:cNvSpPr txBox="1"/>
+          <p:nvPr/>
+        </p:nvSpPr>
+        <p:spPr>
+          <a:xfrm>
+            <a:off x="841248" y="841248"/>
+            <a:ext cx="10607040" cy="566928"/>
+          </a:xfrm>
+          <a:prstGeom prst="rect">
+            <a:avLst/>
+          </a:prstGeom>
+          <a:noFill/>
+        </p:spPr>
+        <p:txBody>
+          <a:bodyPr wrap="square">
+            <a:spAutoFit/>
+          </a:bodyPr>
+          <a:lstStyle/>
+          <a:p>
+            <a:pPr algn="l">
+              <a:lnSpc>
+                <a:spcPct val="115000"/>
+              </a:lnSpc>
+            </a:pPr>
+            <a:r>
+              <a:rPr sz="2800" b="1" i="0">
+                <a:solidFill>
+                  <a:srgbClr val="141B2D"/>
+                </a:solidFill>
+                <a:latin typeface="Segoe UI"/>
+              </a:rPr>
+              <a:t>Standing on other people's work</a:t>
+            </a:r>
+          </a:p>
+        </p:txBody>
+      </p:sp>
+      <p:sp>
+        <p:nvSpPr>
+          <p:cNvPr id="6" name="TextBox 5"/>
+          <p:cNvSpPr txBox="1"/>
+          <p:nvPr/>
+        </p:nvSpPr>
+        <p:spPr>
+          <a:xfrm>
+            <a:off x="868680" y="1783080"/>
+            <a:ext cx="10607040" cy="246761"/>
+          </a:xfrm>
+          <a:prstGeom prst="rect">
+            <a:avLst/>
+          </a:prstGeom>
+          <a:noFill/>
+        </p:spPr>
+        <p:txBody>
+          <a:bodyPr wrap="square">
+            <a:spAutoFit/>
+          </a:bodyPr>
+          <a:lstStyle/>
+          <a:p>
+            <a:pPr algn="l">
+              <a:lnSpc>
+                <a:spcPct val="115000"/>
+              </a:lnSpc>
+            </a:pPr>
+            <a:r>
+              <a:rPr sz="1450" b="1" i="0">
+                <a:solidFill>
+                  <a:srgbClr val="141B2D"/>
+                </a:solidFill>
+                <a:latin typeface="Segoe UI"/>
+              </a:rPr>
+              <a:t>MNIST-PRO  -  MIT</a:t>
+            </a:r>
+          </a:p>
+        </p:txBody>
+      </p:sp>
+      <p:sp>
+        <p:nvSpPr>
+          <p:cNvPr id="7" name="TextBox 6"/>
+          <p:cNvSpPr txBox="1"/>
+          <p:nvPr/>
+        </p:nvSpPr>
+        <p:spPr>
+          <a:xfrm>
+            <a:off x="868680" y="2066416"/>
+            <a:ext cx="10607040" cy="414528"/>
+          </a:xfrm>
+          <a:prstGeom prst="rect">
+            <a:avLst/>
+          </a:prstGeom>
+          <a:noFill/>
+        </p:spPr>
+        <p:txBody>
+          <a:bodyPr wrap="square">
+            <a:spAutoFit/>
+          </a:bodyPr>
+          <a:lstStyle/>
+          <a:p>
+            <a:pPr algn="l">
+              <a:lnSpc>
+                <a:spcPct val="125000"/>
+              </a:lnSpc>
+            </a:pPr>
+            <a:r>
+              <a:rPr sz="1200" b="0" i="0">
+                <a:solidFill>
+                  <a:srgbClr val="5A667A"/>
+                </a:solidFill>
+                <a:latin typeface="Segoe UI"/>
+              </a:rPr>
+              <a:t>Toh, Majumder, Liu, Chen and Poria. DeCLaRe Lab, Nanyang Technological University, and A*STAR. arXiv:2608.31022  ·  github.com/declare-lab/MNIST-PRO</a:t>
+            </a:r>
+          </a:p>
+        </p:txBody>
+      </p:sp>
+      <p:sp>
+        <p:nvSpPr>
+          <p:cNvPr id="8" name="TextBox 7"/>
+          <p:cNvSpPr txBox="1"/>
+          <p:nvPr/>
+        </p:nvSpPr>
+        <p:spPr>
+          <a:xfrm>
+            <a:off x="868680" y="2663825"/>
+            <a:ext cx="10607040" cy="246761"/>
+          </a:xfrm>
+          <a:prstGeom prst="rect">
+            <a:avLst/>
+          </a:prstGeom>
+          <a:noFill/>
+        </p:spPr>
+        <p:txBody>
+          <a:bodyPr wrap="square">
+            <a:spAutoFit/>
+          </a:bodyPr>
+          <a:lstStyle/>
+          <a:p>
+            <a:pPr algn="l">
+              <a:lnSpc>
+                <a:spcPct val="115000"/>
+              </a:lnSpc>
+            </a:pPr>
+            <a:r>
+              <a:rPr sz="1450" b="1" i="0">
+                <a:solidFill>
+                  <a:srgbClr val="141B2D"/>
+                </a:solidFill>
+                <a:latin typeface="Segoe UI"/>
+              </a:rPr>
+              <a:t>MNIST  -  CC BY-SA 3.0</a:t>
+            </a:r>
+          </a:p>
+        </p:txBody>
+      </p:sp>
+      <p:sp>
+        <p:nvSpPr>
+          <p:cNvPr id="9" name="TextBox 8"/>
+          <p:cNvSpPr txBox="1"/>
+          <p:nvPr/>
+        </p:nvSpPr>
+        <p:spPr>
+          <a:xfrm>
+            <a:off x="868680" y="2947162"/>
+            <a:ext cx="10607040" cy="207264"/>
+          </a:xfrm>
+          <a:prstGeom prst="rect">
+            <a:avLst/>
+          </a:prstGeom>
+          <a:noFill/>
+        </p:spPr>
+        <p:txBody>
+          <a:bodyPr wrap="square">
+            <a:spAutoFit/>
+          </a:bodyPr>
+          <a:lstStyle/>
+          <a:p>
+            <a:pPr algn="l">
+              <a:lnSpc>
+                <a:spcPct val="125000"/>
+              </a:lnSpc>
+            </a:pPr>
+            <a:r>
+              <a:rPr sz="1200" b="0" i="0">
+                <a:solidFill>
+                  <a:srgbClr val="5A667A"/>
+                </a:solidFill>
+                <a:latin typeface="Segoe UI"/>
+              </a:rPr>
+              <a:t>LeCun, Cortes and Burges, derived from NIST Special Database 19.</a:t>
+            </a:r>
+          </a:p>
+        </p:txBody>
+      </p:sp>
+      <p:sp>
+        <p:nvSpPr>
+          <p:cNvPr id="10" name="TextBox 9"/>
+          <p:cNvSpPr txBox="1"/>
+          <p:nvPr/>
+        </p:nvSpPr>
+        <p:spPr>
+          <a:xfrm>
+            <a:off x="868680" y="3337306"/>
+            <a:ext cx="10607040" cy="246761"/>
+          </a:xfrm>
+          <a:prstGeom prst="rect">
+            <a:avLst/>
+          </a:prstGeom>
+          <a:noFill/>
+        </p:spPr>
+        <p:txBody>
+          <a:bodyPr wrap="square">
+            <a:spAutoFit/>
+          </a:bodyPr>
+          <a:lstStyle/>
+          <a:p>
+            <a:pPr algn="l">
+              <a:lnSpc>
+                <a:spcPct val="115000"/>
+              </a:lnSpc>
+            </a:pPr>
+            <a:r>
+              <a:rPr sz="1450" b="1" i="0">
+                <a:solidFill>
+                  <a:srgbClr val="141B2D"/>
+                </a:solidFill>
+                <a:latin typeface="Segoe UI"/>
+              </a:rPr>
+              <a:t>ARC-AGI-1  -  Apache 2.0</a:t>
+            </a:r>
+          </a:p>
+        </p:txBody>
+      </p:sp>
+      <p:sp>
+        <p:nvSpPr>
+          <p:cNvPr id="11" name="TextBox 10"/>
+          <p:cNvSpPr txBox="1"/>
+          <p:nvPr/>
+        </p:nvSpPr>
+        <p:spPr>
+          <a:xfrm>
+            <a:off x="868680" y="3620643"/>
+            <a:ext cx="10607040" cy="207264"/>
+          </a:xfrm>
+          <a:prstGeom prst="rect">
+            <a:avLst/>
+          </a:prstGeom>
+          <a:noFill/>
+        </p:spPr>
+        <p:txBody>
+          <a:bodyPr wrap="square">
+            <a:spAutoFit/>
+          </a:bodyPr>
+          <a:lstStyle/>
+          <a:p>
+            <a:pPr algn="l">
+              <a:lnSpc>
+                <a:spcPct val="125000"/>
+              </a:lnSpc>
+            </a:pPr>
+            <a:r>
+              <a:rPr sz="1200" b="0" i="0">
+                <a:solidFill>
+                  <a:srgbClr val="5A667A"/>
+                </a:solidFill>
+                <a:latin typeface="Segoe UI"/>
+              </a:rPr>
+              <a:t>Francois Chollet. The public training set, used unmodified.</a:t>
+            </a:r>
+          </a:p>
+        </p:txBody>
+      </p:sp>
+      <p:sp>
+        <p:nvSpPr>
+          <p:cNvPr id="12" name="TextBox 11"/>
+          <p:cNvSpPr txBox="1"/>
+          <p:nvPr/>
+        </p:nvSpPr>
+        <p:spPr>
+          <a:xfrm>
+            <a:off x="868680" y="4010787"/>
+            <a:ext cx="10607040" cy="246761"/>
+          </a:xfrm>
+          <a:prstGeom prst="rect">
+            <a:avLst/>
+          </a:prstGeom>
+          <a:noFill/>
+        </p:spPr>
+        <p:txBody>
+          <a:bodyPr wrap="square">
+            <a:spAutoFit/>
+          </a:bodyPr>
+          <a:lstStyle/>
+          <a:p>
+            <a:pPr algn="l">
+              <a:lnSpc>
+                <a:spcPct val="115000"/>
+              </a:lnSpc>
+            </a:pPr>
+            <a:r>
+              <a:rPr sz="1450" b="1" i="0">
+                <a:solidFill>
+                  <a:srgbClr val="141B2D"/>
+                </a:solidFill>
+                <a:latin typeface="Segoe UI"/>
+              </a:rPr>
+              <a:t>Licences are retained in the repository.</a:t>
+            </a:r>
+          </a:p>
+        </p:txBody>
+      </p:sp>
+      <p:sp>
+        <p:nvSpPr>
+          <p:cNvPr id="13" name="TextBox 12"/>
+          <p:cNvSpPr txBox="1"/>
+          <p:nvPr/>
+        </p:nvSpPr>
+        <p:spPr>
+          <a:xfrm>
+            <a:off x="868680" y="4294124"/>
+            <a:ext cx="10607040" cy="207264"/>
+          </a:xfrm>
+          <a:prstGeom prst="rect">
+            <a:avLst/>
+          </a:prstGeom>
+          <a:noFill/>
+        </p:spPr>
+        <p:txBody>
+          <a:bodyPr wrap="square">
+            <a:spAutoFit/>
+          </a:bodyPr>
+          <a:lstStyle/>
+          <a:p>
+            <a:pPr algn="l">
+              <a:lnSpc>
+                <a:spcPct val="125000"/>
+              </a:lnSpc>
+            </a:pPr>
+            <a:r>
+              <a:rPr sz="1200" b="0" i="0">
+                <a:solidFill>
+                  <a:srgbClr val="5A667A"/>
+                </a:solidFill>
+                <a:latin typeface="Segoe UI"/>
+              </a:rPr>
+              <a:t>third_party/mnist-pro/LICENSE, with attribution files beside the generated data.</a:t>
             </a:r>
           </a:p>
         </p:txBody>
@@ -10803,6 +12402,277 @@
                 <a:latin typeface="Segoe UI"/>
               </a:rPr>
               <a:t>Two tasks: one needs no prior knowledge at all, the other needs a rule you must infer. Both are played by a person and a model at the same time.</a:t>
+            </a:r>
+          </a:p>
+        </p:txBody>
+      </p:sp>
+    </p:spTree>
+  </p:cSld>
+  <p:clrMapOvr>
+    <a:masterClrMapping/>
+  </p:clrMapOvr>
+</p:sld>
+</file>
+
+<file path=ppt/slides/slide30.xml><?xml version="1.0" encoding="utf-8"?>
+<p:sld xmlns:a="http://schemas.openxmlformats.org/drawingml/2006/main" xmlns:p="http://schemas.openxmlformats.org/presentationml/2006/main" xmlns:r="http://schemas.openxmlformats.org/officeDocument/2006/relationships">
+  <p:cSld>
+    <p:spTree>
+      <p:nvGrpSpPr>
+        <p:cNvPr id="1" name=""/>
+        <p:cNvGrpSpPr/>
+        <p:nvPr/>
+      </p:nvGrpSpPr>
+      <p:grpSpPr/>
+      <p:sp>
+        <p:nvSpPr>
+          <p:cNvPr id="2" name="Rectangle 1"/>
+          <p:cNvSpPr/>
+          <p:nvPr/>
+        </p:nvSpPr>
+        <p:spPr>
+          <a:xfrm>
+            <a:off x="0" y="0"/>
+            <a:ext cx="12191695" cy="6858000"/>
+          </a:xfrm>
+          <a:prstGeom prst="rect">
+            <a:avLst/>
+          </a:prstGeom>
+          <a:solidFill>
+            <a:srgbClr val="0E1A2B"/>
+          </a:solidFill>
+          <a:ln>
+            <a:noFill/>
+          </a:ln>
+          <a:effectLst/>
+        </p:spPr>
+        <p:style>
+          <a:lnRef idx="1">
+            <a:schemeClr val="accent1"/>
+          </a:lnRef>
+          <a:fillRef idx="3">
+            <a:schemeClr val="accent1"/>
+          </a:fillRef>
+          <a:effectRef idx="2">
+            <a:schemeClr val="accent1"/>
+          </a:effectRef>
+          <a:fontRef idx="minor">
+            <a:schemeClr val="lt1"/>
+          </a:fontRef>
+        </p:style>
+        <p:txBody>
+          <a:bodyPr rtlCol="0" anchor="ctr"/>
+          <a:lstStyle/>
+          <a:p>
+            <a:pPr algn="ctr"/>
+          </a:p>
+        </p:txBody>
+      </p:sp>
+      <p:sp>
+        <p:nvSpPr>
+          <p:cNvPr id="3" name="Rectangle 2"/>
+          <p:cNvSpPr/>
+          <p:nvPr/>
+        </p:nvSpPr>
+        <p:spPr>
+          <a:xfrm>
+            <a:off x="0" y="2697480"/>
+            <a:ext cx="12191695" cy="41148"/>
+          </a:xfrm>
+          <a:prstGeom prst="rect">
+            <a:avLst/>
+          </a:prstGeom>
+          <a:solidFill>
+            <a:srgbClr val="00A8BF"/>
+          </a:solidFill>
+          <a:ln>
+            <a:noFill/>
+          </a:ln>
+          <a:effectLst/>
+        </p:spPr>
+        <p:style>
+          <a:lnRef idx="1">
+            <a:schemeClr val="accent1"/>
+          </a:lnRef>
+          <a:fillRef idx="3">
+            <a:schemeClr val="accent1"/>
+          </a:fillRef>
+          <a:effectRef idx="2">
+            <a:schemeClr val="accent1"/>
+          </a:effectRef>
+          <a:fontRef idx="minor">
+            <a:schemeClr val="lt1"/>
+          </a:fontRef>
+        </p:style>
+        <p:txBody>
+          <a:bodyPr rtlCol="0" anchor="ctr"/>
+          <a:lstStyle/>
+          <a:p>
+            <a:pPr algn="ctr"/>
+          </a:p>
+        </p:txBody>
+      </p:sp>
+      <p:sp>
+        <p:nvSpPr>
+          <p:cNvPr id="4" name="TextBox 3"/>
+          <p:cNvSpPr txBox="1"/>
+          <p:nvPr/>
+        </p:nvSpPr>
+        <p:spPr>
+          <a:xfrm>
+            <a:off x="914400" y="1645920"/>
+            <a:ext cx="10515600" cy="822960"/>
+          </a:xfrm>
+          <a:prstGeom prst="rect">
+            <a:avLst/>
+          </a:prstGeom>
+          <a:noFill/>
+        </p:spPr>
+        <p:txBody>
+          <a:bodyPr wrap="square">
+            <a:spAutoFit/>
+          </a:bodyPr>
+          <a:lstStyle/>
+          <a:p>
+            <a:pPr algn="l">
+              <a:lnSpc>
+                <a:spcPct val="115000"/>
+              </a:lnSpc>
+            </a:pPr>
+            <a:r>
+              <a:rPr sz="3800" b="1" i="0">
+                <a:solidFill>
+                  <a:srgbClr val="FFFFFF"/>
+                </a:solidFill>
+                <a:latin typeface="Segoe UI"/>
+              </a:rPr>
+              <a:t>Play it</a:t>
+            </a:r>
+          </a:p>
+        </p:txBody>
+      </p:sp>
+      <p:sp>
+        <p:nvSpPr>
+          <p:cNvPr id="5" name="TextBox 4"/>
+          <p:cNvSpPr txBox="1"/>
+          <p:nvPr/>
+        </p:nvSpPr>
+        <p:spPr>
+          <a:xfrm>
+            <a:off x="914400" y="2971800"/>
+            <a:ext cx="10515600" cy="2194560"/>
+          </a:xfrm>
+          <a:prstGeom prst="rect">
+            <a:avLst/>
+          </a:prstGeom>
+          <a:noFill/>
+        </p:spPr>
+        <p:txBody>
+          <a:bodyPr wrap="square">
+            <a:spAutoFit/>
+          </a:bodyPr>
+          <a:lstStyle/>
+          <a:p>
+            <a:pPr algn="l">
+              <a:lnSpc>
+                <a:spcPct val="190000"/>
+              </a:lnSpc>
+            </a:pPr>
+            <a:r>
+              <a:rPr sz="1550" b="0" i="0">
+                <a:solidFill>
+                  <a:srgbClr val="D4DEEA"/>
+                </a:solidFill>
+                <a:latin typeface="Segoe UI"/>
+              </a:rPr>
+              <a:t>MNIST-PRO        panandi.github.io/mnistpro</a:t>
+            </a:r>
+          </a:p>
+          <a:p>
+            <a:pPr algn="l">
+              <a:lnSpc>
+                <a:spcPct val="190000"/>
+              </a:lnSpc>
+            </a:pPr>
+            <a:r>
+              <a:rPr sz="1550" b="0" i="0">
+                <a:solidFill>
+                  <a:srgbClr val="D4DEEA"/>
+                </a:solidFill>
+                <a:latin typeface="Segoe UI"/>
+              </a:rPr>
+              <a:t>ARC Race         panandi.github.io/mnistpro/arc.html</a:t>
+            </a:r>
+          </a:p>
+          <a:p>
+            <a:pPr algn="l">
+              <a:lnSpc>
+                <a:spcPct val="190000"/>
+              </a:lnSpc>
+            </a:pPr>
+            <a:r>
+              <a:rPr sz="1550" b="0" i="0">
+                <a:solidFill>
+                  <a:srgbClr val="D4DEEA"/>
+                </a:solidFill>
+                <a:latin typeface="Segoe UI"/>
+              </a:rPr>
+              <a:t>Player's guide   panandi.github.io/mnistpro/guide.html</a:t>
+            </a:r>
+          </a:p>
+          <a:p>
+            <a:pPr algn="l">
+              <a:lnSpc>
+                <a:spcPct val="190000"/>
+              </a:lnSpc>
+            </a:pPr>
+            <a:r>
+              <a:rPr sz="1550" b="0" i="0">
+                <a:solidFill>
+                  <a:srgbClr val="D4DEEA"/>
+                </a:solidFill>
+                <a:latin typeface="Segoe UI"/>
+              </a:rPr>
+              <a:t>Source           github.com/panandi/mnistpro</a:t>
+            </a:r>
+          </a:p>
+        </p:txBody>
+      </p:sp>
+      <p:sp>
+        <p:nvSpPr>
+          <p:cNvPr id="6" name="TextBox 5"/>
+          <p:cNvSpPr txBox="1"/>
+          <p:nvPr/>
+        </p:nvSpPr>
+        <p:spPr>
+          <a:xfrm>
+            <a:off x="914400" y="5715000"/>
+            <a:ext cx="10515600" cy="548640"/>
+          </a:xfrm>
+          <a:prstGeom prst="rect">
+            <a:avLst/>
+          </a:prstGeom>
+          <a:noFill/>
+        </p:spPr>
+        <p:txBody>
+          <a:bodyPr wrap="square">
+            <a:spAutoFit/>
+          </a:bodyPr>
+          <a:lstStyle/>
+          <a:p>
+            <a:pPr algn="l">
+              <a:lnSpc>
+                <a:spcPct val="115000"/>
+              </a:lnSpc>
+            </a:pPr>
+            <a:r>
+              <a:rPr sz="1300" b="0" i="0">
+                <a:solidFill>
+                  <a:srgbClr val="8D9DB2"/>
+                </a:solidFill>
+                <a:latin typeface="Segoe UI"/>
+              </a:rPr>
+              <a:t>No install, no sign-up, no key needed to play solo. Bring an OpenRouter key if you want to race the model.</a:t>
             </a:r>
           </a:p>
         </p:txBody>
